--- a/天童中部小学校視察/081019_天童中部小学校_指導主事研修スライド_クイズ版.pptx
+++ b/天童中部小学校視察/081019_天童中部小学校_指導主事研修スライド_クイズ版.pptx
@@ -23,6 +23,7 @@
     <p:sldId id="261" r:id="rId9"/>
     <p:sldId id="262" r:id="rId10"/>
     <p:sldId id="265" r:id="rId11"/>
+    <p:sldId id="281" r:id="rId32"/>
     <p:sldId id="266" r:id="rId12"/>
     <p:sldId id="267" r:id="rId13"/>
     <p:sldId id="279" r:id="rId30"/>
@@ -437,14 +438,32 @@
           <a:lstStyle/>
           <a:p>
             <a:r>
-              <a:rPr lang="en-US" dirty="0"/>
-              <a:t>（約1分15秒）
-ここから講演の内容です。奈須先生は、個性を２つの「好き」「得意」で捉えていました。
-一つは学ぶ領域の「得意」。自分の好きな、得意な領域や活動を知っていることです。これを育む典型が個人総合、同校のFSPです。
-もう一つは学び方の「得意」。自分に合った方法、時間、教材で学習計画を立て、実行できることです。これを育む典型が単元内自由進度学習、同校のMP学習です。
-どちらも、実際に試行錯誤してみないと分からないし、できるようにならない、という点が強調されていました。
-後で触れますが、審議まとめでも、学習内容を精選し、子供の「好き」「得意」を育むことが示されています。
-（参考：個人総合の実践上のポイントとして、「夏休みの自由研究」を学校で展開するイメージ、学校的な価値で過剰に制限しない、まず教師が個別に相談する、計画は変わってよい、発表会は必須ではない、「やってみて違う」も発見、の６点が示された。質問があれば紹介）</a:t>
+              <a:t>（約1分15秒）</a:t>
+            </a:r>
+          </a:p>
+          <a:p>
+            <a:r>
+              <a:t>ここから講演の内容です。奈須先生は、個性を２つの「好き」「得意」で捉えていました。</a:t>
+            </a:r>
+          </a:p>
+          <a:p>
+            <a:r>
+              <a:t>一つは学ぶ領域の「得意」。自分の好きな、得意な領域や活動を知っていることです。これを育む典型が個人総合、同校のFSPです。</a:t>
+            </a:r>
+          </a:p>
+          <a:p>
+            <a:r>
+              <a:t>もう一つは学び方の「得意」。自分に合った方法、時間、教材で学習計画を立て、実行できることです。これを育む典型が単元内自由進度学習、同校のMP学習です。</a:t>
+            </a:r>
+          </a:p>
+          <a:p>
+            <a:r>
+              <a:t>どちらも、実際に試行錯誤してみないと分からないし、できるようにならない、という点が強調されていました。</a:t>
+            </a:r>
+          </a:p>
+          <a:p>
+            <a:r>
+              <a:t>後で触れますが、審議まとめでも、学習内容を精選し、子供の「好き」「得意」を育むことが示されています。</a:t>
             </a:r>
           </a:p>
         </p:txBody>
@@ -1034,7 +1053,7 @@
           </a:p>
           <a:p>
             <a:r>
-              <a:t>教師中心から、子供の学びを中心へ。これが、今日お伝えしたかった教育観・指導観のコペルニクス的転換です。</a:t>
+              <a:t>教師中心から、子供の学びを中心へ。見方が変われば、冒頭の写真も違って見えてくるはずです。</a:t>
             </a:r>
           </a:p>
           <a:p>
@@ -1290,7 +1309,7 @@
           </a:p>
           <a:p>
             <a:r>
-              <a:t>今日の研修で目指したいのは、教育観・指導観のコペルニクス的転換です。この問いを持ったまま報告を聞いていただければと思います。最後に、もう一度この写真に戻ります。</a:t>
+              <a:t>今日は、この問いを持ったまま報告を聞いていただければと思います。最後に、もう一度この写真に戻ります。</a:t>
             </a:r>
           </a:p>
           <a:p/>
@@ -1420,7 +1439,7 @@
           </a:p>
           <a:p>
             <a:r>
-              <a:t>本日のねらいは、天童中部小学校の取組から、教育観・指導観のコペルニクス的転換について考え、次期学習指導要領の方向性を指導主事の間で共有することです。</a:t>
+              <a:t>本日のねらいは、天童中部小学校の取組から、子供の学びを中心に据える授業の見方について考え、次期学習指導要領の方向性を指導主事の間で共有することです。</a:t>
             </a:r>
           </a:p>
           <a:p>
@@ -1809,22 +1828,88 @@
           </a:p>
           <a:p>
             <a:r>
-              <a:t>今日いちばんお伝えしたいことを、一枚にまとめました。教育観・指導観のコペルニクス的転換です。</a:t>
-            </a:r>
-          </a:p>
-          <a:p>
-            <a:r>
-              <a:t>これまでの授業観を天動説にたとえると、中心にいるのは教師です。教師の計画や指示を中心に、子供がそれに合わせて動く。冒頭の写真に「許容できない」と感じたとき、その基準は、この教師中心の見方から来ていたのかもしれません。</a:t>
-            </a:r>
-          </a:p>
-          <a:p>
-            <a:r>
-              <a:t>地動説では、中心にあるのは子供の学びです。教師も、教材も、環境も、仲間も、子供の学びを支えて回る。天童中部小の「すべての子供は有能である」という子供観は、まさにこの見方です。</a:t>
+              <a:t>今日いちばんお伝えしたいことを、一枚にまとめました。授業の中心にあるのは、何でしょうか。</a:t>
+            </a:r>
+          </a:p>
+          <a:p>
+            <a:r>
+              <a:t>これまでの見方では、中心にいるのは教師です。教師の計画や指示を中心に、子供がそれに合わせて動く。冒頭の写真に「許容できない」と感じたとき、その基準は、この教師中心の見方から来ていたのかもしれません。</a:t>
+            </a:r>
+          </a:p>
+          <a:p>
+            <a:r>
+              <a:t>これからの見方では、中心にあるのは子供の学びです。教師も、教材も、環境も、仲間も、子供の学びを支えて回る。天童中部小の「すべての子供は有能である」という子供観は、まさにこの見方です。</a:t>
             </a:r>
           </a:p>
           <a:p>
             <a:r>
               <a:t>ただし、転換するのは授業の形ではなく見方です。同校でも約８割は一斉授業でした。一斉授業をやめるのではなく、普段の授業の中でも子供の学びを中心に据える。私たち指導主事が授業を見るときの見方も、ここから変わっていくのだと思います。</a:t>
+            </a:r>
+          </a:p>
+        </p:txBody>
+      </p:sp>
+    </p:spTree>
+  </p:cSld>
+  <p:clrMapOvr>
+    <a:masterClrMapping/>
+  </p:clrMapOvr>
+</p:notes>
+</file>
+
+<file path=ppt/notesSlides/notesSlide26.xml><?xml version="1.0" encoding="utf-8"?>
+<p:notes xmlns:a="http://schemas.openxmlformats.org/drawingml/2006/main" xmlns:p="http://schemas.openxmlformats.org/presentationml/2006/main" xmlns:r="http://schemas.openxmlformats.org/officeDocument/2006/relationships">
+  <p:cSld>
+    <p:spTree>
+      <p:nvGrpSpPr>
+        <p:cNvPr id="1" name=""/>
+        <p:cNvGrpSpPr/>
+        <p:nvPr/>
+      </p:nvGrpSpPr>
+      <p:grpSpPr>
+        <a:xfrm>
+          <a:off x="0" y="0"/>
+          <a:ext cx="0" cy="0"/>
+          <a:chOff x="0" y="0"/>
+          <a:chExt cx="0" cy="0"/>
+        </a:xfrm>
+      </p:grpSpPr>
+      <p:sp>
+        <p:nvSpPr>
+          <p:cNvPr id="3" name="Notes Placeholder 2"/>
+          <p:cNvSpPr>
+            <a:spLocks noGrp="1"/>
+          </p:cNvSpPr>
+          <p:nvPr>
+            <p:ph type="body" idx="1"/>
+          </p:nvPr>
+        </p:nvSpPr>
+        <p:spPr/>
+        <p:txBody>
+          <a:bodyPr/>
+          <a:lstStyle/>
+          <a:p>
+            <a:r>
+              <a:t>（約１分）</a:t>
+            </a:r>
+          </a:p>
+          <a:p>
+            <a:r>
+              <a:t>講義や協議会では、奈須先生から、かなり踏み込んだ本音のお話もありました。</a:t>
+            </a:r>
+          </a:p>
+          <a:p>
+            <a:r>
+              <a:t>印象的だったのは「マイ探究に、評価は必要ない」という言葉です。子供の「好き」「得意」を、学校の物差しで測らない。学校的な価値で過剰に制限して、子供に忖度させない。発表会も必須ではなく、子供が選んでいい。やってみて「違う」と分かることも、自分の「好き」「得意」の発見だ、というお話でした。</a:t>
+            </a:r>
+          </a:p>
+          <a:p>
+            <a:r>
+              <a:t>ここで一つ考えてみてください。評価しないと不安になるのは、子供でしょうか、それとも私たち大人でしょうか。</a:t>
+            </a:r>
+          </a:p>
+          <a:p>
+            <a:r>
+              <a:t>（表現は、講義・協議会の記録で最終確認すること）</a:t>
             </a:r>
           </a:p>
         </p:txBody>
@@ -15611,6 +15696,1092 @@
 </file>
 
 <file path=ppt/slides/slide22.xml><?xml version="1.0" encoding="utf-8"?>
+<p:sld xmlns:a="http://schemas.openxmlformats.org/drawingml/2006/main" xmlns:p="http://schemas.openxmlformats.org/presentationml/2006/main" xmlns:r="http://schemas.openxmlformats.org/officeDocument/2006/relationships">
+  <p:cSld>
+    <p:spTree>
+      <p:nvGrpSpPr>
+        <p:cNvPr id="1" name=""/>
+        <p:cNvGrpSpPr/>
+        <p:nvPr/>
+      </p:nvGrpSpPr>
+      <p:grpSpPr/>
+      <p:sp>
+        <p:nvSpPr>
+          <p:cNvPr id="2" name="Text Placeholder 1"/>
+          <p:cNvSpPr>
+            <a:spLocks noGrp="1"/>
+          </p:cNvSpPr>
+          <p:nvPr>
+            <p:ph type="body" idx="100"/>
+          </p:nvPr>
+        </p:nvSpPr>
+        <p:spPr/>
+        <p:txBody>
+          <a:bodyPr/>
+          <a:lstStyle/>
+          <a:p>
+            <a:r>
+              <a:t>04　指導主事として</a:t>
+            </a:r>
+          </a:p>
+        </p:txBody>
+      </p:sp>
+      <p:sp>
+        <p:nvSpPr>
+          <p:cNvPr id="3" name="Title 2"/>
+          <p:cNvSpPr>
+            <a:spLocks noGrp="1"/>
+          </p:cNvSpPr>
+          <p:nvPr>
+            <p:ph type="title" idx="101"/>
+          </p:nvPr>
+        </p:nvSpPr>
+        <p:spPr/>
+        <p:txBody>
+          <a:bodyPr/>
+          <a:lstStyle/>
+          <a:p>
+            <a:r>
+              <a:t>中心にあるのは、何か</a:t>
+            </a:r>
+          </a:p>
+        </p:txBody>
+      </p:sp>
+      <p:sp>
+        <p:nvSpPr>
+          <p:cNvPr id="4" name="Rounded Rectangle 3"/>
+          <p:cNvSpPr/>
+          <p:nvPr/>
+        </p:nvSpPr>
+        <p:spPr>
+          <a:xfrm>
+            <a:off x="548640" y="1508760"/>
+            <a:ext cx="4983480" cy="3611880"/>
+          </a:xfrm>
+          <a:prstGeom prst="roundRect">
+            <a:avLst>
+              <a:gd name="adj" fmla="val 6000"/>
+            </a:avLst>
+          </a:prstGeom>
+          <a:solidFill>
+            <a:srgbClr val="EEF4F0"/>
+          </a:solidFill>
+          <a:ln>
+            <a:noFill/>
+          </a:ln>
+          <a:effectLst/>
+        </p:spPr>
+        <p:style>
+          <a:lnRef idx="1">
+            <a:schemeClr val="accent1"/>
+          </a:lnRef>
+          <a:fillRef idx="3">
+            <a:schemeClr val="accent1"/>
+          </a:fillRef>
+          <a:effectRef idx="2">
+            <a:schemeClr val="accent1"/>
+          </a:effectRef>
+          <a:fontRef idx="minor">
+            <a:schemeClr val="lt1"/>
+          </a:fontRef>
+        </p:style>
+        <p:txBody>
+          <a:bodyPr rtlCol="0" anchor="ctr"/>
+          <a:lstStyle/>
+          <a:p>
+            <a:pPr algn="ctr"/>
+          </a:p>
+        </p:txBody>
+      </p:sp>
+      <p:sp>
+        <p:nvSpPr>
+          <p:cNvPr id="5" name="Rounded Rectangle 4"/>
+          <p:cNvSpPr/>
+          <p:nvPr/>
+        </p:nvSpPr>
+        <p:spPr>
+          <a:xfrm>
+            <a:off x="6659575" y="1508760"/>
+            <a:ext cx="4983480" cy="3611880"/>
+          </a:xfrm>
+          <a:prstGeom prst="roundRect">
+            <a:avLst>
+              <a:gd name="adj" fmla="val 6000"/>
+            </a:avLst>
+          </a:prstGeom>
+          <a:solidFill>
+            <a:srgbClr val="FBEADB"/>
+          </a:solidFill>
+          <a:ln>
+            <a:noFill/>
+          </a:ln>
+          <a:effectLst/>
+        </p:spPr>
+        <p:style>
+          <a:lnRef idx="1">
+            <a:schemeClr val="accent1"/>
+          </a:lnRef>
+          <a:fillRef idx="3">
+            <a:schemeClr val="accent1"/>
+          </a:fillRef>
+          <a:effectRef idx="2">
+            <a:schemeClr val="accent1"/>
+          </a:effectRef>
+          <a:fontRef idx="minor">
+            <a:schemeClr val="lt1"/>
+          </a:fontRef>
+        </p:style>
+        <p:txBody>
+          <a:bodyPr rtlCol="0" anchor="ctr"/>
+          <a:lstStyle/>
+          <a:p>
+            <a:pPr algn="ctr"/>
+          </a:p>
+        </p:txBody>
+      </p:sp>
+      <p:sp>
+        <p:nvSpPr>
+          <p:cNvPr id="6" name="TextBox 5"/>
+          <p:cNvSpPr txBox="1"/>
+          <p:nvPr/>
+        </p:nvSpPr>
+        <p:spPr>
+          <a:xfrm>
+            <a:off x="822959" y="1645919"/>
+            <a:ext cx="4434840" cy="411480"/>
+          </a:xfrm>
+          <a:prstGeom prst="rect">
+            <a:avLst/>
+          </a:prstGeom>
+          <a:noFill/>
+        </p:spPr>
+        <p:txBody>
+          <a:bodyPr wrap="square" lIns="0" rIns="0" tIns="0" bIns="0" anchor="ctr">
+            <a:spAutoFit/>
+          </a:bodyPr>
+          <a:lstStyle/>
+          <a:p>
+            <a:pPr algn="l"/>
+            <a:r>
+              <a:rPr sz="1800" b="1">
+                <a:solidFill>
+                  <a:srgbClr val="5E6E68"/>
+                </a:solidFill>
+              </a:rPr>
+              <a:t>これまで</a:t>
+            </a:r>
+          </a:p>
+        </p:txBody>
+      </p:sp>
+      <p:sp>
+        <p:nvSpPr>
+          <p:cNvPr id="7" name="TextBox 6"/>
+          <p:cNvSpPr txBox="1"/>
+          <p:nvPr/>
+        </p:nvSpPr>
+        <p:spPr>
+          <a:xfrm>
+            <a:off x="6933895" y="1645919"/>
+            <a:ext cx="4434840" cy="411480"/>
+          </a:xfrm>
+          <a:prstGeom prst="rect">
+            <a:avLst/>
+          </a:prstGeom>
+          <a:noFill/>
+        </p:spPr>
+        <p:txBody>
+          <a:bodyPr wrap="square" lIns="0" rIns="0" tIns="0" bIns="0" anchor="ctr">
+            <a:spAutoFit/>
+          </a:bodyPr>
+          <a:lstStyle/>
+          <a:p>
+            <a:pPr algn="l"/>
+            <a:r>
+              <a:rPr sz="1800" b="1">
+                <a:solidFill>
+                  <a:srgbClr val="D9702C"/>
+                </a:solidFill>
+              </a:rPr>
+              <a:t>これから</a:t>
+            </a:r>
+          </a:p>
+        </p:txBody>
+      </p:sp>
+      <p:sp>
+        <p:nvSpPr>
+          <p:cNvPr id="8" name="Oval 7"/>
+          <p:cNvSpPr/>
+          <p:nvPr/>
+        </p:nvSpPr>
+        <p:spPr>
+          <a:xfrm>
+            <a:off x="1943100" y="2167128"/>
+            <a:ext cx="2194560" cy="2194560"/>
+          </a:xfrm>
+          <a:prstGeom prst="ellipse">
+            <a:avLst/>
+          </a:prstGeom>
+          <a:noFill/>
+          <a:ln w="22225">
+            <a:solidFill>
+              <a:srgbClr val="7FAF8E"/>
+            </a:solidFill>
+            <a:prstDash val="dash"/>
+          </a:ln>
+          <a:effectLst/>
+        </p:spPr>
+        <p:style>
+          <a:lnRef idx="1">
+            <a:schemeClr val="accent1"/>
+          </a:lnRef>
+          <a:fillRef idx="3">
+            <a:schemeClr val="accent1"/>
+          </a:fillRef>
+          <a:effectRef idx="2">
+            <a:schemeClr val="accent1"/>
+          </a:effectRef>
+          <a:fontRef idx="minor">
+            <a:schemeClr val="lt1"/>
+          </a:fontRef>
+        </p:style>
+        <p:txBody>
+          <a:bodyPr rtlCol="0" anchor="ctr"/>
+          <a:lstStyle/>
+          <a:p>
+            <a:pPr algn="ctr"/>
+          </a:p>
+        </p:txBody>
+      </p:sp>
+      <p:sp>
+        <p:nvSpPr>
+          <p:cNvPr id="9" name="Oval 8"/>
+          <p:cNvSpPr/>
+          <p:nvPr/>
+        </p:nvSpPr>
+        <p:spPr>
+          <a:xfrm>
+            <a:off x="2491740" y="2715768"/>
+            <a:ext cx="1097280" cy="1097280"/>
+          </a:xfrm>
+          <a:prstGeom prst="ellipse">
+            <a:avLst/>
+          </a:prstGeom>
+          <a:solidFill>
+            <a:srgbClr val="1F5A47"/>
+          </a:solidFill>
+          <a:ln>
+            <a:noFill/>
+          </a:ln>
+          <a:effectLst/>
+        </p:spPr>
+        <p:style>
+          <a:lnRef idx="1">
+            <a:schemeClr val="accent1"/>
+          </a:lnRef>
+          <a:fillRef idx="3">
+            <a:schemeClr val="accent1"/>
+          </a:fillRef>
+          <a:effectRef idx="2">
+            <a:schemeClr val="accent1"/>
+          </a:effectRef>
+          <a:fontRef idx="minor">
+            <a:schemeClr val="lt1"/>
+          </a:fontRef>
+        </p:style>
+        <p:txBody>
+          <a:bodyPr rtlCol="0" anchor="ctr" lIns="0" rIns="0" tIns="0" bIns="0"/>
+          <a:lstStyle/>
+          <a:p>
+            <a:pPr algn="ctr"/>
+            <a:r>
+              <a:rPr sz="1500" b="1">
+                <a:solidFill>
+                  <a:srgbClr val="FFFFFF"/>
+                </a:solidFill>
+              </a:rPr>
+              <a:t>教師</a:t>
+            </a:r>
+          </a:p>
+        </p:txBody>
+      </p:sp>
+      <p:sp>
+        <p:nvSpPr>
+          <p:cNvPr id="10" name="Oval 9"/>
+          <p:cNvSpPr/>
+          <p:nvPr/>
+        </p:nvSpPr>
+        <p:spPr>
+          <a:xfrm>
+            <a:off x="1898725" y="2122753"/>
+            <a:ext cx="731520" cy="731520"/>
+          </a:xfrm>
+          <a:prstGeom prst="ellipse">
+            <a:avLst/>
+          </a:prstGeom>
+          <a:solidFill>
+            <a:srgbClr val="D3E3D9"/>
+          </a:solidFill>
+          <a:ln>
+            <a:noFill/>
+          </a:ln>
+          <a:effectLst/>
+        </p:spPr>
+        <p:style>
+          <a:lnRef idx="1">
+            <a:schemeClr val="accent1"/>
+          </a:lnRef>
+          <a:fillRef idx="3">
+            <a:schemeClr val="accent1"/>
+          </a:fillRef>
+          <a:effectRef idx="2">
+            <a:schemeClr val="accent1"/>
+          </a:effectRef>
+          <a:fontRef idx="minor">
+            <a:schemeClr val="lt1"/>
+          </a:fontRef>
+        </p:style>
+        <p:txBody>
+          <a:bodyPr rtlCol="0" anchor="ctr" lIns="0" rIns="0" tIns="0" bIns="0"/>
+          <a:lstStyle/>
+          <a:p>
+            <a:pPr algn="ctr"/>
+            <a:r>
+              <a:rPr sz="1300" b="1">
+                <a:solidFill>
+                  <a:srgbClr val="1F5A47"/>
+                </a:solidFill>
+              </a:rPr>
+              <a:t>子供</a:t>
+            </a:r>
+          </a:p>
+        </p:txBody>
+      </p:sp>
+      <p:sp>
+        <p:nvSpPr>
+          <p:cNvPr id="11" name="Oval 10"/>
+          <p:cNvSpPr/>
+          <p:nvPr/>
+        </p:nvSpPr>
+        <p:spPr>
+          <a:xfrm>
+            <a:off x="3450514" y="2122753"/>
+            <a:ext cx="731520" cy="731520"/>
+          </a:xfrm>
+          <a:prstGeom prst="ellipse">
+            <a:avLst/>
+          </a:prstGeom>
+          <a:solidFill>
+            <a:srgbClr val="D3E3D9"/>
+          </a:solidFill>
+          <a:ln>
+            <a:noFill/>
+          </a:ln>
+          <a:effectLst/>
+        </p:spPr>
+        <p:style>
+          <a:lnRef idx="1">
+            <a:schemeClr val="accent1"/>
+          </a:lnRef>
+          <a:fillRef idx="3">
+            <a:schemeClr val="accent1"/>
+          </a:fillRef>
+          <a:effectRef idx="2">
+            <a:schemeClr val="accent1"/>
+          </a:effectRef>
+          <a:fontRef idx="minor">
+            <a:schemeClr val="lt1"/>
+          </a:fontRef>
+        </p:style>
+        <p:txBody>
+          <a:bodyPr rtlCol="0" anchor="ctr" lIns="0" rIns="0" tIns="0" bIns="0"/>
+          <a:lstStyle/>
+          <a:p>
+            <a:pPr algn="ctr"/>
+            <a:r>
+              <a:rPr sz="1300" b="1">
+                <a:solidFill>
+                  <a:srgbClr val="1F5A47"/>
+                </a:solidFill>
+              </a:rPr>
+              <a:t>子供</a:t>
+            </a:r>
+          </a:p>
+        </p:txBody>
+      </p:sp>
+      <p:sp>
+        <p:nvSpPr>
+          <p:cNvPr id="12" name="Oval 11"/>
+          <p:cNvSpPr/>
+          <p:nvPr/>
+        </p:nvSpPr>
+        <p:spPr>
+          <a:xfrm>
+            <a:off x="3450514" y="3674542"/>
+            <a:ext cx="731520" cy="731520"/>
+          </a:xfrm>
+          <a:prstGeom prst="ellipse">
+            <a:avLst/>
+          </a:prstGeom>
+          <a:solidFill>
+            <a:srgbClr val="D3E3D9"/>
+          </a:solidFill>
+          <a:ln>
+            <a:noFill/>
+          </a:ln>
+          <a:effectLst/>
+        </p:spPr>
+        <p:style>
+          <a:lnRef idx="1">
+            <a:schemeClr val="accent1"/>
+          </a:lnRef>
+          <a:fillRef idx="3">
+            <a:schemeClr val="accent1"/>
+          </a:fillRef>
+          <a:effectRef idx="2">
+            <a:schemeClr val="accent1"/>
+          </a:effectRef>
+          <a:fontRef idx="minor">
+            <a:schemeClr val="lt1"/>
+          </a:fontRef>
+        </p:style>
+        <p:txBody>
+          <a:bodyPr rtlCol="0" anchor="ctr" lIns="0" rIns="0" tIns="0" bIns="0"/>
+          <a:lstStyle/>
+          <a:p>
+            <a:pPr algn="ctr"/>
+            <a:r>
+              <a:rPr sz="1300" b="1">
+                <a:solidFill>
+                  <a:srgbClr val="1F5A47"/>
+                </a:solidFill>
+              </a:rPr>
+              <a:t>子供</a:t>
+            </a:r>
+          </a:p>
+        </p:txBody>
+      </p:sp>
+      <p:sp>
+        <p:nvSpPr>
+          <p:cNvPr id="13" name="Oval 12"/>
+          <p:cNvSpPr/>
+          <p:nvPr/>
+        </p:nvSpPr>
+        <p:spPr>
+          <a:xfrm>
+            <a:off x="1898725" y="3674542"/>
+            <a:ext cx="731520" cy="731520"/>
+          </a:xfrm>
+          <a:prstGeom prst="ellipse">
+            <a:avLst/>
+          </a:prstGeom>
+          <a:solidFill>
+            <a:srgbClr val="D3E3D9"/>
+          </a:solidFill>
+          <a:ln>
+            <a:noFill/>
+          </a:ln>
+          <a:effectLst/>
+        </p:spPr>
+        <p:style>
+          <a:lnRef idx="1">
+            <a:schemeClr val="accent1"/>
+          </a:lnRef>
+          <a:fillRef idx="3">
+            <a:schemeClr val="accent1"/>
+          </a:fillRef>
+          <a:effectRef idx="2">
+            <a:schemeClr val="accent1"/>
+          </a:effectRef>
+          <a:fontRef idx="minor">
+            <a:schemeClr val="lt1"/>
+          </a:fontRef>
+        </p:style>
+        <p:txBody>
+          <a:bodyPr rtlCol="0" anchor="ctr" lIns="0" rIns="0" tIns="0" bIns="0"/>
+          <a:lstStyle/>
+          <a:p>
+            <a:pPr algn="ctr"/>
+            <a:r>
+              <a:rPr sz="1300" b="1">
+                <a:solidFill>
+                  <a:srgbClr val="1F5A47"/>
+                </a:solidFill>
+              </a:rPr>
+              <a:t>子供</a:t>
+            </a:r>
+          </a:p>
+        </p:txBody>
+      </p:sp>
+      <p:sp>
+        <p:nvSpPr>
+          <p:cNvPr id="14" name="Oval 13"/>
+          <p:cNvSpPr/>
+          <p:nvPr/>
+        </p:nvSpPr>
+        <p:spPr>
+          <a:xfrm>
+            <a:off x="8054035" y="2167128"/>
+            <a:ext cx="2194560" cy="2194560"/>
+          </a:xfrm>
+          <a:prstGeom prst="ellipse">
+            <a:avLst/>
+          </a:prstGeom>
+          <a:noFill/>
+          <a:ln w="22225">
+            <a:solidFill>
+              <a:srgbClr val="7FAF8E"/>
+            </a:solidFill>
+            <a:prstDash val="dash"/>
+          </a:ln>
+          <a:effectLst/>
+        </p:spPr>
+        <p:style>
+          <a:lnRef idx="1">
+            <a:schemeClr val="accent1"/>
+          </a:lnRef>
+          <a:fillRef idx="3">
+            <a:schemeClr val="accent1"/>
+          </a:fillRef>
+          <a:effectRef idx="2">
+            <a:schemeClr val="accent1"/>
+          </a:effectRef>
+          <a:fontRef idx="minor">
+            <a:schemeClr val="lt1"/>
+          </a:fontRef>
+        </p:style>
+        <p:txBody>
+          <a:bodyPr rtlCol="0" anchor="ctr"/>
+          <a:lstStyle/>
+          <a:p>
+            <a:pPr algn="ctr"/>
+          </a:p>
+        </p:txBody>
+      </p:sp>
+      <p:sp>
+        <p:nvSpPr>
+          <p:cNvPr id="15" name="Oval 14"/>
+          <p:cNvSpPr/>
+          <p:nvPr/>
+        </p:nvSpPr>
+        <p:spPr>
+          <a:xfrm>
+            <a:off x="8602675" y="2715768"/>
+            <a:ext cx="1097280" cy="1097280"/>
+          </a:xfrm>
+          <a:prstGeom prst="ellipse">
+            <a:avLst/>
+          </a:prstGeom>
+          <a:solidFill>
+            <a:srgbClr val="D9702C"/>
+          </a:solidFill>
+          <a:ln>
+            <a:noFill/>
+          </a:ln>
+          <a:effectLst/>
+        </p:spPr>
+        <p:style>
+          <a:lnRef idx="1">
+            <a:schemeClr val="accent1"/>
+          </a:lnRef>
+          <a:fillRef idx="3">
+            <a:schemeClr val="accent1"/>
+          </a:fillRef>
+          <a:effectRef idx="2">
+            <a:schemeClr val="accent1"/>
+          </a:effectRef>
+          <a:fontRef idx="minor">
+            <a:schemeClr val="lt1"/>
+          </a:fontRef>
+        </p:style>
+        <p:txBody>
+          <a:bodyPr rtlCol="0" anchor="ctr" lIns="0" rIns="0" tIns="0" bIns="0"/>
+          <a:lstStyle/>
+          <a:p>
+            <a:pPr algn="ctr"/>
+            <a:r>
+              <a:rPr sz="1500" b="1">
+                <a:solidFill>
+                  <a:srgbClr val="FFFFFF"/>
+                </a:solidFill>
+              </a:rPr>
+              <a:t>子供の</a:t>
+            </a:r>
+          </a:p>
+          <a:p>
+            <a:pPr algn="ctr"/>
+            <a:r>
+              <a:rPr sz="1500" b="1">
+                <a:solidFill>
+                  <a:srgbClr val="FFFFFF"/>
+                </a:solidFill>
+              </a:rPr>
+              <a:t>学び</a:t>
+            </a:r>
+          </a:p>
+        </p:txBody>
+      </p:sp>
+      <p:sp>
+        <p:nvSpPr>
+          <p:cNvPr id="16" name="Oval 15"/>
+          <p:cNvSpPr/>
+          <p:nvPr/>
+        </p:nvSpPr>
+        <p:spPr>
+          <a:xfrm>
+            <a:off x="8009661" y="2122753"/>
+            <a:ext cx="731520" cy="731520"/>
+          </a:xfrm>
+          <a:prstGeom prst="ellipse">
+            <a:avLst/>
+          </a:prstGeom>
+          <a:solidFill>
+            <a:srgbClr val="1F5A47"/>
+          </a:solidFill>
+          <a:ln>
+            <a:noFill/>
+          </a:ln>
+          <a:effectLst/>
+        </p:spPr>
+        <p:style>
+          <a:lnRef idx="1">
+            <a:schemeClr val="accent1"/>
+          </a:lnRef>
+          <a:fillRef idx="3">
+            <a:schemeClr val="accent1"/>
+          </a:fillRef>
+          <a:effectRef idx="2">
+            <a:schemeClr val="accent1"/>
+          </a:effectRef>
+          <a:fontRef idx="minor">
+            <a:schemeClr val="lt1"/>
+          </a:fontRef>
+        </p:style>
+        <p:txBody>
+          <a:bodyPr rtlCol="0" anchor="ctr" lIns="0" rIns="0" tIns="0" bIns="0"/>
+          <a:lstStyle/>
+          <a:p>
+            <a:pPr algn="ctr"/>
+            <a:r>
+              <a:rPr sz="1300" b="1">
+                <a:solidFill>
+                  <a:srgbClr val="FFFFFF"/>
+                </a:solidFill>
+              </a:rPr>
+              <a:t>教師</a:t>
+            </a:r>
+          </a:p>
+        </p:txBody>
+      </p:sp>
+      <p:sp>
+        <p:nvSpPr>
+          <p:cNvPr id="17" name="Oval 16"/>
+          <p:cNvSpPr/>
+          <p:nvPr/>
+        </p:nvSpPr>
+        <p:spPr>
+          <a:xfrm>
+            <a:off x="9561449" y="2122753"/>
+            <a:ext cx="731520" cy="731520"/>
+          </a:xfrm>
+          <a:prstGeom prst="ellipse">
+            <a:avLst/>
+          </a:prstGeom>
+          <a:solidFill>
+            <a:srgbClr val="1F5A47"/>
+          </a:solidFill>
+          <a:ln>
+            <a:noFill/>
+          </a:ln>
+          <a:effectLst/>
+        </p:spPr>
+        <p:style>
+          <a:lnRef idx="1">
+            <a:schemeClr val="accent1"/>
+          </a:lnRef>
+          <a:fillRef idx="3">
+            <a:schemeClr val="accent1"/>
+          </a:fillRef>
+          <a:effectRef idx="2">
+            <a:schemeClr val="accent1"/>
+          </a:effectRef>
+          <a:fontRef idx="minor">
+            <a:schemeClr val="lt1"/>
+          </a:fontRef>
+        </p:style>
+        <p:txBody>
+          <a:bodyPr rtlCol="0" anchor="ctr" lIns="0" rIns="0" tIns="0" bIns="0"/>
+          <a:lstStyle/>
+          <a:p>
+            <a:pPr algn="ctr"/>
+            <a:r>
+              <a:rPr sz="1300" b="1">
+                <a:solidFill>
+                  <a:srgbClr val="FFFFFF"/>
+                </a:solidFill>
+              </a:rPr>
+              <a:t>教材</a:t>
+            </a:r>
+          </a:p>
+        </p:txBody>
+      </p:sp>
+      <p:sp>
+        <p:nvSpPr>
+          <p:cNvPr id="18" name="Oval 17"/>
+          <p:cNvSpPr/>
+          <p:nvPr/>
+        </p:nvSpPr>
+        <p:spPr>
+          <a:xfrm>
+            <a:off x="9561449" y="3674542"/>
+            <a:ext cx="731520" cy="731520"/>
+          </a:xfrm>
+          <a:prstGeom prst="ellipse">
+            <a:avLst/>
+          </a:prstGeom>
+          <a:solidFill>
+            <a:srgbClr val="1F5A47"/>
+          </a:solidFill>
+          <a:ln>
+            <a:noFill/>
+          </a:ln>
+          <a:effectLst/>
+        </p:spPr>
+        <p:style>
+          <a:lnRef idx="1">
+            <a:schemeClr val="accent1"/>
+          </a:lnRef>
+          <a:fillRef idx="3">
+            <a:schemeClr val="accent1"/>
+          </a:fillRef>
+          <a:effectRef idx="2">
+            <a:schemeClr val="accent1"/>
+          </a:effectRef>
+          <a:fontRef idx="minor">
+            <a:schemeClr val="lt1"/>
+          </a:fontRef>
+        </p:style>
+        <p:txBody>
+          <a:bodyPr rtlCol="0" anchor="ctr" lIns="0" rIns="0" tIns="0" bIns="0"/>
+          <a:lstStyle/>
+          <a:p>
+            <a:pPr algn="ctr"/>
+            <a:r>
+              <a:rPr sz="1300" b="1">
+                <a:solidFill>
+                  <a:srgbClr val="FFFFFF"/>
+                </a:solidFill>
+              </a:rPr>
+              <a:t>環境</a:t>
+            </a:r>
+          </a:p>
+        </p:txBody>
+      </p:sp>
+      <p:sp>
+        <p:nvSpPr>
+          <p:cNvPr id="19" name="Oval 18"/>
+          <p:cNvSpPr/>
+          <p:nvPr/>
+        </p:nvSpPr>
+        <p:spPr>
+          <a:xfrm>
+            <a:off x="8009661" y="3674542"/>
+            <a:ext cx="731520" cy="731520"/>
+          </a:xfrm>
+          <a:prstGeom prst="ellipse">
+            <a:avLst/>
+          </a:prstGeom>
+          <a:solidFill>
+            <a:srgbClr val="1F5A47"/>
+          </a:solidFill>
+          <a:ln>
+            <a:noFill/>
+          </a:ln>
+          <a:effectLst/>
+        </p:spPr>
+        <p:style>
+          <a:lnRef idx="1">
+            <a:schemeClr val="accent1"/>
+          </a:lnRef>
+          <a:fillRef idx="3">
+            <a:schemeClr val="accent1"/>
+          </a:fillRef>
+          <a:effectRef idx="2">
+            <a:schemeClr val="accent1"/>
+          </a:effectRef>
+          <a:fontRef idx="minor">
+            <a:schemeClr val="lt1"/>
+          </a:fontRef>
+        </p:style>
+        <p:txBody>
+          <a:bodyPr rtlCol="0" anchor="ctr" lIns="0" rIns="0" tIns="0" bIns="0"/>
+          <a:lstStyle/>
+          <a:p>
+            <a:pPr algn="ctr"/>
+            <a:r>
+              <a:rPr sz="1300" b="1">
+                <a:solidFill>
+                  <a:srgbClr val="FFFFFF"/>
+                </a:solidFill>
+              </a:rPr>
+              <a:t>仲間</a:t>
+            </a:r>
+          </a:p>
+        </p:txBody>
+      </p:sp>
+      <p:sp>
+        <p:nvSpPr>
+          <p:cNvPr id="20" name="TextBox 19"/>
+          <p:cNvSpPr txBox="1"/>
+          <p:nvPr/>
+        </p:nvSpPr>
+        <p:spPr>
+          <a:xfrm>
+            <a:off x="822959" y="4526279"/>
+            <a:ext cx="4434840" cy="502920"/>
+          </a:xfrm>
+          <a:prstGeom prst="rect">
+            <a:avLst/>
+          </a:prstGeom>
+          <a:noFill/>
+        </p:spPr>
+        <p:txBody>
+          <a:bodyPr wrap="square" lIns="0" rIns="0" tIns="0" bIns="0" anchor="ctr">
+            <a:spAutoFit/>
+          </a:bodyPr>
+          <a:lstStyle/>
+          <a:p>
+            <a:pPr algn="ctr"/>
+            <a:r>
+              <a:rPr sz="1400" b="0">
+                <a:solidFill>
+                  <a:srgbClr val="1E2B27"/>
+                </a:solidFill>
+              </a:rPr>
+              <a:t>教師の計画・指示が中心。子供が合わせて動く</a:t>
+            </a:r>
+          </a:p>
+        </p:txBody>
+      </p:sp>
+      <p:sp>
+        <p:nvSpPr>
+          <p:cNvPr id="21" name="TextBox 20"/>
+          <p:cNvSpPr txBox="1"/>
+          <p:nvPr/>
+        </p:nvSpPr>
+        <p:spPr>
+          <a:xfrm>
+            <a:off x="6933895" y="4526279"/>
+            <a:ext cx="4434840" cy="502920"/>
+          </a:xfrm>
+          <a:prstGeom prst="rect">
+            <a:avLst/>
+          </a:prstGeom>
+          <a:noFill/>
+        </p:spPr>
+        <p:txBody>
+          <a:bodyPr wrap="square" lIns="0" rIns="0" tIns="0" bIns="0" anchor="ctr">
+            <a:spAutoFit/>
+          </a:bodyPr>
+          <a:lstStyle/>
+          <a:p>
+            <a:pPr algn="ctr"/>
+            <a:r>
+              <a:rPr sz="1400" b="1">
+                <a:solidFill>
+                  <a:srgbClr val="1E2B27"/>
+                </a:solidFill>
+              </a:rPr>
+              <a:t>子供の学びが中心。教師・教材・環境・仲間が支える</a:t>
+            </a:r>
+          </a:p>
+        </p:txBody>
+      </p:sp>
+      <p:sp>
+        <p:nvSpPr>
+          <p:cNvPr id="22" name="Right Arrow 21"/>
+          <p:cNvSpPr/>
+          <p:nvPr/>
+        </p:nvSpPr>
+        <p:spPr>
+          <a:xfrm>
+            <a:off x="5641848" y="2990088"/>
+            <a:ext cx="907999" cy="548640"/>
+          </a:xfrm>
+          <a:prstGeom prst="rightArrow">
+            <a:avLst/>
+          </a:prstGeom>
+          <a:solidFill>
+            <a:srgbClr val="D9702C"/>
+          </a:solidFill>
+          <a:ln>
+            <a:noFill/>
+          </a:ln>
+          <a:effectLst/>
+        </p:spPr>
+        <p:style>
+          <a:lnRef idx="1">
+            <a:schemeClr val="accent1"/>
+          </a:lnRef>
+          <a:fillRef idx="3">
+            <a:schemeClr val="accent1"/>
+          </a:fillRef>
+          <a:effectRef idx="2">
+            <a:schemeClr val="accent1"/>
+          </a:effectRef>
+          <a:fontRef idx="minor">
+            <a:schemeClr val="lt1"/>
+          </a:fontRef>
+        </p:style>
+        <p:txBody>
+          <a:bodyPr rtlCol="0" anchor="ctr"/>
+          <a:lstStyle/>
+          <a:p>
+            <a:pPr algn="ctr"/>
+          </a:p>
+        </p:txBody>
+      </p:sp>
+      <p:sp>
+        <p:nvSpPr>
+          <p:cNvPr id="23" name="Rounded Rectangle 22"/>
+          <p:cNvSpPr/>
+          <p:nvPr/>
+        </p:nvSpPr>
+        <p:spPr>
+          <a:xfrm>
+            <a:off x="548640" y="5303520"/>
+            <a:ext cx="11094415" cy="777240"/>
+          </a:xfrm>
+          <a:prstGeom prst="roundRect">
+            <a:avLst>
+              <a:gd name="adj" fmla="val 6000"/>
+            </a:avLst>
+          </a:prstGeom>
+          <a:solidFill>
+            <a:srgbClr val="1F5A47"/>
+          </a:solidFill>
+          <a:ln>
+            <a:noFill/>
+          </a:ln>
+          <a:effectLst/>
+        </p:spPr>
+        <p:style>
+          <a:lnRef idx="1">
+            <a:schemeClr val="accent1"/>
+          </a:lnRef>
+          <a:fillRef idx="3">
+            <a:schemeClr val="accent1"/>
+          </a:fillRef>
+          <a:effectRef idx="2">
+            <a:schemeClr val="accent1"/>
+          </a:effectRef>
+          <a:fontRef idx="minor">
+            <a:schemeClr val="lt1"/>
+          </a:fontRef>
+        </p:style>
+        <p:txBody>
+          <a:bodyPr rtlCol="0" anchor="ctr"/>
+          <a:lstStyle/>
+          <a:p>
+            <a:pPr algn="ctr"/>
+          </a:p>
+        </p:txBody>
+      </p:sp>
+      <p:sp>
+        <p:nvSpPr>
+          <p:cNvPr id="24" name="TextBox 23"/>
+          <p:cNvSpPr txBox="1"/>
+          <p:nvPr/>
+        </p:nvSpPr>
+        <p:spPr>
+          <a:xfrm>
+            <a:off x="868680" y="5303520"/>
+            <a:ext cx="10454335" cy="777240"/>
+          </a:xfrm>
+          <a:prstGeom prst="rect">
+            <a:avLst/>
+          </a:prstGeom>
+          <a:noFill/>
+        </p:spPr>
+        <p:txBody>
+          <a:bodyPr wrap="square" lIns="0" rIns="0" tIns="0" bIns="0" anchor="ctr">
+            <a:spAutoFit/>
+          </a:bodyPr>
+          <a:lstStyle/>
+          <a:p>
+            <a:pPr algn="l"/>
+            <a:r>
+              <a:rPr sz="1700" b="1">
+                <a:solidFill>
+                  <a:srgbClr val="FBEADB"/>
+                </a:solidFill>
+              </a:rPr>
+              <a:t>転換するのは「授業の形」ではなく「見方」　</a:t>
+            </a:r>
+            <a:r>
+              <a:rPr sz="1500" b="0">
+                <a:solidFill>
+                  <a:srgbClr val="FFFFFF"/>
+                </a:solidFill>
+              </a:rPr>
+              <a:t>約８割の一斉授業の中でも、子供の学びを中心に据える</a:t>
+            </a:r>
+          </a:p>
+        </p:txBody>
+      </p:sp>
+      <p:sp>
+        <p:nvSpPr>
+          <p:cNvPr id="25" name="Slide Number Placeholder 0"/>
+          <p:cNvSpPr>
+            <a:spLocks noGrp="1"/>
+          </p:cNvSpPr>
+          <p:nvPr>
+            <p:ph type="sldNum" sz="quarter" idx="4294967295"/>
+          </p:nvPr>
+        </p:nvSpPr>
+        <p:spPr>
+          <a:xfrm>
+            <a:off x="11185855" y="6419088"/>
+            <a:ext cx="457200" cy="274320"/>
+          </a:xfrm>
+          <a:prstGeom prst="rect">
+            <a:avLst/>
+          </a:prstGeom>
+          <a:extLst>
+            <a:ext uri="{C572A759-6A51-4108-AA02-DFA0A04FC94B}">
+              <ma14:wrappingTextBoxFlag xmlns:ma14="http://schemas.microsoft.com/office/mac/drawingml/2011/main" xmlns="" val="0"/>
+            </a:ext>
+          </a:extLst>
+        </p:spPr>
+        <p:txBody>
+          <a:bodyPr/>
+          <a:lstStyle>
+            <a:lvl1pPr>
+              <a:defRPr sz="1000">
+                <a:solidFill>
+                  <a:schemeClr val="accent5"/>
+                </a:solidFill>
+              </a:defRPr>
+            </a:lvl1pPr>
+          </a:lstStyle>
+          <a:p>
+            <a:pPr algn="r"/>
+            <a:fld id="{F7021451-1387-4CA6-816F-3879F97B5CBC}" type="slidenum">
+              <a:rPr lang="en-US" b="0"/>
+              <a:t>2</a:t>
+            </a:fld>
+            <a:endParaRPr lang="en-US"/>
+          </a:p>
+        </p:txBody>
+      </p:sp>
+    </p:spTree>
+  </p:cSld>
+  <p:clrMapOvr>
+    <a:masterClrMapping/>
+  </p:clrMapOvr>
+</p:sld>
+</file>
+
+<file path=ppt/slides/slide23.xml><?xml version="1.0" encoding="utf-8"?>
 <p:sld xmlns:a="http://schemas.openxmlformats.org/drawingml/2006/main" xmlns:r="http://schemas.openxmlformats.org/officeDocument/2006/relationships" xmlns:p="http://schemas.openxmlformats.org/presentationml/2006/main">
   <p:cSld name="Slide 15">
     <p:spTree>
@@ -16416,7 +17587,7 @@
 </p:sld>
 </file>
 
-<file path=ppt/slides/slide23.xml><?xml version="1.0" encoding="utf-8"?>
+<file path=ppt/slides/slide24.xml><?xml version="1.0" encoding="utf-8"?>
 <p:sld xmlns:a="http://schemas.openxmlformats.org/drawingml/2006/main" xmlns:r="http://schemas.openxmlformats.org/officeDocument/2006/relationships" xmlns:p="http://schemas.openxmlformats.org/presentationml/2006/main">
   <p:cSld name="Slide 16">
     <p:spTree>
@@ -17116,7 +18287,7 @@
 </p:sld>
 </file>
 
-<file path=ppt/slides/slide24.xml><?xml version="1.0" encoding="utf-8"?>
+<file path=ppt/slides/slide25.xml><?xml version="1.0" encoding="utf-8"?>
 <p:sld xmlns:a="http://schemas.openxmlformats.org/drawingml/2006/main" xmlns:r="http://schemas.openxmlformats.org/officeDocument/2006/relationships" xmlns:p="http://schemas.openxmlformats.org/presentationml/2006/main">
   <p:cSld name="Slide 17">
     <p:spTree>
@@ -17852,7 +19023,7 @@
 </p:sld>
 </file>
 
-<file path=ppt/slides/slide25.xml><?xml version="1.0" encoding="utf-8"?>
+<file path=ppt/slides/slide26.xml><?xml version="1.0" encoding="utf-8"?>
 <p:sld xmlns:a="http://schemas.openxmlformats.org/drawingml/2006/main" xmlns:p="http://schemas.openxmlformats.org/presentationml/2006/main" xmlns:r="http://schemas.openxmlformats.org/officeDocument/2006/relationships">
   <p:cSld>
     <p:spTree>
@@ -17878,7 +19049,7 @@
           <a:lstStyle/>
           <a:p>
             <a:r>
-              <a:t>04　指導主事として</a:t>
+              <a:t>02　講演・鼎談から（上智大学 奈須正裕 氏）</a:t>
             </a:r>
           </a:p>
         </p:txBody>
@@ -17899,7 +19070,7 @@
           <a:lstStyle/>
           <a:p>
             <a:r>
-              <a:t>教育観・指導観のコペルニクス的転換</a:t>
+              <a:t>講義・協議会で語られた本音</a:t>
             </a:r>
           </a:p>
         </p:txBody>
@@ -17913,7 +19084,247 @@
         <p:spPr>
           <a:xfrm>
             <a:off x="548640" y="1508760"/>
-            <a:ext cx="4983480" cy="3611880"/>
+            <a:ext cx="4937760" cy="4572000"/>
+          </a:xfrm>
+          <a:prstGeom prst="roundRect">
+            <a:avLst>
+              <a:gd name="adj" fmla="val 6000"/>
+            </a:avLst>
+          </a:prstGeom>
+          <a:solidFill>
+            <a:srgbClr val="1F5A47"/>
+          </a:solidFill>
+          <a:ln>
+            <a:noFill/>
+          </a:ln>
+          <a:effectLst/>
+        </p:spPr>
+        <p:style>
+          <a:lnRef idx="1">
+            <a:schemeClr val="accent1"/>
+          </a:lnRef>
+          <a:fillRef idx="3">
+            <a:schemeClr val="accent1"/>
+          </a:fillRef>
+          <a:effectRef idx="2">
+            <a:schemeClr val="accent1"/>
+          </a:effectRef>
+          <a:fontRef idx="minor">
+            <a:schemeClr val="lt1"/>
+          </a:fontRef>
+        </p:style>
+        <p:txBody>
+          <a:bodyPr rtlCol="0" anchor="ctr"/>
+          <a:lstStyle/>
+          <a:p>
+            <a:pPr algn="ctr"/>
+          </a:p>
+        </p:txBody>
+      </p:sp>
+      <p:pic>
+        <p:nvPicPr>
+          <p:cNvPr id="5" name="Picture 4" descr="quote_peach.png"/>
+          <p:cNvPicPr>
+            <a:picLocks noChangeAspect="1"/>
+          </p:cNvPicPr>
+          <p:nvPr/>
+        </p:nvPicPr>
+        <p:blipFill>
+          <a:blip r:embed="rId2"/>
+          <a:stretch>
+            <a:fillRect/>
+          </a:stretch>
+        </p:blipFill>
+        <p:spPr>
+          <a:xfrm>
+            <a:off x="914400" y="1874519"/>
+            <a:ext cx="548640" cy="548640"/>
+          </a:xfrm>
+          <a:prstGeom prst="rect">
+            <a:avLst/>
+          </a:prstGeom>
+        </p:spPr>
+      </p:pic>
+      <p:sp>
+        <p:nvSpPr>
+          <p:cNvPr id="6" name="TextBox 5"/>
+          <p:cNvSpPr txBox="1"/>
+          <p:nvPr/>
+        </p:nvSpPr>
+        <p:spPr>
+          <a:xfrm>
+            <a:off x="914400" y="2560320"/>
+            <a:ext cx="4206240" cy="1463040"/>
+          </a:xfrm>
+          <a:prstGeom prst="rect">
+            <a:avLst/>
+          </a:prstGeom>
+          <a:noFill/>
+        </p:spPr>
+        <p:txBody>
+          <a:bodyPr wrap="square" lIns="0" rIns="0" tIns="0" bIns="0" anchor="t">
+            <a:spAutoFit/>
+          </a:bodyPr>
+          <a:lstStyle/>
+          <a:p>
+            <a:pPr algn="l"/>
+            <a:r>
+              <a:rPr sz="3200" b="1">
+                <a:solidFill>
+                  <a:srgbClr val="FFFFFF"/>
+                </a:solidFill>
+              </a:rPr>
+              <a:t>マイ探究に、</a:t>
+            </a:r>
+          </a:p>
+          <a:p>
+            <a:pPr algn="l"/>
+            <a:r>
+              <a:rPr sz="3200" b="1">
+                <a:solidFill>
+                  <a:srgbClr val="FFFFFF"/>
+                </a:solidFill>
+              </a:rPr>
+              <a:t>評価は必要ない</a:t>
+            </a:r>
+          </a:p>
+        </p:txBody>
+      </p:sp>
+      <p:sp>
+        <p:nvSpPr>
+          <p:cNvPr id="7" name="TextBox 6"/>
+          <p:cNvSpPr txBox="1"/>
+          <p:nvPr/>
+        </p:nvSpPr>
+        <p:spPr>
+          <a:xfrm>
+            <a:off x="914400" y="4114800"/>
+            <a:ext cx="4206240" cy="822960"/>
+          </a:xfrm>
+          <a:prstGeom prst="rect">
+            <a:avLst/>
+          </a:prstGeom>
+          <a:noFill/>
+        </p:spPr>
+        <p:txBody>
+          <a:bodyPr wrap="square" lIns="0" rIns="0" tIns="0" bIns="0" anchor="t">
+            <a:spAutoFit/>
+          </a:bodyPr>
+          <a:lstStyle/>
+          <a:p>
+            <a:pPr algn="l"/>
+            <a:r>
+              <a:rPr sz="1500" b="0">
+                <a:solidFill>
+                  <a:srgbClr val="D3E3D9"/>
+                </a:solidFill>
+              </a:rPr>
+              <a:t>「好き」「得意」を、学校の物差しで測らない</a:t>
+            </a:r>
+          </a:p>
+        </p:txBody>
+      </p:sp>
+      <p:sp>
+        <p:nvSpPr>
+          <p:cNvPr id="8" name="Rounded Rectangle 7"/>
+          <p:cNvSpPr/>
+          <p:nvPr/>
+        </p:nvSpPr>
+        <p:spPr>
+          <a:xfrm>
+            <a:off x="822959" y="4846320"/>
+            <a:ext cx="4389120" cy="960120"/>
+          </a:xfrm>
+          <a:prstGeom prst="roundRect">
+            <a:avLst>
+              <a:gd name="adj" fmla="val 6000"/>
+            </a:avLst>
+          </a:prstGeom>
+          <a:solidFill>
+            <a:srgbClr val="FFFFFF"/>
+          </a:solidFill>
+          <a:ln>
+            <a:noFill/>
+          </a:ln>
+          <a:effectLst/>
+        </p:spPr>
+        <p:style>
+          <a:lnRef idx="1">
+            <a:schemeClr val="accent1"/>
+          </a:lnRef>
+          <a:fillRef idx="3">
+            <a:schemeClr val="accent1"/>
+          </a:fillRef>
+          <a:effectRef idx="2">
+            <a:schemeClr val="accent1"/>
+          </a:effectRef>
+          <a:fontRef idx="minor">
+            <a:schemeClr val="lt1"/>
+          </a:fontRef>
+        </p:style>
+        <p:txBody>
+          <a:bodyPr rtlCol="0" anchor="ctr"/>
+          <a:lstStyle/>
+          <a:p>
+            <a:pPr algn="ctr"/>
+          </a:p>
+        </p:txBody>
+      </p:sp>
+      <p:sp>
+        <p:nvSpPr>
+          <p:cNvPr id="9" name="TextBox 8"/>
+          <p:cNvSpPr txBox="1"/>
+          <p:nvPr/>
+        </p:nvSpPr>
+        <p:spPr>
+          <a:xfrm>
+            <a:off x="1051560" y="4846320"/>
+            <a:ext cx="3931920" cy="960120"/>
+          </a:xfrm>
+          <a:prstGeom prst="rect">
+            <a:avLst/>
+          </a:prstGeom>
+          <a:noFill/>
+        </p:spPr>
+        <p:txBody>
+          <a:bodyPr wrap="square" lIns="0" rIns="0" tIns="0" bIns="0" anchor="ctr">
+            <a:spAutoFit/>
+          </a:bodyPr>
+          <a:lstStyle/>
+          <a:p>
+            <a:pPr algn="l"/>
+            <a:r>
+              <a:rPr sz="1300" b="1">
+                <a:solidFill>
+                  <a:srgbClr val="D9702C"/>
+                </a:solidFill>
+              </a:rPr>
+              <a:t>考えたい問い</a:t>
+            </a:r>
+          </a:p>
+          <a:p>
+            <a:pPr algn="l"/>
+            <a:r>
+              <a:rPr sz="1700" b="1">
+                <a:solidFill>
+                  <a:srgbClr val="1F5A47"/>
+                </a:solidFill>
+              </a:rPr>
+              <a:t>評価しないと不安になるのは、誰か</a:t>
+            </a:r>
+          </a:p>
+        </p:txBody>
+      </p:sp>
+      <p:sp>
+        <p:nvSpPr>
+          <p:cNvPr id="10" name="Rounded Rectangle 9"/>
+          <p:cNvSpPr/>
+          <p:nvPr/>
+        </p:nvSpPr>
+        <p:spPr>
+          <a:xfrm>
+            <a:off x="5806440" y="1508760"/>
+            <a:ext cx="5836615" cy="1371600"/>
           </a:xfrm>
           <a:prstGeom prst="roundRect">
             <a:avLst>
@@ -17950,16 +19361,85 @@
           </a:p>
         </p:txBody>
       </p:sp>
-      <p:sp>
-        <p:nvSpPr>
-          <p:cNvPr id="5" name="Rounded Rectangle 4"/>
+      <p:pic>
+        <p:nvPicPr>
+          <p:cNvPr id="11" name="Picture 10" descr="image.png"/>
+          <p:cNvPicPr>
+            <a:picLocks noChangeAspect="1"/>
+          </p:cNvPicPr>
+          <p:nvPr/>
+        </p:nvPicPr>
+        <p:blipFill>
+          <a:blip r:embed="rId3"/>
+          <a:stretch>
+            <a:fillRect/>
+          </a:stretch>
+        </p:blipFill>
+        <p:spPr>
+          <a:xfrm>
+            <a:off x="6080759" y="1783080"/>
+            <a:ext cx="384048" cy="384048"/>
+          </a:xfrm>
+          <a:prstGeom prst="rect">
+            <a:avLst/>
+          </a:prstGeom>
+        </p:spPr>
+      </p:pic>
+      <p:sp>
+        <p:nvSpPr>
+          <p:cNvPr id="12" name="TextBox 11"/>
+          <p:cNvSpPr txBox="1"/>
+          <p:nvPr/>
+        </p:nvSpPr>
+        <p:spPr>
+          <a:xfrm>
+            <a:off x="6675120" y="1600200"/>
+            <a:ext cx="4739335" cy="1188720"/>
+          </a:xfrm>
+          <a:prstGeom prst="rect">
+            <a:avLst/>
+          </a:prstGeom>
+          <a:noFill/>
+        </p:spPr>
+        <p:txBody>
+          <a:bodyPr wrap="square" lIns="0" rIns="0" tIns="0" bIns="0" anchor="ctr">
+            <a:spAutoFit/>
+          </a:bodyPr>
+          <a:lstStyle/>
+          <a:p>
+            <a:pPr algn="l"/>
+            <a:r>
+              <a:rPr sz="2000" b="1">
+                <a:solidFill>
+                  <a:srgbClr val="1F5A47"/>
+                </a:solidFill>
+              </a:rPr>
+              <a:t>学校的な価値で過剰に制限しない</a:t>
+            </a:r>
+          </a:p>
+          <a:p>
+            <a:pPr algn="l"/>
+            <a:r>
+              <a:rPr sz="1400" b="0">
+                <a:solidFill>
+                  <a:srgbClr val="1E2B27"/>
+                </a:solidFill>
+              </a:rPr>
+              <a:t>子供に忖度させない</a:t>
+            </a:r>
+          </a:p>
+        </p:txBody>
+      </p:sp>
+      <p:sp>
+        <p:nvSpPr>
+          <p:cNvPr id="13" name="Rounded Rectangle 12"/>
           <p:cNvSpPr/>
           <p:nvPr/>
         </p:nvSpPr>
         <p:spPr>
           <a:xfrm>
-            <a:off x="6659575" y="1508760"/>
-            <a:ext cx="4983480" cy="3611880"/>
+            <a:off x="5806440" y="3108960"/>
+            <a:ext cx="5836615" cy="1371600"/>
           </a:xfrm>
           <a:prstGeom prst="roundRect">
             <a:avLst>
@@ -17967,7 +19447,7 @@
             </a:avLst>
           </a:prstGeom>
           <a:solidFill>
-            <a:srgbClr val="FBEADB"/>
+            <a:srgbClr val="EEF4F0"/>
           </a:solidFill>
           <a:ln>
             <a:noFill/>
@@ -17996,16 +19476,40 @@
           </a:p>
         </p:txBody>
       </p:sp>
-      <p:sp>
-        <p:nvSpPr>
-          <p:cNvPr id="6" name="TextBox 5"/>
+      <p:pic>
+        <p:nvPicPr>
+          <p:cNvPr id="14" name="Picture 13" descr="image.png"/>
+          <p:cNvPicPr>
+            <a:picLocks noChangeAspect="1"/>
+          </p:cNvPicPr>
+          <p:nvPr/>
+        </p:nvPicPr>
+        <p:blipFill>
+          <a:blip r:embed="rId3"/>
+          <a:stretch>
+            <a:fillRect/>
+          </a:stretch>
+        </p:blipFill>
+        <p:spPr>
+          <a:xfrm>
+            <a:off x="6080759" y="3383279"/>
+            <a:ext cx="384048" cy="384048"/>
+          </a:xfrm>
+          <a:prstGeom prst="rect">
+            <a:avLst/>
+          </a:prstGeom>
+        </p:spPr>
+      </p:pic>
+      <p:sp>
+        <p:nvSpPr>
+          <p:cNvPr id="15" name="TextBox 14"/>
           <p:cNvSpPr txBox="1"/>
           <p:nvPr/>
         </p:nvSpPr>
         <p:spPr>
           <a:xfrm>
-            <a:off x="822959" y="1645919"/>
-            <a:ext cx="4434840" cy="411480"/>
+            <a:off x="6675120" y="3200400"/>
+            <a:ext cx="4739335" cy="1188720"/>
           </a:xfrm>
           <a:prstGeom prst="rect">
             <a:avLst/>
@@ -18020,86 +19524,48 @@
           <a:p>
             <a:pPr algn="l"/>
             <a:r>
-              <a:rPr sz="1800" b="1">
-                <a:solidFill>
-                  <a:srgbClr val="5E6E68"/>
-                </a:solidFill>
-              </a:rPr>
-              <a:t>これまで　</a:t>
-            </a:r>
-            <a:r>
-              <a:rPr sz="1500" b="0">
-                <a:solidFill>
-                  <a:srgbClr val="5E6E68"/>
-                </a:solidFill>
-              </a:rPr>
-              <a:t>天動説</a:t>
-            </a:r>
-          </a:p>
-        </p:txBody>
-      </p:sp>
-      <p:sp>
-        <p:nvSpPr>
-          <p:cNvPr id="7" name="TextBox 6"/>
-          <p:cNvSpPr txBox="1"/>
-          <p:nvPr/>
-        </p:nvSpPr>
-        <p:spPr>
-          <a:xfrm>
-            <a:off x="6933895" y="1645919"/>
-            <a:ext cx="4434840" cy="411480"/>
-          </a:xfrm>
-          <a:prstGeom prst="rect">
-            <a:avLst/>
-          </a:prstGeom>
-          <a:noFill/>
-        </p:spPr>
-        <p:txBody>
-          <a:bodyPr wrap="square" lIns="0" rIns="0" tIns="0" bIns="0" anchor="ctr">
-            <a:spAutoFit/>
-          </a:bodyPr>
-          <a:lstStyle/>
+              <a:rPr sz="2000" b="1">
+                <a:solidFill>
+                  <a:srgbClr val="1F5A47"/>
+                </a:solidFill>
+              </a:rPr>
+              <a:t>発表会は必須ではない</a:t>
+            </a:r>
+          </a:p>
           <a:p>
             <a:pPr algn="l"/>
             <a:r>
-              <a:rPr sz="1800" b="1">
-                <a:solidFill>
-                  <a:srgbClr val="D9702C"/>
-                </a:solidFill>
-              </a:rPr>
-              <a:t>これから　</a:t>
-            </a:r>
-            <a:r>
-              <a:rPr sz="1500" b="0">
-                <a:solidFill>
-                  <a:srgbClr val="D9702C"/>
-                </a:solidFill>
-              </a:rPr>
-              <a:t>地動説</a:t>
-            </a:r>
-          </a:p>
-        </p:txBody>
-      </p:sp>
-      <p:sp>
-        <p:nvSpPr>
-          <p:cNvPr id="8" name="Oval 7"/>
+              <a:rPr sz="1400" b="0">
+                <a:solidFill>
+                  <a:srgbClr val="1E2B27"/>
+                </a:solidFill>
+              </a:rPr>
+              <a:t>発表するかどうかを子供が選んでもいい</a:t>
+            </a:r>
+          </a:p>
+        </p:txBody>
+      </p:sp>
+      <p:sp>
+        <p:nvSpPr>
+          <p:cNvPr id="16" name="Rounded Rectangle 15"/>
           <p:cNvSpPr/>
           <p:nvPr/>
         </p:nvSpPr>
         <p:spPr>
           <a:xfrm>
-            <a:off x="1943100" y="2167128"/>
-            <a:ext cx="2194560" cy="2194560"/>
-          </a:xfrm>
-          <a:prstGeom prst="ellipse">
-            <a:avLst/>
-          </a:prstGeom>
-          <a:noFill/>
-          <a:ln w="22225">
-            <a:solidFill>
-              <a:srgbClr val="7FAF8E"/>
-            </a:solidFill>
-            <a:prstDash val="dash"/>
+            <a:off x="5806440" y="4709160"/>
+            <a:ext cx="5836615" cy="1371600"/>
+          </a:xfrm>
+          <a:prstGeom prst="roundRect">
+            <a:avLst>
+              <a:gd name="adj" fmla="val 6000"/>
+            </a:avLst>
+          </a:prstGeom>
+          <a:solidFill>
+            <a:srgbClr val="EEF4F0"/>
+          </a:solidFill>
+          <a:ln>
+            <a:noFill/>
           </a:ln>
           <a:effectLst/>
         </p:spPr>
@@ -18125,592 +19591,40 @@
           </a:p>
         </p:txBody>
       </p:sp>
-      <p:sp>
-        <p:nvSpPr>
-          <p:cNvPr id="9" name="Oval 8"/>
-          <p:cNvSpPr/>
-          <p:nvPr/>
-        </p:nvSpPr>
-        <p:spPr>
-          <a:xfrm>
-            <a:off x="2491740" y="2715768"/>
-            <a:ext cx="1097280" cy="1097280"/>
-          </a:xfrm>
-          <a:prstGeom prst="ellipse">
-            <a:avLst/>
-          </a:prstGeom>
-          <a:solidFill>
-            <a:srgbClr val="1F5A47"/>
-          </a:solidFill>
-          <a:ln>
-            <a:noFill/>
-          </a:ln>
-          <a:effectLst/>
-        </p:spPr>
-        <p:style>
-          <a:lnRef idx="1">
-            <a:schemeClr val="accent1"/>
-          </a:lnRef>
-          <a:fillRef idx="3">
-            <a:schemeClr val="accent1"/>
-          </a:fillRef>
-          <a:effectRef idx="2">
-            <a:schemeClr val="accent1"/>
-          </a:effectRef>
-          <a:fontRef idx="minor">
-            <a:schemeClr val="lt1"/>
-          </a:fontRef>
-        </p:style>
-        <p:txBody>
-          <a:bodyPr rtlCol="0" anchor="ctr" lIns="0" rIns="0" tIns="0" bIns="0"/>
-          <a:lstStyle/>
-          <a:p>
-            <a:pPr algn="ctr"/>
-            <a:r>
-              <a:rPr sz="1500" b="1">
-                <a:solidFill>
-                  <a:srgbClr val="FFFFFF"/>
-                </a:solidFill>
-              </a:rPr>
-              <a:t>教師</a:t>
-            </a:r>
-          </a:p>
-        </p:txBody>
-      </p:sp>
-      <p:sp>
-        <p:nvSpPr>
-          <p:cNvPr id="10" name="Oval 9"/>
-          <p:cNvSpPr/>
-          <p:nvPr/>
-        </p:nvSpPr>
-        <p:spPr>
-          <a:xfrm>
-            <a:off x="1898725" y="2122753"/>
-            <a:ext cx="731520" cy="731520"/>
-          </a:xfrm>
-          <a:prstGeom prst="ellipse">
-            <a:avLst/>
-          </a:prstGeom>
-          <a:solidFill>
-            <a:srgbClr val="D3E3D9"/>
-          </a:solidFill>
-          <a:ln>
-            <a:noFill/>
-          </a:ln>
-          <a:effectLst/>
-        </p:spPr>
-        <p:style>
-          <a:lnRef idx="1">
-            <a:schemeClr val="accent1"/>
-          </a:lnRef>
-          <a:fillRef idx="3">
-            <a:schemeClr val="accent1"/>
-          </a:fillRef>
-          <a:effectRef idx="2">
-            <a:schemeClr val="accent1"/>
-          </a:effectRef>
-          <a:fontRef idx="minor">
-            <a:schemeClr val="lt1"/>
-          </a:fontRef>
-        </p:style>
-        <p:txBody>
-          <a:bodyPr rtlCol="0" anchor="ctr" lIns="0" rIns="0" tIns="0" bIns="0"/>
-          <a:lstStyle/>
-          <a:p>
-            <a:pPr algn="ctr"/>
-            <a:r>
-              <a:rPr sz="1300" b="1">
-                <a:solidFill>
-                  <a:srgbClr val="1F5A47"/>
-                </a:solidFill>
-              </a:rPr>
-              <a:t>子供</a:t>
-            </a:r>
-          </a:p>
-        </p:txBody>
-      </p:sp>
-      <p:sp>
-        <p:nvSpPr>
-          <p:cNvPr id="11" name="Oval 10"/>
-          <p:cNvSpPr/>
-          <p:nvPr/>
-        </p:nvSpPr>
-        <p:spPr>
-          <a:xfrm>
-            <a:off x="3450514" y="2122753"/>
-            <a:ext cx="731520" cy="731520"/>
-          </a:xfrm>
-          <a:prstGeom prst="ellipse">
-            <a:avLst/>
-          </a:prstGeom>
-          <a:solidFill>
-            <a:srgbClr val="D3E3D9"/>
-          </a:solidFill>
-          <a:ln>
-            <a:noFill/>
-          </a:ln>
-          <a:effectLst/>
-        </p:spPr>
-        <p:style>
-          <a:lnRef idx="1">
-            <a:schemeClr val="accent1"/>
-          </a:lnRef>
-          <a:fillRef idx="3">
-            <a:schemeClr val="accent1"/>
-          </a:fillRef>
-          <a:effectRef idx="2">
-            <a:schemeClr val="accent1"/>
-          </a:effectRef>
-          <a:fontRef idx="minor">
-            <a:schemeClr val="lt1"/>
-          </a:fontRef>
-        </p:style>
-        <p:txBody>
-          <a:bodyPr rtlCol="0" anchor="ctr" lIns="0" rIns="0" tIns="0" bIns="0"/>
-          <a:lstStyle/>
-          <a:p>
-            <a:pPr algn="ctr"/>
-            <a:r>
-              <a:rPr sz="1300" b="1">
-                <a:solidFill>
-                  <a:srgbClr val="1F5A47"/>
-                </a:solidFill>
-              </a:rPr>
-              <a:t>子供</a:t>
-            </a:r>
-          </a:p>
-        </p:txBody>
-      </p:sp>
-      <p:sp>
-        <p:nvSpPr>
-          <p:cNvPr id="12" name="Oval 11"/>
-          <p:cNvSpPr/>
-          <p:nvPr/>
-        </p:nvSpPr>
-        <p:spPr>
-          <a:xfrm>
-            <a:off x="3450514" y="3674542"/>
-            <a:ext cx="731520" cy="731520"/>
-          </a:xfrm>
-          <a:prstGeom prst="ellipse">
-            <a:avLst/>
-          </a:prstGeom>
-          <a:solidFill>
-            <a:srgbClr val="D3E3D9"/>
-          </a:solidFill>
-          <a:ln>
-            <a:noFill/>
-          </a:ln>
-          <a:effectLst/>
-        </p:spPr>
-        <p:style>
-          <a:lnRef idx="1">
-            <a:schemeClr val="accent1"/>
-          </a:lnRef>
-          <a:fillRef idx="3">
-            <a:schemeClr val="accent1"/>
-          </a:fillRef>
-          <a:effectRef idx="2">
-            <a:schemeClr val="accent1"/>
-          </a:effectRef>
-          <a:fontRef idx="minor">
-            <a:schemeClr val="lt1"/>
-          </a:fontRef>
-        </p:style>
-        <p:txBody>
-          <a:bodyPr rtlCol="0" anchor="ctr" lIns="0" rIns="0" tIns="0" bIns="0"/>
-          <a:lstStyle/>
-          <a:p>
-            <a:pPr algn="ctr"/>
-            <a:r>
-              <a:rPr sz="1300" b="1">
-                <a:solidFill>
-                  <a:srgbClr val="1F5A47"/>
-                </a:solidFill>
-              </a:rPr>
-              <a:t>子供</a:t>
-            </a:r>
-          </a:p>
-        </p:txBody>
-      </p:sp>
-      <p:sp>
-        <p:nvSpPr>
-          <p:cNvPr id="13" name="Oval 12"/>
-          <p:cNvSpPr/>
-          <p:nvPr/>
-        </p:nvSpPr>
-        <p:spPr>
-          <a:xfrm>
-            <a:off x="1898725" y="3674542"/>
-            <a:ext cx="731520" cy="731520"/>
-          </a:xfrm>
-          <a:prstGeom prst="ellipse">
-            <a:avLst/>
-          </a:prstGeom>
-          <a:solidFill>
-            <a:srgbClr val="D3E3D9"/>
-          </a:solidFill>
-          <a:ln>
-            <a:noFill/>
-          </a:ln>
-          <a:effectLst/>
-        </p:spPr>
-        <p:style>
-          <a:lnRef idx="1">
-            <a:schemeClr val="accent1"/>
-          </a:lnRef>
-          <a:fillRef idx="3">
-            <a:schemeClr val="accent1"/>
-          </a:fillRef>
-          <a:effectRef idx="2">
-            <a:schemeClr val="accent1"/>
-          </a:effectRef>
-          <a:fontRef idx="minor">
-            <a:schemeClr val="lt1"/>
-          </a:fontRef>
-        </p:style>
-        <p:txBody>
-          <a:bodyPr rtlCol="0" anchor="ctr" lIns="0" rIns="0" tIns="0" bIns="0"/>
-          <a:lstStyle/>
-          <a:p>
-            <a:pPr algn="ctr"/>
-            <a:r>
-              <a:rPr sz="1300" b="1">
-                <a:solidFill>
-                  <a:srgbClr val="1F5A47"/>
-                </a:solidFill>
-              </a:rPr>
-              <a:t>子供</a:t>
-            </a:r>
-          </a:p>
-        </p:txBody>
-      </p:sp>
-      <p:sp>
-        <p:nvSpPr>
-          <p:cNvPr id="14" name="Oval 13"/>
-          <p:cNvSpPr/>
-          <p:nvPr/>
-        </p:nvSpPr>
-        <p:spPr>
-          <a:xfrm>
-            <a:off x="8054035" y="2167128"/>
-            <a:ext cx="2194560" cy="2194560"/>
-          </a:xfrm>
-          <a:prstGeom prst="ellipse">
-            <a:avLst/>
-          </a:prstGeom>
-          <a:noFill/>
-          <a:ln w="22225">
-            <a:solidFill>
-              <a:srgbClr val="7FAF8E"/>
-            </a:solidFill>
-            <a:prstDash val="dash"/>
-          </a:ln>
-          <a:effectLst/>
-        </p:spPr>
-        <p:style>
-          <a:lnRef idx="1">
-            <a:schemeClr val="accent1"/>
-          </a:lnRef>
-          <a:fillRef idx="3">
-            <a:schemeClr val="accent1"/>
-          </a:fillRef>
-          <a:effectRef idx="2">
-            <a:schemeClr val="accent1"/>
-          </a:effectRef>
-          <a:fontRef idx="minor">
-            <a:schemeClr val="lt1"/>
-          </a:fontRef>
-        </p:style>
-        <p:txBody>
-          <a:bodyPr rtlCol="0" anchor="ctr"/>
-          <a:lstStyle/>
-          <a:p>
-            <a:pPr algn="ctr"/>
-          </a:p>
-        </p:txBody>
-      </p:sp>
-      <p:sp>
-        <p:nvSpPr>
-          <p:cNvPr id="15" name="Oval 14"/>
-          <p:cNvSpPr/>
-          <p:nvPr/>
-        </p:nvSpPr>
-        <p:spPr>
-          <a:xfrm>
-            <a:off x="8602675" y="2715768"/>
-            <a:ext cx="1097280" cy="1097280"/>
-          </a:xfrm>
-          <a:prstGeom prst="ellipse">
-            <a:avLst/>
-          </a:prstGeom>
-          <a:solidFill>
-            <a:srgbClr val="D9702C"/>
-          </a:solidFill>
-          <a:ln>
-            <a:noFill/>
-          </a:ln>
-          <a:effectLst/>
-        </p:spPr>
-        <p:style>
-          <a:lnRef idx="1">
-            <a:schemeClr val="accent1"/>
-          </a:lnRef>
-          <a:fillRef idx="3">
-            <a:schemeClr val="accent1"/>
-          </a:fillRef>
-          <a:effectRef idx="2">
-            <a:schemeClr val="accent1"/>
-          </a:effectRef>
-          <a:fontRef idx="minor">
-            <a:schemeClr val="lt1"/>
-          </a:fontRef>
-        </p:style>
-        <p:txBody>
-          <a:bodyPr rtlCol="0" anchor="ctr" lIns="0" rIns="0" tIns="0" bIns="0"/>
-          <a:lstStyle/>
-          <a:p>
-            <a:pPr algn="ctr"/>
-            <a:r>
-              <a:rPr sz="1500" b="1">
-                <a:solidFill>
-                  <a:srgbClr val="FFFFFF"/>
-                </a:solidFill>
-              </a:rPr>
-              <a:t>子供の</a:t>
-            </a:r>
-          </a:p>
-          <a:p>
-            <a:pPr algn="ctr"/>
-            <a:r>
-              <a:rPr sz="1500" b="1">
-                <a:solidFill>
-                  <a:srgbClr val="FFFFFF"/>
-                </a:solidFill>
-              </a:rPr>
-              <a:t>学び</a:t>
-            </a:r>
-          </a:p>
-        </p:txBody>
-      </p:sp>
-      <p:sp>
-        <p:nvSpPr>
-          <p:cNvPr id="16" name="Oval 15"/>
-          <p:cNvSpPr/>
-          <p:nvPr/>
-        </p:nvSpPr>
-        <p:spPr>
-          <a:xfrm>
-            <a:off x="8009661" y="2122753"/>
-            <a:ext cx="731520" cy="731520"/>
-          </a:xfrm>
-          <a:prstGeom prst="ellipse">
-            <a:avLst/>
-          </a:prstGeom>
-          <a:solidFill>
-            <a:srgbClr val="1F5A47"/>
-          </a:solidFill>
-          <a:ln>
-            <a:noFill/>
-          </a:ln>
-          <a:effectLst/>
-        </p:spPr>
-        <p:style>
-          <a:lnRef idx="1">
-            <a:schemeClr val="accent1"/>
-          </a:lnRef>
-          <a:fillRef idx="3">
-            <a:schemeClr val="accent1"/>
-          </a:fillRef>
-          <a:effectRef idx="2">
-            <a:schemeClr val="accent1"/>
-          </a:effectRef>
-          <a:fontRef idx="minor">
-            <a:schemeClr val="lt1"/>
-          </a:fontRef>
-        </p:style>
-        <p:txBody>
-          <a:bodyPr rtlCol="0" anchor="ctr" lIns="0" rIns="0" tIns="0" bIns="0"/>
-          <a:lstStyle/>
-          <a:p>
-            <a:pPr algn="ctr"/>
-            <a:r>
-              <a:rPr sz="1300" b="1">
-                <a:solidFill>
-                  <a:srgbClr val="FFFFFF"/>
-                </a:solidFill>
-              </a:rPr>
-              <a:t>教師</a:t>
-            </a:r>
-          </a:p>
-        </p:txBody>
-      </p:sp>
-      <p:sp>
-        <p:nvSpPr>
-          <p:cNvPr id="17" name="Oval 16"/>
-          <p:cNvSpPr/>
-          <p:nvPr/>
-        </p:nvSpPr>
-        <p:spPr>
-          <a:xfrm>
-            <a:off x="9561449" y="2122753"/>
-            <a:ext cx="731520" cy="731520"/>
-          </a:xfrm>
-          <a:prstGeom prst="ellipse">
-            <a:avLst/>
-          </a:prstGeom>
-          <a:solidFill>
-            <a:srgbClr val="1F5A47"/>
-          </a:solidFill>
-          <a:ln>
-            <a:noFill/>
-          </a:ln>
-          <a:effectLst/>
-        </p:spPr>
-        <p:style>
-          <a:lnRef idx="1">
-            <a:schemeClr val="accent1"/>
-          </a:lnRef>
-          <a:fillRef idx="3">
-            <a:schemeClr val="accent1"/>
-          </a:fillRef>
-          <a:effectRef idx="2">
-            <a:schemeClr val="accent1"/>
-          </a:effectRef>
-          <a:fontRef idx="minor">
-            <a:schemeClr val="lt1"/>
-          </a:fontRef>
-        </p:style>
-        <p:txBody>
-          <a:bodyPr rtlCol="0" anchor="ctr" lIns="0" rIns="0" tIns="0" bIns="0"/>
-          <a:lstStyle/>
-          <a:p>
-            <a:pPr algn="ctr"/>
-            <a:r>
-              <a:rPr sz="1300" b="1">
-                <a:solidFill>
-                  <a:srgbClr val="FFFFFF"/>
-                </a:solidFill>
-              </a:rPr>
-              <a:t>教材</a:t>
-            </a:r>
-          </a:p>
-        </p:txBody>
-      </p:sp>
-      <p:sp>
-        <p:nvSpPr>
-          <p:cNvPr id="18" name="Oval 17"/>
-          <p:cNvSpPr/>
-          <p:nvPr/>
-        </p:nvSpPr>
-        <p:spPr>
-          <a:xfrm>
-            <a:off x="9561449" y="3674542"/>
-            <a:ext cx="731520" cy="731520"/>
-          </a:xfrm>
-          <a:prstGeom prst="ellipse">
-            <a:avLst/>
-          </a:prstGeom>
-          <a:solidFill>
-            <a:srgbClr val="1F5A47"/>
-          </a:solidFill>
-          <a:ln>
-            <a:noFill/>
-          </a:ln>
-          <a:effectLst/>
-        </p:spPr>
-        <p:style>
-          <a:lnRef idx="1">
-            <a:schemeClr val="accent1"/>
-          </a:lnRef>
-          <a:fillRef idx="3">
-            <a:schemeClr val="accent1"/>
-          </a:fillRef>
-          <a:effectRef idx="2">
-            <a:schemeClr val="accent1"/>
-          </a:effectRef>
-          <a:fontRef idx="minor">
-            <a:schemeClr val="lt1"/>
-          </a:fontRef>
-        </p:style>
-        <p:txBody>
-          <a:bodyPr rtlCol="0" anchor="ctr" lIns="0" rIns="0" tIns="0" bIns="0"/>
-          <a:lstStyle/>
-          <a:p>
-            <a:pPr algn="ctr"/>
-            <a:r>
-              <a:rPr sz="1300" b="1">
-                <a:solidFill>
-                  <a:srgbClr val="FFFFFF"/>
-                </a:solidFill>
-              </a:rPr>
-              <a:t>環境</a:t>
-            </a:r>
-          </a:p>
-        </p:txBody>
-      </p:sp>
-      <p:sp>
-        <p:nvSpPr>
-          <p:cNvPr id="19" name="Oval 18"/>
-          <p:cNvSpPr/>
-          <p:nvPr/>
-        </p:nvSpPr>
-        <p:spPr>
-          <a:xfrm>
-            <a:off x="8009661" y="3674542"/>
-            <a:ext cx="731520" cy="731520"/>
-          </a:xfrm>
-          <a:prstGeom prst="ellipse">
-            <a:avLst/>
-          </a:prstGeom>
-          <a:solidFill>
-            <a:srgbClr val="1F5A47"/>
-          </a:solidFill>
-          <a:ln>
-            <a:noFill/>
-          </a:ln>
-          <a:effectLst/>
-        </p:spPr>
-        <p:style>
-          <a:lnRef idx="1">
-            <a:schemeClr val="accent1"/>
-          </a:lnRef>
-          <a:fillRef idx="3">
-            <a:schemeClr val="accent1"/>
-          </a:fillRef>
-          <a:effectRef idx="2">
-            <a:schemeClr val="accent1"/>
-          </a:effectRef>
-          <a:fontRef idx="minor">
-            <a:schemeClr val="lt1"/>
-          </a:fontRef>
-        </p:style>
-        <p:txBody>
-          <a:bodyPr rtlCol="0" anchor="ctr" lIns="0" rIns="0" tIns="0" bIns="0"/>
-          <a:lstStyle/>
-          <a:p>
-            <a:pPr algn="ctr"/>
-            <a:r>
-              <a:rPr sz="1300" b="1">
-                <a:solidFill>
-                  <a:srgbClr val="FFFFFF"/>
-                </a:solidFill>
-              </a:rPr>
-              <a:t>仲間</a:t>
-            </a:r>
-          </a:p>
-        </p:txBody>
-      </p:sp>
-      <p:sp>
-        <p:nvSpPr>
-          <p:cNvPr id="20" name="TextBox 19"/>
+      <p:pic>
+        <p:nvPicPr>
+          <p:cNvPr id="17" name="Picture 16" descr="image.png"/>
+          <p:cNvPicPr>
+            <a:picLocks noChangeAspect="1"/>
+          </p:cNvPicPr>
+          <p:nvPr/>
+        </p:nvPicPr>
+        <p:blipFill>
+          <a:blip r:embed="rId3"/>
+          <a:stretch>
+            <a:fillRect/>
+          </a:stretch>
+        </p:blipFill>
+        <p:spPr>
+          <a:xfrm>
+            <a:off x="6080759" y="4983480"/>
+            <a:ext cx="384048" cy="384048"/>
+          </a:xfrm>
+          <a:prstGeom prst="rect">
+            <a:avLst/>
+          </a:prstGeom>
+        </p:spPr>
+      </p:pic>
+      <p:sp>
+        <p:nvSpPr>
+          <p:cNvPr id="18" name="TextBox 17"/>
           <p:cNvSpPr txBox="1"/>
           <p:nvPr/>
         </p:nvSpPr>
         <p:spPr>
           <a:xfrm>
-            <a:off x="822959" y="4526279"/>
-            <a:ext cx="4434840" cy="502920"/>
+            <a:off x="6675120" y="4800600"/>
+            <a:ext cx="4739335" cy="1188720"/>
           </a:xfrm>
           <a:prstGeom prst="rect">
             <a:avLst/>
@@ -18723,180 +19637,25 @@
           </a:bodyPr>
           <a:lstStyle/>
           <a:p>
-            <a:pPr algn="ctr"/>
+            <a:pPr algn="l"/>
+            <a:r>
+              <a:rPr sz="2000" b="1">
+                <a:solidFill>
+                  <a:srgbClr val="1F5A47"/>
+                </a:solidFill>
+              </a:rPr>
+              <a:t>「やってみて違う」も発見</a:t>
+            </a:r>
+          </a:p>
+          <a:p>
+            <a:pPr algn="l"/>
             <a:r>
               <a:rPr sz="1400" b="0">
                 <a:solidFill>
                   <a:srgbClr val="1E2B27"/>
                 </a:solidFill>
               </a:rPr>
-              <a:t>教師の計画・指示が中心。子供が合わせて動く</a:t>
-            </a:r>
-          </a:p>
-        </p:txBody>
-      </p:sp>
-      <p:sp>
-        <p:nvSpPr>
-          <p:cNvPr id="21" name="TextBox 20"/>
-          <p:cNvSpPr txBox="1"/>
-          <p:nvPr/>
-        </p:nvSpPr>
-        <p:spPr>
-          <a:xfrm>
-            <a:off x="6933895" y="4526279"/>
-            <a:ext cx="4434840" cy="502920"/>
-          </a:xfrm>
-          <a:prstGeom prst="rect">
-            <a:avLst/>
-          </a:prstGeom>
-          <a:noFill/>
-        </p:spPr>
-        <p:txBody>
-          <a:bodyPr wrap="square" lIns="0" rIns="0" tIns="0" bIns="0" anchor="ctr">
-            <a:spAutoFit/>
-          </a:bodyPr>
-          <a:lstStyle/>
-          <a:p>
-            <a:pPr algn="ctr"/>
-            <a:r>
-              <a:rPr sz="1400" b="1">
-                <a:solidFill>
-                  <a:srgbClr val="1E2B27"/>
-                </a:solidFill>
-              </a:rPr>
-              <a:t>子供の学びが中心。教師・教材・環境・仲間が支える</a:t>
-            </a:r>
-          </a:p>
-        </p:txBody>
-      </p:sp>
-      <p:sp>
-        <p:nvSpPr>
-          <p:cNvPr id="22" name="Right Arrow 21"/>
-          <p:cNvSpPr/>
-          <p:nvPr/>
-        </p:nvSpPr>
-        <p:spPr>
-          <a:xfrm>
-            <a:off x="5641848" y="2990088"/>
-            <a:ext cx="907999" cy="548640"/>
-          </a:xfrm>
-          <a:prstGeom prst="rightArrow">
-            <a:avLst/>
-          </a:prstGeom>
-          <a:solidFill>
-            <a:srgbClr val="D9702C"/>
-          </a:solidFill>
-          <a:ln>
-            <a:noFill/>
-          </a:ln>
-          <a:effectLst/>
-        </p:spPr>
-        <p:style>
-          <a:lnRef idx="1">
-            <a:schemeClr val="accent1"/>
-          </a:lnRef>
-          <a:fillRef idx="3">
-            <a:schemeClr val="accent1"/>
-          </a:fillRef>
-          <a:effectRef idx="2">
-            <a:schemeClr val="accent1"/>
-          </a:effectRef>
-          <a:fontRef idx="minor">
-            <a:schemeClr val="lt1"/>
-          </a:fontRef>
-        </p:style>
-        <p:txBody>
-          <a:bodyPr rtlCol="0" anchor="ctr"/>
-          <a:lstStyle/>
-          <a:p>
-            <a:pPr algn="ctr"/>
-          </a:p>
-        </p:txBody>
-      </p:sp>
-      <p:sp>
-        <p:nvSpPr>
-          <p:cNvPr id="23" name="Rounded Rectangle 22"/>
-          <p:cNvSpPr/>
-          <p:nvPr/>
-        </p:nvSpPr>
-        <p:spPr>
-          <a:xfrm>
-            <a:off x="548640" y="5303520"/>
-            <a:ext cx="11094415" cy="777240"/>
-          </a:xfrm>
-          <a:prstGeom prst="roundRect">
-            <a:avLst>
-              <a:gd name="adj" fmla="val 6000"/>
-            </a:avLst>
-          </a:prstGeom>
-          <a:solidFill>
-            <a:srgbClr val="1F5A47"/>
-          </a:solidFill>
-          <a:ln>
-            <a:noFill/>
-          </a:ln>
-          <a:effectLst/>
-        </p:spPr>
-        <p:style>
-          <a:lnRef idx="1">
-            <a:schemeClr val="accent1"/>
-          </a:lnRef>
-          <a:fillRef idx="3">
-            <a:schemeClr val="accent1"/>
-          </a:fillRef>
-          <a:effectRef idx="2">
-            <a:schemeClr val="accent1"/>
-          </a:effectRef>
-          <a:fontRef idx="minor">
-            <a:schemeClr val="lt1"/>
-          </a:fontRef>
-        </p:style>
-        <p:txBody>
-          <a:bodyPr rtlCol="0" anchor="ctr"/>
-          <a:lstStyle/>
-          <a:p>
-            <a:pPr algn="ctr"/>
-          </a:p>
-        </p:txBody>
-      </p:sp>
-      <p:sp>
-        <p:nvSpPr>
-          <p:cNvPr id="24" name="TextBox 23"/>
-          <p:cNvSpPr txBox="1"/>
-          <p:nvPr/>
-        </p:nvSpPr>
-        <p:spPr>
-          <a:xfrm>
-            <a:off x="868680" y="5303520"/>
-            <a:ext cx="10454335" cy="777240"/>
-          </a:xfrm>
-          <a:prstGeom prst="rect">
-            <a:avLst/>
-          </a:prstGeom>
-          <a:noFill/>
-        </p:spPr>
-        <p:txBody>
-          <a:bodyPr wrap="square" lIns="0" rIns="0" tIns="0" bIns="0" anchor="ctr">
-            <a:spAutoFit/>
-          </a:bodyPr>
-          <a:lstStyle/>
-          <a:p>
-            <a:pPr algn="l"/>
-            <a:r>
-              <a:rPr sz="1700" b="1">
-                <a:solidFill>
-                  <a:srgbClr val="FBEADB"/>
-                </a:solidFill>
-              </a:rPr>
-              <a:t>転換するのは「授業の形」ではなく「見方」　</a:t>
-            </a:r>
-            <a:r>
-              <a:rPr sz="1500" b="0">
-                <a:solidFill>
-                  <a:srgbClr val="FFFFFF"/>
-                </a:solidFill>
-              </a:rPr>
-              <a:t>約８割の一斉授業の中でも、子供の学びを中心に据える</a:t>
+              <a:t>合わないと分かることも「好き」「得意」の発見</a:t>
             </a:r>
           </a:p>
         </p:txBody>
@@ -20431,7 +21190,7 @@
                   <a:srgbClr val="FFFFFF"/>
                 </a:solidFill>
               </a:rPr>
-              <a:t>天童中部小学校の取組から、教育観・指導観のコペルニクス的転換を考え、次期学習指導要領の方向性を指導主事間で共有する。</a:t>
+              <a:t>天童中部小学校の取組から、子供の学びを中心に据える授業の見方を考え、次期学習指導要領の方向性を指導主事間で共有する。</a:t>
             </a:r>
           </a:p>
         </p:txBody>

--- a/天童中部小学校視察/081019_天童中部小学校_指導主事研修スライド_クイズ版.pptx
+++ b/天童中部小学校視察/081019_天童中部小学校_指導主事研修スライド_クイズ版.pptx
@@ -1149,7 +1149,17 @@
           </a:p>
           <a:p>
             <a:r>
-              <a:t>ご質問やご意見をお願いします。質問がなければ、右の３つの問いのどれかについて、ご意見を伺えればと思います。</a:t>
+              <a:t>ご質問やご意見をお願いします。</a:t>
+            </a:r>
+          </a:p>
+          <a:p>
+            <a:r>
+              <a:t>最後に、次の学校訪問に持ち帰っていただきたい問いを二つ挙げます。一つは「この授業の中心にあるのは、何か」。教師の計画や指示か、それとも子供の学びか。もう一つは「普段の授業で、どんな学び方が育っているか」。子供に任せる学びを支える土台は、約８割の普段の授業です。</a:t>
+            </a:r>
+          </a:p>
+          <a:p>
+            <a:r>
+              <a:t>答えは私たちが持っているのではなく、学校の先生方と一緒に探していくものだと思います。ありがとうございました。</a:t>
             </a:r>
           </a:p>
           <a:p/>
@@ -9471,6 +9481,696 @@
 </file>
 
 <file path=ppt/slides/slide16.xml><?xml version="1.0" encoding="utf-8"?>
+<p:sld xmlns:a="http://schemas.openxmlformats.org/drawingml/2006/main" xmlns:p="http://schemas.openxmlformats.org/presentationml/2006/main" xmlns:r="http://schemas.openxmlformats.org/officeDocument/2006/relationships">
+  <p:cSld>
+    <p:spTree>
+      <p:nvGrpSpPr>
+        <p:cNvPr id="1" name=""/>
+        <p:cNvGrpSpPr/>
+        <p:nvPr/>
+      </p:nvGrpSpPr>
+      <p:grpSpPr/>
+      <p:sp>
+        <p:nvSpPr>
+          <p:cNvPr id="2" name="Text Placeholder 1"/>
+          <p:cNvSpPr>
+            <a:spLocks noGrp="1"/>
+          </p:cNvSpPr>
+          <p:nvPr>
+            <p:ph type="body" idx="100"/>
+          </p:nvPr>
+        </p:nvSpPr>
+        <p:spPr/>
+        <p:txBody>
+          <a:bodyPr/>
+          <a:lstStyle/>
+          <a:p>
+            <a:r>
+              <a:t>02　講演・鼎談から（上智大学 奈須正裕 氏）</a:t>
+            </a:r>
+          </a:p>
+        </p:txBody>
+      </p:sp>
+      <p:sp>
+        <p:nvSpPr>
+          <p:cNvPr id="3" name="Title 2"/>
+          <p:cNvSpPr>
+            <a:spLocks noGrp="1"/>
+          </p:cNvSpPr>
+          <p:nvPr>
+            <p:ph type="title" idx="101"/>
+          </p:nvPr>
+        </p:nvSpPr>
+        <p:spPr/>
+        <p:txBody>
+          <a:bodyPr/>
+          <a:lstStyle/>
+          <a:p>
+            <a:r>
+              <a:t>講義・協議会で語られた本音</a:t>
+            </a:r>
+          </a:p>
+        </p:txBody>
+      </p:sp>
+      <p:sp>
+        <p:nvSpPr>
+          <p:cNvPr id="4" name="Rounded Rectangle 3"/>
+          <p:cNvSpPr/>
+          <p:nvPr/>
+        </p:nvSpPr>
+        <p:spPr>
+          <a:xfrm>
+            <a:off x="548640" y="1508760"/>
+            <a:ext cx="4937760" cy="4572000"/>
+          </a:xfrm>
+          <a:prstGeom prst="roundRect">
+            <a:avLst>
+              <a:gd name="adj" fmla="val 6000"/>
+            </a:avLst>
+          </a:prstGeom>
+          <a:solidFill>
+            <a:srgbClr val="1F5A47"/>
+          </a:solidFill>
+          <a:ln>
+            <a:noFill/>
+          </a:ln>
+          <a:effectLst/>
+        </p:spPr>
+        <p:style>
+          <a:lnRef idx="1">
+            <a:schemeClr val="accent1"/>
+          </a:lnRef>
+          <a:fillRef idx="3">
+            <a:schemeClr val="accent1"/>
+          </a:fillRef>
+          <a:effectRef idx="2">
+            <a:schemeClr val="accent1"/>
+          </a:effectRef>
+          <a:fontRef idx="minor">
+            <a:schemeClr val="lt1"/>
+          </a:fontRef>
+        </p:style>
+        <p:txBody>
+          <a:bodyPr rtlCol="0" anchor="ctr"/>
+          <a:lstStyle/>
+          <a:p>
+            <a:pPr algn="ctr"/>
+          </a:p>
+        </p:txBody>
+      </p:sp>
+      <p:pic>
+        <p:nvPicPr>
+          <p:cNvPr id="5" name="Picture 4" descr="quote_peach.png"/>
+          <p:cNvPicPr>
+            <a:picLocks noChangeAspect="1"/>
+          </p:cNvPicPr>
+          <p:nvPr/>
+        </p:nvPicPr>
+        <p:blipFill>
+          <a:blip r:embed="rId2"/>
+          <a:stretch>
+            <a:fillRect/>
+          </a:stretch>
+        </p:blipFill>
+        <p:spPr>
+          <a:xfrm>
+            <a:off x="914400" y="1874519"/>
+            <a:ext cx="548640" cy="548640"/>
+          </a:xfrm>
+          <a:prstGeom prst="rect">
+            <a:avLst/>
+          </a:prstGeom>
+        </p:spPr>
+      </p:pic>
+      <p:sp>
+        <p:nvSpPr>
+          <p:cNvPr id="6" name="TextBox 5"/>
+          <p:cNvSpPr txBox="1"/>
+          <p:nvPr/>
+        </p:nvSpPr>
+        <p:spPr>
+          <a:xfrm>
+            <a:off x="914400" y="2560320"/>
+            <a:ext cx="4206240" cy="1463040"/>
+          </a:xfrm>
+          <a:prstGeom prst="rect">
+            <a:avLst/>
+          </a:prstGeom>
+          <a:noFill/>
+        </p:spPr>
+        <p:txBody>
+          <a:bodyPr wrap="square" lIns="0" rIns="0" tIns="0" bIns="0" anchor="t">
+            <a:spAutoFit/>
+          </a:bodyPr>
+          <a:lstStyle/>
+          <a:p>
+            <a:pPr algn="l"/>
+            <a:r>
+              <a:rPr sz="3200" b="1">
+                <a:solidFill>
+                  <a:srgbClr val="FFFFFF"/>
+                </a:solidFill>
+              </a:rPr>
+              <a:t>マイ探究に、</a:t>
+            </a:r>
+          </a:p>
+          <a:p>
+            <a:pPr algn="l"/>
+            <a:r>
+              <a:rPr sz="3200" b="1">
+                <a:solidFill>
+                  <a:srgbClr val="FFFFFF"/>
+                </a:solidFill>
+              </a:rPr>
+              <a:t>評価は必要ない</a:t>
+            </a:r>
+          </a:p>
+        </p:txBody>
+      </p:sp>
+      <p:sp>
+        <p:nvSpPr>
+          <p:cNvPr id="7" name="TextBox 6"/>
+          <p:cNvSpPr txBox="1"/>
+          <p:nvPr/>
+        </p:nvSpPr>
+        <p:spPr>
+          <a:xfrm>
+            <a:off x="914400" y="4114800"/>
+            <a:ext cx="4206240" cy="822960"/>
+          </a:xfrm>
+          <a:prstGeom prst="rect">
+            <a:avLst/>
+          </a:prstGeom>
+          <a:noFill/>
+        </p:spPr>
+        <p:txBody>
+          <a:bodyPr wrap="square" lIns="0" rIns="0" tIns="0" bIns="0" anchor="t">
+            <a:spAutoFit/>
+          </a:bodyPr>
+          <a:lstStyle/>
+          <a:p>
+            <a:pPr algn="l"/>
+            <a:r>
+              <a:rPr sz="1500" b="0">
+                <a:solidFill>
+                  <a:srgbClr val="D3E3D9"/>
+                </a:solidFill>
+              </a:rPr>
+              <a:t>「好き」「得意」を、学校の物差しで測らない</a:t>
+            </a:r>
+          </a:p>
+        </p:txBody>
+      </p:sp>
+      <p:sp>
+        <p:nvSpPr>
+          <p:cNvPr id="8" name="Rounded Rectangle 7"/>
+          <p:cNvSpPr/>
+          <p:nvPr/>
+        </p:nvSpPr>
+        <p:spPr>
+          <a:xfrm>
+            <a:off x="822959" y="4846320"/>
+            <a:ext cx="4389120" cy="960120"/>
+          </a:xfrm>
+          <a:prstGeom prst="roundRect">
+            <a:avLst>
+              <a:gd name="adj" fmla="val 6000"/>
+            </a:avLst>
+          </a:prstGeom>
+          <a:solidFill>
+            <a:srgbClr val="FFFFFF"/>
+          </a:solidFill>
+          <a:ln>
+            <a:noFill/>
+          </a:ln>
+          <a:effectLst/>
+        </p:spPr>
+        <p:style>
+          <a:lnRef idx="1">
+            <a:schemeClr val="accent1"/>
+          </a:lnRef>
+          <a:fillRef idx="3">
+            <a:schemeClr val="accent1"/>
+          </a:fillRef>
+          <a:effectRef idx="2">
+            <a:schemeClr val="accent1"/>
+          </a:effectRef>
+          <a:fontRef idx="minor">
+            <a:schemeClr val="lt1"/>
+          </a:fontRef>
+        </p:style>
+        <p:txBody>
+          <a:bodyPr rtlCol="0" anchor="ctr"/>
+          <a:lstStyle/>
+          <a:p>
+            <a:pPr algn="ctr"/>
+          </a:p>
+        </p:txBody>
+      </p:sp>
+      <p:sp>
+        <p:nvSpPr>
+          <p:cNvPr id="9" name="TextBox 8"/>
+          <p:cNvSpPr txBox="1"/>
+          <p:nvPr/>
+        </p:nvSpPr>
+        <p:spPr>
+          <a:xfrm>
+            <a:off x="1051560" y="4846320"/>
+            <a:ext cx="3931920" cy="960120"/>
+          </a:xfrm>
+          <a:prstGeom prst="rect">
+            <a:avLst/>
+          </a:prstGeom>
+          <a:noFill/>
+        </p:spPr>
+        <p:txBody>
+          <a:bodyPr wrap="square" lIns="0" rIns="0" tIns="0" bIns="0" anchor="ctr">
+            <a:spAutoFit/>
+          </a:bodyPr>
+          <a:lstStyle/>
+          <a:p>
+            <a:pPr algn="l"/>
+            <a:r>
+              <a:rPr sz="1300" b="1">
+                <a:solidFill>
+                  <a:srgbClr val="D9702C"/>
+                </a:solidFill>
+              </a:rPr>
+              <a:t>考えたい問い</a:t>
+            </a:r>
+          </a:p>
+          <a:p>
+            <a:pPr algn="l"/>
+            <a:r>
+              <a:rPr sz="1700" b="1">
+                <a:solidFill>
+                  <a:srgbClr val="1F5A47"/>
+                </a:solidFill>
+              </a:rPr>
+              <a:t>評価しないと不安になるのは、誰か</a:t>
+            </a:r>
+          </a:p>
+        </p:txBody>
+      </p:sp>
+      <p:sp>
+        <p:nvSpPr>
+          <p:cNvPr id="10" name="Rounded Rectangle 9"/>
+          <p:cNvSpPr/>
+          <p:nvPr/>
+        </p:nvSpPr>
+        <p:spPr>
+          <a:xfrm>
+            <a:off x="5806440" y="1508760"/>
+            <a:ext cx="5836615" cy="1371600"/>
+          </a:xfrm>
+          <a:prstGeom prst="roundRect">
+            <a:avLst>
+              <a:gd name="adj" fmla="val 6000"/>
+            </a:avLst>
+          </a:prstGeom>
+          <a:solidFill>
+            <a:srgbClr val="EEF4F0"/>
+          </a:solidFill>
+          <a:ln>
+            <a:noFill/>
+          </a:ln>
+          <a:effectLst/>
+        </p:spPr>
+        <p:style>
+          <a:lnRef idx="1">
+            <a:schemeClr val="accent1"/>
+          </a:lnRef>
+          <a:fillRef idx="3">
+            <a:schemeClr val="accent1"/>
+          </a:fillRef>
+          <a:effectRef idx="2">
+            <a:schemeClr val="accent1"/>
+          </a:effectRef>
+          <a:fontRef idx="minor">
+            <a:schemeClr val="lt1"/>
+          </a:fontRef>
+        </p:style>
+        <p:txBody>
+          <a:bodyPr rtlCol="0" anchor="ctr"/>
+          <a:lstStyle/>
+          <a:p>
+            <a:pPr algn="ctr"/>
+          </a:p>
+        </p:txBody>
+      </p:sp>
+      <p:pic>
+        <p:nvPicPr>
+          <p:cNvPr id="11" name="Picture 10" descr="image.png"/>
+          <p:cNvPicPr>
+            <a:picLocks noChangeAspect="1"/>
+          </p:cNvPicPr>
+          <p:nvPr/>
+        </p:nvPicPr>
+        <p:blipFill>
+          <a:blip r:embed="rId3"/>
+          <a:stretch>
+            <a:fillRect/>
+          </a:stretch>
+        </p:blipFill>
+        <p:spPr>
+          <a:xfrm>
+            <a:off x="6080759" y="1783080"/>
+            <a:ext cx="384048" cy="384048"/>
+          </a:xfrm>
+          <a:prstGeom prst="rect">
+            <a:avLst/>
+          </a:prstGeom>
+        </p:spPr>
+      </p:pic>
+      <p:sp>
+        <p:nvSpPr>
+          <p:cNvPr id="12" name="TextBox 11"/>
+          <p:cNvSpPr txBox="1"/>
+          <p:nvPr/>
+        </p:nvSpPr>
+        <p:spPr>
+          <a:xfrm>
+            <a:off x="6675120" y="1600200"/>
+            <a:ext cx="4739335" cy="1188720"/>
+          </a:xfrm>
+          <a:prstGeom prst="rect">
+            <a:avLst/>
+          </a:prstGeom>
+          <a:noFill/>
+        </p:spPr>
+        <p:txBody>
+          <a:bodyPr wrap="square" lIns="0" rIns="0" tIns="0" bIns="0" anchor="ctr">
+            <a:spAutoFit/>
+          </a:bodyPr>
+          <a:lstStyle/>
+          <a:p>
+            <a:pPr algn="l"/>
+            <a:r>
+              <a:rPr sz="2000" b="1">
+                <a:solidFill>
+                  <a:srgbClr val="1F5A47"/>
+                </a:solidFill>
+              </a:rPr>
+              <a:t>学校的な価値で過剰に制限しない</a:t>
+            </a:r>
+          </a:p>
+          <a:p>
+            <a:pPr algn="l"/>
+            <a:r>
+              <a:rPr sz="1400" b="0">
+                <a:solidFill>
+                  <a:srgbClr val="1E2B27"/>
+                </a:solidFill>
+              </a:rPr>
+              <a:t>子供に忖度させない</a:t>
+            </a:r>
+          </a:p>
+        </p:txBody>
+      </p:sp>
+      <p:sp>
+        <p:nvSpPr>
+          <p:cNvPr id="13" name="Rounded Rectangle 12"/>
+          <p:cNvSpPr/>
+          <p:nvPr/>
+        </p:nvSpPr>
+        <p:spPr>
+          <a:xfrm>
+            <a:off x="5806440" y="3108960"/>
+            <a:ext cx="5836615" cy="1371600"/>
+          </a:xfrm>
+          <a:prstGeom prst="roundRect">
+            <a:avLst>
+              <a:gd name="adj" fmla="val 6000"/>
+            </a:avLst>
+          </a:prstGeom>
+          <a:solidFill>
+            <a:srgbClr val="EEF4F0"/>
+          </a:solidFill>
+          <a:ln>
+            <a:noFill/>
+          </a:ln>
+          <a:effectLst/>
+        </p:spPr>
+        <p:style>
+          <a:lnRef idx="1">
+            <a:schemeClr val="accent1"/>
+          </a:lnRef>
+          <a:fillRef idx="3">
+            <a:schemeClr val="accent1"/>
+          </a:fillRef>
+          <a:effectRef idx="2">
+            <a:schemeClr val="accent1"/>
+          </a:effectRef>
+          <a:fontRef idx="minor">
+            <a:schemeClr val="lt1"/>
+          </a:fontRef>
+        </p:style>
+        <p:txBody>
+          <a:bodyPr rtlCol="0" anchor="ctr"/>
+          <a:lstStyle/>
+          <a:p>
+            <a:pPr algn="ctr"/>
+          </a:p>
+        </p:txBody>
+      </p:sp>
+      <p:pic>
+        <p:nvPicPr>
+          <p:cNvPr id="14" name="Picture 13" descr="image.png"/>
+          <p:cNvPicPr>
+            <a:picLocks noChangeAspect="1"/>
+          </p:cNvPicPr>
+          <p:nvPr/>
+        </p:nvPicPr>
+        <p:blipFill>
+          <a:blip r:embed="rId3"/>
+          <a:stretch>
+            <a:fillRect/>
+          </a:stretch>
+        </p:blipFill>
+        <p:spPr>
+          <a:xfrm>
+            <a:off x="6080759" y="3383279"/>
+            <a:ext cx="384048" cy="384048"/>
+          </a:xfrm>
+          <a:prstGeom prst="rect">
+            <a:avLst/>
+          </a:prstGeom>
+        </p:spPr>
+      </p:pic>
+      <p:sp>
+        <p:nvSpPr>
+          <p:cNvPr id="15" name="TextBox 14"/>
+          <p:cNvSpPr txBox="1"/>
+          <p:nvPr/>
+        </p:nvSpPr>
+        <p:spPr>
+          <a:xfrm>
+            <a:off x="6675120" y="3200400"/>
+            <a:ext cx="4739335" cy="1188720"/>
+          </a:xfrm>
+          <a:prstGeom prst="rect">
+            <a:avLst/>
+          </a:prstGeom>
+          <a:noFill/>
+        </p:spPr>
+        <p:txBody>
+          <a:bodyPr wrap="square" lIns="0" rIns="0" tIns="0" bIns="0" anchor="ctr">
+            <a:spAutoFit/>
+          </a:bodyPr>
+          <a:lstStyle/>
+          <a:p>
+            <a:pPr algn="l"/>
+            <a:r>
+              <a:rPr sz="2000" b="1">
+                <a:solidFill>
+                  <a:srgbClr val="1F5A47"/>
+                </a:solidFill>
+              </a:rPr>
+              <a:t>発表会は必須ではない</a:t>
+            </a:r>
+          </a:p>
+          <a:p>
+            <a:pPr algn="l"/>
+            <a:r>
+              <a:rPr sz="1400" b="0">
+                <a:solidFill>
+                  <a:srgbClr val="1E2B27"/>
+                </a:solidFill>
+              </a:rPr>
+              <a:t>発表するかどうかを子供が選んでもいい</a:t>
+            </a:r>
+          </a:p>
+        </p:txBody>
+      </p:sp>
+      <p:sp>
+        <p:nvSpPr>
+          <p:cNvPr id="16" name="Rounded Rectangle 15"/>
+          <p:cNvSpPr/>
+          <p:nvPr/>
+        </p:nvSpPr>
+        <p:spPr>
+          <a:xfrm>
+            <a:off x="5806440" y="4709160"/>
+            <a:ext cx="5836615" cy="1371600"/>
+          </a:xfrm>
+          <a:prstGeom prst="roundRect">
+            <a:avLst>
+              <a:gd name="adj" fmla="val 6000"/>
+            </a:avLst>
+          </a:prstGeom>
+          <a:solidFill>
+            <a:srgbClr val="EEF4F0"/>
+          </a:solidFill>
+          <a:ln>
+            <a:noFill/>
+          </a:ln>
+          <a:effectLst/>
+        </p:spPr>
+        <p:style>
+          <a:lnRef idx="1">
+            <a:schemeClr val="accent1"/>
+          </a:lnRef>
+          <a:fillRef idx="3">
+            <a:schemeClr val="accent1"/>
+          </a:fillRef>
+          <a:effectRef idx="2">
+            <a:schemeClr val="accent1"/>
+          </a:effectRef>
+          <a:fontRef idx="minor">
+            <a:schemeClr val="lt1"/>
+          </a:fontRef>
+        </p:style>
+        <p:txBody>
+          <a:bodyPr rtlCol="0" anchor="ctr"/>
+          <a:lstStyle/>
+          <a:p>
+            <a:pPr algn="ctr"/>
+          </a:p>
+        </p:txBody>
+      </p:sp>
+      <p:pic>
+        <p:nvPicPr>
+          <p:cNvPr id="17" name="Picture 16" descr="image.png"/>
+          <p:cNvPicPr>
+            <a:picLocks noChangeAspect="1"/>
+          </p:cNvPicPr>
+          <p:nvPr/>
+        </p:nvPicPr>
+        <p:blipFill>
+          <a:blip r:embed="rId3"/>
+          <a:stretch>
+            <a:fillRect/>
+          </a:stretch>
+        </p:blipFill>
+        <p:spPr>
+          <a:xfrm>
+            <a:off x="6080759" y="4983480"/>
+            <a:ext cx="384048" cy="384048"/>
+          </a:xfrm>
+          <a:prstGeom prst="rect">
+            <a:avLst/>
+          </a:prstGeom>
+        </p:spPr>
+      </p:pic>
+      <p:sp>
+        <p:nvSpPr>
+          <p:cNvPr id="18" name="TextBox 17"/>
+          <p:cNvSpPr txBox="1"/>
+          <p:nvPr/>
+        </p:nvSpPr>
+        <p:spPr>
+          <a:xfrm>
+            <a:off x="6675120" y="4800600"/>
+            <a:ext cx="4739335" cy="1188720"/>
+          </a:xfrm>
+          <a:prstGeom prst="rect">
+            <a:avLst/>
+          </a:prstGeom>
+          <a:noFill/>
+        </p:spPr>
+        <p:txBody>
+          <a:bodyPr wrap="square" lIns="0" rIns="0" tIns="0" bIns="0" anchor="ctr">
+            <a:spAutoFit/>
+          </a:bodyPr>
+          <a:lstStyle/>
+          <a:p>
+            <a:pPr algn="l"/>
+            <a:r>
+              <a:rPr sz="2000" b="1">
+                <a:solidFill>
+                  <a:srgbClr val="1F5A47"/>
+                </a:solidFill>
+              </a:rPr>
+              <a:t>「やってみて違う」も発見</a:t>
+            </a:r>
+          </a:p>
+          <a:p>
+            <a:pPr algn="l"/>
+            <a:r>
+              <a:rPr sz="1400" b="0">
+                <a:solidFill>
+                  <a:srgbClr val="1E2B27"/>
+                </a:solidFill>
+              </a:rPr>
+              <a:t>合わないと分かることも「好き」「得意」の発見</a:t>
+            </a:r>
+          </a:p>
+        </p:txBody>
+      </p:sp>
+      <p:sp>
+        <p:nvSpPr>
+          <p:cNvPr id="25" name="Slide Number Placeholder 0"/>
+          <p:cNvSpPr>
+            <a:spLocks noGrp="1"/>
+          </p:cNvSpPr>
+          <p:nvPr>
+            <p:ph type="sldNum" sz="quarter" idx="4294967295"/>
+          </p:nvPr>
+        </p:nvSpPr>
+        <p:spPr>
+          <a:xfrm>
+            <a:off x="11185855" y="6419088"/>
+            <a:ext cx="457200" cy="274320"/>
+          </a:xfrm>
+          <a:prstGeom prst="rect">
+            <a:avLst/>
+          </a:prstGeom>
+          <a:extLst>
+            <a:ext uri="{C572A759-6A51-4108-AA02-DFA0A04FC94B}">
+              <ma14:wrappingTextBoxFlag xmlns:ma14="http://schemas.microsoft.com/office/mac/drawingml/2011/main" xmlns="" val="0"/>
+            </a:ext>
+          </a:extLst>
+        </p:spPr>
+        <p:txBody>
+          <a:bodyPr/>
+          <a:lstStyle>
+            <a:lvl1pPr>
+              <a:defRPr sz="1000">
+                <a:solidFill>
+                  <a:schemeClr val="accent5"/>
+                </a:solidFill>
+              </a:defRPr>
+            </a:lvl1pPr>
+          </a:lstStyle>
+          <a:p>
+            <a:pPr algn="r"/>
+            <a:fld id="{F7021451-1387-4CA6-816F-3879F97B5CBC}" type="slidenum">
+              <a:rPr lang="en-US" b="0"/>
+              <a:t>2</a:t>
+            </a:fld>
+            <a:endParaRPr lang="en-US"/>
+          </a:p>
+        </p:txBody>
+      </p:sp>
+    </p:spTree>
+  </p:cSld>
+  <p:clrMapOvr>
+    <a:masterClrMapping/>
+  </p:clrMapOvr>
+</p:sld>
+</file>
+
+<file path=ppt/slides/slide17.xml><?xml version="1.0" encoding="utf-8"?>
 <p:sld xmlns:a="http://schemas.openxmlformats.org/drawingml/2006/main" xmlns:r="http://schemas.openxmlformats.org/officeDocument/2006/relationships" xmlns:p="http://schemas.openxmlformats.org/presentationml/2006/main">
   <p:cSld name="Slide 11">
     <p:spTree>
@@ -10325,7 +11025,7 @@
 </p:sld>
 </file>
 
-<file path=ppt/slides/slide17.xml><?xml version="1.0" encoding="utf-8"?>
+<file path=ppt/slides/slide18.xml><?xml version="1.0" encoding="utf-8"?>
 <p:sld xmlns:a="http://schemas.openxmlformats.org/drawingml/2006/main" xmlns:r="http://schemas.openxmlformats.org/officeDocument/2006/relationships" xmlns:p="http://schemas.openxmlformats.org/presentationml/2006/main">
   <p:cSld name="Slide 12">
     <p:spTree>
@@ -11330,470 +12030,6 @@
               </a:rPr>
               <a:t>出典：中央教育審議会 初等中等教育分科会 教育課程部会「次期学習指導要領等に向けた審議まとめ」（令和８年10月５日）</a:t>
             </a:r>
-          </a:p>
-        </p:txBody>
-      </p:sp>
-    </p:spTree>
-  </p:cSld>
-  <p:clrMapOvr>
-    <a:masterClrMapping/>
-  </p:clrMapOvr>
-</p:sld>
-</file>
-
-<file path=ppt/slides/slide18.xml><?xml version="1.0" encoding="utf-8"?>
-<p:sld xmlns:a="http://schemas.openxmlformats.org/drawingml/2006/main" xmlns:p="http://schemas.openxmlformats.org/presentationml/2006/main" xmlns:r="http://schemas.openxmlformats.org/officeDocument/2006/relationships">
-  <p:cSld>
-    <p:spTree>
-      <p:nvGrpSpPr>
-        <p:cNvPr id="1" name=""/>
-        <p:cNvGrpSpPr/>
-        <p:nvPr/>
-      </p:nvGrpSpPr>
-      <p:grpSpPr/>
-      <p:sp>
-        <p:nvSpPr>
-          <p:cNvPr id="2" name="Text Placeholder 1"/>
-          <p:cNvSpPr>
-            <a:spLocks noGrp="1"/>
-          </p:cNvSpPr>
-          <p:nvPr>
-            <p:ph type="body" idx="100"/>
-          </p:nvPr>
-        </p:nvSpPr>
-        <p:spPr/>
-        <p:txBody>
-          <a:bodyPr/>
-          <a:lstStyle/>
-          <a:p>
-            <a:r>
-              <a:t>03　次期学習指導要領の方向性</a:t>
-            </a:r>
-          </a:p>
-        </p:txBody>
-      </p:sp>
-      <p:sp>
-        <p:nvSpPr>
-          <p:cNvPr id="3" name="Title 2"/>
-          <p:cNvSpPr>
-            <a:spLocks noGrp="1"/>
-          </p:cNvSpPr>
-          <p:nvPr>
-            <p:ph type="title" idx="101"/>
-          </p:nvPr>
-        </p:nvSpPr>
-        <p:spPr/>
-        <p:txBody>
-          <a:bodyPr/>
-          <a:lstStyle/>
-          <a:p>
-            <a:r>
-              <a:t>根拠資料 ― 文部科学省「審議まとめ」</a:t>
-            </a:r>
-          </a:p>
-        </p:txBody>
-      </p:sp>
-      <p:sp>
-        <p:nvSpPr>
-          <p:cNvPr id="4" name="Rounded Rectangle 3"/>
-          <p:cNvSpPr/>
-          <p:nvPr/>
-        </p:nvSpPr>
-        <p:spPr>
-          <a:xfrm>
-            <a:off x="548640" y="1508760"/>
-            <a:ext cx="7680960" cy="2743200"/>
-          </a:xfrm>
-          <a:prstGeom prst="roundRect">
-            <a:avLst>
-              <a:gd name="adj" fmla="val 8000"/>
-            </a:avLst>
-          </a:prstGeom>
-          <a:solidFill>
-            <a:srgbClr val="1F5A47"/>
-          </a:solidFill>
-          <a:ln>
-            <a:noFill/>
-          </a:ln>
-          <a:effectLst/>
-        </p:spPr>
-        <p:style>
-          <a:lnRef idx="1">
-            <a:schemeClr val="accent1"/>
-          </a:lnRef>
-          <a:fillRef idx="3">
-            <a:schemeClr val="accent1"/>
-          </a:fillRef>
-          <a:effectRef idx="2">
-            <a:schemeClr val="accent1"/>
-          </a:effectRef>
-          <a:fontRef idx="minor">
-            <a:schemeClr val="lt1"/>
-          </a:fontRef>
-        </p:style>
-        <p:txBody>
-          <a:bodyPr rtlCol="0" anchor="ctr"/>
-          <a:lstStyle/>
-          <a:p>
-            <a:pPr algn="ctr"/>
-          </a:p>
-        </p:txBody>
-      </p:sp>
-      <p:sp>
-        <p:nvSpPr>
-          <p:cNvPr id="5" name="TextBox 4"/>
-          <p:cNvSpPr txBox="1"/>
-          <p:nvPr/>
-        </p:nvSpPr>
-        <p:spPr>
-          <a:xfrm>
-            <a:off x="914400" y="1645919"/>
-            <a:ext cx="6949440" cy="2468880"/>
-          </a:xfrm>
-          <a:prstGeom prst="rect">
-            <a:avLst/>
-          </a:prstGeom>
-          <a:noFill/>
-        </p:spPr>
-        <p:txBody>
-          <a:bodyPr wrap="square" lIns="0" rIns="0" tIns="0" bIns="0" anchor="ctr">
-            <a:spAutoFit/>
-          </a:bodyPr>
-          <a:lstStyle/>
-          <a:p>
-            <a:pPr algn="l"/>
-            <a:r>
-              <a:rPr sz="1500" b="0">
-                <a:solidFill>
-                  <a:srgbClr val="D3E3D9"/>
-                </a:solidFill>
-              </a:rPr>
-              <a:t>中央教育審議会 初等中等教育分科会 教育課程部会</a:t>
-            </a:r>
-          </a:p>
-          <a:p>
-            <a:pPr algn="l"/>
-            <a:r>
-              <a:rPr sz="2600" b="1">
-                <a:solidFill>
-                  <a:srgbClr val="FFFFFF"/>
-                </a:solidFill>
-              </a:rPr>
-              <a:t>次期学習指導要領等に向けた審議まとめ</a:t>
-            </a:r>
-          </a:p>
-          <a:p>
-            <a:pPr algn="l"/>
-            <a:r>
-              <a:rPr sz="1600" b="1">
-                <a:solidFill>
-                  <a:srgbClr val="FBEADB"/>
-                </a:solidFill>
-              </a:rPr>
-              <a:t>令和８年10月５日　公表</a:t>
-            </a:r>
-          </a:p>
-          <a:p>
-            <a:pPr algn="l"/>
-            <a:r>
-              <a:rPr sz="1400" b="0">
-                <a:solidFill>
-                  <a:srgbClr val="D3E3D9"/>
-                </a:solidFill>
-              </a:rPr>
-              <a:t>意見公募（パブリックコメント）：令和８年10月６日〜11月５日</a:t>
-            </a:r>
-          </a:p>
-        </p:txBody>
-      </p:sp>
-      <p:sp>
-        <p:nvSpPr>
-          <p:cNvPr id="6" name="Rounded Rectangle 5"/>
-          <p:cNvSpPr/>
-          <p:nvPr/>
-        </p:nvSpPr>
-        <p:spPr>
-          <a:xfrm>
-            <a:off x="8595360" y="1508760"/>
-            <a:ext cx="3044952" cy="2743200"/>
-          </a:xfrm>
-          <a:prstGeom prst="roundRect">
-            <a:avLst>
-              <a:gd name="adj" fmla="val 8000"/>
-            </a:avLst>
-          </a:prstGeom>
-          <a:solidFill>
-            <a:srgbClr val="EEF4F0"/>
-          </a:solidFill>
-          <a:ln>
-            <a:noFill/>
-          </a:ln>
-          <a:effectLst/>
-        </p:spPr>
-        <p:style>
-          <a:lnRef idx="1">
-            <a:schemeClr val="accent1"/>
-          </a:lnRef>
-          <a:fillRef idx="3">
-            <a:schemeClr val="accent1"/>
-          </a:fillRef>
-          <a:effectRef idx="2">
-            <a:schemeClr val="accent1"/>
-          </a:effectRef>
-          <a:fontRef idx="minor">
-            <a:schemeClr val="lt1"/>
-          </a:fontRef>
-        </p:style>
-        <p:txBody>
-          <a:bodyPr rtlCol="0" anchor="ctr"/>
-          <a:lstStyle/>
-          <a:p>
-            <a:pPr algn="ctr"/>
-          </a:p>
-        </p:txBody>
-      </p:sp>
-      <p:pic>
-        <p:nvPicPr>
-          <p:cNvPr id="7" name="Picture 6" descr="qr_matome.png"/>
-          <p:cNvPicPr>
-            <a:picLocks noChangeAspect="1"/>
-          </p:cNvPicPr>
-          <p:nvPr/>
-        </p:nvPicPr>
-        <p:blipFill>
-          <a:blip r:embed="rId2"/>
-          <a:stretch>
-            <a:fillRect/>
-          </a:stretch>
-        </p:blipFill>
-        <p:spPr>
-          <a:xfrm>
-            <a:off x="9111996" y="1645919"/>
-            <a:ext cx="2011680" cy="2011680"/>
-          </a:xfrm>
-          <a:prstGeom prst="rect">
-            <a:avLst/>
-          </a:prstGeom>
-        </p:spPr>
-      </p:pic>
-      <p:sp>
-        <p:nvSpPr>
-          <p:cNvPr id="8" name="TextBox 7"/>
-          <p:cNvSpPr txBox="1"/>
-          <p:nvPr/>
-        </p:nvSpPr>
-        <p:spPr>
-          <a:xfrm>
-            <a:off x="8595360" y="3703320"/>
-            <a:ext cx="3044952" cy="457200"/>
-          </a:xfrm>
-          <a:prstGeom prst="rect">
-            <a:avLst/>
-          </a:prstGeom>
-          <a:noFill/>
-        </p:spPr>
-        <p:txBody>
-          <a:bodyPr wrap="square" lIns="0" rIns="0" tIns="0" bIns="0" anchor="ctr">
-            <a:spAutoFit/>
-          </a:bodyPr>
-          <a:lstStyle/>
-          <a:p>
-            <a:pPr algn="ctr"/>
-            <a:r>
-              <a:rPr sz="1300" b="1">
-                <a:solidFill>
-                  <a:srgbClr val="1F5A47"/>
-                </a:solidFill>
-              </a:rPr>
-              <a:t>本文PDF（文部科学省）</a:t>
-            </a:r>
-          </a:p>
-        </p:txBody>
-      </p:sp>
-      <p:sp>
-        <p:nvSpPr>
-          <p:cNvPr id="9" name="TextBox 8"/>
-          <p:cNvSpPr txBox="1"/>
-          <p:nvPr/>
-        </p:nvSpPr>
-        <p:spPr>
-          <a:xfrm>
-            <a:off x="548640" y="4434840"/>
-            <a:ext cx="11094415" cy="365760"/>
-          </a:xfrm>
-          <a:prstGeom prst="rect">
-            <a:avLst/>
-          </a:prstGeom>
-          <a:noFill/>
-        </p:spPr>
-        <p:txBody>
-          <a:bodyPr wrap="square" lIns="0" rIns="0" tIns="0" bIns="0" anchor="ctr">
-            <a:spAutoFit/>
-          </a:bodyPr>
-          <a:lstStyle/>
-          <a:p>
-            <a:pPr algn="l"/>
-            <a:r>
-              <a:rPr sz="1300" b="1">
-                <a:solidFill>
-                  <a:srgbClr val="D9702C"/>
-                </a:solidFill>
-              </a:rPr>
-              <a:t>本文PDF　</a:t>
-            </a:r>
-            <a:r>
-              <a:rPr sz="1300" b="0">
-                <a:solidFill>
-                  <a:srgbClr val="1F5A47"/>
-                </a:solidFill>
-                <a:hlinkClick r:id="rId3"/>
-              </a:rPr>
-              <a:t>https://www.mext.go.jp/content/20261005-mxt_kyoiku01-000052367-1.pdf</a:t>
-            </a:r>
-          </a:p>
-        </p:txBody>
-      </p:sp>
-      <p:sp>
-        <p:nvSpPr>
-          <p:cNvPr id="10" name="Rounded Rectangle 9"/>
-          <p:cNvSpPr/>
-          <p:nvPr/>
-        </p:nvSpPr>
-        <p:spPr>
-          <a:xfrm>
-            <a:off x="548640" y="4937760"/>
-            <a:ext cx="11094415" cy="1051560"/>
-          </a:xfrm>
-          <a:prstGeom prst="roundRect">
-            <a:avLst>
-              <a:gd name="adj" fmla="val 8000"/>
-            </a:avLst>
-          </a:prstGeom>
-          <a:solidFill>
-            <a:srgbClr val="EEF4F0"/>
-          </a:solidFill>
-          <a:ln>
-            <a:noFill/>
-          </a:ln>
-          <a:effectLst/>
-        </p:spPr>
-        <p:style>
-          <a:lnRef idx="1">
-            <a:schemeClr val="accent1"/>
-          </a:lnRef>
-          <a:fillRef idx="3">
-            <a:schemeClr val="accent1"/>
-          </a:fillRef>
-          <a:effectRef idx="2">
-            <a:schemeClr val="accent1"/>
-          </a:effectRef>
-          <a:fontRef idx="minor">
-            <a:schemeClr val="lt1"/>
-          </a:fontRef>
-        </p:style>
-        <p:txBody>
-          <a:bodyPr rtlCol="0" anchor="ctr"/>
-          <a:lstStyle/>
-          <a:p>
-            <a:pPr algn="ctr"/>
-          </a:p>
-        </p:txBody>
-      </p:sp>
-      <p:sp>
-        <p:nvSpPr>
-          <p:cNvPr id="11" name="TextBox 10"/>
-          <p:cNvSpPr txBox="1"/>
-          <p:nvPr/>
-        </p:nvSpPr>
-        <p:spPr>
-          <a:xfrm>
-            <a:off x="822959" y="4937760"/>
-            <a:ext cx="10545775" cy="1051560"/>
-          </a:xfrm>
-          <a:prstGeom prst="rect">
-            <a:avLst/>
-          </a:prstGeom>
-          <a:noFill/>
-        </p:spPr>
-        <p:txBody>
-          <a:bodyPr wrap="square" lIns="0" rIns="0" tIns="0" bIns="0" anchor="ctr">
-            <a:spAutoFit/>
-          </a:bodyPr>
-          <a:lstStyle/>
-          <a:p>
-            <a:pPr algn="l"/>
-            <a:r>
-              <a:rPr sz="1400" b="1">
-                <a:solidFill>
-                  <a:srgbClr val="D9702C"/>
-                </a:solidFill>
-              </a:rPr>
-              <a:t>本研修で取り上げた内容　</a:t>
-            </a:r>
-            <a:r>
-              <a:rPr sz="1400" b="0">
-                <a:solidFill>
-                  <a:srgbClr val="1E2B27"/>
-                </a:solidFill>
-              </a:rPr>
-              <a:t>３つの方向性／目標・内容の構造化／調整授業時数制度／裁量的な時間／情報活用能力／学習評価の改善／「好き」「得意」を育む</a:t>
-            </a:r>
-          </a:p>
-          <a:p>
-            <a:pPr algn="l"/>
-            <a:r>
-              <a:rPr sz="1200" b="0">
-                <a:solidFill>
-                  <a:srgbClr val="5E6E68"/>
-                </a:solidFill>
-              </a:rPr>
-              <a:t>名称・詳細は答申・告示で確定する。学校に説明する際は、最新の公表資料で確認すること</a:t>
-            </a:r>
-          </a:p>
-        </p:txBody>
-      </p:sp>
-      <p:sp>
-        <p:nvSpPr>
-          <p:cNvPr id="25" name="Slide Number Placeholder 0"/>
-          <p:cNvSpPr>
-            <a:spLocks noGrp="1"/>
-          </p:cNvSpPr>
-          <p:nvPr>
-            <p:ph type="sldNum" sz="quarter" idx="4294967295"/>
-          </p:nvPr>
-        </p:nvSpPr>
-        <p:spPr>
-          <a:xfrm>
-            <a:off x="11185855" y="6419088"/>
-            <a:ext cx="457200" cy="274320"/>
-          </a:xfrm>
-          <a:prstGeom prst="rect">
-            <a:avLst/>
-          </a:prstGeom>
-          <a:extLst>
-            <a:ext uri="{C572A759-6A51-4108-AA02-DFA0A04FC94B}">
-              <ma14:wrappingTextBoxFlag xmlns:ma14="http://schemas.microsoft.com/office/mac/drawingml/2011/main" xmlns="" val="0"/>
-            </a:ext>
-          </a:extLst>
-        </p:spPr>
-        <p:txBody>
-          <a:bodyPr/>
-          <a:lstStyle>
-            <a:lvl1pPr>
-              <a:defRPr sz="1000">
-                <a:solidFill>
-                  <a:schemeClr val="accent5"/>
-                </a:solidFill>
-              </a:defRPr>
-            </a:lvl1pPr>
-          </a:lstStyle>
-          <a:p>
-            <a:pPr algn="r"/>
-            <a:fld id="{F7021451-1387-4CA6-816F-3879F97B5CBC}" type="slidenum">
-              <a:rPr lang="en-US" b="0"/>
-              <a:t>2</a:t>
-            </a:fld>
-            <a:endParaRPr lang="en-US"/>
           </a:p>
         </p:txBody>
       </p:sp>
@@ -11831,7 +12067,7 @@
           <a:lstStyle/>
           <a:p>
             <a:r>
-              <a:t>QUIZ 3｜指導主事同士で考えよう</a:t>
+              <a:t>03　次期学習指導要領の方向性</a:t>
             </a:r>
           </a:p>
         </p:txBody>
@@ -11852,21 +12088,67 @@
           <a:lstStyle/>
           <a:p>
             <a:r>
-              <a:t>審議まとめが示す「３つの方向性」に含まれないものは？</a:t>
-            </a:r>
-          </a:p>
-        </p:txBody>
-      </p:sp>
-      <p:sp>
-        <p:nvSpPr>
-          <p:cNvPr id="4" name="TextBox 3"/>
+              <a:t>根拠資料 ― 文部科学省「審議まとめ」</a:t>
+            </a:r>
+          </a:p>
+        </p:txBody>
+      </p:sp>
+      <p:sp>
+        <p:nvSpPr>
+          <p:cNvPr id="4" name="Rounded Rectangle 3"/>
+          <p:cNvSpPr/>
+          <p:nvPr/>
+        </p:nvSpPr>
+        <p:spPr>
+          <a:xfrm>
+            <a:off x="548640" y="1508760"/>
+            <a:ext cx="7680960" cy="2743200"/>
+          </a:xfrm>
+          <a:prstGeom prst="roundRect">
+            <a:avLst>
+              <a:gd name="adj" fmla="val 8000"/>
+            </a:avLst>
+          </a:prstGeom>
+          <a:solidFill>
+            <a:srgbClr val="1F5A47"/>
+          </a:solidFill>
+          <a:ln>
+            <a:noFill/>
+          </a:ln>
+          <a:effectLst/>
+        </p:spPr>
+        <p:style>
+          <a:lnRef idx="1">
+            <a:schemeClr val="accent1"/>
+          </a:lnRef>
+          <a:fillRef idx="3">
+            <a:schemeClr val="accent1"/>
+          </a:fillRef>
+          <a:effectRef idx="2">
+            <a:schemeClr val="accent1"/>
+          </a:effectRef>
+          <a:fontRef idx="minor">
+            <a:schemeClr val="lt1"/>
+          </a:fontRef>
+        </p:style>
+        <p:txBody>
+          <a:bodyPr rtlCol="0" anchor="ctr"/>
+          <a:lstStyle/>
+          <a:p>
+            <a:pPr algn="ctr"/>
+          </a:p>
+        </p:txBody>
+      </p:sp>
+      <p:sp>
+        <p:nvSpPr>
+          <p:cNvPr id="5" name="TextBox 4"/>
           <p:cNvSpPr txBox="1"/>
           <p:nvPr/>
         </p:nvSpPr>
         <p:spPr>
           <a:xfrm>
-            <a:off x="548640" y="1508760"/>
-            <a:ext cx="11094415" cy="411480"/>
+            <a:off x="914400" y="1645919"/>
+            <a:ext cx="6949440" cy="2468880"/>
           </a:xfrm>
           <a:prstGeom prst="rect">
             <a:avLst/>
@@ -11883,24 +12165,57 @@
             <a:r>
               <a:rPr sz="1500" b="0">
                 <a:solidFill>
-                  <a:srgbClr val="5E6E68"/>
-                </a:solidFill>
-              </a:rPr>
-              <a:t>中央教育審議会「次期学習指導要領等に向けた審議まとめ」（令和８年10月５日）</a:t>
-            </a:r>
-          </a:p>
-        </p:txBody>
-      </p:sp>
-      <p:sp>
-        <p:nvSpPr>
-          <p:cNvPr id="5" name="Rounded Rectangle 4"/>
+                  <a:srgbClr val="D3E3D9"/>
+                </a:solidFill>
+              </a:rPr>
+              <a:t>中央教育審議会 初等中等教育分科会 教育課程部会</a:t>
+            </a:r>
+          </a:p>
+          <a:p>
+            <a:pPr algn="l"/>
+            <a:r>
+              <a:rPr sz="2600" b="1">
+                <a:solidFill>
+                  <a:srgbClr val="FFFFFF"/>
+                </a:solidFill>
+              </a:rPr>
+              <a:t>次期学習指導要領等に向けた審議まとめ</a:t>
+            </a:r>
+          </a:p>
+          <a:p>
+            <a:pPr algn="l"/>
+            <a:r>
+              <a:rPr sz="1600" b="1">
+                <a:solidFill>
+                  <a:srgbClr val="FBEADB"/>
+                </a:solidFill>
+              </a:rPr>
+              <a:t>令和８年10月５日　公表</a:t>
+            </a:r>
+          </a:p>
+          <a:p>
+            <a:pPr algn="l"/>
+            <a:r>
+              <a:rPr sz="1400" b="0">
+                <a:solidFill>
+                  <a:srgbClr val="D3E3D9"/>
+                </a:solidFill>
+              </a:rPr>
+              <a:t>意見公募（パブリックコメント）：令和８年10月６日〜11月５日</a:t>
+            </a:r>
+          </a:p>
+        </p:txBody>
+      </p:sp>
+      <p:sp>
+        <p:nvSpPr>
+          <p:cNvPr id="6" name="Rounded Rectangle 5"/>
           <p:cNvSpPr/>
           <p:nvPr/>
         </p:nvSpPr>
         <p:spPr>
           <a:xfrm>
-            <a:off x="548640" y="2148840"/>
-            <a:ext cx="5410047" cy="960120"/>
+            <a:off x="8595360" y="1508760"/>
+            <a:ext cx="3044952" cy="2743200"/>
           </a:xfrm>
           <a:prstGeom prst="roundRect">
             <a:avLst>
@@ -11937,68 +12252,40 @@
           </a:p>
         </p:txBody>
       </p:sp>
-      <p:sp>
-        <p:nvSpPr>
-          <p:cNvPr id="6" name="Oval 5"/>
-          <p:cNvSpPr/>
-          <p:nvPr/>
-        </p:nvSpPr>
-        <p:spPr>
-          <a:xfrm>
-            <a:off x="777240" y="2331720"/>
-            <a:ext cx="594360" cy="594360"/>
-          </a:xfrm>
-          <a:prstGeom prst="ellipse">
-            <a:avLst/>
-          </a:prstGeom>
-          <a:solidFill>
-            <a:srgbClr val="D9702C"/>
-          </a:solidFill>
-          <a:ln>
-            <a:noFill/>
-          </a:ln>
-          <a:effectLst/>
-        </p:spPr>
-        <p:style>
-          <a:lnRef idx="1">
-            <a:schemeClr val="accent1"/>
-          </a:lnRef>
-          <a:fillRef idx="3">
-            <a:schemeClr val="accent1"/>
-          </a:fillRef>
-          <a:effectRef idx="2">
-            <a:schemeClr val="accent1"/>
-          </a:effectRef>
-          <a:fontRef idx="minor">
-            <a:schemeClr val="lt1"/>
-          </a:fontRef>
-        </p:style>
-        <p:txBody>
-          <a:bodyPr rtlCol="0" anchor="ctr" lIns="0" rIns="0" tIns="0" bIns="0"/>
-          <a:lstStyle/>
-          <a:p>
-            <a:pPr algn="ctr"/>
-            <a:r>
-              <a:rPr sz="2000" b="1">
-                <a:solidFill>
-                  <a:srgbClr val="FFFFFF"/>
-                </a:solidFill>
-              </a:rPr>
-              <a:t>A</a:t>
-            </a:r>
-          </a:p>
-        </p:txBody>
-      </p:sp>
-      <p:sp>
-        <p:nvSpPr>
-          <p:cNvPr id="7" name="TextBox 6"/>
+      <p:pic>
+        <p:nvPicPr>
+          <p:cNvPr id="7" name="Picture 6" descr="qr_matome.png"/>
+          <p:cNvPicPr>
+            <a:picLocks noChangeAspect="1"/>
+          </p:cNvPicPr>
+          <p:nvPr/>
+        </p:nvPicPr>
+        <p:blipFill>
+          <a:blip r:embed="rId2"/>
+          <a:stretch>
+            <a:fillRect/>
+          </a:stretch>
+        </p:blipFill>
+        <p:spPr>
+          <a:xfrm>
+            <a:off x="9111996" y="1645919"/>
+            <a:ext cx="2011680" cy="2011680"/>
+          </a:xfrm>
+          <a:prstGeom prst="rect">
+            <a:avLst/>
+          </a:prstGeom>
+        </p:spPr>
+      </p:pic>
+      <p:sp>
+        <p:nvSpPr>
+          <p:cNvPr id="8" name="TextBox 7"/>
           <p:cNvSpPr txBox="1"/>
           <p:nvPr/>
         </p:nvSpPr>
         <p:spPr>
           <a:xfrm>
-            <a:off x="1600200" y="2148840"/>
-            <a:ext cx="4175607" cy="960120"/>
+            <a:off x="8595360" y="3703320"/>
+            <a:ext cx="3044952" cy="457200"/>
           </a:xfrm>
           <a:prstGeom prst="rect">
             <a:avLst/>
@@ -12011,28 +12298,71 @@
           </a:bodyPr>
           <a:lstStyle/>
           <a:p>
+            <a:pPr algn="ctr"/>
+            <a:r>
+              <a:rPr sz="1300" b="1">
+                <a:solidFill>
+                  <a:srgbClr val="1F5A47"/>
+                </a:solidFill>
+              </a:rPr>
+              <a:t>本文PDF（文部科学省）</a:t>
+            </a:r>
+          </a:p>
+        </p:txBody>
+      </p:sp>
+      <p:sp>
+        <p:nvSpPr>
+          <p:cNvPr id="9" name="TextBox 8"/>
+          <p:cNvSpPr txBox="1"/>
+          <p:nvPr/>
+        </p:nvSpPr>
+        <p:spPr>
+          <a:xfrm>
+            <a:off x="548640" y="4434840"/>
+            <a:ext cx="11094415" cy="365760"/>
+          </a:xfrm>
+          <a:prstGeom prst="rect">
+            <a:avLst/>
+          </a:prstGeom>
+          <a:noFill/>
+        </p:spPr>
+        <p:txBody>
+          <a:bodyPr wrap="square" lIns="0" rIns="0" tIns="0" bIns="0" anchor="ctr">
+            <a:spAutoFit/>
+          </a:bodyPr>
+          <a:lstStyle/>
+          <a:p>
             <a:pPr algn="l"/>
             <a:r>
-              <a:rPr sz="1800" b="1">
+              <a:rPr sz="1300" b="1">
+                <a:solidFill>
+                  <a:srgbClr val="D9702C"/>
+                </a:solidFill>
+              </a:rPr>
+              <a:t>本文PDF　</a:t>
+            </a:r>
+            <a:r>
+              <a:rPr sz="1300" b="0">
                 <a:solidFill>
                   <a:srgbClr val="1F5A47"/>
                 </a:solidFill>
-              </a:rPr>
-              <a:t>「主体的・対話的で深い学び」の実装</a:t>
-            </a:r>
-          </a:p>
-        </p:txBody>
-      </p:sp>
-      <p:sp>
-        <p:nvSpPr>
-          <p:cNvPr id="8" name="Rounded Rectangle 7"/>
+                <a:hlinkClick r:id="rId3"/>
+              </a:rPr>
+              <a:t>https://www.mext.go.jp/content/20261005-mxt_kyoiku01-000052367-1.pdf</a:t>
+            </a:r>
+          </a:p>
+        </p:txBody>
+      </p:sp>
+      <p:sp>
+        <p:nvSpPr>
+          <p:cNvPr id="10" name="Rounded Rectangle 9"/>
           <p:cNvSpPr/>
           <p:nvPr/>
         </p:nvSpPr>
         <p:spPr>
           <a:xfrm>
-            <a:off x="6233007" y="2148840"/>
-            <a:ext cx="5410047" cy="960120"/>
+            <a:off x="548640" y="4937760"/>
+            <a:ext cx="11094415" cy="1051560"/>
           </a:xfrm>
           <a:prstGeom prst="roundRect">
             <a:avLst>
@@ -12071,66 +12401,14 @@
       </p:sp>
       <p:sp>
         <p:nvSpPr>
-          <p:cNvPr id="9" name="Oval 8"/>
-          <p:cNvSpPr/>
-          <p:nvPr/>
-        </p:nvSpPr>
-        <p:spPr>
-          <a:xfrm>
-            <a:off x="6461607" y="2331720"/>
-            <a:ext cx="594360" cy="594360"/>
-          </a:xfrm>
-          <a:prstGeom prst="ellipse">
-            <a:avLst/>
-          </a:prstGeom>
-          <a:solidFill>
-            <a:srgbClr val="D9702C"/>
-          </a:solidFill>
-          <a:ln>
-            <a:noFill/>
-          </a:ln>
-          <a:effectLst/>
-        </p:spPr>
-        <p:style>
-          <a:lnRef idx="1">
-            <a:schemeClr val="accent1"/>
-          </a:lnRef>
-          <a:fillRef idx="3">
-            <a:schemeClr val="accent1"/>
-          </a:fillRef>
-          <a:effectRef idx="2">
-            <a:schemeClr val="accent1"/>
-          </a:effectRef>
-          <a:fontRef idx="minor">
-            <a:schemeClr val="lt1"/>
-          </a:fontRef>
-        </p:style>
-        <p:txBody>
-          <a:bodyPr rtlCol="0" anchor="ctr" lIns="0" rIns="0" tIns="0" bIns="0"/>
-          <a:lstStyle/>
-          <a:p>
-            <a:pPr algn="ctr"/>
-            <a:r>
-              <a:rPr sz="2000" b="1">
-                <a:solidFill>
-                  <a:srgbClr val="FFFFFF"/>
-                </a:solidFill>
-              </a:rPr>
-              <a:t>B</a:t>
-            </a:r>
-          </a:p>
-        </p:txBody>
-      </p:sp>
-      <p:sp>
-        <p:nvSpPr>
-          <p:cNvPr id="10" name="TextBox 9"/>
+          <p:cNvPr id="11" name="TextBox 10"/>
           <p:cNvSpPr txBox="1"/>
           <p:nvPr/>
         </p:nvSpPr>
         <p:spPr>
           <a:xfrm>
-            <a:off x="7284567" y="2148840"/>
-            <a:ext cx="4175607" cy="960120"/>
+            <a:off x="822959" y="4937760"/>
+            <a:ext cx="10545775" cy="1051560"/>
           </a:xfrm>
           <a:prstGeom prst="rect">
             <a:avLst/>
@@ -12145,487 +12423,31 @@
           <a:p>
             <a:pPr algn="l"/>
             <a:r>
-              <a:rPr sz="1800" b="1">
-                <a:solidFill>
-                  <a:srgbClr val="1F5A47"/>
-                </a:solidFill>
-              </a:rPr>
-              <a:t>多様性の包摂</a:t>
-            </a:r>
-          </a:p>
-        </p:txBody>
-      </p:sp>
-      <p:sp>
-        <p:nvSpPr>
-          <p:cNvPr id="11" name="Rounded Rectangle 10"/>
-          <p:cNvSpPr/>
-          <p:nvPr/>
-        </p:nvSpPr>
-        <p:spPr>
-          <a:xfrm>
-            <a:off x="548640" y="3291840"/>
-            <a:ext cx="5410047" cy="960120"/>
-          </a:xfrm>
-          <a:prstGeom prst="roundRect">
-            <a:avLst>
-              <a:gd name="adj" fmla="val 8000"/>
-            </a:avLst>
-          </a:prstGeom>
-          <a:solidFill>
-            <a:srgbClr val="EEF4F0"/>
-          </a:solidFill>
-          <a:ln>
-            <a:noFill/>
-          </a:ln>
-          <a:effectLst/>
-        </p:spPr>
-        <p:style>
-          <a:lnRef idx="1">
-            <a:schemeClr val="accent1"/>
-          </a:lnRef>
-          <a:fillRef idx="3">
-            <a:schemeClr val="accent1"/>
-          </a:fillRef>
-          <a:effectRef idx="2">
-            <a:schemeClr val="accent1"/>
-          </a:effectRef>
-          <a:fontRef idx="minor">
-            <a:schemeClr val="lt1"/>
-          </a:fontRef>
-        </p:style>
-        <p:txBody>
-          <a:bodyPr rtlCol="0" anchor="ctr"/>
-          <a:lstStyle/>
-          <a:p>
-            <a:pPr algn="ctr"/>
-          </a:p>
-        </p:txBody>
-      </p:sp>
-      <p:sp>
-        <p:nvSpPr>
-          <p:cNvPr id="12" name="Oval 11"/>
-          <p:cNvSpPr/>
-          <p:nvPr/>
-        </p:nvSpPr>
-        <p:spPr>
-          <a:xfrm>
-            <a:off x="777240" y="3474720"/>
-            <a:ext cx="594360" cy="594360"/>
-          </a:xfrm>
-          <a:prstGeom prst="ellipse">
-            <a:avLst/>
-          </a:prstGeom>
-          <a:solidFill>
-            <a:srgbClr val="D9702C"/>
-          </a:solidFill>
-          <a:ln>
-            <a:noFill/>
-          </a:ln>
-          <a:effectLst/>
-        </p:spPr>
-        <p:style>
-          <a:lnRef idx="1">
-            <a:schemeClr val="accent1"/>
-          </a:lnRef>
-          <a:fillRef idx="3">
-            <a:schemeClr val="accent1"/>
-          </a:fillRef>
-          <a:effectRef idx="2">
-            <a:schemeClr val="accent1"/>
-          </a:effectRef>
-          <a:fontRef idx="minor">
-            <a:schemeClr val="lt1"/>
-          </a:fontRef>
-        </p:style>
-        <p:txBody>
-          <a:bodyPr rtlCol="0" anchor="ctr" lIns="0" rIns="0" tIns="0" bIns="0"/>
-          <a:lstStyle/>
-          <a:p>
-            <a:pPr algn="ctr"/>
-            <a:r>
-              <a:rPr sz="2000" b="1">
-                <a:solidFill>
-                  <a:srgbClr val="FFFFFF"/>
-                </a:solidFill>
-              </a:rPr>
-              <a:t>C</a:t>
-            </a:r>
-          </a:p>
-        </p:txBody>
-      </p:sp>
-      <p:sp>
-        <p:nvSpPr>
-          <p:cNvPr id="13" name="TextBox 12"/>
-          <p:cNvSpPr txBox="1"/>
-          <p:nvPr/>
-        </p:nvSpPr>
-        <p:spPr>
-          <a:xfrm>
-            <a:off x="1600200" y="3291840"/>
-            <a:ext cx="4175607" cy="960120"/>
-          </a:xfrm>
-          <a:prstGeom prst="rect">
-            <a:avLst/>
-          </a:prstGeom>
-          <a:noFill/>
-        </p:spPr>
-        <p:txBody>
-          <a:bodyPr wrap="square" lIns="0" rIns="0" tIns="0" bIns="0" anchor="ctr">
-            <a:spAutoFit/>
-          </a:bodyPr>
-          <a:lstStyle/>
+              <a:rPr sz="1400" b="1">
+                <a:solidFill>
+                  <a:srgbClr val="D9702C"/>
+                </a:solidFill>
+              </a:rPr>
+              <a:t>本研修で取り上げた内容　</a:t>
+            </a:r>
+            <a:r>
+              <a:rPr sz="1400" b="0">
+                <a:solidFill>
+                  <a:srgbClr val="1E2B27"/>
+                </a:solidFill>
+              </a:rPr>
+              <a:t>３つの方向性／目標・内容の構造化／調整授業時数制度／裁量的な時間／情報活用能力／学習評価の改善／「好き」「得意」を育む</a:t>
+            </a:r>
+          </a:p>
           <a:p>
             <a:pPr algn="l"/>
             <a:r>
-              <a:rPr sz="1800" b="1">
-                <a:solidFill>
-                  <a:srgbClr val="1F5A47"/>
-                </a:solidFill>
-              </a:rPr>
-              <a:t>授業時数の拡充</a:t>
-            </a:r>
-          </a:p>
-        </p:txBody>
-      </p:sp>
-      <p:sp>
-        <p:nvSpPr>
-          <p:cNvPr id="14" name="Rounded Rectangle 13"/>
-          <p:cNvSpPr/>
-          <p:nvPr/>
-        </p:nvSpPr>
-        <p:spPr>
-          <a:xfrm>
-            <a:off x="6233007" y="3291840"/>
-            <a:ext cx="5410047" cy="960120"/>
-          </a:xfrm>
-          <a:prstGeom prst="roundRect">
-            <a:avLst>
-              <a:gd name="adj" fmla="val 8000"/>
-            </a:avLst>
-          </a:prstGeom>
-          <a:solidFill>
-            <a:srgbClr val="EEF4F0"/>
-          </a:solidFill>
-          <a:ln>
-            <a:noFill/>
-          </a:ln>
-          <a:effectLst/>
-        </p:spPr>
-        <p:style>
-          <a:lnRef idx="1">
-            <a:schemeClr val="accent1"/>
-          </a:lnRef>
-          <a:fillRef idx="3">
-            <a:schemeClr val="accent1"/>
-          </a:fillRef>
-          <a:effectRef idx="2">
-            <a:schemeClr val="accent1"/>
-          </a:effectRef>
-          <a:fontRef idx="minor">
-            <a:schemeClr val="lt1"/>
-          </a:fontRef>
-        </p:style>
-        <p:txBody>
-          <a:bodyPr rtlCol="0" anchor="ctr"/>
-          <a:lstStyle/>
-          <a:p>
-            <a:pPr algn="ctr"/>
-          </a:p>
-        </p:txBody>
-      </p:sp>
-      <p:sp>
-        <p:nvSpPr>
-          <p:cNvPr id="15" name="Oval 14"/>
-          <p:cNvSpPr/>
-          <p:nvPr/>
-        </p:nvSpPr>
-        <p:spPr>
-          <a:xfrm>
-            <a:off x="6461607" y="3474720"/>
-            <a:ext cx="594360" cy="594360"/>
-          </a:xfrm>
-          <a:prstGeom prst="ellipse">
-            <a:avLst/>
-          </a:prstGeom>
-          <a:solidFill>
-            <a:srgbClr val="D9702C"/>
-          </a:solidFill>
-          <a:ln>
-            <a:noFill/>
-          </a:ln>
-          <a:effectLst/>
-        </p:spPr>
-        <p:style>
-          <a:lnRef idx="1">
-            <a:schemeClr val="accent1"/>
-          </a:lnRef>
-          <a:fillRef idx="3">
-            <a:schemeClr val="accent1"/>
-          </a:fillRef>
-          <a:effectRef idx="2">
-            <a:schemeClr val="accent1"/>
-          </a:effectRef>
-          <a:fontRef idx="minor">
-            <a:schemeClr val="lt1"/>
-          </a:fontRef>
-        </p:style>
-        <p:txBody>
-          <a:bodyPr rtlCol="0" anchor="ctr" lIns="0" rIns="0" tIns="0" bIns="0"/>
-          <a:lstStyle/>
-          <a:p>
-            <a:pPr algn="ctr"/>
-            <a:r>
-              <a:rPr sz="2000" b="1">
-                <a:solidFill>
-                  <a:srgbClr val="FFFFFF"/>
-                </a:solidFill>
-              </a:rPr>
-              <a:t>D</a:t>
-            </a:r>
-          </a:p>
-        </p:txBody>
-      </p:sp>
-      <p:sp>
-        <p:nvSpPr>
-          <p:cNvPr id="16" name="TextBox 15"/>
-          <p:cNvSpPr txBox="1"/>
-          <p:nvPr/>
-        </p:nvSpPr>
-        <p:spPr>
-          <a:xfrm>
-            <a:off x="7284567" y="3291840"/>
-            <a:ext cx="4175607" cy="960120"/>
-          </a:xfrm>
-          <a:prstGeom prst="rect">
-            <a:avLst/>
-          </a:prstGeom>
-          <a:noFill/>
-        </p:spPr>
-        <p:txBody>
-          <a:bodyPr wrap="square" lIns="0" rIns="0" tIns="0" bIns="0" anchor="ctr">
-            <a:spAutoFit/>
-          </a:bodyPr>
-          <a:lstStyle/>
-          <a:p>
-            <a:pPr algn="l"/>
-            <a:r>
-              <a:rPr sz="1800" b="1">
-                <a:solidFill>
-                  <a:srgbClr val="1F5A47"/>
-                </a:solidFill>
-              </a:rPr>
-              <a:t>実現可能性の確保</a:t>
-            </a:r>
-          </a:p>
-        </p:txBody>
-      </p:sp>
-      <p:sp>
-        <p:nvSpPr>
-          <p:cNvPr id="17" name="Rounded Rectangle 16"/>
-          <p:cNvSpPr/>
-          <p:nvPr/>
-        </p:nvSpPr>
-        <p:spPr>
-          <a:xfrm>
-            <a:off x="548640" y="4709160"/>
-            <a:ext cx="11094415" cy="1280160"/>
-          </a:xfrm>
-          <a:prstGeom prst="roundRect">
-            <a:avLst>
-              <a:gd name="adj" fmla="val 8000"/>
-            </a:avLst>
-          </a:prstGeom>
-          <a:solidFill>
-            <a:srgbClr val="1F5A47"/>
-          </a:solidFill>
-          <a:ln>
-            <a:noFill/>
-          </a:ln>
-          <a:effectLst/>
-        </p:spPr>
-        <p:style>
-          <a:lnRef idx="1">
-            <a:schemeClr val="accent1"/>
-          </a:lnRef>
-          <a:fillRef idx="3">
-            <a:schemeClr val="accent1"/>
-          </a:fillRef>
-          <a:effectRef idx="2">
-            <a:schemeClr val="accent1"/>
-          </a:effectRef>
-          <a:fontRef idx="minor">
-            <a:schemeClr val="lt1"/>
-          </a:fontRef>
-        </p:style>
-        <p:txBody>
-          <a:bodyPr rtlCol="0" anchor="ctr"/>
-          <a:lstStyle/>
-          <a:p>
-            <a:pPr algn="ctr"/>
-          </a:p>
-        </p:txBody>
-      </p:sp>
-      <p:sp>
-        <p:nvSpPr>
-          <p:cNvPr id="18" name="Oval 17"/>
-          <p:cNvSpPr/>
-          <p:nvPr/>
-        </p:nvSpPr>
-        <p:spPr>
-          <a:xfrm>
-            <a:off x="868680" y="4983480"/>
-            <a:ext cx="731520" cy="731520"/>
-          </a:xfrm>
-          <a:prstGeom prst="ellipse">
-            <a:avLst/>
-          </a:prstGeom>
-          <a:solidFill>
-            <a:srgbClr val="D9702C"/>
-          </a:solidFill>
-          <a:ln>
-            <a:noFill/>
-          </a:ln>
-          <a:effectLst/>
-        </p:spPr>
-        <p:style>
-          <a:lnRef idx="1">
-            <a:schemeClr val="accent1"/>
-          </a:lnRef>
-          <a:fillRef idx="3">
-            <a:schemeClr val="accent1"/>
-          </a:fillRef>
-          <a:effectRef idx="2">
-            <a:schemeClr val="accent1"/>
-          </a:effectRef>
-          <a:fontRef idx="minor">
-            <a:schemeClr val="lt1"/>
-          </a:fontRef>
-        </p:style>
-        <p:txBody>
-          <a:bodyPr rtlCol="0" anchor="ctr" lIns="0" rIns="0" tIns="0" bIns="0"/>
-          <a:lstStyle/>
-          <a:p>
-            <a:pPr algn="ctr"/>
-            <a:r>
-              <a:rPr sz="2200" b="1">
-                <a:solidFill>
-                  <a:srgbClr val="FFFFFF"/>
-                </a:solidFill>
-              </a:rPr>
-              <a:t>話</a:t>
-            </a:r>
-          </a:p>
-        </p:txBody>
-      </p:sp>
-      <p:sp>
-        <p:nvSpPr>
-          <p:cNvPr id="19" name="TextBox 18"/>
-          <p:cNvSpPr txBox="1"/>
-          <p:nvPr/>
-        </p:nvSpPr>
-        <p:spPr>
-          <a:xfrm>
-            <a:off x="1874519" y="4709160"/>
-            <a:ext cx="6400800" cy="1280160"/>
-          </a:xfrm>
-          <a:prstGeom prst="rect">
-            <a:avLst/>
-          </a:prstGeom>
-          <a:noFill/>
-        </p:spPr>
-        <p:txBody>
-          <a:bodyPr wrap="square" lIns="0" rIns="0" tIns="0" bIns="0" anchor="ctr">
-            <a:spAutoFit/>
-          </a:bodyPr>
-          <a:lstStyle/>
-          <a:p>
-            <a:pPr algn="l"/>
-            <a:r>
-              <a:rPr sz="2200" b="1">
-                <a:solidFill>
-                  <a:srgbClr val="FFFFFF"/>
-                </a:solidFill>
-              </a:rPr>
-              <a:t>隣の人と相談（30秒）</a:t>
-            </a:r>
-          </a:p>
-          <a:p>
-            <a:pPr algn="l"/>
-            <a:r>
-              <a:rPr sz="1500" b="0">
-                <a:solidFill>
-                  <a:srgbClr val="D3E3D9"/>
-                </a:solidFill>
-              </a:rPr>
-              <a:t>選んだ理由も話してみてください</a:t>
-            </a:r>
-          </a:p>
-        </p:txBody>
-      </p:sp>
-      <p:sp>
-        <p:nvSpPr>
-          <p:cNvPr id="20" name="TextBox 19"/>
-          <p:cNvSpPr txBox="1"/>
-          <p:nvPr/>
-        </p:nvSpPr>
-        <p:spPr>
-          <a:xfrm>
-            <a:off x="8321040" y="4709160"/>
-            <a:ext cx="3001975" cy="1280160"/>
-          </a:xfrm>
-          <a:prstGeom prst="rect">
-            <a:avLst/>
-          </a:prstGeom>
-          <a:noFill/>
-        </p:spPr>
-        <p:txBody>
-          <a:bodyPr wrap="square" lIns="0" rIns="0" tIns="0" bIns="0" anchor="ctr">
-            <a:spAutoFit/>
-          </a:bodyPr>
-          <a:lstStyle/>
-          <a:p>
-            <a:pPr algn="r"/>
-            <a:r>
-              <a:rPr sz="1600" b="1">
-                <a:solidFill>
-                  <a:srgbClr val="FBEADB"/>
-                </a:solidFill>
-              </a:rPr>
-              <a:t>答えは次のスライドで</a:t>
-            </a:r>
-          </a:p>
-        </p:txBody>
-      </p:sp>
-      <p:sp>
-        <p:nvSpPr>
-          <p:cNvPr id="21" name="TextBox 20"/>
-          <p:cNvSpPr txBox="1"/>
-          <p:nvPr/>
-        </p:nvSpPr>
-        <p:spPr>
-          <a:xfrm>
-            <a:off x="548640" y="6108192"/>
-            <a:ext cx="11094415" cy="237744"/>
-          </a:xfrm>
-          <a:prstGeom prst="rect">
-            <a:avLst/>
-          </a:prstGeom>
-          <a:noFill/>
-        </p:spPr>
-        <p:txBody>
-          <a:bodyPr wrap="square" lIns="0" rIns="0" tIns="0" bIns="0" anchor="ctr">
-            <a:spAutoFit/>
-          </a:bodyPr>
-          <a:lstStyle/>
-          <a:p>
-            <a:pPr algn="r"/>
-            <a:r>
-              <a:rPr sz="1000" b="0">
+              <a:rPr sz="1200" b="0">
                 <a:solidFill>
                   <a:srgbClr val="5E6E68"/>
                 </a:solidFill>
               </a:rPr>
-              <a:t>出典：中央教育審議会 初等中等教育分科会 教育課程部会「次期学習指導要領等に向けた審議まとめ」（令和８年10月５日）</a:t>
+              <a:t>名称・詳細は答申・告示で確定する。学校に説明する際は、最新の公表資料で確認すること</a:t>
             </a:r>
           </a:p>
         </p:txBody>
@@ -13278,6 +13100,884 @@
 </file>
 
 <file path=ppt/slides/slide20.xml><?xml version="1.0" encoding="utf-8"?>
+<p:sld xmlns:a="http://schemas.openxmlformats.org/drawingml/2006/main" xmlns:p="http://schemas.openxmlformats.org/presentationml/2006/main" xmlns:r="http://schemas.openxmlformats.org/officeDocument/2006/relationships">
+  <p:cSld>
+    <p:spTree>
+      <p:nvGrpSpPr>
+        <p:cNvPr id="1" name=""/>
+        <p:cNvGrpSpPr/>
+        <p:nvPr/>
+      </p:nvGrpSpPr>
+      <p:grpSpPr/>
+      <p:sp>
+        <p:nvSpPr>
+          <p:cNvPr id="2" name="Text Placeholder 1"/>
+          <p:cNvSpPr>
+            <a:spLocks noGrp="1"/>
+          </p:cNvSpPr>
+          <p:nvPr>
+            <p:ph type="body" idx="100"/>
+          </p:nvPr>
+        </p:nvSpPr>
+        <p:spPr/>
+        <p:txBody>
+          <a:bodyPr/>
+          <a:lstStyle/>
+          <a:p>
+            <a:r>
+              <a:t>QUIZ 3｜指導主事同士で考えよう</a:t>
+            </a:r>
+          </a:p>
+        </p:txBody>
+      </p:sp>
+      <p:sp>
+        <p:nvSpPr>
+          <p:cNvPr id="3" name="Title 2"/>
+          <p:cNvSpPr>
+            <a:spLocks noGrp="1"/>
+          </p:cNvSpPr>
+          <p:nvPr>
+            <p:ph type="title" idx="101"/>
+          </p:nvPr>
+        </p:nvSpPr>
+        <p:spPr/>
+        <p:txBody>
+          <a:bodyPr/>
+          <a:lstStyle/>
+          <a:p>
+            <a:r>
+              <a:t>審議まとめが示す「３つの方向性」に含まれないものは？</a:t>
+            </a:r>
+          </a:p>
+        </p:txBody>
+      </p:sp>
+      <p:sp>
+        <p:nvSpPr>
+          <p:cNvPr id="4" name="TextBox 3"/>
+          <p:cNvSpPr txBox="1"/>
+          <p:nvPr/>
+        </p:nvSpPr>
+        <p:spPr>
+          <a:xfrm>
+            <a:off x="548640" y="1508760"/>
+            <a:ext cx="11094415" cy="411480"/>
+          </a:xfrm>
+          <a:prstGeom prst="rect">
+            <a:avLst/>
+          </a:prstGeom>
+          <a:noFill/>
+        </p:spPr>
+        <p:txBody>
+          <a:bodyPr wrap="square" lIns="0" rIns="0" tIns="0" bIns="0" anchor="ctr">
+            <a:spAutoFit/>
+          </a:bodyPr>
+          <a:lstStyle/>
+          <a:p>
+            <a:pPr algn="l"/>
+            <a:r>
+              <a:rPr sz="1500" b="0">
+                <a:solidFill>
+                  <a:srgbClr val="5E6E68"/>
+                </a:solidFill>
+              </a:rPr>
+              <a:t>中央教育審議会「次期学習指導要領等に向けた審議まとめ」（令和８年10月５日）</a:t>
+            </a:r>
+          </a:p>
+        </p:txBody>
+      </p:sp>
+      <p:sp>
+        <p:nvSpPr>
+          <p:cNvPr id="5" name="Rounded Rectangle 4"/>
+          <p:cNvSpPr/>
+          <p:nvPr/>
+        </p:nvSpPr>
+        <p:spPr>
+          <a:xfrm>
+            <a:off x="548640" y="2148840"/>
+            <a:ext cx="5410047" cy="960120"/>
+          </a:xfrm>
+          <a:prstGeom prst="roundRect">
+            <a:avLst>
+              <a:gd name="adj" fmla="val 8000"/>
+            </a:avLst>
+          </a:prstGeom>
+          <a:solidFill>
+            <a:srgbClr val="EEF4F0"/>
+          </a:solidFill>
+          <a:ln>
+            <a:noFill/>
+          </a:ln>
+          <a:effectLst/>
+        </p:spPr>
+        <p:style>
+          <a:lnRef idx="1">
+            <a:schemeClr val="accent1"/>
+          </a:lnRef>
+          <a:fillRef idx="3">
+            <a:schemeClr val="accent1"/>
+          </a:fillRef>
+          <a:effectRef idx="2">
+            <a:schemeClr val="accent1"/>
+          </a:effectRef>
+          <a:fontRef idx="minor">
+            <a:schemeClr val="lt1"/>
+          </a:fontRef>
+        </p:style>
+        <p:txBody>
+          <a:bodyPr rtlCol="0" anchor="ctr"/>
+          <a:lstStyle/>
+          <a:p>
+            <a:pPr algn="ctr"/>
+          </a:p>
+        </p:txBody>
+      </p:sp>
+      <p:sp>
+        <p:nvSpPr>
+          <p:cNvPr id="6" name="Oval 5"/>
+          <p:cNvSpPr/>
+          <p:nvPr/>
+        </p:nvSpPr>
+        <p:spPr>
+          <a:xfrm>
+            <a:off x="777240" y="2331720"/>
+            <a:ext cx="594360" cy="594360"/>
+          </a:xfrm>
+          <a:prstGeom prst="ellipse">
+            <a:avLst/>
+          </a:prstGeom>
+          <a:solidFill>
+            <a:srgbClr val="D9702C"/>
+          </a:solidFill>
+          <a:ln>
+            <a:noFill/>
+          </a:ln>
+          <a:effectLst/>
+        </p:spPr>
+        <p:style>
+          <a:lnRef idx="1">
+            <a:schemeClr val="accent1"/>
+          </a:lnRef>
+          <a:fillRef idx="3">
+            <a:schemeClr val="accent1"/>
+          </a:fillRef>
+          <a:effectRef idx="2">
+            <a:schemeClr val="accent1"/>
+          </a:effectRef>
+          <a:fontRef idx="minor">
+            <a:schemeClr val="lt1"/>
+          </a:fontRef>
+        </p:style>
+        <p:txBody>
+          <a:bodyPr rtlCol="0" anchor="ctr" lIns="0" rIns="0" tIns="0" bIns="0"/>
+          <a:lstStyle/>
+          <a:p>
+            <a:pPr algn="ctr"/>
+            <a:r>
+              <a:rPr sz="2000" b="1">
+                <a:solidFill>
+                  <a:srgbClr val="FFFFFF"/>
+                </a:solidFill>
+              </a:rPr>
+              <a:t>A</a:t>
+            </a:r>
+          </a:p>
+        </p:txBody>
+      </p:sp>
+      <p:sp>
+        <p:nvSpPr>
+          <p:cNvPr id="7" name="TextBox 6"/>
+          <p:cNvSpPr txBox="1"/>
+          <p:nvPr/>
+        </p:nvSpPr>
+        <p:spPr>
+          <a:xfrm>
+            <a:off x="1600200" y="2148840"/>
+            <a:ext cx="4175607" cy="960120"/>
+          </a:xfrm>
+          <a:prstGeom prst="rect">
+            <a:avLst/>
+          </a:prstGeom>
+          <a:noFill/>
+        </p:spPr>
+        <p:txBody>
+          <a:bodyPr wrap="square" lIns="0" rIns="0" tIns="0" bIns="0" anchor="ctr">
+            <a:spAutoFit/>
+          </a:bodyPr>
+          <a:lstStyle/>
+          <a:p>
+            <a:pPr algn="l"/>
+            <a:r>
+              <a:rPr sz="1800" b="1">
+                <a:solidFill>
+                  <a:srgbClr val="1F5A47"/>
+                </a:solidFill>
+              </a:rPr>
+              <a:t>「主体的・対話的で深い学び」の実装</a:t>
+            </a:r>
+          </a:p>
+        </p:txBody>
+      </p:sp>
+      <p:sp>
+        <p:nvSpPr>
+          <p:cNvPr id="8" name="Rounded Rectangle 7"/>
+          <p:cNvSpPr/>
+          <p:nvPr/>
+        </p:nvSpPr>
+        <p:spPr>
+          <a:xfrm>
+            <a:off x="6233007" y="2148840"/>
+            <a:ext cx="5410047" cy="960120"/>
+          </a:xfrm>
+          <a:prstGeom prst="roundRect">
+            <a:avLst>
+              <a:gd name="adj" fmla="val 8000"/>
+            </a:avLst>
+          </a:prstGeom>
+          <a:solidFill>
+            <a:srgbClr val="EEF4F0"/>
+          </a:solidFill>
+          <a:ln>
+            <a:noFill/>
+          </a:ln>
+          <a:effectLst/>
+        </p:spPr>
+        <p:style>
+          <a:lnRef idx="1">
+            <a:schemeClr val="accent1"/>
+          </a:lnRef>
+          <a:fillRef idx="3">
+            <a:schemeClr val="accent1"/>
+          </a:fillRef>
+          <a:effectRef idx="2">
+            <a:schemeClr val="accent1"/>
+          </a:effectRef>
+          <a:fontRef idx="minor">
+            <a:schemeClr val="lt1"/>
+          </a:fontRef>
+        </p:style>
+        <p:txBody>
+          <a:bodyPr rtlCol="0" anchor="ctr"/>
+          <a:lstStyle/>
+          <a:p>
+            <a:pPr algn="ctr"/>
+          </a:p>
+        </p:txBody>
+      </p:sp>
+      <p:sp>
+        <p:nvSpPr>
+          <p:cNvPr id="9" name="Oval 8"/>
+          <p:cNvSpPr/>
+          <p:nvPr/>
+        </p:nvSpPr>
+        <p:spPr>
+          <a:xfrm>
+            <a:off x="6461607" y="2331720"/>
+            <a:ext cx="594360" cy="594360"/>
+          </a:xfrm>
+          <a:prstGeom prst="ellipse">
+            <a:avLst/>
+          </a:prstGeom>
+          <a:solidFill>
+            <a:srgbClr val="D9702C"/>
+          </a:solidFill>
+          <a:ln>
+            <a:noFill/>
+          </a:ln>
+          <a:effectLst/>
+        </p:spPr>
+        <p:style>
+          <a:lnRef idx="1">
+            <a:schemeClr val="accent1"/>
+          </a:lnRef>
+          <a:fillRef idx="3">
+            <a:schemeClr val="accent1"/>
+          </a:fillRef>
+          <a:effectRef idx="2">
+            <a:schemeClr val="accent1"/>
+          </a:effectRef>
+          <a:fontRef idx="minor">
+            <a:schemeClr val="lt1"/>
+          </a:fontRef>
+        </p:style>
+        <p:txBody>
+          <a:bodyPr rtlCol="0" anchor="ctr" lIns="0" rIns="0" tIns="0" bIns="0"/>
+          <a:lstStyle/>
+          <a:p>
+            <a:pPr algn="ctr"/>
+            <a:r>
+              <a:rPr sz="2000" b="1">
+                <a:solidFill>
+                  <a:srgbClr val="FFFFFF"/>
+                </a:solidFill>
+              </a:rPr>
+              <a:t>B</a:t>
+            </a:r>
+          </a:p>
+        </p:txBody>
+      </p:sp>
+      <p:sp>
+        <p:nvSpPr>
+          <p:cNvPr id="10" name="TextBox 9"/>
+          <p:cNvSpPr txBox="1"/>
+          <p:nvPr/>
+        </p:nvSpPr>
+        <p:spPr>
+          <a:xfrm>
+            <a:off x="7284567" y="2148840"/>
+            <a:ext cx="4175607" cy="960120"/>
+          </a:xfrm>
+          <a:prstGeom prst="rect">
+            <a:avLst/>
+          </a:prstGeom>
+          <a:noFill/>
+        </p:spPr>
+        <p:txBody>
+          <a:bodyPr wrap="square" lIns="0" rIns="0" tIns="0" bIns="0" anchor="ctr">
+            <a:spAutoFit/>
+          </a:bodyPr>
+          <a:lstStyle/>
+          <a:p>
+            <a:pPr algn="l"/>
+            <a:r>
+              <a:rPr sz="1800" b="1">
+                <a:solidFill>
+                  <a:srgbClr val="1F5A47"/>
+                </a:solidFill>
+              </a:rPr>
+              <a:t>多様性の包摂</a:t>
+            </a:r>
+          </a:p>
+        </p:txBody>
+      </p:sp>
+      <p:sp>
+        <p:nvSpPr>
+          <p:cNvPr id="11" name="Rounded Rectangle 10"/>
+          <p:cNvSpPr/>
+          <p:nvPr/>
+        </p:nvSpPr>
+        <p:spPr>
+          <a:xfrm>
+            <a:off x="548640" y="3291840"/>
+            <a:ext cx="5410047" cy="960120"/>
+          </a:xfrm>
+          <a:prstGeom prst="roundRect">
+            <a:avLst>
+              <a:gd name="adj" fmla="val 8000"/>
+            </a:avLst>
+          </a:prstGeom>
+          <a:solidFill>
+            <a:srgbClr val="EEF4F0"/>
+          </a:solidFill>
+          <a:ln>
+            <a:noFill/>
+          </a:ln>
+          <a:effectLst/>
+        </p:spPr>
+        <p:style>
+          <a:lnRef idx="1">
+            <a:schemeClr val="accent1"/>
+          </a:lnRef>
+          <a:fillRef idx="3">
+            <a:schemeClr val="accent1"/>
+          </a:fillRef>
+          <a:effectRef idx="2">
+            <a:schemeClr val="accent1"/>
+          </a:effectRef>
+          <a:fontRef idx="minor">
+            <a:schemeClr val="lt1"/>
+          </a:fontRef>
+        </p:style>
+        <p:txBody>
+          <a:bodyPr rtlCol="0" anchor="ctr"/>
+          <a:lstStyle/>
+          <a:p>
+            <a:pPr algn="ctr"/>
+          </a:p>
+        </p:txBody>
+      </p:sp>
+      <p:sp>
+        <p:nvSpPr>
+          <p:cNvPr id="12" name="Oval 11"/>
+          <p:cNvSpPr/>
+          <p:nvPr/>
+        </p:nvSpPr>
+        <p:spPr>
+          <a:xfrm>
+            <a:off x="777240" y="3474720"/>
+            <a:ext cx="594360" cy="594360"/>
+          </a:xfrm>
+          <a:prstGeom prst="ellipse">
+            <a:avLst/>
+          </a:prstGeom>
+          <a:solidFill>
+            <a:srgbClr val="D9702C"/>
+          </a:solidFill>
+          <a:ln>
+            <a:noFill/>
+          </a:ln>
+          <a:effectLst/>
+        </p:spPr>
+        <p:style>
+          <a:lnRef idx="1">
+            <a:schemeClr val="accent1"/>
+          </a:lnRef>
+          <a:fillRef idx="3">
+            <a:schemeClr val="accent1"/>
+          </a:fillRef>
+          <a:effectRef idx="2">
+            <a:schemeClr val="accent1"/>
+          </a:effectRef>
+          <a:fontRef idx="minor">
+            <a:schemeClr val="lt1"/>
+          </a:fontRef>
+        </p:style>
+        <p:txBody>
+          <a:bodyPr rtlCol="0" anchor="ctr" lIns="0" rIns="0" tIns="0" bIns="0"/>
+          <a:lstStyle/>
+          <a:p>
+            <a:pPr algn="ctr"/>
+            <a:r>
+              <a:rPr sz="2000" b="1">
+                <a:solidFill>
+                  <a:srgbClr val="FFFFFF"/>
+                </a:solidFill>
+              </a:rPr>
+              <a:t>C</a:t>
+            </a:r>
+          </a:p>
+        </p:txBody>
+      </p:sp>
+      <p:sp>
+        <p:nvSpPr>
+          <p:cNvPr id="13" name="TextBox 12"/>
+          <p:cNvSpPr txBox="1"/>
+          <p:nvPr/>
+        </p:nvSpPr>
+        <p:spPr>
+          <a:xfrm>
+            <a:off x="1600200" y="3291840"/>
+            <a:ext cx="4175607" cy="960120"/>
+          </a:xfrm>
+          <a:prstGeom prst="rect">
+            <a:avLst/>
+          </a:prstGeom>
+          <a:noFill/>
+        </p:spPr>
+        <p:txBody>
+          <a:bodyPr wrap="square" lIns="0" rIns="0" tIns="0" bIns="0" anchor="ctr">
+            <a:spAutoFit/>
+          </a:bodyPr>
+          <a:lstStyle/>
+          <a:p>
+            <a:pPr algn="l"/>
+            <a:r>
+              <a:rPr sz="1800" b="1">
+                <a:solidFill>
+                  <a:srgbClr val="1F5A47"/>
+                </a:solidFill>
+              </a:rPr>
+              <a:t>授業時数の拡充</a:t>
+            </a:r>
+          </a:p>
+        </p:txBody>
+      </p:sp>
+      <p:sp>
+        <p:nvSpPr>
+          <p:cNvPr id="14" name="Rounded Rectangle 13"/>
+          <p:cNvSpPr/>
+          <p:nvPr/>
+        </p:nvSpPr>
+        <p:spPr>
+          <a:xfrm>
+            <a:off x="6233007" y="3291840"/>
+            <a:ext cx="5410047" cy="960120"/>
+          </a:xfrm>
+          <a:prstGeom prst="roundRect">
+            <a:avLst>
+              <a:gd name="adj" fmla="val 8000"/>
+            </a:avLst>
+          </a:prstGeom>
+          <a:solidFill>
+            <a:srgbClr val="EEF4F0"/>
+          </a:solidFill>
+          <a:ln>
+            <a:noFill/>
+          </a:ln>
+          <a:effectLst/>
+        </p:spPr>
+        <p:style>
+          <a:lnRef idx="1">
+            <a:schemeClr val="accent1"/>
+          </a:lnRef>
+          <a:fillRef idx="3">
+            <a:schemeClr val="accent1"/>
+          </a:fillRef>
+          <a:effectRef idx="2">
+            <a:schemeClr val="accent1"/>
+          </a:effectRef>
+          <a:fontRef idx="minor">
+            <a:schemeClr val="lt1"/>
+          </a:fontRef>
+        </p:style>
+        <p:txBody>
+          <a:bodyPr rtlCol="0" anchor="ctr"/>
+          <a:lstStyle/>
+          <a:p>
+            <a:pPr algn="ctr"/>
+          </a:p>
+        </p:txBody>
+      </p:sp>
+      <p:sp>
+        <p:nvSpPr>
+          <p:cNvPr id="15" name="Oval 14"/>
+          <p:cNvSpPr/>
+          <p:nvPr/>
+        </p:nvSpPr>
+        <p:spPr>
+          <a:xfrm>
+            <a:off x="6461607" y="3474720"/>
+            <a:ext cx="594360" cy="594360"/>
+          </a:xfrm>
+          <a:prstGeom prst="ellipse">
+            <a:avLst/>
+          </a:prstGeom>
+          <a:solidFill>
+            <a:srgbClr val="D9702C"/>
+          </a:solidFill>
+          <a:ln>
+            <a:noFill/>
+          </a:ln>
+          <a:effectLst/>
+        </p:spPr>
+        <p:style>
+          <a:lnRef idx="1">
+            <a:schemeClr val="accent1"/>
+          </a:lnRef>
+          <a:fillRef idx="3">
+            <a:schemeClr val="accent1"/>
+          </a:fillRef>
+          <a:effectRef idx="2">
+            <a:schemeClr val="accent1"/>
+          </a:effectRef>
+          <a:fontRef idx="minor">
+            <a:schemeClr val="lt1"/>
+          </a:fontRef>
+        </p:style>
+        <p:txBody>
+          <a:bodyPr rtlCol="0" anchor="ctr" lIns="0" rIns="0" tIns="0" bIns="0"/>
+          <a:lstStyle/>
+          <a:p>
+            <a:pPr algn="ctr"/>
+            <a:r>
+              <a:rPr sz="2000" b="1">
+                <a:solidFill>
+                  <a:srgbClr val="FFFFFF"/>
+                </a:solidFill>
+              </a:rPr>
+              <a:t>D</a:t>
+            </a:r>
+          </a:p>
+        </p:txBody>
+      </p:sp>
+      <p:sp>
+        <p:nvSpPr>
+          <p:cNvPr id="16" name="TextBox 15"/>
+          <p:cNvSpPr txBox="1"/>
+          <p:nvPr/>
+        </p:nvSpPr>
+        <p:spPr>
+          <a:xfrm>
+            <a:off x="7284567" y="3291840"/>
+            <a:ext cx="4175607" cy="960120"/>
+          </a:xfrm>
+          <a:prstGeom prst="rect">
+            <a:avLst/>
+          </a:prstGeom>
+          <a:noFill/>
+        </p:spPr>
+        <p:txBody>
+          <a:bodyPr wrap="square" lIns="0" rIns="0" tIns="0" bIns="0" anchor="ctr">
+            <a:spAutoFit/>
+          </a:bodyPr>
+          <a:lstStyle/>
+          <a:p>
+            <a:pPr algn="l"/>
+            <a:r>
+              <a:rPr sz="1800" b="1">
+                <a:solidFill>
+                  <a:srgbClr val="1F5A47"/>
+                </a:solidFill>
+              </a:rPr>
+              <a:t>実現可能性の確保</a:t>
+            </a:r>
+          </a:p>
+        </p:txBody>
+      </p:sp>
+      <p:sp>
+        <p:nvSpPr>
+          <p:cNvPr id="17" name="Rounded Rectangle 16"/>
+          <p:cNvSpPr/>
+          <p:nvPr/>
+        </p:nvSpPr>
+        <p:spPr>
+          <a:xfrm>
+            <a:off x="548640" y="4709160"/>
+            <a:ext cx="11094415" cy="1280160"/>
+          </a:xfrm>
+          <a:prstGeom prst="roundRect">
+            <a:avLst>
+              <a:gd name="adj" fmla="val 8000"/>
+            </a:avLst>
+          </a:prstGeom>
+          <a:solidFill>
+            <a:srgbClr val="1F5A47"/>
+          </a:solidFill>
+          <a:ln>
+            <a:noFill/>
+          </a:ln>
+          <a:effectLst/>
+        </p:spPr>
+        <p:style>
+          <a:lnRef idx="1">
+            <a:schemeClr val="accent1"/>
+          </a:lnRef>
+          <a:fillRef idx="3">
+            <a:schemeClr val="accent1"/>
+          </a:fillRef>
+          <a:effectRef idx="2">
+            <a:schemeClr val="accent1"/>
+          </a:effectRef>
+          <a:fontRef idx="minor">
+            <a:schemeClr val="lt1"/>
+          </a:fontRef>
+        </p:style>
+        <p:txBody>
+          <a:bodyPr rtlCol="0" anchor="ctr"/>
+          <a:lstStyle/>
+          <a:p>
+            <a:pPr algn="ctr"/>
+          </a:p>
+        </p:txBody>
+      </p:sp>
+      <p:sp>
+        <p:nvSpPr>
+          <p:cNvPr id="18" name="Oval 17"/>
+          <p:cNvSpPr/>
+          <p:nvPr/>
+        </p:nvSpPr>
+        <p:spPr>
+          <a:xfrm>
+            <a:off x="868680" y="4983480"/>
+            <a:ext cx="731520" cy="731520"/>
+          </a:xfrm>
+          <a:prstGeom prst="ellipse">
+            <a:avLst/>
+          </a:prstGeom>
+          <a:solidFill>
+            <a:srgbClr val="D9702C"/>
+          </a:solidFill>
+          <a:ln>
+            <a:noFill/>
+          </a:ln>
+          <a:effectLst/>
+        </p:spPr>
+        <p:style>
+          <a:lnRef idx="1">
+            <a:schemeClr val="accent1"/>
+          </a:lnRef>
+          <a:fillRef idx="3">
+            <a:schemeClr val="accent1"/>
+          </a:fillRef>
+          <a:effectRef idx="2">
+            <a:schemeClr val="accent1"/>
+          </a:effectRef>
+          <a:fontRef idx="minor">
+            <a:schemeClr val="lt1"/>
+          </a:fontRef>
+        </p:style>
+        <p:txBody>
+          <a:bodyPr rtlCol="0" anchor="ctr" lIns="0" rIns="0" tIns="0" bIns="0"/>
+          <a:lstStyle/>
+          <a:p>
+            <a:pPr algn="ctr"/>
+            <a:r>
+              <a:rPr sz="2200" b="1">
+                <a:solidFill>
+                  <a:srgbClr val="FFFFFF"/>
+                </a:solidFill>
+              </a:rPr>
+              <a:t>話</a:t>
+            </a:r>
+          </a:p>
+        </p:txBody>
+      </p:sp>
+      <p:sp>
+        <p:nvSpPr>
+          <p:cNvPr id="19" name="TextBox 18"/>
+          <p:cNvSpPr txBox="1"/>
+          <p:nvPr/>
+        </p:nvSpPr>
+        <p:spPr>
+          <a:xfrm>
+            <a:off x="1874519" y="4709160"/>
+            <a:ext cx="6400800" cy="1280160"/>
+          </a:xfrm>
+          <a:prstGeom prst="rect">
+            <a:avLst/>
+          </a:prstGeom>
+          <a:noFill/>
+        </p:spPr>
+        <p:txBody>
+          <a:bodyPr wrap="square" lIns="0" rIns="0" tIns="0" bIns="0" anchor="ctr">
+            <a:spAutoFit/>
+          </a:bodyPr>
+          <a:lstStyle/>
+          <a:p>
+            <a:pPr algn="l"/>
+            <a:r>
+              <a:rPr sz="2200" b="1">
+                <a:solidFill>
+                  <a:srgbClr val="FFFFFF"/>
+                </a:solidFill>
+              </a:rPr>
+              <a:t>隣の人と相談（30秒）</a:t>
+            </a:r>
+          </a:p>
+          <a:p>
+            <a:pPr algn="l"/>
+            <a:r>
+              <a:rPr sz="1500" b="0">
+                <a:solidFill>
+                  <a:srgbClr val="D3E3D9"/>
+                </a:solidFill>
+              </a:rPr>
+              <a:t>選んだ理由も話してみてください</a:t>
+            </a:r>
+          </a:p>
+        </p:txBody>
+      </p:sp>
+      <p:sp>
+        <p:nvSpPr>
+          <p:cNvPr id="20" name="TextBox 19"/>
+          <p:cNvSpPr txBox="1"/>
+          <p:nvPr/>
+        </p:nvSpPr>
+        <p:spPr>
+          <a:xfrm>
+            <a:off x="8321040" y="4709160"/>
+            <a:ext cx="3001975" cy="1280160"/>
+          </a:xfrm>
+          <a:prstGeom prst="rect">
+            <a:avLst/>
+          </a:prstGeom>
+          <a:noFill/>
+        </p:spPr>
+        <p:txBody>
+          <a:bodyPr wrap="square" lIns="0" rIns="0" tIns="0" bIns="0" anchor="ctr">
+            <a:spAutoFit/>
+          </a:bodyPr>
+          <a:lstStyle/>
+          <a:p>
+            <a:pPr algn="r"/>
+            <a:r>
+              <a:rPr sz="1600" b="1">
+                <a:solidFill>
+                  <a:srgbClr val="FBEADB"/>
+                </a:solidFill>
+              </a:rPr>
+              <a:t>答えは次のスライドで</a:t>
+            </a:r>
+          </a:p>
+        </p:txBody>
+      </p:sp>
+      <p:sp>
+        <p:nvSpPr>
+          <p:cNvPr id="21" name="TextBox 20"/>
+          <p:cNvSpPr txBox="1"/>
+          <p:nvPr/>
+        </p:nvSpPr>
+        <p:spPr>
+          <a:xfrm>
+            <a:off x="548640" y="6108192"/>
+            <a:ext cx="11094415" cy="237744"/>
+          </a:xfrm>
+          <a:prstGeom prst="rect">
+            <a:avLst/>
+          </a:prstGeom>
+          <a:noFill/>
+        </p:spPr>
+        <p:txBody>
+          <a:bodyPr wrap="square" lIns="0" rIns="0" tIns="0" bIns="0" anchor="ctr">
+            <a:spAutoFit/>
+          </a:bodyPr>
+          <a:lstStyle/>
+          <a:p>
+            <a:pPr algn="r"/>
+            <a:r>
+              <a:rPr sz="1000" b="0">
+                <a:solidFill>
+                  <a:srgbClr val="5E6E68"/>
+                </a:solidFill>
+              </a:rPr>
+              <a:t>出典：中央教育審議会 初等中等教育分科会 教育課程部会「次期学習指導要領等に向けた審議まとめ」（令和８年10月５日）</a:t>
+            </a:r>
+          </a:p>
+        </p:txBody>
+      </p:sp>
+      <p:sp>
+        <p:nvSpPr>
+          <p:cNvPr id="25" name="Slide Number Placeholder 0"/>
+          <p:cNvSpPr>
+            <a:spLocks noGrp="1"/>
+          </p:cNvSpPr>
+          <p:nvPr>
+            <p:ph type="sldNum" sz="quarter" idx="4294967295"/>
+          </p:nvPr>
+        </p:nvSpPr>
+        <p:spPr>
+          <a:xfrm>
+            <a:off x="11185855" y="6419088"/>
+            <a:ext cx="457200" cy="274320"/>
+          </a:xfrm>
+          <a:prstGeom prst="rect">
+            <a:avLst/>
+          </a:prstGeom>
+          <a:extLst>
+            <a:ext uri="{C572A759-6A51-4108-AA02-DFA0A04FC94B}">
+              <ma14:wrappingTextBoxFlag xmlns:ma14="http://schemas.microsoft.com/office/mac/drawingml/2011/main" xmlns="" val="0"/>
+            </a:ext>
+          </a:extLst>
+        </p:spPr>
+        <p:txBody>
+          <a:bodyPr/>
+          <a:lstStyle>
+            <a:lvl1pPr>
+              <a:defRPr sz="1000">
+                <a:solidFill>
+                  <a:schemeClr val="accent5"/>
+                </a:solidFill>
+              </a:defRPr>
+            </a:lvl1pPr>
+          </a:lstStyle>
+          <a:p>
+            <a:pPr algn="r"/>
+            <a:fld id="{F7021451-1387-4CA6-816F-3879F97B5CBC}" type="slidenum">
+              <a:rPr lang="en-US" b="0"/>
+              <a:t>2</a:t>
+            </a:fld>
+            <a:endParaRPr lang="en-US"/>
+          </a:p>
+        </p:txBody>
+      </p:sp>
+    </p:spTree>
+  </p:cSld>
+  <p:clrMapOvr>
+    <a:masterClrMapping/>
+  </p:clrMapOvr>
+</p:sld>
+</file>
+
+<file path=ppt/slides/slide21.xml><?xml version="1.0" encoding="utf-8"?>
 <p:sld xmlns:a="http://schemas.openxmlformats.org/drawingml/2006/main" xmlns:r="http://schemas.openxmlformats.org/officeDocument/2006/relationships" xmlns:p="http://schemas.openxmlformats.org/presentationml/2006/main">
   <p:cSld name="Slide 13">
     <p:spTree>
@@ -14285,7 +14985,7 @@
 </p:sld>
 </file>
 
-<file path=ppt/slides/slide21.xml><?xml version="1.0" encoding="utf-8"?>
+<file path=ppt/slides/slide22.xml><?xml version="1.0" encoding="utf-8"?>
 <p:sld xmlns:a="http://schemas.openxmlformats.org/drawingml/2006/main" xmlns:r="http://schemas.openxmlformats.org/officeDocument/2006/relationships" xmlns:p="http://schemas.openxmlformats.org/presentationml/2006/main">
   <p:cSld name="Slide 14">
     <p:spTree>
@@ -15695,7 +16395,7 @@
 </p:sld>
 </file>
 
-<file path=ppt/slides/slide22.xml><?xml version="1.0" encoding="utf-8"?>
+<file path=ppt/slides/slide23.xml><?xml version="1.0" encoding="utf-8"?>
 <p:sld xmlns:a="http://schemas.openxmlformats.org/drawingml/2006/main" xmlns:p="http://schemas.openxmlformats.org/presentationml/2006/main" xmlns:r="http://schemas.openxmlformats.org/officeDocument/2006/relationships">
   <p:cSld>
     <p:spTree>
@@ -16781,7 +17481,7 @@
 </p:sld>
 </file>
 
-<file path=ppt/slides/slide23.xml><?xml version="1.0" encoding="utf-8"?>
+<file path=ppt/slides/slide24.xml><?xml version="1.0" encoding="utf-8"?>
 <p:sld xmlns:a="http://schemas.openxmlformats.org/drawingml/2006/main" xmlns:r="http://schemas.openxmlformats.org/officeDocument/2006/relationships" xmlns:p="http://schemas.openxmlformats.org/presentationml/2006/main">
   <p:cSld name="Slide 15">
     <p:spTree>
@@ -17587,7 +18287,7 @@
 </p:sld>
 </file>
 
-<file path=ppt/slides/slide24.xml><?xml version="1.0" encoding="utf-8"?>
+<file path=ppt/slides/slide25.xml><?xml version="1.0" encoding="utf-8"?>
 <p:sld xmlns:a="http://schemas.openxmlformats.org/drawingml/2006/main" xmlns:r="http://schemas.openxmlformats.org/officeDocument/2006/relationships" xmlns:p="http://schemas.openxmlformats.org/presentationml/2006/main">
   <p:cSld name="Slide 16">
     <p:spTree>
@@ -18287,7 +18987,7 @@
 </p:sld>
 </file>
 
-<file path=ppt/slides/slide25.xml><?xml version="1.0" encoding="utf-8"?>
+<file path=ppt/slides/slide26.xml><?xml version="1.0" encoding="utf-8"?>
 <p:sld xmlns:a="http://schemas.openxmlformats.org/drawingml/2006/main" xmlns:r="http://schemas.openxmlformats.org/officeDocument/2006/relationships" xmlns:p="http://schemas.openxmlformats.org/presentationml/2006/main">
   <p:cSld name="Slide 17">
     <p:spTree>
@@ -18329,18 +19029,9 @@
           <a:bodyPr wrap="square" lIns="0" tIns="0" rIns="0" bIns="0" rtlCol="0" anchor="ctr"/>
           <a:lstStyle/>
           <a:p>
-            <a:pPr marL="0" indent="0">
-              <a:buNone/>
-            </a:pPr>
-            <a:r>
-              <a:rPr lang="en-US" sz="1300" b="1" dirty="0">
-                <a:solidFill>
-                  <a:schemeClr val="accent2"/>
-                </a:solidFill>
-              </a:rPr>
-              <a:t>質疑応答・意見交換（５分）</a:t>
-            </a:r>
-            <a:endParaRPr lang="en-US" sz="1300" dirty="0"/>
+            <a:r>
+              <a:t>質疑応答（５分）</a:t>
+            </a:r>
           </a:p>
         </p:txBody>
       </p:sp>
@@ -18552,426 +19243,6 @@
       </p:sp>
       <p:sp>
         <p:nvSpPr>
-          <p:cNvPr id="9" name="Text 6"/>
-          <p:cNvSpPr txBox="1"/>
-          <p:nvPr/>
-        </p:nvSpPr>
-        <p:spPr>
-          <a:xfrm>
-            <a:off x="4846320" y="1508760"/>
-            <a:ext cx="6796735" cy="411480"/>
-          </a:xfrm>
-          <a:prstGeom prst="rect">
-            <a:avLst/>
-          </a:prstGeom>
-          <a:noFill/>
-          <a:ln/>
-        </p:spPr>
-        <p:txBody>
-          <a:bodyPr wrap="square" lIns="0" tIns="0" rIns="0" bIns="0" rtlCol="0" anchor="ctr"/>
-          <a:lstStyle/>
-          <a:p>
-            <a:pPr marL="0" indent="0">
-              <a:buNone/>
-            </a:pPr>
-            <a:r>
-              <a:rPr lang="en-US" sz="1600" b="1" dirty="0">
-                <a:solidFill>
-                  <a:schemeClr val="accent2"/>
-                </a:solidFill>
-              </a:rPr>
-              <a:t>意見交換のきっかけに</a:t>
-            </a:r>
-            <a:endParaRPr lang="en-US" sz="1600" dirty="0"/>
-          </a:p>
-        </p:txBody>
-      </p:sp>
-      <p:sp>
-        <p:nvSpPr>
-          <p:cNvPr id="10" name="Shape 7"/>
-          <p:cNvSpPr/>
-          <p:nvPr/>
-        </p:nvSpPr>
-        <p:spPr>
-          <a:xfrm>
-            <a:off x="4846320" y="2057400"/>
-            <a:ext cx="6796735" cy="1143000"/>
-          </a:xfrm>
-          <a:prstGeom prst="roundRect">
-            <a:avLst>
-              <a:gd name="adj" fmla="val 6400"/>
-            </a:avLst>
-          </a:prstGeom>
-          <a:solidFill>
-            <a:schemeClr val="bg2"/>
-          </a:solidFill>
-          <a:ln/>
-        </p:spPr>
-        <p:txBody>
-          <a:bodyPr/>
-          <a:lstStyle/>
-          <a:p>
-            <a:endParaRPr lang="ja-JP" altLang="en-US"/>
-          </a:p>
-        </p:txBody>
-      </p:sp>
-      <p:sp>
-        <p:nvSpPr>
-          <p:cNvPr id="11" name="Shape 8"/>
-          <p:cNvSpPr/>
-          <p:nvPr/>
-        </p:nvSpPr>
-        <p:spPr>
-          <a:xfrm>
-            <a:off x="5074920" y="2331720"/>
-            <a:ext cx="594360" cy="594360"/>
-          </a:xfrm>
-          <a:prstGeom prst="ellipse">
-            <a:avLst/>
-          </a:prstGeom>
-          <a:solidFill>
-            <a:schemeClr val="accent1"/>
-          </a:solidFill>
-          <a:ln/>
-        </p:spPr>
-        <p:txBody>
-          <a:bodyPr/>
-          <a:lstStyle/>
-          <a:p>
-            <a:endParaRPr lang="ja-JP" altLang="en-US"/>
-          </a:p>
-        </p:txBody>
-      </p:sp>
-      <p:sp>
-        <p:nvSpPr>
-          <p:cNvPr id="12" name="Text 9"/>
-          <p:cNvSpPr txBox="1"/>
-          <p:nvPr/>
-        </p:nvSpPr>
-        <p:spPr>
-          <a:xfrm>
-            <a:off x="5074920" y="2331720"/>
-            <a:ext cx="594360" cy="594360"/>
-          </a:xfrm>
-          <a:prstGeom prst="rect">
-            <a:avLst/>
-          </a:prstGeom>
-          <a:noFill/>
-          <a:ln/>
-        </p:spPr>
-        <p:txBody>
-          <a:bodyPr wrap="square" lIns="0" tIns="0" rIns="0" bIns="0" rtlCol="0" anchor="ctr"/>
-          <a:lstStyle/>
-          <a:p>
-            <a:pPr marL="0" indent="0" algn="ctr">
-              <a:buNone/>
-            </a:pPr>
-            <a:r>
-              <a:rPr lang="en-US" sz="1800" b="1" dirty="0">
-                <a:solidFill>
-                  <a:schemeClr val="bg1"/>
-                </a:solidFill>
-              </a:rPr>
-              <a:t>Q1</a:t>
-            </a:r>
-            <a:endParaRPr lang="en-US" sz="1800" dirty="0"/>
-          </a:p>
-        </p:txBody>
-      </p:sp>
-      <p:sp>
-        <p:nvSpPr>
-          <p:cNvPr id="13" name="Text 10"/>
-          <p:cNvSpPr txBox="1"/>
-          <p:nvPr/>
-        </p:nvSpPr>
-        <p:spPr>
-          <a:xfrm>
-            <a:off x="5897880" y="2057400"/>
-            <a:ext cx="5516575" cy="1143000"/>
-          </a:xfrm>
-          <a:prstGeom prst="rect">
-            <a:avLst/>
-          </a:prstGeom>
-          <a:noFill/>
-          <a:ln/>
-        </p:spPr>
-        <p:txBody>
-          <a:bodyPr wrap="square" lIns="0" tIns="0" rIns="0" bIns="0" rtlCol="0" anchor="ctr"/>
-          <a:lstStyle/>
-          <a:p>
-            <a:pPr marL="0" indent="0">
-              <a:buNone/>
-            </a:pPr>
-            <a:r>
-              <a:rPr lang="en-US" sz="1700" dirty="0">
-                <a:solidFill>
-                  <a:schemeClr val="tx1"/>
-                </a:solidFill>
-              </a:rPr>
-              <a:t>担当校で、子供が「自分で決めている」場面はどこにありますか</a:t>
-            </a:r>
-            <a:endParaRPr lang="en-US" sz="1700" dirty="0"/>
-          </a:p>
-        </p:txBody>
-      </p:sp>
-      <p:sp>
-        <p:nvSpPr>
-          <p:cNvPr id="14" name="Shape 11"/>
-          <p:cNvSpPr/>
-          <p:nvPr/>
-        </p:nvSpPr>
-        <p:spPr>
-          <a:xfrm>
-            <a:off x="4846320" y="3383280"/>
-            <a:ext cx="6796735" cy="1143000"/>
-          </a:xfrm>
-          <a:prstGeom prst="roundRect">
-            <a:avLst>
-              <a:gd name="adj" fmla="val 6400"/>
-            </a:avLst>
-          </a:prstGeom>
-          <a:solidFill>
-            <a:schemeClr val="bg2"/>
-          </a:solidFill>
-          <a:ln/>
-        </p:spPr>
-        <p:txBody>
-          <a:bodyPr/>
-          <a:lstStyle/>
-          <a:p>
-            <a:endParaRPr lang="ja-JP" altLang="en-US"/>
-          </a:p>
-        </p:txBody>
-      </p:sp>
-      <p:sp>
-        <p:nvSpPr>
-          <p:cNvPr id="15" name="Shape 12"/>
-          <p:cNvSpPr/>
-          <p:nvPr/>
-        </p:nvSpPr>
-        <p:spPr>
-          <a:xfrm>
-            <a:off x="5074920" y="3657600"/>
-            <a:ext cx="594360" cy="594360"/>
-          </a:xfrm>
-          <a:prstGeom prst="ellipse">
-            <a:avLst/>
-          </a:prstGeom>
-          <a:solidFill>
-            <a:schemeClr val="accent2"/>
-          </a:solidFill>
-          <a:ln/>
-        </p:spPr>
-        <p:txBody>
-          <a:bodyPr/>
-          <a:lstStyle/>
-          <a:p>
-            <a:endParaRPr lang="ja-JP" altLang="en-US"/>
-          </a:p>
-        </p:txBody>
-      </p:sp>
-      <p:sp>
-        <p:nvSpPr>
-          <p:cNvPr id="16" name="Text 13"/>
-          <p:cNvSpPr txBox="1"/>
-          <p:nvPr/>
-        </p:nvSpPr>
-        <p:spPr>
-          <a:xfrm>
-            <a:off x="5074920" y="3657600"/>
-            <a:ext cx="594360" cy="594360"/>
-          </a:xfrm>
-          <a:prstGeom prst="rect">
-            <a:avLst/>
-          </a:prstGeom>
-          <a:noFill/>
-          <a:ln/>
-        </p:spPr>
-        <p:txBody>
-          <a:bodyPr wrap="square" lIns="0" tIns="0" rIns="0" bIns="0" rtlCol="0" anchor="ctr"/>
-          <a:lstStyle/>
-          <a:p>
-            <a:pPr marL="0" indent="0" algn="ctr">
-              <a:buNone/>
-            </a:pPr>
-            <a:r>
-              <a:rPr lang="en-US" sz="1800" b="1" dirty="0">
-                <a:solidFill>
-                  <a:schemeClr val="bg1"/>
-                </a:solidFill>
-              </a:rPr>
-              <a:t>Q2</a:t>
-            </a:r>
-            <a:endParaRPr lang="en-US" sz="1800" dirty="0"/>
-          </a:p>
-        </p:txBody>
-      </p:sp>
-      <p:sp>
-        <p:nvSpPr>
-          <p:cNvPr id="17" name="Text 14"/>
-          <p:cNvSpPr txBox="1"/>
-          <p:nvPr/>
-        </p:nvSpPr>
-        <p:spPr>
-          <a:xfrm>
-            <a:off x="5897880" y="3383280"/>
-            <a:ext cx="5516575" cy="1143000"/>
-          </a:xfrm>
-          <a:prstGeom prst="rect">
-            <a:avLst/>
-          </a:prstGeom>
-          <a:noFill/>
-          <a:ln/>
-        </p:spPr>
-        <p:txBody>
-          <a:bodyPr wrap="square" lIns="0" tIns="0" rIns="0" bIns="0" rtlCol="0" anchor="ctr"/>
-          <a:lstStyle/>
-          <a:p>
-            <a:pPr marL="0" indent="0">
-              <a:buNone/>
-            </a:pPr>
-            <a:r>
-              <a:rPr lang="en-US" sz="1700" dirty="0">
-                <a:solidFill>
-                  <a:schemeClr val="tx1"/>
-                </a:solidFill>
-              </a:rPr>
-              <a:t>学校から「自由進度学習に取り組みたい」と相談されたら、まず何を助言しますか</a:t>
-            </a:r>
-            <a:endParaRPr lang="en-US" sz="1700" dirty="0"/>
-          </a:p>
-        </p:txBody>
-      </p:sp>
-      <p:sp>
-        <p:nvSpPr>
-          <p:cNvPr id="18" name="Shape 15"/>
-          <p:cNvSpPr/>
-          <p:nvPr/>
-        </p:nvSpPr>
-        <p:spPr>
-          <a:xfrm>
-            <a:off x="4846320" y="4709160"/>
-            <a:ext cx="6796735" cy="1143000"/>
-          </a:xfrm>
-          <a:prstGeom prst="roundRect">
-            <a:avLst>
-              <a:gd name="adj" fmla="val 6400"/>
-            </a:avLst>
-          </a:prstGeom>
-          <a:solidFill>
-            <a:schemeClr val="bg2"/>
-          </a:solidFill>
-          <a:ln/>
-        </p:spPr>
-        <p:txBody>
-          <a:bodyPr/>
-          <a:lstStyle/>
-          <a:p>
-            <a:endParaRPr lang="ja-JP" altLang="en-US"/>
-          </a:p>
-        </p:txBody>
-      </p:sp>
-      <p:sp>
-        <p:nvSpPr>
-          <p:cNvPr id="19" name="Shape 16"/>
-          <p:cNvSpPr/>
-          <p:nvPr/>
-        </p:nvSpPr>
-        <p:spPr>
-          <a:xfrm>
-            <a:off x="5074920" y="4983480"/>
-            <a:ext cx="594360" cy="594360"/>
-          </a:xfrm>
-          <a:prstGeom prst="ellipse">
-            <a:avLst/>
-          </a:prstGeom>
-          <a:solidFill>
-            <a:schemeClr val="accent1"/>
-          </a:solidFill>
-          <a:ln/>
-        </p:spPr>
-        <p:txBody>
-          <a:bodyPr/>
-          <a:lstStyle/>
-          <a:p>
-            <a:endParaRPr lang="ja-JP" altLang="en-US"/>
-          </a:p>
-        </p:txBody>
-      </p:sp>
-      <p:sp>
-        <p:nvSpPr>
-          <p:cNvPr id="20" name="Text 17"/>
-          <p:cNvSpPr txBox="1"/>
-          <p:nvPr/>
-        </p:nvSpPr>
-        <p:spPr>
-          <a:xfrm>
-            <a:off x="5074920" y="4983480"/>
-            <a:ext cx="594360" cy="594360"/>
-          </a:xfrm>
-          <a:prstGeom prst="rect">
-            <a:avLst/>
-          </a:prstGeom>
-          <a:noFill/>
-          <a:ln/>
-        </p:spPr>
-        <p:txBody>
-          <a:bodyPr wrap="square" lIns="0" tIns="0" rIns="0" bIns="0" rtlCol="0" anchor="ctr"/>
-          <a:lstStyle/>
-          <a:p>
-            <a:pPr marL="0" indent="0" algn="ctr">
-              <a:buNone/>
-            </a:pPr>
-            <a:r>
-              <a:rPr lang="en-US" sz="1800" b="1" dirty="0">
-                <a:solidFill>
-                  <a:schemeClr val="bg1"/>
-                </a:solidFill>
-              </a:rPr>
-              <a:t>Q3</a:t>
-            </a:r>
-            <a:endParaRPr lang="en-US" sz="1800" dirty="0"/>
-          </a:p>
-        </p:txBody>
-      </p:sp>
-      <p:sp>
-        <p:nvSpPr>
-          <p:cNvPr id="21" name="Text 18"/>
-          <p:cNvSpPr txBox="1"/>
-          <p:nvPr/>
-        </p:nvSpPr>
-        <p:spPr>
-          <a:xfrm>
-            <a:off x="5897880" y="4709160"/>
-            <a:ext cx="5516575" cy="1143000"/>
-          </a:xfrm>
-          <a:prstGeom prst="rect">
-            <a:avLst/>
-          </a:prstGeom>
-          <a:noFill/>
-          <a:ln/>
-        </p:spPr>
-        <p:txBody>
-          <a:bodyPr wrap="square" lIns="0" tIns="0" rIns="0" bIns="0" rtlCol="0" anchor="ctr"/>
-          <a:lstStyle/>
-          <a:p>
-            <a:pPr marL="0" indent="0">
-              <a:buNone/>
-            </a:pPr>
-            <a:r>
-              <a:rPr lang="en-US" sz="1700" dirty="0">
-                <a:solidFill>
-                  <a:schemeClr val="tx1"/>
-                </a:solidFill>
-              </a:rPr>
-              <a:t>調整授業時数制度や裁量的な時間に向けて、学校に今から何を準備してもらいますか</a:t>
-            </a:r>
-            <a:endParaRPr lang="en-US" sz="1700" dirty="0"/>
-          </a:p>
-        </p:txBody>
-      </p:sp>
-      <p:sp>
-        <p:nvSpPr>
           <p:cNvPr id="25" name="Slide Number Placeholder 0"/>
           <p:cNvSpPr>
             <a:spLocks noGrp="1"/>
@@ -19015,81 +19286,242 @@
           </a:p>
         </p:txBody>
       </p:sp>
-    </p:spTree>
-  </p:cSld>
-  <p:clrMapOvr>
-    <a:masterClrMapping/>
-  </p:clrMapOvr>
-</p:sld>
-</file>
-
-<file path=ppt/slides/slide26.xml><?xml version="1.0" encoding="utf-8"?>
-<p:sld xmlns:a="http://schemas.openxmlformats.org/drawingml/2006/main" xmlns:p="http://schemas.openxmlformats.org/presentationml/2006/main" xmlns:r="http://schemas.openxmlformats.org/officeDocument/2006/relationships">
-  <p:cSld>
-    <p:spTree>
-      <p:nvGrpSpPr>
-        <p:cNvPr id="1" name=""/>
-        <p:cNvGrpSpPr/>
-        <p:nvPr/>
-      </p:nvGrpSpPr>
-      <p:grpSpPr/>
-      <p:sp>
-        <p:nvSpPr>
-          <p:cNvPr id="2" name="Text Placeholder 1"/>
-          <p:cNvSpPr>
-            <a:spLocks noGrp="1"/>
-          </p:cNvSpPr>
-          <p:nvPr>
-            <p:ph type="body" idx="100"/>
-          </p:nvPr>
-        </p:nvSpPr>
-        <p:spPr/>
-        <p:txBody>
-          <a:bodyPr/>
-          <a:lstStyle/>
-          <a:p>
-            <a:r>
-              <a:t>02　講演・鼎談から（上智大学 奈須正裕 氏）</a:t>
-            </a:r>
-          </a:p>
-        </p:txBody>
-      </p:sp>
-      <p:sp>
-        <p:nvSpPr>
-          <p:cNvPr id="3" name="Title 2"/>
-          <p:cNvSpPr>
-            <a:spLocks noGrp="1"/>
-          </p:cNvSpPr>
-          <p:nvPr>
-            <p:ph type="title" idx="101"/>
-          </p:nvPr>
-        </p:nvSpPr>
-        <p:spPr/>
-        <p:txBody>
-          <a:bodyPr/>
-          <a:lstStyle/>
-          <a:p>
-            <a:r>
-              <a:t>講義・協議会で語られた本音</a:t>
-            </a:r>
-          </a:p>
-        </p:txBody>
-      </p:sp>
-      <p:sp>
-        <p:nvSpPr>
-          <p:cNvPr id="4" name="Rounded Rectangle 3"/>
+      <p:sp>
+        <p:nvSpPr>
+          <p:cNvPr id="26" name="TextBox 25"/>
+          <p:cNvSpPr txBox="1"/>
+          <p:nvPr/>
+        </p:nvSpPr>
+        <p:spPr>
+          <a:xfrm>
+            <a:off x="4846320" y="1508760"/>
+            <a:ext cx="6796735" cy="411480"/>
+          </a:xfrm>
+          <a:prstGeom prst="rect">
+            <a:avLst/>
+          </a:prstGeom>
+          <a:noFill/>
+        </p:spPr>
+        <p:txBody>
+          <a:bodyPr wrap="square" lIns="0" rIns="0" tIns="0" bIns="0" anchor="ctr">
+            <a:spAutoFit/>
+          </a:bodyPr>
+          <a:lstStyle/>
+          <a:p>
+            <a:pPr algn="l"/>
+            <a:r>
+              <a:rPr sz="1700" b="1">
+                <a:solidFill>
+                  <a:srgbClr val="D9702C"/>
+                </a:solidFill>
+              </a:rPr>
+              <a:t>持ち帰ってほしい問い ― 次の学校訪問で</a:t>
+            </a:r>
+          </a:p>
+        </p:txBody>
+      </p:sp>
+      <p:sp>
+        <p:nvSpPr>
+          <p:cNvPr id="27" name="Rounded Rectangle 26"/>
           <p:cNvSpPr/>
           <p:nvPr/>
         </p:nvSpPr>
         <p:spPr>
           <a:xfrm>
-            <a:off x="548640" y="1508760"/>
-            <a:ext cx="4937760" cy="4572000"/>
+            <a:off x="4846320" y="2057400"/>
+            <a:ext cx="6796735" cy="1645920"/>
           </a:xfrm>
           <a:prstGeom prst="roundRect">
             <a:avLst>
               <a:gd name="adj" fmla="val 6000"/>
             </a:avLst>
+          </a:prstGeom>
+          <a:solidFill>
+            <a:srgbClr val="EEF4F0"/>
+          </a:solidFill>
+          <a:ln>
+            <a:noFill/>
+          </a:ln>
+          <a:effectLst/>
+        </p:spPr>
+        <p:style>
+          <a:lnRef idx="1">
+            <a:schemeClr val="accent1"/>
+          </a:lnRef>
+          <a:fillRef idx="3">
+            <a:schemeClr val="accent1"/>
+          </a:fillRef>
+          <a:effectRef idx="2">
+            <a:schemeClr val="accent1"/>
+          </a:effectRef>
+          <a:fontRef idx="minor">
+            <a:schemeClr val="lt1"/>
+          </a:fontRef>
+        </p:style>
+        <p:txBody>
+          <a:bodyPr rtlCol="0" anchor="ctr"/>
+          <a:lstStyle/>
+          <a:p>
+            <a:pPr algn="ctr"/>
+          </a:p>
+        </p:txBody>
+      </p:sp>
+      <p:sp>
+        <p:nvSpPr>
+          <p:cNvPr id="28" name="Oval 27"/>
+          <p:cNvSpPr/>
+          <p:nvPr/>
+        </p:nvSpPr>
+        <p:spPr>
+          <a:xfrm>
+            <a:off x="5120640" y="2514600"/>
+            <a:ext cx="731520" cy="731520"/>
+          </a:xfrm>
+          <a:prstGeom prst="ellipse">
+            <a:avLst/>
+          </a:prstGeom>
+          <a:solidFill>
+            <a:srgbClr val="D9702C"/>
+          </a:solidFill>
+          <a:ln>
+            <a:noFill/>
+          </a:ln>
+          <a:effectLst/>
+        </p:spPr>
+        <p:style>
+          <a:lnRef idx="1">
+            <a:schemeClr val="accent1"/>
+          </a:lnRef>
+          <a:fillRef idx="3">
+            <a:schemeClr val="accent1"/>
+          </a:fillRef>
+          <a:effectRef idx="2">
+            <a:schemeClr val="accent1"/>
+          </a:effectRef>
+          <a:fontRef idx="minor">
+            <a:schemeClr val="lt1"/>
+          </a:fontRef>
+        </p:style>
+        <p:txBody>
+          <a:bodyPr rtlCol="0" anchor="ctr" lIns="0" rIns="0" tIns="0" bIns="0"/>
+          <a:lstStyle/>
+          <a:p>
+            <a:pPr algn="ctr"/>
+            <a:r>
+              <a:rPr sz="2200" b="1">
+                <a:solidFill>
+                  <a:srgbClr val="FFFFFF"/>
+                </a:solidFill>
+              </a:rPr>
+              <a:t>1</a:t>
+            </a:r>
+          </a:p>
+        </p:txBody>
+      </p:sp>
+      <p:sp>
+        <p:nvSpPr>
+          <p:cNvPr id="29" name="TextBox 28"/>
+          <p:cNvSpPr txBox="1"/>
+          <p:nvPr/>
+        </p:nvSpPr>
+        <p:spPr>
+          <a:xfrm>
+            <a:off x="6080760" y="2194560"/>
+            <a:ext cx="5333695" cy="1371600"/>
+          </a:xfrm>
+          <a:prstGeom prst="rect">
+            <a:avLst/>
+          </a:prstGeom>
+          <a:noFill/>
+        </p:spPr>
+        <p:txBody>
+          <a:bodyPr wrap="square" lIns="0" rIns="0" tIns="0" bIns="0" anchor="ctr">
+            <a:spAutoFit/>
+          </a:bodyPr>
+          <a:lstStyle/>
+          <a:p>
+            <a:pPr algn="l"/>
+            <a:r>
+              <a:rPr sz="2000" b="1">
+                <a:solidFill>
+                  <a:srgbClr val="1F5A47"/>
+                </a:solidFill>
+              </a:rPr>
+              <a:t>この授業の中心にあるのは、何か</a:t>
+            </a:r>
+          </a:p>
+          <a:p>
+            <a:pPr algn="l"/>
+            <a:r>
+              <a:rPr sz="1500" b="0">
+                <a:solidFill>
+                  <a:srgbClr val="1E2B27"/>
+                </a:solidFill>
+              </a:rPr>
+              <a:t>教師の計画・指示か、それとも子供の学びか</a:t>
+            </a:r>
+          </a:p>
+        </p:txBody>
+      </p:sp>
+      <p:sp>
+        <p:nvSpPr>
+          <p:cNvPr id="30" name="Rounded Rectangle 29"/>
+          <p:cNvSpPr/>
+          <p:nvPr/>
+        </p:nvSpPr>
+        <p:spPr>
+          <a:xfrm>
+            <a:off x="4846320" y="3886200"/>
+            <a:ext cx="6796735" cy="1645920"/>
+          </a:xfrm>
+          <a:prstGeom prst="roundRect">
+            <a:avLst>
+              <a:gd name="adj" fmla="val 6000"/>
+            </a:avLst>
+          </a:prstGeom>
+          <a:solidFill>
+            <a:srgbClr val="EEF4F0"/>
+          </a:solidFill>
+          <a:ln>
+            <a:noFill/>
+          </a:ln>
+          <a:effectLst/>
+        </p:spPr>
+        <p:style>
+          <a:lnRef idx="1">
+            <a:schemeClr val="accent1"/>
+          </a:lnRef>
+          <a:fillRef idx="3">
+            <a:schemeClr val="accent1"/>
+          </a:fillRef>
+          <a:effectRef idx="2">
+            <a:schemeClr val="accent1"/>
+          </a:effectRef>
+          <a:fontRef idx="minor">
+            <a:schemeClr val="lt1"/>
+          </a:fontRef>
+        </p:style>
+        <p:txBody>
+          <a:bodyPr rtlCol="0" anchor="ctr"/>
+          <a:lstStyle/>
+          <a:p>
+            <a:pPr algn="ctr"/>
+          </a:p>
+        </p:txBody>
+      </p:sp>
+      <p:sp>
+        <p:nvSpPr>
+          <p:cNvPr id="31" name="Oval 30"/>
+          <p:cNvSpPr/>
+          <p:nvPr/>
+        </p:nvSpPr>
+        <p:spPr>
+          <a:xfrm>
+            <a:off x="5120640" y="4343400"/>
+            <a:ext cx="731520" cy="731520"/>
+          </a:xfrm>
+          <a:prstGeom prst="ellipse">
+            <a:avLst/>
           </a:prstGeom>
           <a:solidFill>
             <a:srgbClr val="1F5A47"/>
@@ -19114,172 +19546,31 @@
           </a:fontRef>
         </p:style>
         <p:txBody>
-          <a:bodyPr rtlCol="0" anchor="ctr"/>
+          <a:bodyPr rtlCol="0" anchor="ctr" lIns="0" rIns="0" tIns="0" bIns="0"/>
           <a:lstStyle/>
           <a:p>
             <a:pPr algn="ctr"/>
-          </a:p>
-        </p:txBody>
-      </p:sp>
-      <p:pic>
-        <p:nvPicPr>
-          <p:cNvPr id="5" name="Picture 4" descr="quote_peach.png"/>
-          <p:cNvPicPr>
-            <a:picLocks noChangeAspect="1"/>
-          </p:cNvPicPr>
-          <p:nvPr/>
-        </p:nvPicPr>
-        <p:blipFill>
-          <a:blip r:embed="rId2"/>
-          <a:stretch>
-            <a:fillRect/>
-          </a:stretch>
-        </p:blipFill>
-        <p:spPr>
-          <a:xfrm>
-            <a:off x="914400" y="1874519"/>
-            <a:ext cx="548640" cy="548640"/>
-          </a:xfrm>
-          <a:prstGeom prst="rect">
-            <a:avLst/>
-          </a:prstGeom>
-        </p:spPr>
-      </p:pic>
-      <p:sp>
-        <p:nvSpPr>
-          <p:cNvPr id="6" name="TextBox 5"/>
+            <a:r>
+              <a:rPr sz="2200" b="1">
+                <a:solidFill>
+                  <a:srgbClr val="FFFFFF"/>
+                </a:solidFill>
+              </a:rPr>
+              <a:t>2</a:t>
+            </a:r>
+          </a:p>
+        </p:txBody>
+      </p:sp>
+      <p:sp>
+        <p:nvSpPr>
+          <p:cNvPr id="32" name="TextBox 31"/>
           <p:cNvSpPr txBox="1"/>
           <p:nvPr/>
         </p:nvSpPr>
         <p:spPr>
           <a:xfrm>
-            <a:off x="914400" y="2560320"/>
-            <a:ext cx="4206240" cy="1463040"/>
-          </a:xfrm>
-          <a:prstGeom prst="rect">
-            <a:avLst/>
-          </a:prstGeom>
-          <a:noFill/>
-        </p:spPr>
-        <p:txBody>
-          <a:bodyPr wrap="square" lIns="0" rIns="0" tIns="0" bIns="0" anchor="t">
-            <a:spAutoFit/>
-          </a:bodyPr>
-          <a:lstStyle/>
-          <a:p>
-            <a:pPr algn="l"/>
-            <a:r>
-              <a:rPr sz="3200" b="1">
-                <a:solidFill>
-                  <a:srgbClr val="FFFFFF"/>
-                </a:solidFill>
-              </a:rPr>
-              <a:t>マイ探究に、</a:t>
-            </a:r>
-          </a:p>
-          <a:p>
-            <a:pPr algn="l"/>
-            <a:r>
-              <a:rPr sz="3200" b="1">
-                <a:solidFill>
-                  <a:srgbClr val="FFFFFF"/>
-                </a:solidFill>
-              </a:rPr>
-              <a:t>評価は必要ない</a:t>
-            </a:r>
-          </a:p>
-        </p:txBody>
-      </p:sp>
-      <p:sp>
-        <p:nvSpPr>
-          <p:cNvPr id="7" name="TextBox 6"/>
-          <p:cNvSpPr txBox="1"/>
-          <p:nvPr/>
-        </p:nvSpPr>
-        <p:spPr>
-          <a:xfrm>
-            <a:off x="914400" y="4114800"/>
-            <a:ext cx="4206240" cy="822960"/>
-          </a:xfrm>
-          <a:prstGeom prst="rect">
-            <a:avLst/>
-          </a:prstGeom>
-          <a:noFill/>
-        </p:spPr>
-        <p:txBody>
-          <a:bodyPr wrap="square" lIns="0" rIns="0" tIns="0" bIns="0" anchor="t">
-            <a:spAutoFit/>
-          </a:bodyPr>
-          <a:lstStyle/>
-          <a:p>
-            <a:pPr algn="l"/>
-            <a:r>
-              <a:rPr sz="1500" b="0">
-                <a:solidFill>
-                  <a:srgbClr val="D3E3D9"/>
-                </a:solidFill>
-              </a:rPr>
-              <a:t>「好き」「得意」を、学校の物差しで測らない</a:t>
-            </a:r>
-          </a:p>
-        </p:txBody>
-      </p:sp>
-      <p:sp>
-        <p:nvSpPr>
-          <p:cNvPr id="8" name="Rounded Rectangle 7"/>
-          <p:cNvSpPr/>
-          <p:nvPr/>
-        </p:nvSpPr>
-        <p:spPr>
-          <a:xfrm>
-            <a:off x="822959" y="4846320"/>
-            <a:ext cx="4389120" cy="960120"/>
-          </a:xfrm>
-          <a:prstGeom prst="roundRect">
-            <a:avLst>
-              <a:gd name="adj" fmla="val 6000"/>
-            </a:avLst>
-          </a:prstGeom>
-          <a:solidFill>
-            <a:srgbClr val="FFFFFF"/>
-          </a:solidFill>
-          <a:ln>
-            <a:noFill/>
-          </a:ln>
-          <a:effectLst/>
-        </p:spPr>
-        <p:style>
-          <a:lnRef idx="1">
-            <a:schemeClr val="accent1"/>
-          </a:lnRef>
-          <a:fillRef idx="3">
-            <a:schemeClr val="accent1"/>
-          </a:fillRef>
-          <a:effectRef idx="2">
-            <a:schemeClr val="accent1"/>
-          </a:effectRef>
-          <a:fontRef idx="minor">
-            <a:schemeClr val="lt1"/>
-          </a:fontRef>
-        </p:style>
-        <p:txBody>
-          <a:bodyPr rtlCol="0" anchor="ctr"/>
-          <a:lstStyle/>
-          <a:p>
-            <a:pPr algn="ctr"/>
-          </a:p>
-        </p:txBody>
-      </p:sp>
-      <p:sp>
-        <p:nvSpPr>
-          <p:cNvPr id="9" name="TextBox 8"/>
-          <p:cNvSpPr txBox="1"/>
-          <p:nvPr/>
-        </p:nvSpPr>
-        <p:spPr>
-          <a:xfrm>
-            <a:off x="1051560" y="4846320"/>
-            <a:ext cx="3931920" cy="960120"/>
+            <a:off x="6080760" y="4023360"/>
+            <a:ext cx="5333695" cy="1371600"/>
           </a:xfrm>
           <a:prstGeom prst="rect">
             <a:avLst/>
@@ -19294,107 +19585,37 @@
           <a:p>
             <a:pPr algn="l"/>
             <a:r>
-              <a:rPr sz="1300" b="1">
-                <a:solidFill>
-                  <a:srgbClr val="D9702C"/>
-                </a:solidFill>
-              </a:rPr>
-              <a:t>考えたい問い</a:t>
+              <a:rPr sz="2000" b="1">
+                <a:solidFill>
+                  <a:srgbClr val="1F5A47"/>
+                </a:solidFill>
+              </a:rPr>
+              <a:t>普段の授業で、どんな学び方が育っているか</a:t>
             </a:r>
           </a:p>
           <a:p>
             <a:pPr algn="l"/>
             <a:r>
-              <a:rPr sz="1700" b="1">
-                <a:solidFill>
-                  <a:srgbClr val="1F5A47"/>
-                </a:solidFill>
-              </a:rPr>
-              <a:t>評価しないと不安になるのは、誰か</a:t>
-            </a:r>
-          </a:p>
-        </p:txBody>
-      </p:sp>
-      <p:sp>
-        <p:nvSpPr>
-          <p:cNvPr id="10" name="Rounded Rectangle 9"/>
-          <p:cNvSpPr/>
-          <p:nvPr/>
-        </p:nvSpPr>
-        <p:spPr>
-          <a:xfrm>
-            <a:off x="5806440" y="1508760"/>
-            <a:ext cx="5836615" cy="1371600"/>
-          </a:xfrm>
-          <a:prstGeom prst="roundRect">
-            <a:avLst>
-              <a:gd name="adj" fmla="val 6000"/>
-            </a:avLst>
-          </a:prstGeom>
-          <a:solidFill>
-            <a:srgbClr val="EEF4F0"/>
-          </a:solidFill>
-          <a:ln>
-            <a:noFill/>
-          </a:ln>
-          <a:effectLst/>
-        </p:spPr>
-        <p:style>
-          <a:lnRef idx="1">
-            <a:schemeClr val="accent1"/>
-          </a:lnRef>
-          <a:fillRef idx="3">
-            <a:schemeClr val="accent1"/>
-          </a:fillRef>
-          <a:effectRef idx="2">
-            <a:schemeClr val="accent1"/>
-          </a:effectRef>
-          <a:fontRef idx="minor">
-            <a:schemeClr val="lt1"/>
-          </a:fontRef>
-        </p:style>
-        <p:txBody>
-          <a:bodyPr rtlCol="0" anchor="ctr"/>
-          <a:lstStyle/>
-          <a:p>
-            <a:pPr algn="ctr"/>
-          </a:p>
-        </p:txBody>
-      </p:sp>
-      <p:pic>
-        <p:nvPicPr>
-          <p:cNvPr id="11" name="Picture 10" descr="image.png"/>
-          <p:cNvPicPr>
-            <a:picLocks noChangeAspect="1"/>
-          </p:cNvPicPr>
-          <p:nvPr/>
-        </p:nvPicPr>
-        <p:blipFill>
-          <a:blip r:embed="rId3"/>
-          <a:stretch>
-            <a:fillRect/>
-          </a:stretch>
-        </p:blipFill>
-        <p:spPr>
-          <a:xfrm>
-            <a:off x="6080759" y="1783080"/>
-            <a:ext cx="384048" cy="384048"/>
-          </a:xfrm>
-          <a:prstGeom prst="rect">
-            <a:avLst/>
-          </a:prstGeom>
-        </p:spPr>
-      </p:pic>
-      <p:sp>
-        <p:nvSpPr>
-          <p:cNvPr id="12" name="TextBox 11"/>
+              <a:rPr sz="1500" b="0">
+                <a:solidFill>
+                  <a:srgbClr val="1E2B27"/>
+                </a:solidFill>
+              </a:rPr>
+              <a:t>子供に任せる学びを支える土台は、約８割の普段の授業</a:t>
+            </a:r>
+          </a:p>
+        </p:txBody>
+      </p:sp>
+      <p:sp>
+        <p:nvSpPr>
+          <p:cNvPr id="33" name="TextBox 32"/>
           <p:cNvSpPr txBox="1"/>
           <p:nvPr/>
         </p:nvSpPr>
         <p:spPr>
           <a:xfrm>
-            <a:off x="6675120" y="1600200"/>
-            <a:ext cx="4739335" cy="1188720"/>
+            <a:off x="4846320" y="5715000"/>
+            <a:ext cx="6796735" cy="365760"/>
           </a:xfrm>
           <a:prstGeom prst="rect">
             <a:avLst/>
@@ -19409,299 +19630,13 @@
           <a:p>
             <a:pPr algn="l"/>
             <a:r>
-              <a:rPr sz="2000" b="1">
-                <a:solidFill>
-                  <a:srgbClr val="1F5A47"/>
-                </a:solidFill>
-              </a:rPr>
-              <a:t>学校的な価値で過剰に制限しない</a:t>
-            </a:r>
-          </a:p>
-          <a:p>
-            <a:pPr algn="l"/>
-            <a:r>
               <a:rPr sz="1400" b="0">
                 <a:solidFill>
-                  <a:srgbClr val="1E2B27"/>
-                </a:solidFill>
-              </a:rPr>
-              <a:t>子供に忖度させない</a:t>
-            </a:r>
-          </a:p>
-        </p:txBody>
-      </p:sp>
-      <p:sp>
-        <p:nvSpPr>
-          <p:cNvPr id="13" name="Rounded Rectangle 12"/>
-          <p:cNvSpPr/>
-          <p:nvPr/>
-        </p:nvSpPr>
-        <p:spPr>
-          <a:xfrm>
-            <a:off x="5806440" y="3108960"/>
-            <a:ext cx="5836615" cy="1371600"/>
-          </a:xfrm>
-          <a:prstGeom prst="roundRect">
-            <a:avLst>
-              <a:gd name="adj" fmla="val 6000"/>
-            </a:avLst>
-          </a:prstGeom>
-          <a:solidFill>
-            <a:srgbClr val="EEF4F0"/>
-          </a:solidFill>
-          <a:ln>
-            <a:noFill/>
-          </a:ln>
-          <a:effectLst/>
-        </p:spPr>
-        <p:style>
-          <a:lnRef idx="1">
-            <a:schemeClr val="accent1"/>
-          </a:lnRef>
-          <a:fillRef idx="3">
-            <a:schemeClr val="accent1"/>
-          </a:fillRef>
-          <a:effectRef idx="2">
-            <a:schemeClr val="accent1"/>
-          </a:effectRef>
-          <a:fontRef idx="minor">
-            <a:schemeClr val="lt1"/>
-          </a:fontRef>
-        </p:style>
-        <p:txBody>
-          <a:bodyPr rtlCol="0" anchor="ctr"/>
-          <a:lstStyle/>
-          <a:p>
-            <a:pPr algn="ctr"/>
-          </a:p>
-        </p:txBody>
-      </p:sp>
-      <p:pic>
-        <p:nvPicPr>
-          <p:cNvPr id="14" name="Picture 13" descr="image.png"/>
-          <p:cNvPicPr>
-            <a:picLocks noChangeAspect="1"/>
-          </p:cNvPicPr>
-          <p:nvPr/>
-        </p:nvPicPr>
-        <p:blipFill>
-          <a:blip r:embed="rId3"/>
-          <a:stretch>
-            <a:fillRect/>
-          </a:stretch>
-        </p:blipFill>
-        <p:spPr>
-          <a:xfrm>
-            <a:off x="6080759" y="3383279"/>
-            <a:ext cx="384048" cy="384048"/>
-          </a:xfrm>
-          <a:prstGeom prst="rect">
-            <a:avLst/>
-          </a:prstGeom>
-        </p:spPr>
-      </p:pic>
-      <p:sp>
-        <p:nvSpPr>
-          <p:cNvPr id="15" name="TextBox 14"/>
-          <p:cNvSpPr txBox="1"/>
-          <p:nvPr/>
-        </p:nvSpPr>
-        <p:spPr>
-          <a:xfrm>
-            <a:off x="6675120" y="3200400"/>
-            <a:ext cx="4739335" cy="1188720"/>
-          </a:xfrm>
-          <a:prstGeom prst="rect">
-            <a:avLst/>
-          </a:prstGeom>
-          <a:noFill/>
-        </p:spPr>
-        <p:txBody>
-          <a:bodyPr wrap="square" lIns="0" rIns="0" tIns="0" bIns="0" anchor="ctr">
-            <a:spAutoFit/>
-          </a:bodyPr>
-          <a:lstStyle/>
-          <a:p>
-            <a:pPr algn="l"/>
-            <a:r>
-              <a:rPr sz="2000" b="1">
-                <a:solidFill>
-                  <a:srgbClr val="1F5A47"/>
-                </a:solidFill>
-              </a:rPr>
-              <a:t>発表会は必須ではない</a:t>
-            </a:r>
-          </a:p>
-          <a:p>
-            <a:pPr algn="l"/>
-            <a:r>
-              <a:rPr sz="1400" b="0">
-                <a:solidFill>
-                  <a:srgbClr val="1E2B27"/>
-                </a:solidFill>
-              </a:rPr>
-              <a:t>発表するかどうかを子供が選んでもいい</a:t>
-            </a:r>
-          </a:p>
-        </p:txBody>
-      </p:sp>
-      <p:sp>
-        <p:nvSpPr>
-          <p:cNvPr id="16" name="Rounded Rectangle 15"/>
-          <p:cNvSpPr/>
-          <p:nvPr/>
-        </p:nvSpPr>
-        <p:spPr>
-          <a:xfrm>
-            <a:off x="5806440" y="4709160"/>
-            <a:ext cx="5836615" cy="1371600"/>
-          </a:xfrm>
-          <a:prstGeom prst="roundRect">
-            <a:avLst>
-              <a:gd name="adj" fmla="val 6000"/>
-            </a:avLst>
-          </a:prstGeom>
-          <a:solidFill>
-            <a:srgbClr val="EEF4F0"/>
-          </a:solidFill>
-          <a:ln>
-            <a:noFill/>
-          </a:ln>
-          <a:effectLst/>
-        </p:spPr>
-        <p:style>
-          <a:lnRef idx="1">
-            <a:schemeClr val="accent1"/>
-          </a:lnRef>
-          <a:fillRef idx="3">
-            <a:schemeClr val="accent1"/>
-          </a:fillRef>
-          <a:effectRef idx="2">
-            <a:schemeClr val="accent1"/>
-          </a:effectRef>
-          <a:fontRef idx="minor">
-            <a:schemeClr val="lt1"/>
-          </a:fontRef>
-        </p:style>
-        <p:txBody>
-          <a:bodyPr rtlCol="0" anchor="ctr"/>
-          <a:lstStyle/>
-          <a:p>
-            <a:pPr algn="ctr"/>
-          </a:p>
-        </p:txBody>
-      </p:sp>
-      <p:pic>
-        <p:nvPicPr>
-          <p:cNvPr id="17" name="Picture 16" descr="image.png"/>
-          <p:cNvPicPr>
-            <a:picLocks noChangeAspect="1"/>
-          </p:cNvPicPr>
-          <p:nvPr/>
-        </p:nvPicPr>
-        <p:blipFill>
-          <a:blip r:embed="rId3"/>
-          <a:stretch>
-            <a:fillRect/>
-          </a:stretch>
-        </p:blipFill>
-        <p:spPr>
-          <a:xfrm>
-            <a:off x="6080759" y="4983480"/>
-            <a:ext cx="384048" cy="384048"/>
-          </a:xfrm>
-          <a:prstGeom prst="rect">
-            <a:avLst/>
-          </a:prstGeom>
-        </p:spPr>
-      </p:pic>
-      <p:sp>
-        <p:nvSpPr>
-          <p:cNvPr id="18" name="TextBox 17"/>
-          <p:cNvSpPr txBox="1"/>
-          <p:nvPr/>
-        </p:nvSpPr>
-        <p:spPr>
-          <a:xfrm>
-            <a:off x="6675120" y="4800600"/>
-            <a:ext cx="4739335" cy="1188720"/>
-          </a:xfrm>
-          <a:prstGeom prst="rect">
-            <a:avLst/>
-          </a:prstGeom>
-          <a:noFill/>
-        </p:spPr>
-        <p:txBody>
-          <a:bodyPr wrap="square" lIns="0" rIns="0" tIns="0" bIns="0" anchor="ctr">
-            <a:spAutoFit/>
-          </a:bodyPr>
-          <a:lstStyle/>
-          <a:p>
-            <a:pPr algn="l"/>
-            <a:r>
-              <a:rPr sz="2000" b="1">
-                <a:solidFill>
-                  <a:srgbClr val="1F5A47"/>
-                </a:solidFill>
-              </a:rPr>
-              <a:t>「やってみて違う」も発見</a:t>
-            </a:r>
-          </a:p>
-          <a:p>
-            <a:pPr algn="l"/>
-            <a:r>
-              <a:rPr sz="1400" b="0">
-                <a:solidFill>
-                  <a:srgbClr val="1E2B27"/>
-                </a:solidFill>
-              </a:rPr>
-              <a:t>合わないと分かることも「好き」「得意」の発見</a:t>
-            </a:r>
-          </a:p>
-        </p:txBody>
-      </p:sp>
-      <p:sp>
-        <p:nvSpPr>
-          <p:cNvPr id="25" name="Slide Number Placeholder 0"/>
-          <p:cNvSpPr>
-            <a:spLocks noGrp="1"/>
-          </p:cNvSpPr>
-          <p:nvPr>
-            <p:ph type="sldNum" sz="quarter" idx="4294967295"/>
-          </p:nvPr>
-        </p:nvSpPr>
-        <p:spPr>
-          <a:xfrm>
-            <a:off x="11185855" y="6419088"/>
-            <a:ext cx="457200" cy="274320"/>
-          </a:xfrm>
-          <a:prstGeom prst="rect">
-            <a:avLst/>
-          </a:prstGeom>
-          <a:extLst>
-            <a:ext uri="{C572A759-6A51-4108-AA02-DFA0A04FC94B}">
-              <ma14:wrappingTextBoxFlag xmlns:ma14="http://schemas.microsoft.com/office/mac/drawingml/2011/main" xmlns="" val="0"/>
-            </a:ext>
-          </a:extLst>
-        </p:spPr>
-        <p:txBody>
-          <a:bodyPr/>
-          <a:lstStyle>
-            <a:lvl1pPr>
-              <a:defRPr sz="1000">
-                <a:solidFill>
-                  <a:schemeClr val="accent5"/>
-                </a:solidFill>
-              </a:defRPr>
-            </a:lvl1pPr>
-          </a:lstStyle>
-          <a:p>
-            <a:pPr algn="r"/>
-            <a:fld id="{F7021451-1387-4CA6-816F-3879F97B5CBC}" type="slidenum">
-              <a:rPr lang="en-US" b="0"/>
-              <a:t>2</a:t>
-            </a:fld>
-            <a:endParaRPr lang="en-US"/>
+                  <a:srgbClr val="5E6E68"/>
+                </a:solidFill>
+              </a:rPr>
+              <a:t>答えは、学校の先生方と一緒に探していく</a:t>
+            </a:r>
           </a:p>
         </p:txBody>
       </p:sp>

--- a/天童中部小学校視察/081019_天童中部小学校_指導主事研修スライド_クイズ版.pptx
+++ b/天童中部小学校視察/081019_天童中部小学校_指導主事研修スライド_クイズ版.pptx
@@ -33,6 +33,7 @@
     <p:sldId id="280" r:id="rId31"/>
     <p:sldId id="270" r:id="rId16"/>
     <p:sldId id="271" r:id="rId17"/>
+    <p:sldId id="282" r:id="rId33"/>
     <p:sldId id="272" r:id="rId18"/>
   </p:sldIdLst>
   <p:sldSz cx="12192000" cy="6858000"/>
@@ -1048,17 +1049,7 @@
           </a:p>
           <a:p>
             <a:r>
-              <a:t>冒頭の写真をもう一度思い出してください。廊下のベンチで足を伸ばして学ぶ姿は、子供を信頼する教育観があってこそ「学んでいる姿」に見えます。最初に「許容できない」と感じた方も、その見え方が少し変わっていればうれしく思います。そして、その姿を支えているのは、約８割を占める普段の授業です。</a:t>
-            </a:r>
-          </a:p>
-          <a:p>
-            <a:r>
-              <a:t>教師中心から、子供の学びを中心へ。見方が変われば、冒頭の写真も違って見えてくるはずです。</a:t>
-            </a:r>
-          </a:p>
-          <a:p>
-            <a:r>
-              <a:t>講義は以上です。ここから質疑応答に移ります。</a:t>
+              <a:t>最後に、もう一度、冒頭の問いに戻ります。</a:t>
             </a:r>
           </a:p>
         </p:txBody>
@@ -1920,6 +1911,77 @@
           <a:p>
             <a:r>
               <a:t>（表現は、講義・協議会の記録で最終確認すること）</a:t>
+            </a:r>
+          </a:p>
+        </p:txBody>
+      </p:sp>
+    </p:spTree>
+  </p:cSld>
+  <p:clrMapOvr>
+    <a:masterClrMapping/>
+  </p:clrMapOvr>
+</p:notes>
+</file>
+
+<file path=ppt/notesSlides/notesSlide27.xml><?xml version="1.0" encoding="utf-8"?>
+<p:notes xmlns:a="http://schemas.openxmlformats.org/drawingml/2006/main" xmlns:p="http://schemas.openxmlformats.org/presentationml/2006/main" xmlns:r="http://schemas.openxmlformats.org/officeDocument/2006/relationships">
+  <p:cSld>
+    <p:spTree>
+      <p:nvGrpSpPr>
+        <p:cNvPr id="1" name=""/>
+        <p:cNvGrpSpPr/>
+        <p:nvPr/>
+      </p:nvGrpSpPr>
+      <p:grpSpPr>
+        <a:xfrm>
+          <a:off x="0" y="0"/>
+          <a:ext cx="0" cy="0"/>
+          <a:chOff x="0" y="0"/>
+          <a:chExt cx="0" cy="0"/>
+        </a:xfrm>
+      </p:grpSpPr>
+      <p:sp>
+        <p:nvSpPr>
+          <p:cNvPr id="3" name="Notes Placeholder 2"/>
+          <p:cNvSpPr>
+            <a:spLocks noGrp="1"/>
+          </p:cNvSpPr>
+          <p:nvPr>
+            <p:ph type="body" idx="1"/>
+          </p:nvPr>
+        </p:nvSpPr>
+        <p:spPr/>
+        <p:txBody>
+          <a:bodyPr/>
+          <a:lstStyle/>
+          <a:p>
+            <a:r>
+              <a:t>（約１分15秒）</a:t>
+            </a:r>
+          </a:p>
+          <a:p>
+            <a:r>
+              <a:t>最後に、もう一度問います。冒頭の写真に、机に座らずに学習に取り組む子供たちの写真を加えました。床に寝そべってタブレットで学ぶ子、窓際に座り込んで仲間と学ぶ子、床に座ってワークシートとタブレットを使う子。（各写真の場面は、撮影時の状況に合わせて補足する）</a:t>
+            </a:r>
+          </a:p>
+          <a:p>
+            <a:r>
+              <a:t>この姿を、あなたは許容できますか。最初と、見え方は変わりましたか。変わったとしたら、何が変わったのでしょうか。隣の人と30秒、話してみてください。</a:t>
+            </a:r>
+          </a:p>
+          <a:p>
+            <a:r>
+              <a:t>（１〜２人に聞く）</a:t>
+            </a:r>
+          </a:p>
+          <a:p>
+            <a:r>
+              <a:t>子供の姿は、最初と同じです。変わったとすれば、それは見る私たちの側です。そして、こうした姿を支えているのは、約８割を占める普段の授業です。</a:t>
+            </a:r>
+          </a:p>
+          <a:p>
+            <a:r>
+              <a:t>講義は以上です。ここから質疑応答に移ります。</a:t>
             </a:r>
           </a:p>
         </p:txBody>
@@ -19636,6 +19698,420 @@
                 </a:solidFill>
               </a:rPr>
               <a:t>答えは、学校の先生方と一緒に探していく</a:t>
+            </a:r>
+          </a:p>
+        </p:txBody>
+      </p:sp>
+    </p:spTree>
+  </p:cSld>
+  <p:clrMapOvr>
+    <a:masterClrMapping/>
+  </p:clrMapOvr>
+</p:sld>
+</file>
+
+<file path=ppt/slides/slide27.xml><?xml version="1.0" encoding="utf-8"?>
+<p:sld xmlns:a="http://schemas.openxmlformats.org/drawingml/2006/main" xmlns:p="http://schemas.openxmlformats.org/presentationml/2006/main" xmlns:r="http://schemas.openxmlformats.org/officeDocument/2006/relationships">
+  <p:cSld>
+    <p:spTree>
+      <p:nvGrpSpPr>
+        <p:cNvPr id="1" name=""/>
+        <p:cNvGrpSpPr/>
+        <p:nvPr/>
+      </p:nvGrpSpPr>
+      <p:grpSpPr/>
+      <p:sp>
+        <p:nvSpPr>
+          <p:cNvPr id="2" name="Text Placeholder 1"/>
+          <p:cNvSpPr>
+            <a:spLocks noGrp="1"/>
+          </p:cNvSpPr>
+          <p:nvPr>
+            <p:ph type="body" idx="100"/>
+          </p:nvPr>
+        </p:nvSpPr>
+        <p:spPr/>
+        <p:txBody>
+          <a:bodyPr/>
+          <a:lstStyle/>
+          <a:p>
+            <a:r>
+              <a:t>おわりに｜もう一度、問い</a:t>
+            </a:r>
+          </a:p>
+        </p:txBody>
+      </p:sp>
+      <p:sp>
+        <p:nvSpPr>
+          <p:cNvPr id="3" name="Title 2"/>
+          <p:cNvSpPr>
+            <a:spLocks noGrp="1"/>
+          </p:cNvSpPr>
+          <p:nvPr>
+            <p:ph type="title" idx="101"/>
+          </p:nvPr>
+        </p:nvSpPr>
+        <p:spPr/>
+        <p:txBody>
+          <a:bodyPr/>
+          <a:lstStyle/>
+          <a:p>
+            <a:r>
+              <a:t>この子供たちの姿を、あなたは許容できますか？</a:t>
+            </a:r>
+          </a:p>
+        </p:txBody>
+      </p:sp>
+      <p:pic>
+        <p:nvPicPr>
+          <p:cNvPr id="4" name="写真 IMG_0087.JPG" descr="image.JPG"/>
+          <p:cNvPicPr>
+            <a:picLocks noChangeAspect="1"/>
+          </p:cNvPicPr>
+          <p:nvPr/>
+        </p:nvPicPr>
+        <p:blipFill>
+          <a:blip r:embed="rId2"/>
+          <a:srcRect t="4943" b="4943"/>
+          <a:stretch>
+            <a:fillRect/>
+          </a:stretch>
+        </p:blipFill>
+        <p:spPr>
+          <a:xfrm>
+            <a:off x="548640" y="1554480"/>
+            <a:ext cx="3314700" cy="2240279"/>
+          </a:xfrm>
+          <a:prstGeom prst="rect">
+            <a:avLst/>
+          </a:prstGeom>
+        </p:spPr>
+      </p:pic>
+      <p:pic>
+        <p:nvPicPr>
+          <p:cNvPr id="5" name="写真 IMG_0201.JPG" descr="IMG_0201.JPG"/>
+          <p:cNvPicPr>
+            <a:picLocks noChangeAspect="1"/>
+          </p:cNvPicPr>
+          <p:nvPr/>
+        </p:nvPicPr>
+        <p:blipFill>
+          <a:blip r:embed="rId3"/>
+          <a:srcRect t="4943" b="4943"/>
+          <a:stretch>
+            <a:fillRect/>
+          </a:stretch>
+        </p:blipFill>
+        <p:spPr>
+          <a:xfrm>
+            <a:off x="4000500" y="1554480"/>
+            <a:ext cx="3314700" cy="2240279"/>
+          </a:xfrm>
+          <a:prstGeom prst="rect">
+            <a:avLst/>
+          </a:prstGeom>
+        </p:spPr>
+      </p:pic>
+      <p:pic>
+        <p:nvPicPr>
+          <p:cNvPr id="6" name="写真 IMG_0147.JPG" descr="IMG_0147.JPG"/>
+          <p:cNvPicPr>
+            <a:picLocks noChangeAspect="1"/>
+          </p:cNvPicPr>
+          <p:nvPr/>
+        </p:nvPicPr>
+        <p:blipFill>
+          <a:blip r:embed="rId4"/>
+          <a:srcRect t="9885"/>
+          <a:stretch>
+            <a:fillRect/>
+          </a:stretch>
+        </p:blipFill>
+        <p:spPr>
+          <a:xfrm>
+            <a:off x="548640" y="3931920"/>
+            <a:ext cx="3314700" cy="2240279"/>
+          </a:xfrm>
+          <a:prstGeom prst="rect">
+            <a:avLst/>
+          </a:prstGeom>
+        </p:spPr>
+      </p:pic>
+      <p:pic>
+        <p:nvPicPr>
+          <p:cNvPr id="7" name="写真 IMG_0189.JPG" descr="IMG_0189.JPG"/>
+          <p:cNvPicPr>
+            <a:picLocks noChangeAspect="1"/>
+          </p:cNvPicPr>
+          <p:nvPr/>
+        </p:nvPicPr>
+        <p:blipFill>
+          <a:blip r:embed="rId5"/>
+          <a:srcRect t="4943" b="4943"/>
+          <a:stretch>
+            <a:fillRect/>
+          </a:stretch>
+        </p:blipFill>
+        <p:spPr>
+          <a:xfrm>
+            <a:off x="4000500" y="3931920"/>
+            <a:ext cx="3314700" cy="2240279"/>
+          </a:xfrm>
+          <a:prstGeom prst="rect">
+            <a:avLst/>
+          </a:prstGeom>
+        </p:spPr>
+      </p:pic>
+      <p:sp>
+        <p:nvSpPr>
+          <p:cNvPr id="8" name="Rounded Rectangle 7"/>
+          <p:cNvSpPr/>
+          <p:nvPr/>
+        </p:nvSpPr>
+        <p:spPr>
+          <a:xfrm>
+            <a:off x="658368" y="1664207"/>
+            <a:ext cx="1143000" cy="347472"/>
+          </a:xfrm>
+          <a:prstGeom prst="roundRect">
+            <a:avLst/>
+          </a:prstGeom>
+          <a:solidFill>
+            <a:srgbClr val="D9702C"/>
+          </a:solidFill>
+          <a:ln>
+            <a:noFill/>
+          </a:ln>
+          <a:effectLst/>
+        </p:spPr>
+        <p:style>
+          <a:lnRef idx="1">
+            <a:schemeClr val="accent1"/>
+          </a:lnRef>
+          <a:fillRef idx="3">
+            <a:schemeClr val="accent1"/>
+          </a:fillRef>
+          <a:effectRef idx="2">
+            <a:schemeClr val="accent1"/>
+          </a:effectRef>
+          <a:fontRef idx="minor">
+            <a:schemeClr val="lt1"/>
+          </a:fontRef>
+        </p:style>
+        <p:txBody>
+          <a:bodyPr rtlCol="0" anchor="ctr" lIns="0" rIns="0" tIns="0" bIns="0"/>
+          <a:lstStyle/>
+          <a:p>
+            <a:pPr algn="ctr"/>
+            <a:r>
+              <a:rPr sz="1200" b="1">
+                <a:solidFill>
+                  <a:srgbClr val="FFFFFF"/>
+                </a:solidFill>
+              </a:rPr>
+              <a:t>冒頭の写真</a:t>
+            </a:r>
+          </a:p>
+        </p:txBody>
+      </p:sp>
+      <p:sp>
+        <p:nvSpPr>
+          <p:cNvPr id="9" name="TextBox 8"/>
+          <p:cNvSpPr txBox="1"/>
+          <p:nvPr/>
+        </p:nvSpPr>
+        <p:spPr>
+          <a:xfrm>
+            <a:off x="7772400" y="1554480"/>
+            <a:ext cx="3870655" cy="365760"/>
+          </a:xfrm>
+          <a:prstGeom prst="rect">
+            <a:avLst/>
+          </a:prstGeom>
+          <a:noFill/>
+        </p:spPr>
+        <p:txBody>
+          <a:bodyPr wrap="square" lIns="0" rIns="0" tIns="0" bIns="0" anchor="ctr">
+            <a:spAutoFit/>
+          </a:bodyPr>
+          <a:lstStyle/>
+          <a:p>
+            <a:pPr algn="l"/>
+            <a:r>
+              <a:rPr sz="1500" b="0">
+                <a:solidFill>
+                  <a:srgbClr val="D3E3D9"/>
+                </a:solidFill>
+              </a:rPr>
+              <a:t>机に座っていないけれど、学んでいる</a:t>
+            </a:r>
+          </a:p>
+        </p:txBody>
+      </p:sp>
+      <p:sp>
+        <p:nvSpPr>
+          <p:cNvPr id="10" name="TextBox 9"/>
+          <p:cNvSpPr txBox="1"/>
+          <p:nvPr/>
+        </p:nvSpPr>
+        <p:spPr>
+          <a:xfrm>
+            <a:off x="7772400" y="2148840"/>
+            <a:ext cx="3870655" cy="1280160"/>
+          </a:xfrm>
+          <a:prstGeom prst="rect">
+            <a:avLst/>
+          </a:prstGeom>
+          <a:noFill/>
+        </p:spPr>
+        <p:txBody>
+          <a:bodyPr wrap="square" lIns="0" rIns="0" tIns="0" bIns="0" anchor="ctr">
+            <a:spAutoFit/>
+          </a:bodyPr>
+          <a:lstStyle/>
+          <a:p>
+            <a:pPr algn="l"/>
+            <a:r>
+              <a:rPr sz="2600" b="1">
+                <a:solidFill>
+                  <a:srgbClr val="FBEADB"/>
+                </a:solidFill>
+              </a:rPr>
+              <a:t>最初と、</a:t>
+            </a:r>
+          </a:p>
+          <a:p>
+            <a:pPr algn="l"/>
+            <a:r>
+              <a:rPr sz="2600" b="1">
+                <a:solidFill>
+                  <a:srgbClr val="FBEADB"/>
+                </a:solidFill>
+              </a:rPr>
+              <a:t>見え方は変わりましたか？</a:t>
+            </a:r>
+          </a:p>
+        </p:txBody>
+      </p:sp>
+      <p:sp>
+        <p:nvSpPr>
+          <p:cNvPr id="11" name="TextBox 10"/>
+          <p:cNvSpPr txBox="1"/>
+          <p:nvPr/>
+        </p:nvSpPr>
+        <p:spPr>
+          <a:xfrm>
+            <a:off x="7772400" y="3657600"/>
+            <a:ext cx="3870655" cy="914400"/>
+          </a:xfrm>
+          <a:prstGeom prst="rect">
+            <a:avLst/>
+          </a:prstGeom>
+          <a:noFill/>
+        </p:spPr>
+        <p:txBody>
+          <a:bodyPr wrap="square" lIns="0" rIns="0" tIns="0" bIns="0" anchor="ctr">
+            <a:spAutoFit/>
+          </a:bodyPr>
+          <a:lstStyle/>
+          <a:p>
+            <a:pPr algn="l"/>
+            <a:r>
+              <a:rPr sz="1700" b="0">
+                <a:solidFill>
+                  <a:srgbClr val="FFFFFF"/>
+                </a:solidFill>
+              </a:rPr>
+              <a:t>変わったとしたら、</a:t>
+            </a:r>
+          </a:p>
+          <a:p>
+            <a:pPr algn="l"/>
+            <a:r>
+              <a:rPr sz="1700" b="0">
+                <a:solidFill>
+                  <a:srgbClr val="FFFFFF"/>
+                </a:solidFill>
+              </a:rPr>
+              <a:t>何が変わったのでしょうか</a:t>
+            </a:r>
+          </a:p>
+        </p:txBody>
+      </p:sp>
+      <p:sp>
+        <p:nvSpPr>
+          <p:cNvPr id="12" name="Rounded Rectangle 11"/>
+          <p:cNvSpPr/>
+          <p:nvPr/>
+        </p:nvSpPr>
+        <p:spPr>
+          <a:xfrm>
+            <a:off x="7772400" y="5349240"/>
+            <a:ext cx="3870655" cy="822960"/>
+          </a:xfrm>
+          <a:prstGeom prst="roundRect">
+            <a:avLst/>
+          </a:prstGeom>
+          <a:noFill/>
+          <a:ln w="15875">
+            <a:solidFill>
+              <a:srgbClr val="7FAF8E"/>
+            </a:solidFill>
+          </a:ln>
+          <a:effectLst/>
+        </p:spPr>
+        <p:style>
+          <a:lnRef idx="1">
+            <a:schemeClr val="accent1"/>
+          </a:lnRef>
+          <a:fillRef idx="3">
+            <a:schemeClr val="accent1"/>
+          </a:fillRef>
+          <a:effectRef idx="2">
+            <a:schemeClr val="accent1"/>
+          </a:effectRef>
+          <a:fontRef idx="minor">
+            <a:schemeClr val="lt1"/>
+          </a:fontRef>
+        </p:style>
+        <p:txBody>
+          <a:bodyPr rtlCol="0" anchor="ctr"/>
+          <a:lstStyle/>
+          <a:p>
+            <a:pPr algn="ctr"/>
+          </a:p>
+        </p:txBody>
+      </p:sp>
+      <p:sp>
+        <p:nvSpPr>
+          <p:cNvPr id="13" name="TextBox 12"/>
+          <p:cNvSpPr txBox="1"/>
+          <p:nvPr/>
+        </p:nvSpPr>
+        <p:spPr>
+          <a:xfrm>
+            <a:off x="8001000" y="5349240"/>
+            <a:ext cx="3413455" cy="822960"/>
+          </a:xfrm>
+          <a:prstGeom prst="rect">
+            <a:avLst/>
+          </a:prstGeom>
+          <a:noFill/>
+        </p:spPr>
+        <p:txBody>
+          <a:bodyPr wrap="square" lIns="0" rIns="0" tIns="0" bIns="0" anchor="ctr">
+            <a:spAutoFit/>
+          </a:bodyPr>
+          <a:lstStyle/>
+          <a:p>
+            <a:pPr algn="l"/>
+            <a:r>
+              <a:rPr sz="1800" b="1">
+                <a:solidFill>
+                  <a:srgbClr val="FFFFFF"/>
+                </a:solidFill>
+              </a:rPr>
+              <a:t>隣の人と30秒</a:t>
             </a:r>
           </a:p>
         </p:txBody>

--- a/天童中部小学校視察/081019_天童中部小学校_指導主事研修スライド_クイズ版.pptx
+++ b/天童中部小学校視察/081019_天童中部小学校_指導主事研修スライド_クイズ版.pptx
@@ -8824,7 +8824,23 @@
                   <a:schemeClr val="accent2"/>
                 </a:solidFill>
               </a:rPr>
-              <a:t>02　講演・鼎談から（上智大学 奈須正裕 氏）</a:t>
+              <a:t>02　講演・鼎談</a:t>
+            </a:r>
+            <a:r>
+              <a:rPr lang="en-US" sz="900" b="1" dirty="0">
+                <a:solidFill>
+                  <a:schemeClr val="accent2"/>
+                </a:solidFill>
+              </a:rPr>
+              <a:t>（ていだん）</a:t>
+            </a:r>
+            <a:r>
+              <a:rPr lang="en-US" sz="1300" b="1" dirty="0">
+                <a:solidFill>
+                  <a:schemeClr val="accent2"/>
+                </a:solidFill>
+              </a:rPr>
+              <a:t>から（上智大学 奈須正裕 氏）</a:t>
             </a:r>
             <a:endParaRPr lang="en-US" sz="1300" dirty="0"/>
           </a:p>
@@ -9568,7 +9584,16 @@
           <a:lstStyle/>
           <a:p>
             <a:r>
-              <a:t>02　講演・鼎談から（上智大学 奈須正裕 氏）</a:t>
+              <a:rPr/>
+              <a:t>02　講演・鼎談</a:t>
+            </a:r>
+            <a:r>
+              <a:rPr sz="900"/>
+              <a:t>（ていだん）</a:t>
+            </a:r>
+            <a:r>
+              <a:rPr/>
+              <a:t>から（上智大学 奈須正裕 氏）</a:t>
             </a:r>
           </a:p>
         </p:txBody>
@@ -10283,7 +10308,23 @@
                   <a:schemeClr val="accent2"/>
                 </a:solidFill>
               </a:rPr>
-              <a:t>02　講演・鼎談から</a:t>
+              <a:t>02　講演・鼎談</a:t>
+            </a:r>
+            <a:r>
+              <a:rPr lang="en-US" sz="900" b="1" dirty="0">
+                <a:solidFill>
+                  <a:schemeClr val="accent2"/>
+                </a:solidFill>
+              </a:rPr>
+              <a:t>（ていだん）</a:t>
+            </a:r>
+            <a:r>
+              <a:rPr lang="en-US" sz="1300" b="1" dirty="0">
+                <a:solidFill>
+                  <a:schemeClr val="accent2"/>
+                </a:solidFill>
+              </a:rPr>
+              <a:t>から</a:t>
             </a:r>
             <a:endParaRPr lang="en-US" sz="1300" dirty="0"/>
           </a:p>
@@ -10323,7 +10364,23 @@
                   <a:schemeClr val="tx2"/>
                 </a:solidFill>
               </a:rPr>
-              <a:t>鼎談・質疑応答から学んだこと</a:t>
+              <a:t>鼎談</a:t>
+            </a:r>
+            <a:r>
+              <a:rPr lang="en-US" sz="1600" b="1" dirty="0">
+                <a:solidFill>
+                  <a:schemeClr val="tx2"/>
+                </a:solidFill>
+              </a:rPr>
+              <a:t>（ていだん）</a:t>
+            </a:r>
+            <a:r>
+              <a:rPr lang="en-US" sz="3000" b="1" dirty="0">
+                <a:solidFill>
+                  <a:schemeClr val="tx2"/>
+                </a:solidFill>
+              </a:rPr>
+              <a:t>・質疑応答から学んだこと</a:t>
             </a:r>
             <a:endParaRPr lang="en-US" sz="3000" dirty="0"/>
           </a:p>
@@ -19050,6 +19107,420 @@
 </file>
 
 <file path=ppt/slides/slide26.xml><?xml version="1.0" encoding="utf-8"?>
+<p:sld xmlns:a="http://schemas.openxmlformats.org/drawingml/2006/main" xmlns:p="http://schemas.openxmlformats.org/presentationml/2006/main" xmlns:r="http://schemas.openxmlformats.org/officeDocument/2006/relationships">
+  <p:cSld>
+    <p:spTree>
+      <p:nvGrpSpPr>
+        <p:cNvPr id="1" name=""/>
+        <p:cNvGrpSpPr/>
+        <p:nvPr/>
+      </p:nvGrpSpPr>
+      <p:grpSpPr/>
+      <p:sp>
+        <p:nvSpPr>
+          <p:cNvPr id="2" name="Text Placeholder 1"/>
+          <p:cNvSpPr>
+            <a:spLocks noGrp="1"/>
+          </p:cNvSpPr>
+          <p:nvPr>
+            <p:ph type="body" idx="100"/>
+          </p:nvPr>
+        </p:nvSpPr>
+        <p:spPr/>
+        <p:txBody>
+          <a:bodyPr/>
+          <a:lstStyle/>
+          <a:p>
+            <a:r>
+              <a:t>おわりに｜もう一度、問い</a:t>
+            </a:r>
+          </a:p>
+        </p:txBody>
+      </p:sp>
+      <p:sp>
+        <p:nvSpPr>
+          <p:cNvPr id="3" name="Title 2"/>
+          <p:cNvSpPr>
+            <a:spLocks noGrp="1"/>
+          </p:cNvSpPr>
+          <p:nvPr>
+            <p:ph type="title" idx="101"/>
+          </p:nvPr>
+        </p:nvSpPr>
+        <p:spPr/>
+        <p:txBody>
+          <a:bodyPr/>
+          <a:lstStyle/>
+          <a:p>
+            <a:r>
+              <a:t>この子供たちの姿を、あなたは許容できますか？</a:t>
+            </a:r>
+          </a:p>
+        </p:txBody>
+      </p:sp>
+      <p:pic>
+        <p:nvPicPr>
+          <p:cNvPr id="4" name="写真 IMG_0087.JPG" descr="image.JPG"/>
+          <p:cNvPicPr>
+            <a:picLocks noChangeAspect="1"/>
+          </p:cNvPicPr>
+          <p:nvPr/>
+        </p:nvPicPr>
+        <p:blipFill>
+          <a:blip r:embed="rId2"/>
+          <a:srcRect t="4943" b="4943"/>
+          <a:stretch>
+            <a:fillRect/>
+          </a:stretch>
+        </p:blipFill>
+        <p:spPr>
+          <a:xfrm>
+            <a:off x="548640" y="1554480"/>
+            <a:ext cx="3314700" cy="2240279"/>
+          </a:xfrm>
+          <a:prstGeom prst="rect">
+            <a:avLst/>
+          </a:prstGeom>
+        </p:spPr>
+      </p:pic>
+      <p:pic>
+        <p:nvPicPr>
+          <p:cNvPr id="5" name="写真 IMG_0201.JPG" descr="IMG_0201.JPG"/>
+          <p:cNvPicPr>
+            <a:picLocks noChangeAspect="1"/>
+          </p:cNvPicPr>
+          <p:nvPr/>
+        </p:nvPicPr>
+        <p:blipFill>
+          <a:blip r:embed="rId3"/>
+          <a:srcRect t="4943" b="4943"/>
+          <a:stretch>
+            <a:fillRect/>
+          </a:stretch>
+        </p:blipFill>
+        <p:spPr>
+          <a:xfrm>
+            <a:off x="4000500" y="1554480"/>
+            <a:ext cx="3314700" cy="2240279"/>
+          </a:xfrm>
+          <a:prstGeom prst="rect">
+            <a:avLst/>
+          </a:prstGeom>
+        </p:spPr>
+      </p:pic>
+      <p:pic>
+        <p:nvPicPr>
+          <p:cNvPr id="6" name="写真 IMG_0147.JPG" descr="IMG_0147.JPG"/>
+          <p:cNvPicPr>
+            <a:picLocks noChangeAspect="1"/>
+          </p:cNvPicPr>
+          <p:nvPr/>
+        </p:nvPicPr>
+        <p:blipFill>
+          <a:blip r:embed="rId4"/>
+          <a:srcRect t="9885"/>
+          <a:stretch>
+            <a:fillRect/>
+          </a:stretch>
+        </p:blipFill>
+        <p:spPr>
+          <a:xfrm>
+            <a:off x="548640" y="3931920"/>
+            <a:ext cx="3314700" cy="2240279"/>
+          </a:xfrm>
+          <a:prstGeom prst="rect">
+            <a:avLst/>
+          </a:prstGeom>
+        </p:spPr>
+      </p:pic>
+      <p:pic>
+        <p:nvPicPr>
+          <p:cNvPr id="7" name="写真 IMG_0189.JPG" descr="IMG_0189.JPG"/>
+          <p:cNvPicPr>
+            <a:picLocks noChangeAspect="1"/>
+          </p:cNvPicPr>
+          <p:nvPr/>
+        </p:nvPicPr>
+        <p:blipFill>
+          <a:blip r:embed="rId5"/>
+          <a:srcRect t="4943" b="4943"/>
+          <a:stretch>
+            <a:fillRect/>
+          </a:stretch>
+        </p:blipFill>
+        <p:spPr>
+          <a:xfrm>
+            <a:off x="4000500" y="3931920"/>
+            <a:ext cx="3314700" cy="2240279"/>
+          </a:xfrm>
+          <a:prstGeom prst="rect">
+            <a:avLst/>
+          </a:prstGeom>
+        </p:spPr>
+      </p:pic>
+      <p:sp>
+        <p:nvSpPr>
+          <p:cNvPr id="8" name="Rounded Rectangle 7"/>
+          <p:cNvSpPr/>
+          <p:nvPr/>
+        </p:nvSpPr>
+        <p:spPr>
+          <a:xfrm>
+            <a:off x="658368" y="1664207"/>
+            <a:ext cx="1143000" cy="347472"/>
+          </a:xfrm>
+          <a:prstGeom prst="roundRect">
+            <a:avLst/>
+          </a:prstGeom>
+          <a:solidFill>
+            <a:srgbClr val="D9702C"/>
+          </a:solidFill>
+          <a:ln>
+            <a:noFill/>
+          </a:ln>
+          <a:effectLst/>
+        </p:spPr>
+        <p:style>
+          <a:lnRef idx="1">
+            <a:schemeClr val="accent1"/>
+          </a:lnRef>
+          <a:fillRef idx="3">
+            <a:schemeClr val="accent1"/>
+          </a:fillRef>
+          <a:effectRef idx="2">
+            <a:schemeClr val="accent1"/>
+          </a:effectRef>
+          <a:fontRef idx="minor">
+            <a:schemeClr val="lt1"/>
+          </a:fontRef>
+        </p:style>
+        <p:txBody>
+          <a:bodyPr rtlCol="0" anchor="ctr" lIns="0" rIns="0" tIns="0" bIns="0"/>
+          <a:lstStyle/>
+          <a:p>
+            <a:pPr algn="ctr"/>
+            <a:r>
+              <a:rPr sz="1200" b="1">
+                <a:solidFill>
+                  <a:srgbClr val="FFFFFF"/>
+                </a:solidFill>
+              </a:rPr>
+              <a:t>冒頭の写真</a:t>
+            </a:r>
+          </a:p>
+        </p:txBody>
+      </p:sp>
+      <p:sp>
+        <p:nvSpPr>
+          <p:cNvPr id="9" name="TextBox 8"/>
+          <p:cNvSpPr txBox="1"/>
+          <p:nvPr/>
+        </p:nvSpPr>
+        <p:spPr>
+          <a:xfrm>
+            <a:off x="7772400" y="1554480"/>
+            <a:ext cx="3870655" cy="365760"/>
+          </a:xfrm>
+          <a:prstGeom prst="rect">
+            <a:avLst/>
+          </a:prstGeom>
+          <a:noFill/>
+        </p:spPr>
+        <p:txBody>
+          <a:bodyPr wrap="square" lIns="0" rIns="0" tIns="0" bIns="0" anchor="ctr">
+            <a:spAutoFit/>
+          </a:bodyPr>
+          <a:lstStyle/>
+          <a:p>
+            <a:pPr algn="l"/>
+            <a:r>
+              <a:rPr sz="1500" b="0">
+                <a:solidFill>
+                  <a:srgbClr val="D3E3D9"/>
+                </a:solidFill>
+              </a:rPr>
+              <a:t>机に座っていないけれど、学んでいる</a:t>
+            </a:r>
+          </a:p>
+        </p:txBody>
+      </p:sp>
+      <p:sp>
+        <p:nvSpPr>
+          <p:cNvPr id="10" name="TextBox 9"/>
+          <p:cNvSpPr txBox="1"/>
+          <p:nvPr/>
+        </p:nvSpPr>
+        <p:spPr>
+          <a:xfrm>
+            <a:off x="7772400" y="2148840"/>
+            <a:ext cx="3870655" cy="1280160"/>
+          </a:xfrm>
+          <a:prstGeom prst="rect">
+            <a:avLst/>
+          </a:prstGeom>
+          <a:noFill/>
+        </p:spPr>
+        <p:txBody>
+          <a:bodyPr wrap="square" lIns="0" rIns="0" tIns="0" bIns="0" anchor="ctr">
+            <a:spAutoFit/>
+          </a:bodyPr>
+          <a:lstStyle/>
+          <a:p>
+            <a:pPr algn="l"/>
+            <a:r>
+              <a:rPr sz="2600" b="1">
+                <a:solidFill>
+                  <a:srgbClr val="FBEADB"/>
+                </a:solidFill>
+              </a:rPr>
+              <a:t>最初と、</a:t>
+            </a:r>
+          </a:p>
+          <a:p>
+            <a:pPr algn="l"/>
+            <a:r>
+              <a:rPr sz="2600" b="1">
+                <a:solidFill>
+                  <a:srgbClr val="FBEADB"/>
+                </a:solidFill>
+              </a:rPr>
+              <a:t>見え方は変わりましたか？</a:t>
+            </a:r>
+          </a:p>
+        </p:txBody>
+      </p:sp>
+      <p:sp>
+        <p:nvSpPr>
+          <p:cNvPr id="11" name="TextBox 10"/>
+          <p:cNvSpPr txBox="1"/>
+          <p:nvPr/>
+        </p:nvSpPr>
+        <p:spPr>
+          <a:xfrm>
+            <a:off x="7772400" y="3657600"/>
+            <a:ext cx="3870655" cy="914400"/>
+          </a:xfrm>
+          <a:prstGeom prst="rect">
+            <a:avLst/>
+          </a:prstGeom>
+          <a:noFill/>
+        </p:spPr>
+        <p:txBody>
+          <a:bodyPr wrap="square" lIns="0" rIns="0" tIns="0" bIns="0" anchor="ctr">
+            <a:spAutoFit/>
+          </a:bodyPr>
+          <a:lstStyle/>
+          <a:p>
+            <a:pPr algn="l"/>
+            <a:r>
+              <a:rPr sz="1700" b="0">
+                <a:solidFill>
+                  <a:srgbClr val="FFFFFF"/>
+                </a:solidFill>
+              </a:rPr>
+              <a:t>変わったとしたら、</a:t>
+            </a:r>
+          </a:p>
+          <a:p>
+            <a:pPr algn="l"/>
+            <a:r>
+              <a:rPr sz="1700" b="0">
+                <a:solidFill>
+                  <a:srgbClr val="FFFFFF"/>
+                </a:solidFill>
+              </a:rPr>
+              <a:t>何が変わったのでしょうか</a:t>
+            </a:r>
+          </a:p>
+        </p:txBody>
+      </p:sp>
+      <p:sp>
+        <p:nvSpPr>
+          <p:cNvPr id="12" name="Rounded Rectangle 11"/>
+          <p:cNvSpPr/>
+          <p:nvPr/>
+        </p:nvSpPr>
+        <p:spPr>
+          <a:xfrm>
+            <a:off x="7772400" y="5349240"/>
+            <a:ext cx="3870655" cy="822960"/>
+          </a:xfrm>
+          <a:prstGeom prst="roundRect">
+            <a:avLst/>
+          </a:prstGeom>
+          <a:noFill/>
+          <a:ln w="15875">
+            <a:solidFill>
+              <a:srgbClr val="7FAF8E"/>
+            </a:solidFill>
+          </a:ln>
+          <a:effectLst/>
+        </p:spPr>
+        <p:style>
+          <a:lnRef idx="1">
+            <a:schemeClr val="accent1"/>
+          </a:lnRef>
+          <a:fillRef idx="3">
+            <a:schemeClr val="accent1"/>
+          </a:fillRef>
+          <a:effectRef idx="2">
+            <a:schemeClr val="accent1"/>
+          </a:effectRef>
+          <a:fontRef idx="minor">
+            <a:schemeClr val="lt1"/>
+          </a:fontRef>
+        </p:style>
+        <p:txBody>
+          <a:bodyPr rtlCol="0" anchor="ctr"/>
+          <a:lstStyle/>
+          <a:p>
+            <a:pPr algn="ctr"/>
+          </a:p>
+        </p:txBody>
+      </p:sp>
+      <p:sp>
+        <p:nvSpPr>
+          <p:cNvPr id="13" name="TextBox 12"/>
+          <p:cNvSpPr txBox="1"/>
+          <p:nvPr/>
+        </p:nvSpPr>
+        <p:spPr>
+          <a:xfrm>
+            <a:off x="8001000" y="5349240"/>
+            <a:ext cx="3413455" cy="822960"/>
+          </a:xfrm>
+          <a:prstGeom prst="rect">
+            <a:avLst/>
+          </a:prstGeom>
+          <a:noFill/>
+        </p:spPr>
+        <p:txBody>
+          <a:bodyPr wrap="square" lIns="0" rIns="0" tIns="0" bIns="0" anchor="ctr">
+            <a:spAutoFit/>
+          </a:bodyPr>
+          <a:lstStyle/>
+          <a:p>
+            <a:pPr algn="l"/>
+            <a:r>
+              <a:rPr sz="1800" b="1">
+                <a:solidFill>
+                  <a:srgbClr val="FFFFFF"/>
+                </a:solidFill>
+              </a:rPr>
+              <a:t>隣の人と30秒</a:t>
+            </a:r>
+          </a:p>
+        </p:txBody>
+      </p:sp>
+    </p:spTree>
+  </p:cSld>
+  <p:clrMapOvr>
+    <a:masterClrMapping/>
+  </p:clrMapOvr>
+</p:sld>
+</file>
+
+<file path=ppt/slides/slide27.xml><?xml version="1.0" encoding="utf-8"?>
 <p:sld xmlns:a="http://schemas.openxmlformats.org/drawingml/2006/main" xmlns:r="http://schemas.openxmlformats.org/officeDocument/2006/relationships" xmlns:p="http://schemas.openxmlformats.org/presentationml/2006/main">
   <p:cSld name="Slide 17">
     <p:spTree>
@@ -19698,420 +20169,6 @@
                 </a:solidFill>
               </a:rPr>
               <a:t>答えは、学校の先生方と一緒に探していく</a:t>
-            </a:r>
-          </a:p>
-        </p:txBody>
-      </p:sp>
-    </p:spTree>
-  </p:cSld>
-  <p:clrMapOvr>
-    <a:masterClrMapping/>
-  </p:clrMapOvr>
-</p:sld>
-</file>
-
-<file path=ppt/slides/slide27.xml><?xml version="1.0" encoding="utf-8"?>
-<p:sld xmlns:a="http://schemas.openxmlformats.org/drawingml/2006/main" xmlns:p="http://schemas.openxmlformats.org/presentationml/2006/main" xmlns:r="http://schemas.openxmlformats.org/officeDocument/2006/relationships">
-  <p:cSld>
-    <p:spTree>
-      <p:nvGrpSpPr>
-        <p:cNvPr id="1" name=""/>
-        <p:cNvGrpSpPr/>
-        <p:nvPr/>
-      </p:nvGrpSpPr>
-      <p:grpSpPr/>
-      <p:sp>
-        <p:nvSpPr>
-          <p:cNvPr id="2" name="Text Placeholder 1"/>
-          <p:cNvSpPr>
-            <a:spLocks noGrp="1"/>
-          </p:cNvSpPr>
-          <p:nvPr>
-            <p:ph type="body" idx="100"/>
-          </p:nvPr>
-        </p:nvSpPr>
-        <p:spPr/>
-        <p:txBody>
-          <a:bodyPr/>
-          <a:lstStyle/>
-          <a:p>
-            <a:r>
-              <a:t>おわりに｜もう一度、問い</a:t>
-            </a:r>
-          </a:p>
-        </p:txBody>
-      </p:sp>
-      <p:sp>
-        <p:nvSpPr>
-          <p:cNvPr id="3" name="Title 2"/>
-          <p:cNvSpPr>
-            <a:spLocks noGrp="1"/>
-          </p:cNvSpPr>
-          <p:nvPr>
-            <p:ph type="title" idx="101"/>
-          </p:nvPr>
-        </p:nvSpPr>
-        <p:spPr/>
-        <p:txBody>
-          <a:bodyPr/>
-          <a:lstStyle/>
-          <a:p>
-            <a:r>
-              <a:t>この子供たちの姿を、あなたは許容できますか？</a:t>
-            </a:r>
-          </a:p>
-        </p:txBody>
-      </p:sp>
-      <p:pic>
-        <p:nvPicPr>
-          <p:cNvPr id="4" name="写真 IMG_0087.JPG" descr="image.JPG"/>
-          <p:cNvPicPr>
-            <a:picLocks noChangeAspect="1"/>
-          </p:cNvPicPr>
-          <p:nvPr/>
-        </p:nvPicPr>
-        <p:blipFill>
-          <a:blip r:embed="rId2"/>
-          <a:srcRect t="4943" b="4943"/>
-          <a:stretch>
-            <a:fillRect/>
-          </a:stretch>
-        </p:blipFill>
-        <p:spPr>
-          <a:xfrm>
-            <a:off x="548640" y="1554480"/>
-            <a:ext cx="3314700" cy="2240279"/>
-          </a:xfrm>
-          <a:prstGeom prst="rect">
-            <a:avLst/>
-          </a:prstGeom>
-        </p:spPr>
-      </p:pic>
-      <p:pic>
-        <p:nvPicPr>
-          <p:cNvPr id="5" name="写真 IMG_0201.JPG" descr="IMG_0201.JPG"/>
-          <p:cNvPicPr>
-            <a:picLocks noChangeAspect="1"/>
-          </p:cNvPicPr>
-          <p:nvPr/>
-        </p:nvPicPr>
-        <p:blipFill>
-          <a:blip r:embed="rId3"/>
-          <a:srcRect t="4943" b="4943"/>
-          <a:stretch>
-            <a:fillRect/>
-          </a:stretch>
-        </p:blipFill>
-        <p:spPr>
-          <a:xfrm>
-            <a:off x="4000500" y="1554480"/>
-            <a:ext cx="3314700" cy="2240279"/>
-          </a:xfrm>
-          <a:prstGeom prst="rect">
-            <a:avLst/>
-          </a:prstGeom>
-        </p:spPr>
-      </p:pic>
-      <p:pic>
-        <p:nvPicPr>
-          <p:cNvPr id="6" name="写真 IMG_0147.JPG" descr="IMG_0147.JPG"/>
-          <p:cNvPicPr>
-            <a:picLocks noChangeAspect="1"/>
-          </p:cNvPicPr>
-          <p:nvPr/>
-        </p:nvPicPr>
-        <p:blipFill>
-          <a:blip r:embed="rId4"/>
-          <a:srcRect t="9885"/>
-          <a:stretch>
-            <a:fillRect/>
-          </a:stretch>
-        </p:blipFill>
-        <p:spPr>
-          <a:xfrm>
-            <a:off x="548640" y="3931920"/>
-            <a:ext cx="3314700" cy="2240279"/>
-          </a:xfrm>
-          <a:prstGeom prst="rect">
-            <a:avLst/>
-          </a:prstGeom>
-        </p:spPr>
-      </p:pic>
-      <p:pic>
-        <p:nvPicPr>
-          <p:cNvPr id="7" name="写真 IMG_0189.JPG" descr="IMG_0189.JPG"/>
-          <p:cNvPicPr>
-            <a:picLocks noChangeAspect="1"/>
-          </p:cNvPicPr>
-          <p:nvPr/>
-        </p:nvPicPr>
-        <p:blipFill>
-          <a:blip r:embed="rId5"/>
-          <a:srcRect t="4943" b="4943"/>
-          <a:stretch>
-            <a:fillRect/>
-          </a:stretch>
-        </p:blipFill>
-        <p:spPr>
-          <a:xfrm>
-            <a:off x="4000500" y="3931920"/>
-            <a:ext cx="3314700" cy="2240279"/>
-          </a:xfrm>
-          <a:prstGeom prst="rect">
-            <a:avLst/>
-          </a:prstGeom>
-        </p:spPr>
-      </p:pic>
-      <p:sp>
-        <p:nvSpPr>
-          <p:cNvPr id="8" name="Rounded Rectangle 7"/>
-          <p:cNvSpPr/>
-          <p:nvPr/>
-        </p:nvSpPr>
-        <p:spPr>
-          <a:xfrm>
-            <a:off x="658368" y="1664207"/>
-            <a:ext cx="1143000" cy="347472"/>
-          </a:xfrm>
-          <a:prstGeom prst="roundRect">
-            <a:avLst/>
-          </a:prstGeom>
-          <a:solidFill>
-            <a:srgbClr val="D9702C"/>
-          </a:solidFill>
-          <a:ln>
-            <a:noFill/>
-          </a:ln>
-          <a:effectLst/>
-        </p:spPr>
-        <p:style>
-          <a:lnRef idx="1">
-            <a:schemeClr val="accent1"/>
-          </a:lnRef>
-          <a:fillRef idx="3">
-            <a:schemeClr val="accent1"/>
-          </a:fillRef>
-          <a:effectRef idx="2">
-            <a:schemeClr val="accent1"/>
-          </a:effectRef>
-          <a:fontRef idx="minor">
-            <a:schemeClr val="lt1"/>
-          </a:fontRef>
-        </p:style>
-        <p:txBody>
-          <a:bodyPr rtlCol="0" anchor="ctr" lIns="0" rIns="0" tIns="0" bIns="0"/>
-          <a:lstStyle/>
-          <a:p>
-            <a:pPr algn="ctr"/>
-            <a:r>
-              <a:rPr sz="1200" b="1">
-                <a:solidFill>
-                  <a:srgbClr val="FFFFFF"/>
-                </a:solidFill>
-              </a:rPr>
-              <a:t>冒頭の写真</a:t>
-            </a:r>
-          </a:p>
-        </p:txBody>
-      </p:sp>
-      <p:sp>
-        <p:nvSpPr>
-          <p:cNvPr id="9" name="TextBox 8"/>
-          <p:cNvSpPr txBox="1"/>
-          <p:nvPr/>
-        </p:nvSpPr>
-        <p:spPr>
-          <a:xfrm>
-            <a:off x="7772400" y="1554480"/>
-            <a:ext cx="3870655" cy="365760"/>
-          </a:xfrm>
-          <a:prstGeom prst="rect">
-            <a:avLst/>
-          </a:prstGeom>
-          <a:noFill/>
-        </p:spPr>
-        <p:txBody>
-          <a:bodyPr wrap="square" lIns="0" rIns="0" tIns="0" bIns="0" anchor="ctr">
-            <a:spAutoFit/>
-          </a:bodyPr>
-          <a:lstStyle/>
-          <a:p>
-            <a:pPr algn="l"/>
-            <a:r>
-              <a:rPr sz="1500" b="0">
-                <a:solidFill>
-                  <a:srgbClr val="D3E3D9"/>
-                </a:solidFill>
-              </a:rPr>
-              <a:t>机に座っていないけれど、学んでいる</a:t>
-            </a:r>
-          </a:p>
-        </p:txBody>
-      </p:sp>
-      <p:sp>
-        <p:nvSpPr>
-          <p:cNvPr id="10" name="TextBox 9"/>
-          <p:cNvSpPr txBox="1"/>
-          <p:nvPr/>
-        </p:nvSpPr>
-        <p:spPr>
-          <a:xfrm>
-            <a:off x="7772400" y="2148840"/>
-            <a:ext cx="3870655" cy="1280160"/>
-          </a:xfrm>
-          <a:prstGeom prst="rect">
-            <a:avLst/>
-          </a:prstGeom>
-          <a:noFill/>
-        </p:spPr>
-        <p:txBody>
-          <a:bodyPr wrap="square" lIns="0" rIns="0" tIns="0" bIns="0" anchor="ctr">
-            <a:spAutoFit/>
-          </a:bodyPr>
-          <a:lstStyle/>
-          <a:p>
-            <a:pPr algn="l"/>
-            <a:r>
-              <a:rPr sz="2600" b="1">
-                <a:solidFill>
-                  <a:srgbClr val="FBEADB"/>
-                </a:solidFill>
-              </a:rPr>
-              <a:t>最初と、</a:t>
-            </a:r>
-          </a:p>
-          <a:p>
-            <a:pPr algn="l"/>
-            <a:r>
-              <a:rPr sz="2600" b="1">
-                <a:solidFill>
-                  <a:srgbClr val="FBEADB"/>
-                </a:solidFill>
-              </a:rPr>
-              <a:t>見え方は変わりましたか？</a:t>
-            </a:r>
-          </a:p>
-        </p:txBody>
-      </p:sp>
-      <p:sp>
-        <p:nvSpPr>
-          <p:cNvPr id="11" name="TextBox 10"/>
-          <p:cNvSpPr txBox="1"/>
-          <p:nvPr/>
-        </p:nvSpPr>
-        <p:spPr>
-          <a:xfrm>
-            <a:off x="7772400" y="3657600"/>
-            <a:ext cx="3870655" cy="914400"/>
-          </a:xfrm>
-          <a:prstGeom prst="rect">
-            <a:avLst/>
-          </a:prstGeom>
-          <a:noFill/>
-        </p:spPr>
-        <p:txBody>
-          <a:bodyPr wrap="square" lIns="0" rIns="0" tIns="0" bIns="0" anchor="ctr">
-            <a:spAutoFit/>
-          </a:bodyPr>
-          <a:lstStyle/>
-          <a:p>
-            <a:pPr algn="l"/>
-            <a:r>
-              <a:rPr sz="1700" b="0">
-                <a:solidFill>
-                  <a:srgbClr val="FFFFFF"/>
-                </a:solidFill>
-              </a:rPr>
-              <a:t>変わったとしたら、</a:t>
-            </a:r>
-          </a:p>
-          <a:p>
-            <a:pPr algn="l"/>
-            <a:r>
-              <a:rPr sz="1700" b="0">
-                <a:solidFill>
-                  <a:srgbClr val="FFFFFF"/>
-                </a:solidFill>
-              </a:rPr>
-              <a:t>何が変わったのでしょうか</a:t>
-            </a:r>
-          </a:p>
-        </p:txBody>
-      </p:sp>
-      <p:sp>
-        <p:nvSpPr>
-          <p:cNvPr id="12" name="Rounded Rectangle 11"/>
-          <p:cNvSpPr/>
-          <p:nvPr/>
-        </p:nvSpPr>
-        <p:spPr>
-          <a:xfrm>
-            <a:off x="7772400" y="5349240"/>
-            <a:ext cx="3870655" cy="822960"/>
-          </a:xfrm>
-          <a:prstGeom prst="roundRect">
-            <a:avLst/>
-          </a:prstGeom>
-          <a:noFill/>
-          <a:ln w="15875">
-            <a:solidFill>
-              <a:srgbClr val="7FAF8E"/>
-            </a:solidFill>
-          </a:ln>
-          <a:effectLst/>
-        </p:spPr>
-        <p:style>
-          <a:lnRef idx="1">
-            <a:schemeClr val="accent1"/>
-          </a:lnRef>
-          <a:fillRef idx="3">
-            <a:schemeClr val="accent1"/>
-          </a:fillRef>
-          <a:effectRef idx="2">
-            <a:schemeClr val="accent1"/>
-          </a:effectRef>
-          <a:fontRef idx="minor">
-            <a:schemeClr val="lt1"/>
-          </a:fontRef>
-        </p:style>
-        <p:txBody>
-          <a:bodyPr rtlCol="0" anchor="ctr"/>
-          <a:lstStyle/>
-          <a:p>
-            <a:pPr algn="ctr"/>
-          </a:p>
-        </p:txBody>
-      </p:sp>
-      <p:sp>
-        <p:nvSpPr>
-          <p:cNvPr id="13" name="TextBox 12"/>
-          <p:cNvSpPr txBox="1"/>
-          <p:nvPr/>
-        </p:nvSpPr>
-        <p:spPr>
-          <a:xfrm>
-            <a:off x="8001000" y="5349240"/>
-            <a:ext cx="3413455" cy="822960"/>
-          </a:xfrm>
-          <a:prstGeom prst="rect">
-            <a:avLst/>
-          </a:prstGeom>
-          <a:noFill/>
-        </p:spPr>
-        <p:txBody>
-          <a:bodyPr wrap="square" lIns="0" rIns="0" tIns="0" bIns="0" anchor="ctr">
-            <a:spAutoFit/>
-          </a:bodyPr>
-          <a:lstStyle/>
-          <a:p>
-            <a:pPr algn="l"/>
-            <a:r>
-              <a:rPr sz="1800" b="1">
-                <a:solidFill>
-                  <a:srgbClr val="FFFFFF"/>
-                </a:solidFill>
-              </a:rPr>
-              <a:t>隣の人と30秒</a:t>
             </a:r>
           </a:p>
         </p:txBody>
@@ -22847,7 +22904,23 @@
                   <a:schemeClr val="tx1"/>
                 </a:solidFill>
               </a:rPr>
-              <a:t>講演・鼎談・質疑応答</a:t>
+              <a:t>講演・鼎談</a:t>
+            </a:r>
+            <a:r>
+              <a:rPr lang="en-US" sz="900" dirty="0" err="1">
+                <a:solidFill>
+                  <a:schemeClr val="tx1"/>
+                </a:solidFill>
+              </a:rPr>
+              <a:t>（ていだん）</a:t>
+            </a:r>
+            <a:r>
+              <a:rPr lang="en-US" sz="1600" dirty="0" err="1">
+                <a:solidFill>
+                  <a:schemeClr val="tx1"/>
+                </a:solidFill>
+              </a:rPr>
+              <a:t>・質疑応答</a:t>
             </a:r>
             <a:endParaRPr lang="en-US" sz="1600" dirty="0"/>
           </a:p>

--- a/天童中部小学校視察/081019_天童中部小学校_指導主事研修スライド_クイズ版.pptx
+++ b/天童中部小学校視察/081019_天童中部小学校_指導主事研修スライド_クイズ版.pptx
@@ -1049,7 +1049,12 @@
           </a:p>
           <a:p>
             <a:r>
-              <a:t>最後に、もう一度、冒頭の問いに戻ります。</a:t>
+              <a:t>冒頭の写真をもう一度思い出してください。廊下のベンチで足を伸ばして学ぶ姿は、子供を信頼する見方があってこそ「学んでいる姿」に見えます。最初に「許容できない」と感じた方も、その見え方が少し変わっていればうれしく思います。そして、その姿を支えているのは、約８割を占める普段の授業です。</a:t>
+            </a:r>
+          </a:p>
+          <a:p>
+            <a:r>
+              <a:t>最後に、調整授業時数制度について補足します。</a:t>
             </a:r>
           </a:p>
         </p:txBody>
@@ -1961,22 +1966,27 @@
           </a:p>
           <a:p>
             <a:r>
-              <a:t>最後に、もう一度問います。冒頭の写真に、机に座らずに学習に取り組む子供たちの写真を加えました。床に寝そべってタブレットで学ぶ子、窓際に座り込んで仲間と学ぶ子、床に座ってワークシートとタブレットを使う子。（各写真の場面は、撮影時の状況に合わせて補足する）</a:t>
-            </a:r>
-          </a:p>
-          <a:p>
-            <a:r>
-              <a:t>この姿を、あなたは許容できますか。最初と、見え方は変わりましたか。変わったとしたら、何が変わったのでしょうか。隣の人と30秒、話してみてください。</a:t>
-            </a:r>
-          </a:p>
-          <a:p>
-            <a:r>
-              <a:t>（１〜２人に聞く）</a:t>
-            </a:r>
-          </a:p>
-          <a:p>
-            <a:r>
-              <a:t>子供の姿は、最初と同じです。変わったとすれば、それは見る私たちの側です。そして、こうした姿を支えているのは、約８割を占める普段の授業です。</a:t>
+              <a:t>最後に、今後、学校から相談が増えると思われる調整授業時数制度について補足します。</a:t>
+            </a:r>
+          </a:p>
+          <a:p>
+            <a:r>
+              <a:t>審議まとめでは、学校や子供の実態に応じて、各教科等の標準授業時数を一定の範囲で調整できる仕組みが示されています。そこで生み出した時間は、子供の個性や特性に応じた学びに充てる「裁量的な時間」とする構想で、その質を担保するために、組織的・計画的に取り組むことが求められています。</a:t>
+            </a:r>
+          </a:p>
+          <a:p>
+            <a:r>
+              <a:t>（参考：８月31日の素案段階では、上限15％程度まで調整した場合、小学校で年間約138コマとの例が報じられた。数値は答申・告示で変わり得るので、紹介する場合はその旨を添える）</a:t>
+            </a:r>
+          </a:p>
+          <a:p>
+            <a:r>
+              <a:t>学校から「時数を減らしたい」と相談されたら、まず一緒に確かめたいことが四つあります。何のために時間を生み出すのか。どの教科・単元をどう精選するのか。生み出した時間で何をするのか。天童中部小のFSPは一つのモデルになります。そして、保護者・地域への説明と、教師の負担、組織での推進です。</a:t>
+            </a:r>
+          </a:p>
+          <a:p>
+            <a:r>
+              <a:t>制度ありきではなく、目指す子供の姿から逆算して考える。ここでも、中心にあるのは子供の学びです。</a:t>
             </a:r>
           </a:p>
           <a:p>
@@ -19132,7 +19142,7 @@
           <a:lstStyle/>
           <a:p>
             <a:r>
-              <a:t>おわりに｜もう一度、問い</a:t>
+              <a:t>04　指導主事として</a:t>
             </a:r>
           </a:p>
         </p:txBody>
@@ -19153,123 +19163,286 @@
           <a:lstStyle/>
           <a:p>
             <a:r>
-              <a:t>この子供たちの姿を、あなたは許容できますか？</a:t>
-            </a:r>
-          </a:p>
-        </p:txBody>
-      </p:sp>
-      <p:pic>
-        <p:nvPicPr>
-          <p:cNvPr id="4" name="写真 IMG_0087.JPG" descr="image.JPG"/>
-          <p:cNvPicPr>
-            <a:picLocks noChangeAspect="1"/>
-          </p:cNvPicPr>
-          <p:nvPr/>
-        </p:nvPicPr>
-        <p:blipFill>
-          <a:blip r:embed="rId2"/>
-          <a:srcRect t="4943" b="4943"/>
-          <a:stretch>
-            <a:fillRect/>
-          </a:stretch>
-        </p:blipFill>
-        <p:spPr>
-          <a:xfrm>
-            <a:off x="548640" y="1554480"/>
-            <a:ext cx="3314700" cy="2240279"/>
-          </a:xfrm>
-          <a:prstGeom prst="rect">
-            <a:avLst/>
-          </a:prstGeom>
-        </p:spPr>
-      </p:pic>
-      <p:pic>
-        <p:nvPicPr>
-          <p:cNvPr id="5" name="写真 IMG_0201.JPG" descr="IMG_0201.JPG"/>
-          <p:cNvPicPr>
-            <a:picLocks noChangeAspect="1"/>
-          </p:cNvPicPr>
-          <p:nvPr/>
-        </p:nvPicPr>
-        <p:blipFill>
-          <a:blip r:embed="rId3"/>
-          <a:srcRect t="4943" b="4943"/>
-          <a:stretch>
-            <a:fillRect/>
-          </a:stretch>
-        </p:blipFill>
-        <p:spPr>
-          <a:xfrm>
-            <a:off x="4000500" y="1554480"/>
-            <a:ext cx="3314700" cy="2240279"/>
-          </a:xfrm>
-          <a:prstGeom prst="rect">
-            <a:avLst/>
-          </a:prstGeom>
-        </p:spPr>
-      </p:pic>
-      <p:pic>
-        <p:nvPicPr>
-          <p:cNvPr id="6" name="写真 IMG_0147.JPG" descr="IMG_0147.JPG"/>
-          <p:cNvPicPr>
-            <a:picLocks noChangeAspect="1"/>
-          </p:cNvPicPr>
-          <p:nvPr/>
-        </p:nvPicPr>
-        <p:blipFill>
-          <a:blip r:embed="rId4"/>
-          <a:srcRect t="9885"/>
-          <a:stretch>
-            <a:fillRect/>
-          </a:stretch>
-        </p:blipFill>
-        <p:spPr>
-          <a:xfrm>
-            <a:off x="548640" y="3931920"/>
-            <a:ext cx="3314700" cy="2240279"/>
-          </a:xfrm>
-          <a:prstGeom prst="rect">
-            <a:avLst/>
-          </a:prstGeom>
-        </p:spPr>
-      </p:pic>
-      <p:pic>
-        <p:nvPicPr>
-          <p:cNvPr id="7" name="写真 IMG_0189.JPG" descr="IMG_0189.JPG"/>
-          <p:cNvPicPr>
-            <a:picLocks noChangeAspect="1"/>
-          </p:cNvPicPr>
-          <p:nvPr/>
-        </p:nvPicPr>
-        <p:blipFill>
-          <a:blip r:embed="rId5"/>
-          <a:srcRect t="4943" b="4943"/>
-          <a:stretch>
-            <a:fillRect/>
-          </a:stretch>
-        </p:blipFill>
-        <p:spPr>
-          <a:xfrm>
-            <a:off x="4000500" y="3931920"/>
-            <a:ext cx="3314700" cy="2240279"/>
-          </a:xfrm>
-          <a:prstGeom prst="rect">
-            <a:avLst/>
-          </a:prstGeom>
-        </p:spPr>
-      </p:pic>
-      <p:sp>
-        <p:nvSpPr>
-          <p:cNvPr id="8" name="Rounded Rectangle 7"/>
+              <a:t>調整授業時数制度とは</a:t>
+            </a:r>
+          </a:p>
+        </p:txBody>
+      </p:sp>
+      <p:sp>
+        <p:nvSpPr>
+          <p:cNvPr id="4" name="Rounded Rectangle 3"/>
           <p:cNvSpPr/>
           <p:nvPr/>
         </p:nvSpPr>
         <p:spPr>
           <a:xfrm>
-            <a:off x="658368" y="1664207"/>
-            <a:ext cx="1143000" cy="347472"/>
+            <a:off x="548640" y="1508760"/>
+            <a:ext cx="5257800" cy="4572000"/>
           </a:xfrm>
           <a:prstGeom prst="roundRect">
+            <a:avLst>
+              <a:gd name="adj" fmla="val 8000"/>
+            </a:avLst>
+          </a:prstGeom>
+          <a:solidFill>
+            <a:srgbClr val="EEF4F0"/>
+          </a:solidFill>
+          <a:ln>
+            <a:noFill/>
+          </a:ln>
+          <a:effectLst/>
+        </p:spPr>
+        <p:style>
+          <a:lnRef idx="1">
+            <a:schemeClr val="accent1"/>
+          </a:lnRef>
+          <a:fillRef idx="3">
+            <a:schemeClr val="accent1"/>
+          </a:fillRef>
+          <a:effectRef idx="2">
+            <a:schemeClr val="accent1"/>
+          </a:effectRef>
+          <a:fontRef idx="minor">
+            <a:schemeClr val="lt1"/>
+          </a:fontRef>
+        </p:style>
+        <p:txBody>
+          <a:bodyPr rtlCol="0" anchor="ctr"/>
+          <a:lstStyle/>
+          <a:p>
+            <a:pPr algn="ctr"/>
+          </a:p>
+        </p:txBody>
+      </p:sp>
+      <p:sp>
+        <p:nvSpPr>
+          <p:cNvPr id="5" name="TextBox 4"/>
+          <p:cNvSpPr txBox="1"/>
+          <p:nvPr/>
+        </p:nvSpPr>
+        <p:spPr>
+          <a:xfrm>
+            <a:off x="822959" y="1645919"/>
+            <a:ext cx="4709160" cy="777240"/>
+          </a:xfrm>
+          <a:prstGeom prst="rect">
+            <a:avLst/>
+          </a:prstGeom>
+          <a:noFill/>
+        </p:spPr>
+        <p:txBody>
+          <a:bodyPr wrap="square" lIns="0" rIns="0" tIns="0" bIns="0" anchor="t">
+            <a:spAutoFit/>
+          </a:bodyPr>
+          <a:lstStyle/>
+          <a:p>
+            <a:pPr algn="l"/>
+            <a:r>
+              <a:rPr sz="1500" b="0">
+                <a:solidFill>
+                  <a:srgbClr val="1E2B27"/>
+                </a:solidFill>
+              </a:rPr>
+              <a:t>学校や子供の実態に応じて、標準授業時数を</a:t>
+            </a:r>
+          </a:p>
+          <a:p>
+            <a:pPr algn="l"/>
+            <a:r>
+              <a:rPr sz="1700" b="1">
+                <a:solidFill>
+                  <a:srgbClr val="1F5A47"/>
+                </a:solidFill>
+              </a:rPr>
+              <a:t>一定の範囲で調整できる仕組み</a:t>
+            </a:r>
+          </a:p>
+        </p:txBody>
+      </p:sp>
+      <p:sp>
+        <p:nvSpPr>
+          <p:cNvPr id="6" name="TextBox 5"/>
+          <p:cNvSpPr txBox="1"/>
+          <p:nvPr/>
+        </p:nvSpPr>
+        <p:spPr>
+          <a:xfrm>
+            <a:off x="822959" y="2606040"/>
+            <a:ext cx="1005840" cy="640080"/>
+          </a:xfrm>
+          <a:prstGeom prst="rect">
+            <a:avLst/>
+          </a:prstGeom>
+          <a:noFill/>
+        </p:spPr>
+        <p:txBody>
+          <a:bodyPr wrap="square" lIns="0" rIns="0" tIns="0" bIns="0" anchor="ctr">
+            <a:spAutoFit/>
+          </a:bodyPr>
+          <a:lstStyle/>
+          <a:p>
+            <a:pPr algn="l"/>
+            <a:r>
+              <a:rPr sz="1400" b="1">
+                <a:solidFill>
+                  <a:srgbClr val="5E6E68"/>
+                </a:solidFill>
+              </a:rPr>
+              <a:t>これまで</a:t>
+            </a:r>
+          </a:p>
+        </p:txBody>
+      </p:sp>
+      <p:sp>
+        <p:nvSpPr>
+          <p:cNvPr id="7" name="Rectangle 6"/>
+          <p:cNvSpPr/>
+          <p:nvPr/>
+        </p:nvSpPr>
+        <p:spPr>
+          <a:xfrm>
+            <a:off x="1874519" y="2606040"/>
+            <a:ext cx="3657600" cy="640080"/>
+          </a:xfrm>
+          <a:prstGeom prst="rect">
+            <a:avLst/>
+          </a:prstGeom>
+          <a:solidFill>
+            <a:srgbClr val="7FAF8E"/>
+          </a:solidFill>
+          <a:ln>
+            <a:noFill/>
+          </a:ln>
+          <a:effectLst/>
+        </p:spPr>
+        <p:style>
+          <a:lnRef idx="1">
+            <a:schemeClr val="accent1"/>
+          </a:lnRef>
+          <a:fillRef idx="3">
+            <a:schemeClr val="accent1"/>
+          </a:fillRef>
+          <a:effectRef idx="2">
+            <a:schemeClr val="accent1"/>
+          </a:effectRef>
+          <a:fontRef idx="minor">
+            <a:schemeClr val="lt1"/>
+          </a:fontRef>
+        </p:style>
+        <p:txBody>
+          <a:bodyPr rtlCol="0" anchor="ctr" lIns="73152" rIns="73152" tIns="0" bIns="0" wrap="square"/>
+          <a:lstStyle/>
+          <a:p>
+            <a:pPr algn="ctr"/>
+            <a:r>
+              <a:rPr sz="1400" b="1">
+                <a:solidFill>
+                  <a:srgbClr val="1F5A47"/>
+                </a:solidFill>
+              </a:rPr>
+              <a:t>各教科等の標準授業時数</a:t>
+            </a:r>
+          </a:p>
+        </p:txBody>
+      </p:sp>
+      <p:sp>
+        <p:nvSpPr>
+          <p:cNvPr id="8" name="TextBox 7"/>
+          <p:cNvSpPr txBox="1"/>
+          <p:nvPr/>
+        </p:nvSpPr>
+        <p:spPr>
+          <a:xfrm>
+            <a:off x="822959" y="3429000"/>
+            <a:ext cx="1005840" cy="640080"/>
+          </a:xfrm>
+          <a:prstGeom prst="rect">
+            <a:avLst/>
+          </a:prstGeom>
+          <a:noFill/>
+        </p:spPr>
+        <p:txBody>
+          <a:bodyPr wrap="square" lIns="0" rIns="0" tIns="0" bIns="0" anchor="ctr">
+            <a:spAutoFit/>
+          </a:bodyPr>
+          <a:lstStyle/>
+          <a:p>
+            <a:pPr algn="l"/>
+            <a:r>
+              <a:rPr sz="1400" b="1">
+                <a:solidFill>
+                  <a:srgbClr val="D9702C"/>
+                </a:solidFill>
+              </a:rPr>
+              <a:t>調整後</a:t>
+            </a:r>
+          </a:p>
+        </p:txBody>
+      </p:sp>
+      <p:sp>
+        <p:nvSpPr>
+          <p:cNvPr id="9" name="Rectangle 8"/>
+          <p:cNvSpPr/>
+          <p:nvPr/>
+        </p:nvSpPr>
+        <p:spPr>
+          <a:xfrm>
+            <a:off x="1874519" y="3429000"/>
+            <a:ext cx="2962656" cy="640080"/>
+          </a:xfrm>
+          <a:prstGeom prst="rect">
+            <a:avLst/>
+          </a:prstGeom>
+          <a:solidFill>
+            <a:srgbClr val="1F5A47"/>
+          </a:solidFill>
+          <a:ln>
+            <a:noFill/>
+          </a:ln>
+          <a:effectLst/>
+        </p:spPr>
+        <p:style>
+          <a:lnRef idx="1">
+            <a:schemeClr val="accent1"/>
+          </a:lnRef>
+          <a:fillRef idx="3">
+            <a:schemeClr val="accent1"/>
+          </a:fillRef>
+          <a:effectRef idx="2">
+            <a:schemeClr val="accent1"/>
+          </a:effectRef>
+          <a:fontRef idx="minor">
+            <a:schemeClr val="lt1"/>
+          </a:fontRef>
+        </p:style>
+        <p:txBody>
+          <a:bodyPr rtlCol="0" anchor="ctr" lIns="73152" rIns="73152" tIns="0" bIns="0" wrap="square"/>
+          <a:lstStyle/>
+          <a:p>
+            <a:pPr algn="ctr"/>
+            <a:r>
+              <a:rPr sz="1400" b="1">
+                <a:solidFill>
+                  <a:srgbClr val="FFFFFF"/>
+                </a:solidFill>
+              </a:rPr>
+              <a:t>各教科等（精選・調整）</a:t>
+            </a:r>
+          </a:p>
+        </p:txBody>
+      </p:sp>
+      <p:sp>
+        <p:nvSpPr>
+          <p:cNvPr id="10" name="Rectangle 9"/>
+          <p:cNvSpPr/>
+          <p:nvPr/>
+        </p:nvSpPr>
+        <p:spPr>
+          <a:xfrm>
+            <a:off x="4873752" y="3429000"/>
+            <a:ext cx="658368" cy="640080"/>
+          </a:xfrm>
+          <a:prstGeom prst="rect">
             <a:avLst/>
           </a:prstGeom>
           <a:solidFill>
@@ -19295,31 +19468,42 @@
           </a:fontRef>
         </p:style>
         <p:txBody>
-          <a:bodyPr rtlCol="0" anchor="ctr" lIns="0" rIns="0" tIns="0" bIns="0"/>
+          <a:bodyPr rtlCol="0" anchor="ctr" lIns="73152" rIns="73152" tIns="0" bIns="0" wrap="square"/>
           <a:lstStyle/>
           <a:p>
             <a:pPr algn="ctr"/>
             <a:r>
-              <a:rPr sz="1200" b="1">
+              <a:rPr sz="1100" b="1">
                 <a:solidFill>
                   <a:srgbClr val="FFFFFF"/>
                 </a:solidFill>
               </a:rPr>
-              <a:t>冒頭の写真</a:t>
-            </a:r>
-          </a:p>
-        </p:txBody>
-      </p:sp>
-      <p:sp>
-        <p:nvSpPr>
-          <p:cNvPr id="9" name="TextBox 8"/>
+              <a:t>裁量的</a:t>
+            </a:r>
+          </a:p>
+          <a:p>
+            <a:pPr algn="ctr"/>
+            <a:r>
+              <a:rPr sz="1100" b="1">
+                <a:solidFill>
+                  <a:srgbClr val="FFFFFF"/>
+                </a:solidFill>
+              </a:rPr>
+              <a:t>な時間</a:t>
+            </a:r>
+          </a:p>
+        </p:txBody>
+      </p:sp>
+      <p:sp>
+        <p:nvSpPr>
+          <p:cNvPr id="11" name="TextBox 10"/>
           <p:cNvSpPr txBox="1"/>
           <p:nvPr/>
         </p:nvSpPr>
         <p:spPr>
           <a:xfrm>
-            <a:off x="7772400" y="1554480"/>
-            <a:ext cx="3870655" cy="365760"/>
+            <a:off x="1874519" y="4114800"/>
+            <a:ext cx="3657600" cy="320040"/>
           </a:xfrm>
           <a:prstGeom prst="rect">
             <a:avLst/>
@@ -19332,104 +19516,14 @@
           </a:bodyPr>
           <a:lstStyle/>
           <a:p>
-            <a:pPr algn="l"/>
-            <a:r>
-              <a:rPr sz="1500" b="0">
-                <a:solidFill>
-                  <a:srgbClr val="D3E3D9"/>
-                </a:solidFill>
-              </a:rPr>
-              <a:t>机に座っていないけれど、学んでいる</a:t>
-            </a:r>
-          </a:p>
-        </p:txBody>
-      </p:sp>
-      <p:sp>
-        <p:nvSpPr>
-          <p:cNvPr id="10" name="TextBox 9"/>
-          <p:cNvSpPr txBox="1"/>
-          <p:nvPr/>
-        </p:nvSpPr>
-        <p:spPr>
-          <a:xfrm>
-            <a:off x="7772400" y="2148840"/>
-            <a:ext cx="3870655" cy="1280160"/>
-          </a:xfrm>
-          <a:prstGeom prst="rect">
-            <a:avLst/>
-          </a:prstGeom>
-          <a:noFill/>
-        </p:spPr>
-        <p:txBody>
-          <a:bodyPr wrap="square" lIns="0" rIns="0" tIns="0" bIns="0" anchor="ctr">
-            <a:spAutoFit/>
-          </a:bodyPr>
-          <a:lstStyle/>
-          <a:p>
-            <a:pPr algn="l"/>
-            <a:r>
-              <a:rPr sz="2600" b="1">
-                <a:solidFill>
-                  <a:srgbClr val="FBEADB"/>
-                </a:solidFill>
-              </a:rPr>
-              <a:t>最初と、</a:t>
-            </a:r>
-          </a:p>
-          <a:p>
-            <a:pPr algn="l"/>
-            <a:r>
-              <a:rPr sz="2600" b="1">
-                <a:solidFill>
-                  <a:srgbClr val="FBEADB"/>
-                </a:solidFill>
-              </a:rPr>
-              <a:t>見え方は変わりましたか？</a:t>
-            </a:r>
-          </a:p>
-        </p:txBody>
-      </p:sp>
-      <p:sp>
-        <p:nvSpPr>
-          <p:cNvPr id="11" name="TextBox 10"/>
-          <p:cNvSpPr txBox="1"/>
-          <p:nvPr/>
-        </p:nvSpPr>
-        <p:spPr>
-          <a:xfrm>
-            <a:off x="7772400" y="3657600"/>
-            <a:ext cx="3870655" cy="914400"/>
-          </a:xfrm>
-          <a:prstGeom prst="rect">
-            <a:avLst/>
-          </a:prstGeom>
-          <a:noFill/>
-        </p:spPr>
-        <p:txBody>
-          <a:bodyPr wrap="square" lIns="0" rIns="0" tIns="0" bIns="0" anchor="ctr">
-            <a:spAutoFit/>
-          </a:bodyPr>
-          <a:lstStyle/>
-          <a:p>
-            <a:pPr algn="l"/>
-            <a:r>
-              <a:rPr sz="1700" b="0">
-                <a:solidFill>
-                  <a:srgbClr val="FFFFFF"/>
-                </a:solidFill>
-              </a:rPr>
-              <a:t>変わったとしたら、</a:t>
-            </a:r>
-          </a:p>
-          <a:p>
-            <a:pPr algn="l"/>
-            <a:r>
-              <a:rPr sz="1700" b="0">
-                <a:solidFill>
-                  <a:srgbClr val="FFFFFF"/>
-                </a:solidFill>
-              </a:rPr>
-              <a:t>何が変わったのでしょうか</a:t>
+            <a:pPr algn="r"/>
+            <a:r>
+              <a:rPr sz="1200" b="1">
+                <a:solidFill>
+                  <a:srgbClr val="D9702C"/>
+                </a:solidFill>
+              </a:rPr>
+              <a:t>↑ 生み出した時間を充てる</a:t>
             </a:r>
           </a:p>
         </p:txBody>
@@ -19442,17 +19536,19 @@
         </p:nvSpPr>
         <p:spPr>
           <a:xfrm>
-            <a:off x="7772400" y="5349240"/>
-            <a:ext cx="3870655" cy="822960"/>
+            <a:off x="822959" y="4617720"/>
+            <a:ext cx="4709160" cy="1234440"/>
           </a:xfrm>
           <a:prstGeom prst="roundRect">
-            <a:avLst/>
-          </a:prstGeom>
-          <a:noFill/>
-          <a:ln w="15875">
-            <a:solidFill>
-              <a:srgbClr val="7FAF8E"/>
-            </a:solidFill>
+            <a:avLst>
+              <a:gd name="adj" fmla="val 8000"/>
+            </a:avLst>
+          </a:prstGeom>
+          <a:solidFill>
+            <a:srgbClr val="FFFFFF"/>
+          </a:solidFill>
+          <a:ln>
+            <a:noFill/>
           </a:ln>
           <a:effectLst/>
         </p:spPr>
@@ -19486,8 +19582,8 @@
         </p:nvSpPr>
         <p:spPr>
           <a:xfrm>
-            <a:off x="8001000" y="5349240"/>
-            <a:ext cx="3413455" cy="822960"/>
+            <a:off x="1005840" y="4617720"/>
+            <a:ext cx="4343400" cy="1234440"/>
           </a:xfrm>
           <a:prstGeom prst="rect">
             <a:avLst/>
@@ -19502,13 +19598,801 @@
           <a:p>
             <a:pPr algn="l"/>
             <a:r>
-              <a:rPr sz="1800" b="1">
+              <a:rPr sz="1500" b="1">
+                <a:solidFill>
+                  <a:srgbClr val="D9702C"/>
+                </a:solidFill>
+              </a:rPr>
+              <a:t>裁量的な時間</a:t>
+            </a:r>
+          </a:p>
+          <a:p>
+            <a:pPr algn="l"/>
+            <a:r>
+              <a:rPr sz="1300" b="0">
+                <a:solidFill>
+                  <a:srgbClr val="1E2B27"/>
+                </a:solidFill>
+              </a:rPr>
+              <a:t>子供の個性や特性に応じた学びに充てる。質を担保するため、組織的・計画的な取組が求められる</a:t>
+            </a:r>
+          </a:p>
+        </p:txBody>
+      </p:sp>
+      <p:sp>
+        <p:nvSpPr>
+          <p:cNvPr id="14" name="TextBox 13"/>
+          <p:cNvSpPr txBox="1"/>
+          <p:nvPr/>
+        </p:nvSpPr>
+        <p:spPr>
+          <a:xfrm>
+            <a:off x="6126479" y="1508760"/>
+            <a:ext cx="5516575" cy="411480"/>
+          </a:xfrm>
+          <a:prstGeom prst="rect">
+            <a:avLst/>
+          </a:prstGeom>
+          <a:noFill/>
+        </p:spPr>
+        <p:txBody>
+          <a:bodyPr wrap="square" lIns="0" rIns="0" tIns="0" bIns="0" anchor="ctr">
+            <a:spAutoFit/>
+          </a:bodyPr>
+          <a:lstStyle/>
+          <a:p>
+            <a:pPr algn="l"/>
+            <a:r>
+              <a:rPr sz="1600" b="1">
+                <a:solidFill>
+                  <a:srgbClr val="D9702C"/>
+                </a:solidFill>
+              </a:rPr>
+              <a:t>学校から相談されたら、一緒に確かめたい４つのこと</a:t>
+            </a:r>
+          </a:p>
+        </p:txBody>
+      </p:sp>
+      <p:sp>
+        <p:nvSpPr>
+          <p:cNvPr id="15" name="Rounded Rectangle 14"/>
+          <p:cNvSpPr/>
+          <p:nvPr/>
+        </p:nvSpPr>
+        <p:spPr>
+          <a:xfrm>
+            <a:off x="6126479" y="2057400"/>
+            <a:ext cx="5516575" cy="889254"/>
+          </a:xfrm>
+          <a:prstGeom prst="roundRect">
+            <a:avLst>
+              <a:gd name="adj" fmla="val 8000"/>
+            </a:avLst>
+          </a:prstGeom>
+          <a:solidFill>
+            <a:srgbClr val="EEF4F0"/>
+          </a:solidFill>
+          <a:ln>
+            <a:noFill/>
+          </a:ln>
+          <a:effectLst/>
+        </p:spPr>
+        <p:style>
+          <a:lnRef idx="1">
+            <a:schemeClr val="accent1"/>
+          </a:lnRef>
+          <a:fillRef idx="3">
+            <a:schemeClr val="accent1"/>
+          </a:fillRef>
+          <a:effectRef idx="2">
+            <a:schemeClr val="accent1"/>
+          </a:effectRef>
+          <a:fontRef idx="minor">
+            <a:schemeClr val="lt1"/>
+          </a:fontRef>
+        </p:style>
+        <p:txBody>
+          <a:bodyPr rtlCol="0" anchor="ctr"/>
+          <a:lstStyle/>
+          <a:p>
+            <a:pPr algn="ctr"/>
+          </a:p>
+        </p:txBody>
+      </p:sp>
+      <p:sp>
+        <p:nvSpPr>
+          <p:cNvPr id="16" name="Oval 15"/>
+          <p:cNvSpPr/>
+          <p:nvPr/>
+        </p:nvSpPr>
+        <p:spPr>
+          <a:xfrm>
+            <a:off x="6309359" y="2227707"/>
+            <a:ext cx="548640" cy="548640"/>
+          </a:xfrm>
+          <a:prstGeom prst="ellipse">
+            <a:avLst/>
+          </a:prstGeom>
+          <a:solidFill>
+            <a:srgbClr val="D9702C"/>
+          </a:solidFill>
+          <a:ln>
+            <a:noFill/>
+          </a:ln>
+          <a:effectLst/>
+        </p:spPr>
+        <p:style>
+          <a:lnRef idx="1">
+            <a:schemeClr val="accent1"/>
+          </a:lnRef>
+          <a:fillRef idx="3">
+            <a:schemeClr val="accent1"/>
+          </a:fillRef>
+          <a:effectRef idx="2">
+            <a:schemeClr val="accent1"/>
+          </a:effectRef>
+          <a:fontRef idx="minor">
+            <a:schemeClr val="lt1"/>
+          </a:fontRef>
+        </p:style>
+        <p:txBody>
+          <a:bodyPr rtlCol="0" anchor="ctr" lIns="73152" rIns="73152" tIns="0" bIns="0" wrap="square"/>
+          <a:lstStyle/>
+          <a:p>
+            <a:pPr algn="ctr"/>
+            <a:r>
+              <a:rPr sz="1600" b="1">
                 <a:solidFill>
                   <a:srgbClr val="FFFFFF"/>
                 </a:solidFill>
               </a:rPr>
-              <a:t>隣の人と30秒</a:t>
-            </a:r>
+              <a:t>1</a:t>
+            </a:r>
+          </a:p>
+        </p:txBody>
+      </p:sp>
+      <p:sp>
+        <p:nvSpPr>
+          <p:cNvPr id="17" name="TextBox 16"/>
+          <p:cNvSpPr txBox="1"/>
+          <p:nvPr/>
+        </p:nvSpPr>
+        <p:spPr>
+          <a:xfrm>
+            <a:off x="7040879" y="2057400"/>
+            <a:ext cx="1188720" cy="889254"/>
+          </a:xfrm>
+          <a:prstGeom prst="rect">
+            <a:avLst/>
+          </a:prstGeom>
+          <a:noFill/>
+        </p:spPr>
+        <p:txBody>
+          <a:bodyPr wrap="square" lIns="0" rIns="0" tIns="0" bIns="0" anchor="ctr">
+            <a:spAutoFit/>
+          </a:bodyPr>
+          <a:lstStyle/>
+          <a:p>
+            <a:pPr algn="l"/>
+            <a:r>
+              <a:rPr sz="1600" b="1">
+                <a:solidFill>
+                  <a:srgbClr val="1F5A47"/>
+                </a:solidFill>
+              </a:rPr>
+              <a:t>目的</a:t>
+            </a:r>
+          </a:p>
+        </p:txBody>
+      </p:sp>
+      <p:sp>
+        <p:nvSpPr>
+          <p:cNvPr id="18" name="TextBox 17"/>
+          <p:cNvSpPr txBox="1"/>
+          <p:nvPr/>
+        </p:nvSpPr>
+        <p:spPr>
+          <a:xfrm>
+            <a:off x="8275319" y="2057400"/>
+            <a:ext cx="3184855" cy="889254"/>
+          </a:xfrm>
+          <a:prstGeom prst="rect">
+            <a:avLst/>
+          </a:prstGeom>
+          <a:noFill/>
+        </p:spPr>
+        <p:txBody>
+          <a:bodyPr wrap="square" lIns="0" rIns="0" tIns="0" bIns="0" anchor="ctr">
+            <a:spAutoFit/>
+          </a:bodyPr>
+          <a:lstStyle/>
+          <a:p>
+            <a:pPr algn="l"/>
+            <a:r>
+              <a:rPr sz="1300" b="0">
+                <a:solidFill>
+                  <a:srgbClr val="1E2B27"/>
+                </a:solidFill>
+              </a:rPr>
+              <a:t>何のために時間を生み出すのか。目指す子供の姿から考える</a:t>
+            </a:r>
+          </a:p>
+        </p:txBody>
+      </p:sp>
+      <p:sp>
+        <p:nvSpPr>
+          <p:cNvPr id="19" name="Rounded Rectangle 18"/>
+          <p:cNvSpPr/>
+          <p:nvPr/>
+        </p:nvSpPr>
+        <p:spPr>
+          <a:xfrm>
+            <a:off x="6126479" y="3102102"/>
+            <a:ext cx="5516575" cy="889254"/>
+          </a:xfrm>
+          <a:prstGeom prst="roundRect">
+            <a:avLst>
+              <a:gd name="adj" fmla="val 8000"/>
+            </a:avLst>
+          </a:prstGeom>
+          <a:solidFill>
+            <a:srgbClr val="EEF4F0"/>
+          </a:solidFill>
+          <a:ln>
+            <a:noFill/>
+          </a:ln>
+          <a:effectLst/>
+        </p:spPr>
+        <p:style>
+          <a:lnRef idx="1">
+            <a:schemeClr val="accent1"/>
+          </a:lnRef>
+          <a:fillRef idx="3">
+            <a:schemeClr val="accent1"/>
+          </a:fillRef>
+          <a:effectRef idx="2">
+            <a:schemeClr val="accent1"/>
+          </a:effectRef>
+          <a:fontRef idx="minor">
+            <a:schemeClr val="lt1"/>
+          </a:fontRef>
+        </p:style>
+        <p:txBody>
+          <a:bodyPr rtlCol="0" anchor="ctr"/>
+          <a:lstStyle/>
+          <a:p>
+            <a:pPr algn="ctr"/>
+          </a:p>
+        </p:txBody>
+      </p:sp>
+      <p:sp>
+        <p:nvSpPr>
+          <p:cNvPr id="20" name="Oval 19"/>
+          <p:cNvSpPr/>
+          <p:nvPr/>
+        </p:nvSpPr>
+        <p:spPr>
+          <a:xfrm>
+            <a:off x="6309359" y="3272409"/>
+            <a:ext cx="548640" cy="548640"/>
+          </a:xfrm>
+          <a:prstGeom prst="ellipse">
+            <a:avLst/>
+          </a:prstGeom>
+          <a:solidFill>
+            <a:srgbClr val="1F5A47"/>
+          </a:solidFill>
+          <a:ln>
+            <a:noFill/>
+          </a:ln>
+          <a:effectLst/>
+        </p:spPr>
+        <p:style>
+          <a:lnRef idx="1">
+            <a:schemeClr val="accent1"/>
+          </a:lnRef>
+          <a:fillRef idx="3">
+            <a:schemeClr val="accent1"/>
+          </a:fillRef>
+          <a:effectRef idx="2">
+            <a:schemeClr val="accent1"/>
+          </a:effectRef>
+          <a:fontRef idx="minor">
+            <a:schemeClr val="lt1"/>
+          </a:fontRef>
+        </p:style>
+        <p:txBody>
+          <a:bodyPr rtlCol="0" anchor="ctr" lIns="73152" rIns="73152" tIns="0" bIns="0" wrap="square"/>
+          <a:lstStyle/>
+          <a:p>
+            <a:pPr algn="ctr"/>
+            <a:r>
+              <a:rPr sz="1600" b="1">
+                <a:solidFill>
+                  <a:srgbClr val="FFFFFF"/>
+                </a:solidFill>
+              </a:rPr>
+              <a:t>2</a:t>
+            </a:r>
+          </a:p>
+        </p:txBody>
+      </p:sp>
+      <p:sp>
+        <p:nvSpPr>
+          <p:cNvPr id="21" name="TextBox 20"/>
+          <p:cNvSpPr txBox="1"/>
+          <p:nvPr/>
+        </p:nvSpPr>
+        <p:spPr>
+          <a:xfrm>
+            <a:off x="7040879" y="3102102"/>
+            <a:ext cx="1188720" cy="889254"/>
+          </a:xfrm>
+          <a:prstGeom prst="rect">
+            <a:avLst/>
+          </a:prstGeom>
+          <a:noFill/>
+        </p:spPr>
+        <p:txBody>
+          <a:bodyPr wrap="square" lIns="0" rIns="0" tIns="0" bIns="0" anchor="ctr">
+            <a:spAutoFit/>
+          </a:bodyPr>
+          <a:lstStyle/>
+          <a:p>
+            <a:pPr algn="l"/>
+            <a:r>
+              <a:rPr sz="1600" b="1">
+                <a:solidFill>
+                  <a:srgbClr val="1F5A47"/>
+                </a:solidFill>
+              </a:rPr>
+              <a:t>教育課程</a:t>
+            </a:r>
+          </a:p>
+        </p:txBody>
+      </p:sp>
+      <p:sp>
+        <p:nvSpPr>
+          <p:cNvPr id="22" name="TextBox 21"/>
+          <p:cNvSpPr txBox="1"/>
+          <p:nvPr/>
+        </p:nvSpPr>
+        <p:spPr>
+          <a:xfrm>
+            <a:off x="8275319" y="3102102"/>
+            <a:ext cx="3184855" cy="889254"/>
+          </a:xfrm>
+          <a:prstGeom prst="rect">
+            <a:avLst/>
+          </a:prstGeom>
+          <a:noFill/>
+        </p:spPr>
+        <p:txBody>
+          <a:bodyPr wrap="square" lIns="0" rIns="0" tIns="0" bIns="0" anchor="ctr">
+            <a:spAutoFit/>
+          </a:bodyPr>
+          <a:lstStyle/>
+          <a:p>
+            <a:pPr algn="l"/>
+            <a:r>
+              <a:rPr sz="1300" b="0">
+                <a:solidFill>
+                  <a:srgbClr val="1E2B27"/>
+                </a:solidFill>
+              </a:rPr>
+              <a:t>どの教科・単元をどう精選するか。カリキュラム全体で見る</a:t>
+            </a:r>
+          </a:p>
+        </p:txBody>
+      </p:sp>
+      <p:sp>
+        <p:nvSpPr>
+          <p:cNvPr id="23" name="Rounded Rectangle 22"/>
+          <p:cNvSpPr/>
+          <p:nvPr/>
+        </p:nvSpPr>
+        <p:spPr>
+          <a:xfrm>
+            <a:off x="6126479" y="4146804"/>
+            <a:ext cx="5516575" cy="889254"/>
+          </a:xfrm>
+          <a:prstGeom prst="roundRect">
+            <a:avLst>
+              <a:gd name="adj" fmla="val 8000"/>
+            </a:avLst>
+          </a:prstGeom>
+          <a:solidFill>
+            <a:srgbClr val="EEF4F0"/>
+          </a:solidFill>
+          <a:ln>
+            <a:noFill/>
+          </a:ln>
+          <a:effectLst/>
+        </p:spPr>
+        <p:style>
+          <a:lnRef idx="1">
+            <a:schemeClr val="accent1"/>
+          </a:lnRef>
+          <a:fillRef idx="3">
+            <a:schemeClr val="accent1"/>
+          </a:fillRef>
+          <a:effectRef idx="2">
+            <a:schemeClr val="accent1"/>
+          </a:effectRef>
+          <a:fontRef idx="minor">
+            <a:schemeClr val="lt1"/>
+          </a:fontRef>
+        </p:style>
+        <p:txBody>
+          <a:bodyPr rtlCol="0" anchor="ctr"/>
+          <a:lstStyle/>
+          <a:p>
+            <a:pPr algn="ctr"/>
+          </a:p>
+        </p:txBody>
+      </p:sp>
+      <p:sp>
+        <p:nvSpPr>
+          <p:cNvPr id="24" name="Oval 23"/>
+          <p:cNvSpPr/>
+          <p:nvPr/>
+        </p:nvSpPr>
+        <p:spPr>
+          <a:xfrm>
+            <a:off x="6309359" y="4317111"/>
+            <a:ext cx="548640" cy="548640"/>
+          </a:xfrm>
+          <a:prstGeom prst="ellipse">
+            <a:avLst/>
+          </a:prstGeom>
+          <a:solidFill>
+            <a:srgbClr val="1F5A47"/>
+          </a:solidFill>
+          <a:ln>
+            <a:noFill/>
+          </a:ln>
+          <a:effectLst/>
+        </p:spPr>
+        <p:style>
+          <a:lnRef idx="1">
+            <a:schemeClr val="accent1"/>
+          </a:lnRef>
+          <a:fillRef idx="3">
+            <a:schemeClr val="accent1"/>
+          </a:fillRef>
+          <a:effectRef idx="2">
+            <a:schemeClr val="accent1"/>
+          </a:effectRef>
+          <a:fontRef idx="minor">
+            <a:schemeClr val="lt1"/>
+          </a:fontRef>
+        </p:style>
+        <p:txBody>
+          <a:bodyPr rtlCol="0" anchor="ctr" lIns="73152" rIns="73152" tIns="0" bIns="0" wrap="square"/>
+          <a:lstStyle/>
+          <a:p>
+            <a:pPr algn="ctr"/>
+            <a:r>
+              <a:rPr sz="1600" b="1">
+                <a:solidFill>
+                  <a:srgbClr val="FFFFFF"/>
+                </a:solidFill>
+              </a:rPr>
+              <a:t>3</a:t>
+            </a:r>
+          </a:p>
+        </p:txBody>
+      </p:sp>
+      <p:sp>
+        <p:nvSpPr>
+          <p:cNvPr id="25" name="TextBox 24"/>
+          <p:cNvSpPr txBox="1"/>
+          <p:nvPr/>
+        </p:nvSpPr>
+        <p:spPr>
+          <a:xfrm>
+            <a:off x="7040879" y="4146804"/>
+            <a:ext cx="1188720" cy="889254"/>
+          </a:xfrm>
+          <a:prstGeom prst="rect">
+            <a:avLst/>
+          </a:prstGeom>
+          <a:noFill/>
+        </p:spPr>
+        <p:txBody>
+          <a:bodyPr wrap="square" lIns="0" rIns="0" tIns="0" bIns="0" anchor="ctr">
+            <a:spAutoFit/>
+          </a:bodyPr>
+          <a:lstStyle/>
+          <a:p>
+            <a:pPr algn="l"/>
+            <a:r>
+              <a:rPr sz="1600" b="1">
+                <a:solidFill>
+                  <a:srgbClr val="1F5A47"/>
+                </a:solidFill>
+              </a:rPr>
+              <a:t>時間の中身</a:t>
+            </a:r>
+          </a:p>
+        </p:txBody>
+      </p:sp>
+      <p:sp>
+        <p:nvSpPr>
+          <p:cNvPr id="26" name="TextBox 25"/>
+          <p:cNvSpPr txBox="1"/>
+          <p:nvPr/>
+        </p:nvSpPr>
+        <p:spPr>
+          <a:xfrm>
+            <a:off x="8275319" y="4146804"/>
+            <a:ext cx="3184855" cy="889254"/>
+          </a:xfrm>
+          <a:prstGeom prst="rect">
+            <a:avLst/>
+          </a:prstGeom>
+          <a:noFill/>
+        </p:spPr>
+        <p:txBody>
+          <a:bodyPr wrap="square" lIns="0" rIns="0" tIns="0" bIns="0" anchor="ctr">
+            <a:spAutoFit/>
+          </a:bodyPr>
+          <a:lstStyle/>
+          <a:p>
+            <a:pPr algn="l"/>
+            <a:r>
+              <a:rPr sz="1300" b="0">
+                <a:solidFill>
+                  <a:srgbClr val="1E2B27"/>
+                </a:solidFill>
+              </a:rPr>
+              <a:t>生み出した時間で何をするか（例：天童中部小のFSP）</a:t>
+            </a:r>
+          </a:p>
+        </p:txBody>
+      </p:sp>
+      <p:sp>
+        <p:nvSpPr>
+          <p:cNvPr id="27" name="Rounded Rectangle 26"/>
+          <p:cNvSpPr/>
+          <p:nvPr/>
+        </p:nvSpPr>
+        <p:spPr>
+          <a:xfrm>
+            <a:off x="6126479" y="5191506"/>
+            <a:ext cx="5516575" cy="889254"/>
+          </a:xfrm>
+          <a:prstGeom prst="roundRect">
+            <a:avLst>
+              <a:gd name="adj" fmla="val 8000"/>
+            </a:avLst>
+          </a:prstGeom>
+          <a:solidFill>
+            <a:srgbClr val="EEF4F0"/>
+          </a:solidFill>
+          <a:ln>
+            <a:noFill/>
+          </a:ln>
+          <a:effectLst/>
+        </p:spPr>
+        <p:style>
+          <a:lnRef idx="1">
+            <a:schemeClr val="accent1"/>
+          </a:lnRef>
+          <a:fillRef idx="3">
+            <a:schemeClr val="accent1"/>
+          </a:fillRef>
+          <a:effectRef idx="2">
+            <a:schemeClr val="accent1"/>
+          </a:effectRef>
+          <a:fontRef idx="minor">
+            <a:schemeClr val="lt1"/>
+          </a:fontRef>
+        </p:style>
+        <p:txBody>
+          <a:bodyPr rtlCol="0" anchor="ctr"/>
+          <a:lstStyle/>
+          <a:p>
+            <a:pPr algn="ctr"/>
+          </a:p>
+        </p:txBody>
+      </p:sp>
+      <p:sp>
+        <p:nvSpPr>
+          <p:cNvPr id="28" name="Oval 27"/>
+          <p:cNvSpPr/>
+          <p:nvPr/>
+        </p:nvSpPr>
+        <p:spPr>
+          <a:xfrm>
+            <a:off x="6309359" y="5361813"/>
+            <a:ext cx="548640" cy="548640"/>
+          </a:xfrm>
+          <a:prstGeom prst="ellipse">
+            <a:avLst/>
+          </a:prstGeom>
+          <a:solidFill>
+            <a:srgbClr val="1F5A47"/>
+          </a:solidFill>
+          <a:ln>
+            <a:noFill/>
+          </a:ln>
+          <a:effectLst/>
+        </p:spPr>
+        <p:style>
+          <a:lnRef idx="1">
+            <a:schemeClr val="accent1"/>
+          </a:lnRef>
+          <a:fillRef idx="3">
+            <a:schemeClr val="accent1"/>
+          </a:fillRef>
+          <a:effectRef idx="2">
+            <a:schemeClr val="accent1"/>
+          </a:effectRef>
+          <a:fontRef idx="minor">
+            <a:schemeClr val="lt1"/>
+          </a:fontRef>
+        </p:style>
+        <p:txBody>
+          <a:bodyPr rtlCol="0" anchor="ctr" lIns="73152" rIns="73152" tIns="0" bIns="0" wrap="square"/>
+          <a:lstStyle/>
+          <a:p>
+            <a:pPr algn="ctr"/>
+            <a:r>
+              <a:rPr sz="1600" b="1">
+                <a:solidFill>
+                  <a:srgbClr val="FFFFFF"/>
+                </a:solidFill>
+              </a:rPr>
+              <a:t>4</a:t>
+            </a:r>
+          </a:p>
+        </p:txBody>
+      </p:sp>
+      <p:sp>
+        <p:nvSpPr>
+          <p:cNvPr id="29" name="TextBox 28"/>
+          <p:cNvSpPr txBox="1"/>
+          <p:nvPr/>
+        </p:nvSpPr>
+        <p:spPr>
+          <a:xfrm>
+            <a:off x="7040879" y="5191506"/>
+            <a:ext cx="1188720" cy="889254"/>
+          </a:xfrm>
+          <a:prstGeom prst="rect">
+            <a:avLst/>
+          </a:prstGeom>
+          <a:noFill/>
+        </p:spPr>
+        <p:txBody>
+          <a:bodyPr wrap="square" lIns="0" rIns="0" tIns="0" bIns="0" anchor="ctr">
+            <a:spAutoFit/>
+          </a:bodyPr>
+          <a:lstStyle/>
+          <a:p>
+            <a:pPr algn="l"/>
+            <a:r>
+              <a:rPr sz="1600" b="1">
+                <a:solidFill>
+                  <a:srgbClr val="1F5A47"/>
+                </a:solidFill>
+              </a:rPr>
+              <a:t>説明と体制</a:t>
+            </a:r>
+          </a:p>
+        </p:txBody>
+      </p:sp>
+      <p:sp>
+        <p:nvSpPr>
+          <p:cNvPr id="30" name="TextBox 29"/>
+          <p:cNvSpPr txBox="1"/>
+          <p:nvPr/>
+        </p:nvSpPr>
+        <p:spPr>
+          <a:xfrm>
+            <a:off x="8275319" y="5191506"/>
+            <a:ext cx="3184855" cy="889254"/>
+          </a:xfrm>
+          <a:prstGeom prst="rect">
+            <a:avLst/>
+          </a:prstGeom>
+          <a:noFill/>
+        </p:spPr>
+        <p:txBody>
+          <a:bodyPr wrap="square" lIns="0" rIns="0" tIns="0" bIns="0" anchor="ctr">
+            <a:spAutoFit/>
+          </a:bodyPr>
+          <a:lstStyle/>
+          <a:p>
+            <a:pPr algn="l"/>
+            <a:r>
+              <a:rPr sz="1300" b="0">
+                <a:solidFill>
+                  <a:srgbClr val="1E2B27"/>
+                </a:solidFill>
+              </a:rPr>
+              <a:t>保護者・地域への説明、教師の負担、組織での推進</a:t>
+            </a:r>
+          </a:p>
+        </p:txBody>
+      </p:sp>
+      <p:sp>
+        <p:nvSpPr>
+          <p:cNvPr id="31" name="TextBox 30"/>
+          <p:cNvSpPr txBox="1"/>
+          <p:nvPr/>
+        </p:nvSpPr>
+        <p:spPr>
+          <a:xfrm>
+            <a:off x="548640" y="6144768"/>
+            <a:ext cx="11094415" cy="237744"/>
+          </a:xfrm>
+          <a:prstGeom prst="rect">
+            <a:avLst/>
+          </a:prstGeom>
+          <a:noFill/>
+        </p:spPr>
+        <p:txBody>
+          <a:bodyPr wrap="square" lIns="0" rIns="0" tIns="0" bIns="0" anchor="ctr">
+            <a:spAutoFit/>
+          </a:bodyPr>
+          <a:lstStyle/>
+          <a:p>
+            <a:pPr algn="r"/>
+            <a:r>
+              <a:rPr sz="1000" b="0">
+                <a:solidFill>
+                  <a:srgbClr val="5E6E68"/>
+                </a:solidFill>
+              </a:rPr>
+              <a:t>出典：中央教育審議会 初等中等教育分科会 教育課程部会「次期学習指導要領等に向けた審議まとめ」（令和８年10月５日）　※名称・詳細は答申・告示で確定する</a:t>
+            </a:r>
+          </a:p>
+        </p:txBody>
+      </p:sp>
+      <p:sp>
+        <p:nvSpPr>
+          <p:cNvPr id="25" name="Slide Number Placeholder 0"/>
+          <p:cNvSpPr>
+            <a:spLocks noGrp="1"/>
+          </p:cNvSpPr>
+          <p:nvPr>
+            <p:ph type="sldNum" sz="quarter" idx="4294967295"/>
+          </p:nvPr>
+        </p:nvSpPr>
+        <p:spPr>
+          <a:xfrm>
+            <a:off x="11185855" y="6419088"/>
+            <a:ext cx="457200" cy="274320"/>
+          </a:xfrm>
+          <a:prstGeom prst="rect">
+            <a:avLst/>
+          </a:prstGeom>
+          <a:extLst>
+            <a:ext uri="{C572A759-6A51-4108-AA02-DFA0A04FC94B}">
+              <ma14:wrappingTextBoxFlag xmlns:ma14="http://schemas.microsoft.com/office/mac/drawingml/2011/main" xmlns="" val="0"/>
+            </a:ext>
+          </a:extLst>
+        </p:spPr>
+        <p:txBody>
+          <a:bodyPr/>
+          <a:lstStyle>
+            <a:lvl1pPr>
+              <a:defRPr sz="1000">
+                <a:solidFill>
+                  <a:schemeClr val="accent5"/>
+                </a:solidFill>
+              </a:defRPr>
+            </a:lvl1pPr>
+          </a:lstStyle>
+          <a:p>
+            <a:pPr algn="r"/>
+            <a:fld id="{F7021451-1387-4CA6-816F-3879F97B5CBC}" type="slidenum">
+              <a:rPr lang="en-US" b="0"/>
+              <a:t>2</a:t>
+            </a:fld>
+            <a:endParaRPr lang="en-US"/>
           </a:p>
         </p:txBody>
       </p:sp>

--- a/天童中部小学校視察/081019_天童中部小学校_指導主事研修スライド_クイズ版.pptx
+++ b/天童中部小学校視察/081019_天童中部小学校_指導主事研修スライド_クイズ版.pptx
@@ -349,11 +349,12 @@
           <a:lstStyle/>
           <a:p>
             <a:r>
-              <a:rPr lang="en-US" dirty="0"/>
-              <a:t>（約30秒）
-指導課の紺多です。10月14日に参加した、山形県天童市立天童中部小学校の教育研究発表会について報告します。
-同校が掲げる「すべての子供は有能である」という子供観を、どのように学校づくりとして具現化しているのか。そして、それが次期学習指導要領の方向性とどう重なるのか。この２点を、指導主事の皆さんと共有したいと思います。
-【写真】枠のアイコンをクリックして挿入（例：校舎外観、発表会の様子）</a:t>
+              <a:t>（20秒）</a:t>
+            </a:r>
+          </a:p>
+          <a:p>
+            <a:r>
+              <a:t>指導課の紺多です。10月14日に参加した、山形県天童市立天童中部小学校の教育研究発表会について報告します。同校の実践と次期学習指導要領の方向性を、重ねてお伝えします。〔クリック〕</a:t>
             </a:r>
           </a:p>
         </p:txBody>
@@ -439,32 +440,12 @@
           <a:lstStyle/>
           <a:p>
             <a:r>
-              <a:t>（約1分15秒）</a:t>
-            </a:r>
-          </a:p>
-          <a:p>
-            <a:r>
-              <a:t>ここから講演の内容です。奈須先生は、個性を２つの「好き」「得意」で捉えていました。</a:t>
-            </a:r>
-          </a:p>
-          <a:p>
-            <a:r>
-              <a:t>一つは学ぶ領域の「得意」。自分の好きな、得意な領域や活動を知っていることです。これを育む典型が個人総合、同校のFSPです。</a:t>
-            </a:r>
-          </a:p>
-          <a:p>
-            <a:r>
-              <a:t>もう一つは学び方の「得意」。自分に合った方法、時間、教材で学習計画を立て、実行できることです。これを育む典型が単元内自由進度学習、同校のMP学習です。</a:t>
-            </a:r>
-          </a:p>
-          <a:p>
-            <a:r>
-              <a:t>どちらも、実際に試行錯誤してみないと分からないし、できるようにならない、という点が強調されていました。</a:t>
-            </a:r>
-          </a:p>
-          <a:p>
-            <a:r>
-              <a:t>後で触れますが、審議まとめでも、学習内容を精選し、子供の「好き」「得意」を育むことが示されています。</a:t>
+              <a:t>（50秒）</a:t>
+            </a:r>
+          </a:p>
+          <a:p>
+            <a:r>
+              <a:t>奈須先生は、個性を2つの「好き」「得意」で捉えていました。学ぶ領域の「得意」を育てるのが個人総合、つまりFSP。学び方の「得意」を育てるのが単元内自由進度学習、つまりMP学習です。どちらも、やってみないと分からないし、できるようにならない。〔クリック〕</a:t>
             </a:r>
           </a:p>
         </p:txBody>
@@ -550,11 +531,12 @@
           <a:lstStyle/>
           <a:p>
             <a:r>
-              <a:rPr lang="en-US" dirty="0"/>
-              <a:t>（約1分）
-講演、鼎談、質疑応答を通して繰り返し語られたのは、好きや得意を伸ばす教育、自己調整学習、多様性の包摂、そして教師の理解と覚悟でした。
-特に印象的だったのは、「MP学習やFSPが目的ではない」という言葉です。根底にある子供観を実現するために、学習システムや環境が設計されている。手法をまねるだけでは同じことにはならない、ということだと受け止めました。
-このほか、緒川小学校以来の個別化・個性化教育の系譜、王寺町の取組、不登校が50万人規模にのぼるという現状、そして調整授業時数制度の生かし方なども話題になりました。</a:t>
+              <a:t>（20秒）</a:t>
+            </a:r>
+          </a:p>
+          <a:p>
+            <a:r>
+              <a:t>鼎談で繰り返されたのが、「MP学習やFSPが目的ではない」。手法をまねても、同じことにはならないということです。〔クリック〕</a:t>
             </a:r>
           </a:p>
         </p:txBody>
@@ -640,10 +622,12 @@
           <a:lstStyle/>
           <a:p>
             <a:r>
-              <a:rPr lang="en-US" dirty="0"/>
-              <a:t>（約40秒）
-ここから次期学習指導要領です。令和６年12月に諮問、令和７年９月に論点整理が出され、今月５日に中教審の教育課程部会から「審議まとめ」が公表されました。11月５日まで意見公募が行われています。今冬に答申、小・中学校は今年度内の告示が見込まれています。
-全面実施の年度などは答申・告示で確定します。学校に説明する際は、最新の文部科学省資料で確認してください。</a:t>
+              <a:t>（30秒）</a:t>
+            </a:r>
+          </a:p>
+          <a:p>
+            <a:r>
+              <a:t>10月5日に中教審の「審議まとめ」が公表され、11月5日まで意見公募中です。今冬に答申、小・中学校は今年度内の告示が見込まれています。全面実施の年度は、答申・告示で確定します。〔クリック〕</a:t>
             </a:r>
           </a:p>
         </p:txBody>
@@ -729,13 +713,17 @@
           <a:lstStyle/>
           <a:p>
             <a:r>
-              <a:rPr lang="en-US" dirty="0"/>
-              <a:t>（約1分15秒）
-審議まとめは、次期学習指導要領の基盤として３つの方向性を示しています。
-１つ目は「主体的・対話的で深い学び」の実装。現行の学習指導要領の考え方を、日常の授業で実現する段階に進めることです。天童中部小は、MP学習を各教科の単元計画に位置付け、日常化していました。
-２つ目は多様性の包摂。興味・関心や特性、学ぶペースの違いを前提に、すべての子供の学びを保障することです。同校では、学ぶ内容、方法、場所を子供が選べ、FSPでは一人一人が自分のテーマをもっています。
-３つ目は実現可能性の確保。学習内容の精選や柔軟な教育課程で、学校が無理なく実現できるようにすることです。同校は４つの学びをカリキュラム全体で組み合わせ、学校全体のシステムとして動かしていました。
-同校の実践は、３つの方向性を先取りした姿として見ることができます。</a:t>
+              <a:t>（50秒）</a:t>
+            </a:r>
+          </a:p>
+          <a:p>
+            <a:r>
+              <a:t>1つ目は「主体的・対話的で深い学び」の実装。日常の授業で実現する段階へ進むことです。2つ目は多様性の包摂。一人一人の違いを前提に、すべての子供の学びを保障すること。3つ目は実現可能性の確保。学校が無理なく実現できるようにすることです。</a:t>
+            </a:r>
+          </a:p>
+          <a:p>
+            <a:r>
+              <a:t>天童中部小の実践は、この3つを先取りした姿として見ることができます。〔クリック〕</a:t>
             </a:r>
           </a:p>
         </p:txBody>
@@ -821,13 +809,12 @@
           <a:lstStyle/>
           <a:p>
             <a:r>
-              <a:rPr lang="en-US" dirty="0"/>
-              <a:t>（約1分30秒）
-審議まとめに示された主な改善の方向を６つに整理し、それぞれ天童中部小の実践と結び付けました。
-目標・内容は、中核的な概念等を軸に構造化して示す方向です。
-オレンジの２つは、学校のカリキュラム・マネジメントに直結する制度です。調整授業時数制度は、学校の実態に応じて標準授業時数を一定の範囲で調整できる仕組みで、生み出した時間を、子供の個性や特性に応じた学びに充てるのが「裁量的な時間」です。同校のFSPは、この時間の使い方の一つのモデルになると考えます。
-そのほか、情報活用能力の抜本的向上、「主体的に学習に取り組む態度」の評価の在り方などを見直す学習評価の改善、学習内容を精選して「好き」「得意」を育むことが示されています。
-名称や詳細は答申・告示で確定します。</a:t>
+              <a:t>（40秒）</a:t>
+            </a:r>
+          </a:p>
+          <a:p>
+            <a:r>
+              <a:t>主な改善の方向を、同校の実践と結び付けました。特にオレンジの2つ、調整授業時数制度と裁量的な時間は、学校のカリキュラムに直結します。詳しくは最後に補足します。〔クリック〕</a:t>
             </a:r>
           </a:p>
         </p:txBody>
@@ -913,37 +900,12 @@
           <a:lstStyle/>
           <a:p>
             <a:r>
-              <a:t>（約1分）</a:t>
-            </a:r>
-          </a:p>
-          <a:p>
-            <a:r>
-              <a:t>最後に、私たち指導主事としてどう生かすかです。学校訪問・指導助言で大切にしたい視点を４つ挙げます。</a:t>
-            </a:r>
-          </a:p>
-          <a:p>
-            <a:r>
-              <a:t>１つ目、手法より子供観から。「〇〇学習を導入しましょう」ではなく、子供をどう捉えるかから学校と対話したいと思います。「MP学習やFSPが目的ではない」という言葉のとおりです。</a:t>
-            </a:r>
-          </a:p>
-          <a:p>
-            <a:r>
-              <a:t>２つ目、「子供がどう学んだか」を見る。発問や板書に加えて、子供の選択と自己調整の姿を見取ることです。</a:t>
-            </a:r>
-          </a:p>
-          <a:p>
-            <a:r>
-              <a:t>３つ目、教師を「教える人」から「伴走する人」へ。統制ではなく、環境を整え、一人一人を支える授業づくりを後押しします。</a:t>
-            </a:r>
-          </a:p>
-          <a:p>
-            <a:r>
-              <a:t>４つ目、教育課程に位置付ける。単発の取組で終わらせず、単元計画や時数、次期の調整授業時数制度や裁量的な時間まで、学校と一緒に考えることです。</a:t>
-            </a:r>
-          </a:p>
-          <a:p>
-            <a:r>
-              <a:t>そして何より、同校でも約８割は普段の一斉授業です。新しい学習形態だけを探すのではなく、普段の授業で子供が学び方を身に付けているか、そこを一緒に見ていくことが、私たち指導主事の役割だと考えます。</a:t>
+              <a:t>（40秒）</a:t>
+            </a:r>
+          </a:p>
+          <a:p>
+            <a:r>
+              <a:t>指導主事としては、4つです。手法より子供観から対話する。「子供がどう学んだか」を見る。教師を「伴走する人」へ後押しする。単発で終わらせず、教育課程に位置付ける。〔クリック〕</a:t>
             </a:r>
           </a:p>
         </p:txBody>
@@ -1029,32 +991,17 @@
           <a:lstStyle/>
           <a:p>
             <a:r>
-              <a:t>（約40秒）</a:t>
-            </a:r>
-          </a:p>
-          <a:p>
-            <a:r>
-              <a:t>まとめです。自己調整学習や探究的な学びの実現に必要なのは、手法以上に「子供を信頼する教育観」と、それを支える学校文化である。これが今回の視察で最も強く実感したことです。</a:t>
-            </a:r>
-          </a:p>
-          <a:p>
-            <a:r>
-              <a:t>天童中部小は、４つの学びをカリキュラムで一体的に構想し、子供が学び方を主体的に選び、調整していました。次期学習指導要領の方向性を先取りした姿だと言えます。</a:t>
-            </a:r>
-          </a:p>
-          <a:p>
-            <a:r>
-              <a:t>次の一歩として、ぜひ審議まとめの本文を読んでみてください。そして次の学校訪問で、「子供がどう学んだか」という視点を一度試してみてください。</a:t>
-            </a:r>
-          </a:p>
-          <a:p>
-            <a:r>
-              <a:t>冒頭の写真をもう一度思い出してください。廊下のベンチで足を伸ばして学ぶ姿は、子供を信頼する見方があってこそ「学んでいる姿」に見えます。最初に「許容できない」と感じた方も、その見え方が少し変わっていればうれしく思います。そして、その姿を支えているのは、約８割を占める普段の授業です。</a:t>
-            </a:r>
-          </a:p>
-          <a:p>
-            <a:r>
-              <a:t>最後に、調整授業時数制度について補足します。</a:t>
+              <a:t>（40秒）</a:t>
+            </a:r>
+          </a:p>
+          <a:p>
+            <a:r>
+              <a:t>必要なのは、手法以上に「子供を信頼する教育観」と、それを支える学校文化です。</a:t>
+            </a:r>
+          </a:p>
+          <a:p>
+            <a:r>
+              <a:t>冒頭の写真を思い出してください。最初と、見え方は変わったでしょうか。そしてその姿を支えているのは、約8割の普段の授業です。最後に、調整授業時数制度を補足します。〔クリック〕</a:t>
             </a:r>
           </a:p>
         </p:txBody>
@@ -1140,7 +1087,7 @@
           <a:lstStyle/>
           <a:p>
             <a:r>
-              <a:t>（質疑応答 ５分）</a:t>
+              <a:t>（質疑応答 5分）</a:t>
             </a:r>
           </a:p>
           <a:p>
@@ -1150,58 +1097,68 @@
           </a:p>
           <a:p>
             <a:r>
-              <a:t>最後に、次の学校訪問に持ち帰っていただきたい問いを二つ挙げます。一つは「この授業の中心にあるのは、何か」。教師の計画や指示か、それとも子供の学びか。もう一つは「普段の授業で、どんな学び方が育っているか」。子供に任せる学びを支える土台は、約８割の普段の授業です。</a:t>
-            </a:r>
-          </a:p>
-          <a:p>
-            <a:r>
-              <a:t>答えは私たちが持っているのではなく、学校の先生方と一緒に探していくものだと思います。ありがとうございました。</a:t>
+              <a:t>最後に、次の学校訪問に持ち帰ってほしい問いを2つ挙げます。「この授業の中心にあるのは、何か」「普段の授業で、どんな学び方が育っているか」。答えは、学校の先生方と一緒に探していきましょう。ありがとうございました。</a:t>
+            </a:r>
+          </a:p>
+          <a:p>
+            <a:r>
+              <a:t>《進め方》質問が出なければ、持ち帰りの問いを先に読み、「担当校ではどうですか」と1人に振る。</a:t>
             </a:r>
           </a:p>
           <a:p/>
           <a:p>
             <a:r>
-              <a:t>【想定質問と回答の例】</a:t>
-            </a:r>
-          </a:p>
-          <a:p>
-            <a:r>
-              <a:t>Q　自由進度学習と同じではないのか。</a:t>
-            </a:r>
-          </a:p>
-          <a:p>
-            <a:r>
-              <a:t>A　講演では単元内自由進度学習の典型として紹介された。ただ同校では、進度を自由にすることより、ゴールに向かって計画し、修正しながら学ぶ「自己調整」を重視している。</a:t>
-            </a:r>
-          </a:p>
-          <a:p>
-            <a:r>
-              <a:t>Q　学習が遅れる子や学力差への対応は。</a:t>
-            </a:r>
-          </a:p>
-          <a:p>
-            <a:r>
-              <a:t>A　教師が一斉指導から離れる分、個別の見取りと支援に回っている。学習計画表と振り返りで進み具合を把握している。具体的な成果データは今回の資料では確認できていないため、必要なら同校に照会する。</a:t>
-            </a:r>
-          </a:p>
-          <a:p>
-            <a:r>
-              <a:t>Q　練馬区の学校では、何から始めればよいか。</a:t>
-            </a:r>
-          </a:p>
-          <a:p>
-            <a:r>
-              <a:t>A　手法の導入より先に、子供観の共有から。そのうえで、一つの教科の一つの単元で、学習計画表を使った学習を試すことが現実的。いきなり自由にせず、自由度を段階的に高めていくのが同校の進め方。</a:t>
-            </a:r>
-          </a:p>
-          <a:p>
-            <a:r>
-              <a:t>Q　調整授業時数制度はいつから使えるのか。</a:t>
-            </a:r>
-          </a:p>
-          <a:p>
-            <a:r>
-              <a:t>A　審議まとめの段階で、名称・詳細は答申・告示で確定する。現時点では、文部科学省の資料で最新情報を確認してほしい。</a:t>
+              <a:t>【想定問答】</a:t>
+            </a:r>
+          </a:p>
+          <a:p>
+            <a:r>
+              <a:t>Q 自由進度学習と同じではないのか。</a:t>
+            </a:r>
+          </a:p>
+          <a:p>
+            <a:r>
+              <a:t>A 講演では単元内自由進度学習の典型と紹介された。ただし同校は、進度よりも「計画を直しながら学ぶ自己調整」を重視している。</a:t>
+            </a:r>
+          </a:p>
+          <a:p>
+            <a:r>
+              <a:t>Q 学習が遅れる子や学力差への対応は。</a:t>
+            </a:r>
+          </a:p>
+          <a:p>
+            <a:r>
+              <a:t>A 教師は一斉指導から離れた分、個別の見取りと支援に回る。学習計画表と振り返りで進み具合を把握している。成果データは今回の資料では未確認のため、必要なら同校に照会する。</a:t>
+            </a:r>
+          </a:p>
+          <a:p>
+            <a:r>
+              <a:t>Q 練馬区の学校では何から始めるか。</a:t>
+            </a:r>
+          </a:p>
+          <a:p>
+            <a:r>
+              <a:t>A 手法より先に、子供観の共有から。次に、1教科の1単元で学習計画表を使ってみる。自由度は段階的に高める。</a:t>
+            </a:r>
+          </a:p>
+          <a:p>
+            <a:r>
+              <a:t>Q 調整授業時数制度はいつから使えるか。</a:t>
+            </a:r>
+          </a:p>
+          <a:p>
+            <a:r>
+              <a:t>A 現在は審議まとめの段階。名称・詳細・実施時期は答申・告示で確定するので、文部科学省の最新資料で確認する。</a:t>
+            </a:r>
+          </a:p>
+          <a:p>
+            <a:r>
+              <a:t>Q マイ探究に評価が必要ないとは、通知表はどうするのか。</a:t>
+            </a:r>
+          </a:p>
+          <a:p>
+            <a:r>
+              <a:t>A 奈須先生の趣旨は「学校の物差しで好き・得意を測らない」こと。制度上の扱いは各校の評価計画によるので、個別に確認する。</a:t>
             </a:r>
           </a:p>
         </p:txBody>
@@ -1275,53 +1232,27 @@
           <a:lstStyle/>
           <a:p>
             <a:r>
-              <a:t>（導入の問い　約２分）</a:t>
-            </a:r>
-          </a:p>
-          <a:p>
-            <a:r>
-              <a:t>本題に入る前に、一枚の写真を見てください。ある小学校の、学習の時間の一場面です。</a:t>
-            </a:r>
-          </a:p>
-          <a:p>
-            <a:r>
-              <a:t>タブレットを手に、廊下のベンチに座ったり、足を伸ばしたりして学んでいます。</a:t>
-            </a:r>
-          </a:p>
-          <a:p>
-            <a:r>
-              <a:t>皆さんが学校訪問でこの場面に出会ったら、この姿を許容できますか。A 許容できる、B 場面によっては許容できる、C 許容できない。手を挙げてください。（挙手）</a:t>
-            </a:r>
-          </a:p>
-          <a:p>
-            <a:r>
-              <a:t>なぜそう思ったのか、隣の人と30秒話してみてください。（１〜２人に聞く）</a:t>
-            </a:r>
-          </a:p>
-          <a:p>
-            <a:r>
-              <a:t>「姿勢がよくない」「教室にいない」「先生の目が届かない」と感じた方もいると思います。実はこれは、天童中部小学校で、子供が自分で学ぶ場所を選び、学習を進めている姿です。</a:t>
-            </a:r>
-          </a:p>
-          <a:p>
-            <a:r>
-              <a:t>ただし、同校でもこうした学び方は授業の約２割です。約８割は、子供と教師が共に創る一斉授業。普段の授業で学び方を身に付けているからこそ、この姿が成り立っています。</a:t>
-            </a:r>
-          </a:p>
-          <a:p>
-            <a:r>
-              <a:t>私たちが「許容できない」と感じるとき、その基準はどこから来ているのでしょうか。子供を「指示を待つ存在」と見るか、「自ら学びを創る存在」と見るかで、同じ姿の見え方は変わります。</a:t>
-            </a:r>
-          </a:p>
-          <a:p>
-            <a:r>
-              <a:t>今日は、この問いを持ったまま報告を聞いていただければと思います。最後に、もう一度この写真に戻ります。</a:t>
-            </a:r>
-          </a:p>
-          <a:p/>
-          <a:p>
-            <a:r>
-              <a:t>【進め方のポイント】正解を示す場ではないので、Cを選んだ人を否定しない。「なぜ気になるのか」を言葉にしてもらうことが、指導観を見直す入口になる。</a:t>
+              <a:t>（1分30秒）</a:t>
+            </a:r>
+          </a:p>
+          <a:p>
+            <a:r>
+              <a:t>まず、一枚の写真を見てください。ある小学校の、学習の時間の一場面です。学校訪問でこの場面に出会ったら、この姿を許容できますか。A、B、Cで手を挙げてください。〔挙手〕</a:t>
+            </a:r>
+          </a:p>
+          <a:p>
+            <a:r>
+              <a:t>なぜそう思ったか、隣の人と30秒でどうぞ。〔ペア30秒〕</a:t>
+            </a:r>
+          </a:p>
+          <a:p>
+            <a:r>
+              <a:t>実はこれは、天童中部小学校で子供が学ぶ場所を自分で選んで、学習を進めている姿です。「許容できない」と感じるとき、その基準はどこから来ているのでしょうか。この問いを持ったまま、聞いてください。〔クリック〕</a:t>
+            </a:r>
+          </a:p>
+          <a:p>
+            <a:r>
+              <a:t>《進め方》Cを選んだ人を否定しない。指名はしない（時間を守る）。「約2割しかない」ことはQUIZ 1で明かすので、ここでは言わない。</a:t>
             </a:r>
           </a:p>
         </p:txBody>
@@ -1367,22 +1298,12 @@
           <a:lstStyle/>
           <a:p>
             <a:r>
-              <a:t>（約45秒）</a:t>
-            </a:r>
-          </a:p>
-          <a:p>
-            <a:r>
-              <a:t>ここで、同校の授業の約８割を占める普段の授業を見ておきます。公開授業では、子供と教師が共に授業を創っていました。</a:t>
-            </a:r>
-          </a:p>
-          <a:p>
-            <a:r>
-              <a:t>例えば、画面には「答えだけ言う」ではなく「式の意味、図と結びつける」と、学び方そのものが示されていました。子供が黒板に考えを書き、全体で練り上げていく場面もありました。</a:t>
-            </a:r>
-          </a:p>
-          <a:p>
-            <a:r>
-              <a:t>こうした普段の授業で学び方を身に付けているからこそ、MP学習やFSPのように子供に任せる２割が成り立ちます。新しい学習形態に目が向きがちですが、土台は普段の授業です。</a:t>
+              <a:t>（30秒）</a:t>
+            </a:r>
+          </a:p>
+          <a:p>
+            <a:r>
+              <a:t>その8割の普段の授業です。画面には「答えだけ言う」ではなく「式の意味、図と結びつける」と、学び方そのものが示されていました。ここで身に付けた学び方が、任せる2割を支えています。土台は普段の授業です。〔クリック〕</a:t>
             </a:r>
           </a:p>
         </p:txBody>
@@ -1440,17 +1361,12 @@
           <a:lstStyle/>
           <a:p>
             <a:r>
-              <a:t>（約40秒）</a:t>
-            </a:r>
-          </a:p>
-          <a:p>
-            <a:r>
-              <a:t>本日のねらいは、天童中部小学校の取組から、子供の学びを中心に据える授業の見方について考え、次期学習指導要領の方向性を指導主事の間で共有することです。</a:t>
-            </a:r>
-          </a:p>
-          <a:p>
-            <a:r>
-              <a:t>時間は30分です。講義25分の中で、今の問いに加えてクイズを３問用意しました。隣の方と話し合いながら進めます。最後の５分を質疑応答とします。</a:t>
+              <a:t>（20秒）</a:t>
+            </a:r>
+          </a:p>
+          <a:p>
+            <a:r>
+              <a:t>ねらいは、子供の学びを中心に据える授業の見方を考え、次期学習指導要領の方向性を共有することです。講義20分の中でクイズを3問出します。最後の5分で質疑応答です。〔クリック〕</a:t>
             </a:r>
           </a:p>
         </p:txBody>
@@ -1524,27 +1440,12 @@
           <a:lstStyle/>
           <a:p>
             <a:r>
-              <a:t>（約１分）</a:t>
-            </a:r>
-          </a:p>
-          <a:p>
-            <a:r>
-              <a:t>今の問いかけは、アイスブレイクの一つの手本として組み立てました。学校の校内研修の冒頭でもそのまま使える型です。</a:t>
-            </a:r>
-          </a:p>
-          <a:p>
-            <a:r>
-              <a:t>写真１枚で具体を見せる。A・B・Cで立場を選んでもらう。隣の人と30秒、理由を話す。種明かしで事実を知る。そして「その基準はどこから来ているのか」と問い返し、本題につなげる。</a:t>
-            </a:r>
-          </a:p>
-          <a:p>
-            <a:r>
-              <a:t>ポイントは３つです。正解を求めず、違和感を出してもらうこと。挙手とペアで、全員が一度は口を開くこと。最後に本題へつなげ、講義の終わりで回収することです。</a:t>
-            </a:r>
-          </a:p>
-          <a:p>
-            <a:r>
-              <a:t>写真と問いを替えれば、板書やノート、休み時間の一場面など、どの研修テーマにも応用できます。</a:t>
+              <a:t>（40秒）</a:t>
+            </a:r>
+          </a:p>
+          <a:p>
+            <a:r>
+              <a:t>今の問いかけは、校内研修でも使えるアイスブレイクの型です。見せる、選ぶ、語る、知る、問い返す。正解を求めず、全員が口を開き、本題につなげる。写真と問いを替えれば、どの研修でも使えます。〔クリック〕</a:t>
             </a:r>
           </a:p>
         </p:txBody>
@@ -1590,27 +1491,22 @@
           <a:lstStyle/>
           <a:p>
             <a:r>
-              <a:t>（QUIZ 1　約１分30秒）</a:t>
-            </a:r>
-          </a:p>
-          <a:p>
-            <a:r>
-              <a:t>ここで、指導主事同士で考えていただきます。天童中部小学校で、自学・自習、MP学習、FSPのように、子供が自分で計画して進める学習は、授業のおよそ何割でしょうか。A 約２割、B 約５割、C 約８割。</a:t>
-            </a:r>
-          </a:p>
-          <a:p>
-            <a:r>
-              <a:t>隣の人と１分、理由も含めて相談してください。（１分後、挙手で確認）</a:t>
-            </a:r>
-          </a:p>
-          <a:p>
-            <a:r>
-              <a:t>正解は A、約２割です。残りの約８割は、子供と教師が共に創る一斉授業です。次のスライドで、その全体像を見ます。</a:t>
-            </a:r>
-          </a:p>
-          <a:p>
-            <a:r>
-              <a:t>【進め方】冒頭の写真の印象から「ほとんどが自由な学習」と考える人が多いはず。そのずれが、普段の授業の大切さへの気付きにつながる。</a:t>
+              <a:t>（1分）</a:t>
+            </a:r>
+          </a:p>
+          <a:p>
+            <a:r>
+              <a:t>ではクイズです。子供が自分で計画して進める学習は、授業のおよそ何割でしょうか。隣の人と30秒。〔ペア30秒〕〔挙手〕</a:t>
+            </a:r>
+          </a:p>
+          <a:p>
+            <a:r>
+              <a:t>正解は A、約2割です。残りの約8割は、子供と教師が共に創る一斉授業です。〔クリック〕</a:t>
+            </a:r>
+          </a:p>
+          <a:p>
+            <a:r>
+              <a:t>《進め方》冒頭の写真から「C 約8割」を選ぶ人が多いはず。そのずれを次の2枚で回収する。</a:t>
             </a:r>
           </a:p>
         </p:txBody>
@@ -1656,22 +1552,17 @@
           <a:lstStyle/>
           <a:p>
             <a:r>
-              <a:t>（QUIZ 2　約１分30秒）</a:t>
-            </a:r>
-          </a:p>
-          <a:p>
-            <a:r>
-              <a:t>２問目です。MP学習で、計画どおりに進まなかった子供がいます。同校が大切にしているのはどれでしょう。A 家庭学習で補わせる、B 計画を修正して学び直す、C 教師が個別に教えて計画に戻す。隣の人と１分です。</a:t>
-            </a:r>
-          </a:p>
-          <a:p>
-            <a:r>
-              <a:t>正解は B です。同校では「計画を修正することが大切」と考えています。計画どおりに進める「自己管理」ではなく、修正しながら学ぶ「自己調整」の力を育てようとしている。次のスライドで詳しく見ます。</a:t>
-            </a:r>
-          </a:p>
-          <a:p>
-            <a:r>
-              <a:t>【進め方】AやCを選んだ人の理由（「遅れを取り戻させたい」）も大切に扱い、「では、遅れたとき子供に何を学ばせたいか」と問い返す。</a:t>
+              <a:t>（1分）</a:t>
+            </a:r>
+          </a:p>
+          <a:p>
+            <a:r>
+              <a:t>2問目です。計画どおりに進まなかった子供。同校が大切にしているのはどれでしょう。隣の人と30秒。〔ペア30秒〕〔挙手〕</a:t>
+            </a:r>
+          </a:p>
+          <a:p>
+            <a:r>
+              <a:t>正解は B、計画を修正して学び直す、です。〔クリック〕</a:t>
             </a:r>
           </a:p>
         </p:txBody>
@@ -1717,17 +1608,17 @@
           <a:lstStyle/>
           <a:p>
             <a:r>
-              <a:t>（QUIZ 3　約１分）</a:t>
-            </a:r>
-          </a:p>
-          <a:p>
-            <a:r>
-              <a:t>次期学習指導要領についてもクイズです。審議まとめが示す「３つの方向性」に含まれないものはどれでしょう。隣の人と30秒です。</a:t>
-            </a:r>
-          </a:p>
-          <a:p>
-            <a:r>
-              <a:t>正解は C、授業時数の拡充です。むしろ、学校の実態に応じて授業時数を調整できる「調整授業時数制度」が示されています。残りの３つが方向性です。次のスライドで、天童中部小の実践と重ねて確認します。</a:t>
+              <a:t>（45秒）</a:t>
+            </a:r>
+          </a:p>
+          <a:p>
+            <a:r>
+              <a:t>「3つの方向性」に含まれないものはどれでしょう。今回は挙手だけで。〔挙手〕</a:t>
+            </a:r>
+          </a:p>
+          <a:p>
+            <a:r>
+              <a:t>正解は C、授業時数の拡充です。むしろ、時数を調整できる仕組みが示されています。〔クリック〕</a:t>
             </a:r>
           </a:p>
         </p:txBody>
@@ -1773,17 +1664,12 @@
           <a:lstStyle/>
           <a:p>
             <a:r>
-              <a:t>（約30秒）</a:t>
-            </a:r>
-          </a:p>
-          <a:p>
-            <a:r>
-              <a:t>ここからの内容の根拠は、10月５日に公表された中央教育審議会教育課程部会の「次期学習指導要領等に向けた審議まとめ」です。QRコードから本文PDFを開けます。11月５日まで意見公募が行われています。</a:t>
-            </a:r>
-          </a:p>
-          <a:p>
-            <a:r>
-              <a:t>スライドでは要点を整理していますが、名称や詳細は答申・告示で確定します。学校に説明する際は、必ず本文と最新の公表資料で確認してください。</a:t>
+              <a:t>（15秒）</a:t>
+            </a:r>
+          </a:p>
+          <a:p>
+            <a:r>
+              <a:t>ここからの根拠は審議まとめです。QRコードから本文を開けます。学校に説明するときは、必ず本文で確かめてください。〔クリック〕</a:t>
             </a:r>
           </a:p>
         </p:txBody>
@@ -1829,27 +1715,17 @@
           <a:lstStyle/>
           <a:p>
             <a:r>
-              <a:t>（約１分15秒）</a:t>
-            </a:r>
-          </a:p>
-          <a:p>
-            <a:r>
-              <a:t>今日いちばんお伝えしたいことを、一枚にまとめました。授業の中心にあるのは、何でしょうか。</a:t>
-            </a:r>
-          </a:p>
-          <a:p>
-            <a:r>
-              <a:t>これまでの見方では、中心にいるのは教師です。教師の計画や指示を中心に、子供がそれに合わせて動く。冒頭の写真に「許容できない」と感じたとき、その基準は、この教師中心の見方から来ていたのかもしれません。</a:t>
-            </a:r>
-          </a:p>
-          <a:p>
-            <a:r>
-              <a:t>これからの見方では、中心にあるのは子供の学びです。教師も、教材も、環境も、仲間も、子供の学びを支えて回る。天童中部小の「すべての子供は有能である」という子供観は、まさにこの見方です。</a:t>
-            </a:r>
-          </a:p>
-          <a:p>
-            <a:r>
-              <a:t>ただし、転換するのは授業の形ではなく見方です。同校でも約８割は一斉授業でした。一斉授業をやめるのではなく、普段の授業の中でも子供の学びを中心に据える。私たち指導主事が授業を見るときの見方も、ここから変わっていくのだと思います。</a:t>
+              <a:t>（50秒）</a:t>
+            </a:r>
+          </a:p>
+          <a:p>
+            <a:r>
+              <a:t>授業の中心にあるのは、何でしょうか。これまでは教師が中心で、子供がそれに合わせて動きました。これからは、子供の学びが中心です。教師も教材も環境も仲間も、子供の学びを支えて回ります。</a:t>
+            </a:r>
+          </a:p>
+          <a:p>
+            <a:r>
+              <a:t>ただし、変えるのは授業の形ではなく見方です。約8割の一斉授業の中でも、子供の学びを中心に据える。〔クリック〕</a:t>
             </a:r>
           </a:p>
         </p:txBody>
@@ -1895,27 +1771,22 @@
           <a:lstStyle/>
           <a:p>
             <a:r>
-              <a:t>（約１分）</a:t>
-            </a:r>
-          </a:p>
-          <a:p>
-            <a:r>
-              <a:t>講義や協議会では、奈須先生から、かなり踏み込んだ本音のお話もありました。</a:t>
-            </a:r>
-          </a:p>
-          <a:p>
-            <a:r>
-              <a:t>印象的だったのは「マイ探究に、評価は必要ない」という言葉です。子供の「好き」「得意」を、学校の物差しで測らない。学校的な価値で過剰に制限して、子供に忖度させない。発表会も必須ではなく、子供が選んでいい。やってみて「違う」と分かることも、自分の「好き」「得意」の発見だ、というお話でした。</a:t>
-            </a:r>
-          </a:p>
-          <a:p>
-            <a:r>
-              <a:t>ここで一つ考えてみてください。評価しないと不安になるのは、子供でしょうか、それとも私たち大人でしょうか。</a:t>
-            </a:r>
-          </a:p>
-          <a:p>
-            <a:r>
-              <a:t>（表現は、講義・協議会の記録で最終確認すること）</a:t>
+              <a:t>（45秒）</a:t>
+            </a:r>
+          </a:p>
+          <a:p>
+            <a:r>
+              <a:t>協議会では、踏み込んだ本音もありました。「マイ探究に、評価は必要ない」。学校的な価値で制限しない。発表会も必須ではない。</a:t>
+            </a:r>
+          </a:p>
+          <a:p>
+            <a:r>
+              <a:t>では、評価しないと不安になるのは、子供でしょうか、私たち大人でしょうか。（1秒間を置く）〔クリック〕</a:t>
+            </a:r>
+          </a:p>
+          <a:p>
+            <a:r>
+              <a:t>《進め方》問いかけだけで、答えは求めない。発言の表現は、講義・協議会の記録で最終確認する。</a:t>
             </a:r>
           </a:p>
         </p:txBody>
@@ -1961,37 +1832,22 @@
           <a:lstStyle/>
           <a:p>
             <a:r>
-              <a:t>（約１分15秒）</a:t>
-            </a:r>
-          </a:p>
-          <a:p>
-            <a:r>
-              <a:t>最後に、今後、学校から相談が増えると思われる調整授業時数制度について補足します。</a:t>
-            </a:r>
-          </a:p>
-          <a:p>
-            <a:r>
-              <a:t>審議まとめでは、学校や子供の実態に応じて、各教科等の標準授業時数を一定の範囲で調整できる仕組みが示されています。そこで生み出した時間は、子供の個性や特性に応じた学びに充てる「裁量的な時間」とする構想で、その質を担保するために、組織的・計画的に取り組むことが求められています。</a:t>
-            </a:r>
-          </a:p>
-          <a:p>
-            <a:r>
-              <a:t>（参考：８月31日の素案段階では、上限15％程度まで調整した場合、小学校で年間約138コマとの例が報じられた。数値は答申・告示で変わり得るので、紹介する場合はその旨を添える）</a:t>
-            </a:r>
-          </a:p>
-          <a:p>
-            <a:r>
-              <a:t>学校から「時数を減らしたい」と相談されたら、まず一緒に確かめたいことが四つあります。何のために時間を生み出すのか。どの教科・単元をどう精選するのか。生み出した時間で何をするのか。天童中部小のFSPは一つのモデルになります。そして、保護者・地域への説明と、教師の負担、組織での推進です。</a:t>
-            </a:r>
-          </a:p>
-          <a:p>
-            <a:r>
-              <a:t>制度ありきではなく、目指す子供の姿から逆算して考える。ここでも、中心にあるのは子供の学びです。</a:t>
-            </a:r>
-          </a:p>
-          <a:p>
-            <a:r>
-              <a:t>講義は以上です。ここから質疑応答に移ります。</a:t>
+              <a:t>（50秒）</a:t>
+            </a:r>
+          </a:p>
+          <a:p>
+            <a:r>
+              <a:t>学校や子供の実態に応じて、標準授業時数を一定の範囲で調整できる仕組みです。生み出した時間は、子供の個性や特性に応じた「裁量的な時間」に充てる構想です。</a:t>
+            </a:r>
+          </a:p>
+          <a:p>
+            <a:r>
+              <a:t>学校から相談されたら、目的、教育課程、時間の中身、説明と体制の4つを一緒に確かめましょう。制度ありきではなく、目指す子供の姿から考える。講義は以上です。〔クリック〕</a:t>
+            </a:r>
+          </a:p>
+          <a:p>
+            <a:r>
+              <a:t>《進め方》素案段階の数値（上限15％程度、小学校で年間約138コマ）は、質問が出たら「答申で変わり得る」と添えて紹介する。</a:t>
             </a:r>
           </a:p>
         </p:txBody>
@@ -2049,22 +1905,12 @@
           <a:lstStyle/>
           <a:p>
             <a:r>
-              <a:t>（約40秒）</a:t>
-            </a:r>
-          </a:p>
-          <a:p>
-            <a:r>
-              <a:t>研修の概要です。期日は10月14日、会場は天童中部小学校です。</a:t>
-            </a:r>
-          </a:p>
-          <a:p>
-            <a:r>
-              <a:t>２年国語や６年算数などの公開授業に加え、自学・自習、マイプラン学習、フリースタイルプロジェクトを中心とした取組が公開されました。また、上智大学の奈須正裕先生の講演、鼎談、質疑応答がありました。</a:t>
-            </a:r>
-          </a:p>
-          <a:p>
-            <a:r>
-              <a:t>同校は「自分で学びをつくる」「自分でくらしをつくる」ことを、目指す姿として掲げています。</a:t>
+              <a:t>（15秒）</a:t>
+            </a:r>
+          </a:p>
+          <a:p>
+            <a:r>
+              <a:t>期日・内容はご覧のとおりです。同校は「自分で学びをつくる」「自分でくらしをつくる」を掲げています。〔クリック〕</a:t>
             </a:r>
           </a:p>
         </p:txBody>
@@ -2150,12 +1996,17 @@
           <a:lstStyle/>
           <a:p>
             <a:r>
-              <a:rPr lang="en-US" dirty="0"/>
-              <a:t>（約1分）
-最も印象的だったのは、個々の学習方法よりも、その根底にある子供観でした。
-同校は「すべての子供は有能である」という言葉を掲げ、子供を「指示を待つ存在」ではなく、「自ら学びを創る存在」として捉えています。
-それが表れているのが、子供が「選ぶ」場面の多さです。学習内容、学習方法、学習場所、発表方法を自分で選び、学習計画も自分で修正します。これが特別な時間ではなく、日常的に行われていました。
-教師は学習を統制するのではなく、環境を整え、必要に応じて支援する「伴走者」でした。この後紹介する取組は、すべてこの子供観から出発しています。</a:t>
+              <a:t>（45秒）</a:t>
+            </a:r>
+          </a:p>
+          <a:p>
+            <a:r>
+              <a:t>最も印象的だったのは、学習方法よりも、その根底にある子供観です。「すべての子供は有能である」。子供を「指示を待つ存在」ではなく、「自ら学びを創る存在」と捉えています。</a:t>
+            </a:r>
+          </a:p>
+          <a:p>
+            <a:r>
+              <a:t>だから子供は、学習の内容、方法、場所、発表方法を自分で選び、計画も自分で直します。教師は統制せず、環境を整えて支える「伴走者」でした。〔クリック〕</a:t>
             </a:r>
           </a:p>
         </p:txBody>
@@ -2241,32 +2092,12 @@
           <a:lstStyle/>
           <a:p>
             <a:r>
-              <a:t>（約1分）</a:t>
-            </a:r>
-          </a:p>
-          <a:p>
-            <a:r>
-              <a:t>同校の学びの全体像です。奈須先生の講演で、この表のように整理されました。</a:t>
-            </a:r>
-          </a:p>
-          <a:p>
-            <a:r>
-              <a:t>フリースタイルプロジェクト、マイプラン学習、自学・自習、仲間と教師で創る授業。この４つを、学習内容、学習形態、計画主体の観点で組み合わせています。</a:t>
-            </a:r>
-          </a:p>
-          <a:p>
-            <a:r>
-              <a:t>左に行くほど子供が計画し、右に行くほど教師が計画する。個別最適な学びと協働的な学びの一体的な充実を、一つの授業の中ではなく、カリキュラム全体で実現する「カラフルなカリキュラム」だという説明でした。</a:t>
-            </a:r>
-          </a:p>
-          <a:p>
-            <a:r>
-              <a:t>例えば自学・自習では、司会、板書、学習進行を児童が担い、自分たちで授業を成立させていました。</a:t>
-            </a:r>
-          </a:p>
-          <a:p>
-            <a:r>
-              <a:t>なお、同校でもすべての授業がこのスタイルではありません。約８割は子供と教師が共に創る一斉授業で、自学・自習、MP学習（単元内自由進度学習）、FSP（マイ探究）は約２割です。普段の授業で学び方を身に付けているからこそ、子供に任せる２割が成り立つ。土台は普段の授業だということを強調しておきたいと思います。</a:t>
+              <a:t>（45秒）</a:t>
+            </a:r>
+          </a:p>
+          <a:p>
+            <a:r>
+              <a:t>同校の学びの全体像です。FSP、MP学習、自学・自習、仲間と教師で創る授業。左ほど子供が、右ほど教師が計画します。個別最適な学びと協働的な学びを、一つの授業ではなくカリキュラム全体で実現する。奈須先生はこれを「カラフルなカリキュラム」と呼んでいました。〔クリック〕</a:t>
             </a:r>
           </a:p>
         </p:txBody>
@@ -2352,22 +2183,12 @@
           <a:lstStyle/>
           <a:p>
             <a:r>
-              <a:t>（約1分）</a:t>
-            </a:r>
-          </a:p>
-          <a:p>
-            <a:r>
-              <a:t>フリースタイルプロジェクト、FSPです。テーマ設定、探究、発表、省察を一連のサイクルとして進める、個人の探究活動です。テーマは野球、犬、ネイル、ピアノ、野菜づくりなど、一人一人の興味・関心から設定されていました。</a:t>
-            </a:r>
-          </a:p>
-          <a:p>
-            <a:r>
-              <a:t>探究の過程は「計画・振り返りカード」に、テーマ設定の理由、活動内容、学んだこと、次に取り組みたいことを継続的に記録し、教師はコメントで伴走していました。単発の自由研究ではなく、継続的な探究です。</a:t>
-            </a:r>
-          </a:p>
-          <a:p>
-            <a:r>
-              <a:t>発表会では、スライド、ブース、実演など、発表方法も子供が選んでいました。</a:t>
+              <a:t>（40秒）</a:t>
+            </a:r>
+          </a:p>
+          <a:p>
+            <a:r>
+              <a:t>FSPは、一人一人が興味のあるテーマを探究する個人の総合です。野球、犬、ネイル、ピアノなど。計画・振り返りカードに記録し、教師はコメントで伴走します。発表の方法も子供が選びます。〔クリック〕</a:t>
             </a:r>
           </a:p>
         </p:txBody>
@@ -2453,17 +2274,12 @@
           <a:lstStyle/>
           <a:p>
             <a:r>
-              <a:t>（約50秒）</a:t>
-            </a:r>
-          </a:p>
-          <a:p>
-            <a:r>
-              <a:t>学習環境です。理科学習ステーション、伝統工芸コーナー、発展課題コーナー、QRコード教材などが整備され、廊下やオープンスペース、壁面、図書コーナーも学びの場になっていました。子供は「どこで学ぶか」「何を使って学ぶか」を自分で選んでいます。</a:t>
-            </a:r>
-          </a:p>
-          <a:p>
-            <a:r>
-              <a:t>（情報提供として、必要に応じて）なお、同校には「自分でくらしをつくる」取組として、校内に買い物学習施設「サンピュア」もあります。</a:t>
+              <a:t>（30秒）</a:t>
+            </a:r>
+          </a:p>
+          <a:p>
+            <a:r>
+              <a:t>廊下や壁面、図書コーナーも学びの場です。発展課題や伝統工芸のコーナーが整備され、子供は「どこで、何を使って学ぶか」を選んでいます。〔クリック〕</a:t>
             </a:r>
           </a:p>
         </p:txBody>
@@ -2549,22 +2365,17 @@
           <a:lstStyle/>
           <a:p>
             <a:r>
-              <a:t>（約1分15秒）</a:t>
-            </a:r>
-          </a:p>
-          <a:p>
-            <a:r>
-              <a:t>マイプラン学習、MP学習です。講演では単元内自由進度学習の典型として紹介されましたが、同校では単に進度を自由にする学習ではなく、「学習のゴールに向かって、自分で計画を立て、調整しながら学ぶ学習」と位置付けています。学習計画表や学習の手引きを使い、計画する、学ぶ、振り返る、調整する、というサイクルで進めます。</a:t>
-            </a:r>
-          </a:p>
-          <a:p>
-            <a:r>
-              <a:t>特徴的だったのは、計画通りに進まなかったときの捉え方です。同校では「計画を修正することが大切」と考えています。目指しているのは、計画どおりに進める「自己管理」ではなく、計画を修正しながら学ぶ「自己調整」の力です。</a:t>
-            </a:r>
-          </a:p>
-          <a:p>
-            <a:r>
-              <a:t>また、視察前は自由進度学習中心の実践を想定していましたが、実際には国語、算数、理科、社会などの単元計画に位置付けられ、教育課程全体の中で計画的に実施されていました。</a:t>
+              <a:t>（50秒）</a:t>
+            </a:r>
+          </a:p>
+          <a:p>
+            <a:r>
+              <a:t>MP学習は、単に進度を自由にする学習ではありません。学習のゴールに向かって自分で計画し、調整しながら学ぶ学習です。</a:t>
+            </a:r>
+          </a:p>
+          <a:p>
+            <a:r>
+              <a:t>目指すのは、計画どおりに進める「自己管理」ではなく、計画を直しながら学ぶ「自己調整」。しかも、国語・算数・理科・社会などの単元計画に位置付けられ、学校全体の仕組みとして動いていました。〔クリック〕</a:t>
             </a:r>
           </a:p>
         </p:txBody>
@@ -2650,17 +2461,12 @@
           <a:lstStyle/>
           <a:p>
             <a:r>
-              <a:t>（約50秒）</a:t>
-            </a:r>
-          </a:p>
-          <a:p>
-            <a:r>
-              <a:t>授業の中では、教科書で調べる子、実験に取り組む子、ワークシートに整理する子、仲間と対話する子と、様々な学び方が同時に見られました。一人で追究する時間と、協働的に学ぶ時間を行き来しながら、自分で学習を調整していました。</a:t>
-            </a:r>
-          </a:p>
-          <a:p>
-            <a:r>
-              <a:t>振り返りの掲示には、「前回の失敗を生かした」「計画を修正した」「次に調べたいことが見つかった」といった記述が多く見られました。結果だけでなく、学習の過程そのものを価値付ける文化が学校全体にあると感じました。</a:t>
+              <a:t>（30秒）</a:t>
+            </a:r>
+          </a:p>
+          <a:p>
+            <a:r>
+              <a:t>実験する子、教科書で調べる子、仲間と話す子。振り返りの掲示には「計画を修正した」「次に調べたいことが見つかった」。学習の過程そのものを価値付ける文化がありました。〔クリック〕</a:t>
             </a:r>
           </a:p>
         </p:txBody>
@@ -6727,7 +6533,7 @@
                   <a:srgbClr val="FFFFFF"/>
                 </a:solidFill>
               </a:rPr>
-              <a:t>隣の人と相談（１分）</a:t>
+              <a:t>隣の人と相談（30秒）</a:t>
             </a:r>
           </a:p>
           <a:p>
@@ -13935,7 +13741,7 @@
                   <a:srgbClr val="FFFFFF"/>
                 </a:solidFill>
               </a:rPr>
-              <a:t>話</a:t>
+              <a:t>手</a:t>
             </a:r>
           </a:p>
         </p:txBody>
@@ -13969,7 +13775,7 @@
                   <a:srgbClr val="FFFFFF"/>
                 </a:solidFill>
               </a:rPr>
-              <a:t>隣の人と相談（30秒）</a:t>
+              <a:t>挙手で答えよう</a:t>
             </a:r>
           </a:p>
           <a:p>
@@ -13980,7 +13786,7 @@
                   <a:srgbClr val="D3E3D9"/>
                 </a:solidFill>
               </a:rPr>
-              <a:t>選んだ理由も話してみてください</a:t>
+              <a:t>理由も考えながら選んでください</a:t>
             </a:r>
           </a:p>
         </p:txBody>
@@ -22409,7 +22215,7 @@
           <a:lstStyle/>
           <a:p>
             <a:r>
-              <a:t>本日のねらいと流れ（30分）</a:t>
+              <a:t>本日のねらいと流れ</a:t>
             </a:r>
           </a:p>
         </p:txBody>
@@ -22556,7 +22362,7 @@
         <p:spPr>
           <a:xfrm>
             <a:off x="548640" y="2834640"/>
-            <a:ext cx="9245345" cy="411480"/>
+            <a:ext cx="8875532" cy="411480"/>
           </a:xfrm>
           <a:prstGeom prst="rect">
             <a:avLst/>
@@ -22576,7 +22382,7 @@
                   <a:srgbClr val="1F5A47"/>
                 </a:solidFill>
               </a:rPr>
-              <a:t>講義　25分（クイズで指導主事同士が話し合う）</a:t>
+              <a:t>講義　20分（クイズで指導主事同士が話し合う）</a:t>
             </a:r>
           </a:p>
         </p:txBody>
@@ -22589,8 +22395,8 @@
         </p:nvSpPr>
         <p:spPr>
           <a:xfrm>
-            <a:off x="9793985" y="2834640"/>
-            <a:ext cx="1849069" cy="411480"/>
+            <a:off x="9424172" y="2834640"/>
+            <a:ext cx="2218883" cy="411480"/>
           </a:xfrm>
           <a:prstGeom prst="rect">
             <a:avLst/>
@@ -22624,7 +22430,7 @@
         <p:spPr>
           <a:xfrm>
             <a:off x="548640" y="3611880"/>
-            <a:ext cx="1424391" cy="1188720"/>
+            <a:ext cx="1276465" cy="1188720"/>
           </a:xfrm>
           <a:prstGeom prst="rect">
             <a:avLst/>
@@ -22668,7 +22474,7 @@
         <p:spPr>
           <a:xfrm>
             <a:off x="658368" y="3611880"/>
-            <a:ext cx="1204935" cy="1188720"/>
+            <a:ext cx="1057009" cy="1188720"/>
           </a:xfrm>
           <a:prstGeom prst="rect">
             <a:avLst/>
@@ -22699,7 +22505,7 @@
                   <a:srgbClr val="1F5A47"/>
                 </a:solidFill>
               </a:rPr>
-              <a:t>4分</a:t>
+              <a:t>3分</a:t>
             </a:r>
           </a:p>
           <a:p>
@@ -22723,8 +22529,8 @@
         </p:nvSpPr>
         <p:spPr>
           <a:xfrm>
-            <a:off x="2027895" y="3611880"/>
-            <a:ext cx="3643274" cy="1188720"/>
+            <a:off x="1879969" y="3611880"/>
+            <a:ext cx="3051572" cy="1188720"/>
           </a:xfrm>
           <a:prstGeom prst="rect">
             <a:avLst/>
@@ -22767,8 +22573,8 @@
         </p:nvSpPr>
         <p:spPr>
           <a:xfrm>
-            <a:off x="2137623" y="3611880"/>
-            <a:ext cx="3423818" cy="1188720"/>
+            <a:off x="1989697" y="3611880"/>
+            <a:ext cx="2832116" cy="1188720"/>
           </a:xfrm>
           <a:prstGeom prst="rect">
             <a:avLst/>
@@ -22799,7 +22605,7 @@
                   <a:srgbClr val="FFFFFF"/>
                 </a:solidFill>
               </a:rPr>
-              <a:t>10分</a:t>
+              <a:t>7分</a:t>
             </a:r>
           </a:p>
           <a:p>
@@ -22823,8 +22629,8 @@
         </p:nvSpPr>
         <p:spPr>
           <a:xfrm>
-            <a:off x="5726033" y="3611880"/>
-            <a:ext cx="1054577" cy="1188720"/>
+            <a:off x="4986406" y="3611880"/>
+            <a:ext cx="832689" cy="1188720"/>
           </a:xfrm>
           <a:prstGeom prst="rect">
             <a:avLst/>
@@ -22867,8 +22673,8 @@
         </p:nvSpPr>
         <p:spPr>
           <a:xfrm>
-            <a:off x="5835761" y="3611880"/>
-            <a:ext cx="835121" cy="1188720"/>
+            <a:off x="5096134" y="3611880"/>
+            <a:ext cx="613233" cy="1188720"/>
           </a:xfrm>
           <a:prstGeom prst="rect">
             <a:avLst/>
@@ -22888,7 +22694,7 @@
                   <a:srgbClr val="1F5A47"/>
                 </a:solidFill>
               </a:rPr>
-              <a:t>2　講演</a:t>
+              <a:t>2</a:t>
             </a:r>
           </a:p>
           <a:p>
@@ -22899,7 +22705,18 @@
                   <a:srgbClr val="1F5A47"/>
                 </a:solidFill>
               </a:rPr>
-              <a:t>3分</a:t>
+              <a:t>2分</a:t>
+            </a:r>
+          </a:p>
+          <a:p>
+            <a:pPr algn="l"/>
+            <a:r>
+              <a:rPr sz="1200" b="1">
+                <a:solidFill>
+                  <a:srgbClr val="1F5A47"/>
+                </a:solidFill>
+              </a:rPr>
+              <a:t>講演</a:t>
             </a:r>
           </a:p>
         </p:txBody>
@@ -22912,8 +22729,8 @@
         </p:nvSpPr>
         <p:spPr>
           <a:xfrm>
-            <a:off x="6835475" y="3611880"/>
-            <a:ext cx="1794205" cy="1188720"/>
+            <a:off x="5873959" y="3611880"/>
+            <a:ext cx="1720242" cy="1188720"/>
           </a:xfrm>
           <a:prstGeom prst="rect">
             <a:avLst/>
@@ -22956,8 +22773,8 @@
         </p:nvSpPr>
         <p:spPr>
           <a:xfrm>
-            <a:off x="6945203" y="3611880"/>
-            <a:ext cx="1574749" cy="1188720"/>
+            <a:off x="5983687" y="3611880"/>
+            <a:ext cx="1500786" cy="1188720"/>
           </a:xfrm>
           <a:prstGeom prst="rect">
             <a:avLst/>
@@ -22988,7 +22805,7 @@
                   <a:srgbClr val="FFFFFF"/>
                 </a:solidFill>
               </a:rPr>
-              <a:t>5分</a:t>
+              <a:t>4分</a:t>
             </a:r>
           </a:p>
           <a:p>
@@ -23012,8 +22829,8 @@
         </p:nvSpPr>
         <p:spPr>
           <a:xfrm>
-            <a:off x="8684544" y="3611880"/>
-            <a:ext cx="1054577" cy="1188720"/>
+            <a:off x="7649065" y="3611880"/>
+            <a:ext cx="1720242" cy="1188720"/>
           </a:xfrm>
           <a:prstGeom prst="rect">
             <a:avLst/>
@@ -23056,8 +22873,8 @@
         </p:nvSpPr>
         <p:spPr>
           <a:xfrm>
-            <a:off x="8794272" y="3611880"/>
-            <a:ext cx="835121" cy="1188720"/>
+            <a:off x="7758793" y="3611880"/>
+            <a:ext cx="1500786" cy="1188720"/>
           </a:xfrm>
           <a:prstGeom prst="rect">
             <a:avLst/>
@@ -23088,7 +22905,7 @@
                   <a:srgbClr val="1F5A47"/>
                 </a:solidFill>
               </a:rPr>
-              <a:t>3分</a:t>
+              <a:t>4分</a:t>
             </a:r>
           </a:p>
         </p:txBody>
@@ -23101,8 +22918,8 @@
         </p:nvSpPr>
         <p:spPr>
           <a:xfrm>
-            <a:off x="9793986" y="3611880"/>
-            <a:ext cx="1794205" cy="1188720"/>
+            <a:off x="9424172" y="3611880"/>
+            <a:ext cx="2164019" cy="1188720"/>
           </a:xfrm>
           <a:prstGeom prst="rect">
             <a:avLst/>
@@ -23145,8 +22962,8 @@
         </p:nvSpPr>
         <p:spPr>
           <a:xfrm>
-            <a:off x="9903714" y="3611880"/>
-            <a:ext cx="1574749" cy="1188720"/>
+            <a:off x="9533900" y="3611880"/>
+            <a:ext cx="1944563" cy="1188720"/>
           </a:xfrm>
           <a:prstGeom prst="rect">
             <a:avLst/>
@@ -25723,7 +25540,7 @@
                   <a:srgbClr val="FFFFFF"/>
                 </a:solidFill>
               </a:rPr>
-              <a:t>隣の人と相談（１分）</a:t>
+              <a:t>隣の人と相談（30秒）</a:t>
             </a:r>
           </a:p>
           <a:p>

--- a/天童中部小学校視察/081019_天童中部小学校_指導主事研修スライド_クイズ版.pptx
+++ b/天童中部小学校視察/081019_天童中部小学校_指導主事研修スライド_クイズ版.pptx
@@ -531,6 +531,11 @@
           <a:lstStyle/>
           <a:p>
             <a:r>
+              <a:t>《非表示》スライドショーでは表示しない（配布資料用）。時間に余裕があるときの予備原稿：</a:t>
+            </a:r>
+          </a:p>
+          <a:p>
+            <a:r>
               <a:t>（20秒）</a:t>
             </a:r>
           </a:p>
@@ -627,7 +632,7 @@
           </a:p>
           <a:p>
             <a:r>
-              <a:t>10月5日に中教審の「審議まとめ」が公表され、11月5日まで意見公募中です。今冬に答申、小・中学校は今年度内の告示が見込まれています。全面実施の年度は、答申・告示で確定します。〔クリック〕</a:t>
+              <a:t>10月5日に中教審の「審議まとめ」が公表され、11月5日まで意見公募中です。今冬に答申、小・中学校は今年度内の告示が見込まれています。全面実施の年度は、答申・告示で確定します。根拠の本文は、配布資料のQRコードから開けます。〔クリック〕</a:t>
             </a:r>
           </a:p>
         </p:txBody>
@@ -713,12 +718,12 @@
           <a:lstStyle/>
           <a:p>
             <a:r>
-              <a:t>（50秒）</a:t>
-            </a:r>
-          </a:p>
-          <a:p>
-            <a:r>
-              <a:t>1つ目は「主体的・対話的で深い学び」の実装。日常の授業で実現する段階へ進むことです。2つ目は多様性の包摂。一人一人の違いを前提に、すべての子供の学びを保障すること。3つ目は実現可能性の確保。学校が無理なく実現できるようにすることです。</a:t>
+              <a:t>（30秒）</a:t>
+            </a:r>
+          </a:p>
+          <a:p>
+            <a:r>
+              <a:t>審議まとめは3つの方向性を示しています。「主体的・対話的で深い学び」の実装、多様性の包摂、実現可能性の確保です。</a:t>
             </a:r>
           </a:p>
           <a:p>
@@ -809,6 +814,11 @@
           <a:lstStyle/>
           <a:p>
             <a:r>
+              <a:t>《非表示》スライドショーでは表示しない（配布資料用）。時間に余裕があるときの予備原稿：</a:t>
+            </a:r>
+          </a:p>
+          <a:p>
+            <a:r>
               <a:t>（40秒）</a:t>
             </a:r>
           </a:p>
@@ -1440,12 +1450,12 @@
           <a:lstStyle/>
           <a:p>
             <a:r>
-              <a:t>（40秒）</a:t>
-            </a:r>
-          </a:p>
-          <a:p>
-            <a:r>
-              <a:t>今の問いかけは、校内研修でも使えるアイスブレイクの型です。見せる、選ぶ、語る、知る、問い返す。正解を求めず、全員が口を開き、本題につなげる。写真と問いを替えれば、どの研修でも使えます。〔クリック〕</a:t>
+              <a:t>（25秒）</a:t>
+            </a:r>
+          </a:p>
+          <a:p>
+            <a:r>
+              <a:t>今の問いかけは、校内研修でも使えるアイスブレイクの型です。見せる、選ぶ、語る、知る、問い返す。写真を替えれば、どの研修でも使えます。〔クリック〕</a:t>
             </a:r>
           </a:p>
         </p:txBody>
@@ -1552,12 +1562,12 @@
           <a:lstStyle/>
           <a:p>
             <a:r>
-              <a:t>（1分）</a:t>
-            </a:r>
-          </a:p>
-          <a:p>
-            <a:r>
-              <a:t>2問目です。計画どおりに進まなかった子供。同校が大切にしているのはどれでしょう。隣の人と30秒。〔ペア30秒〕〔挙手〕</a:t>
+              <a:t>（30秒）</a:t>
+            </a:r>
+          </a:p>
+          <a:p>
+            <a:r>
+              <a:t>2問目です。計画どおりに進まなかった子供。同校が大切にしているのはどれでしょう。今度は挙手で。〔挙手〕</a:t>
             </a:r>
           </a:p>
           <a:p>
@@ -1662,6 +1672,11 @@
         <p:txBody>
           <a:bodyPr/>
           <a:lstStyle/>
+          <a:p>
+            <a:r>
+              <a:t>《非表示》スライドショーでは表示しない（配布資料用）。時間に余裕があるときの予備原稿：</a:t>
+            </a:r>
+          </a:p>
           <a:p>
             <a:r>
               <a:t>（15秒）</a:t>
@@ -2274,12 +2289,12 @@
           <a:lstStyle/>
           <a:p>
             <a:r>
-              <a:t>（30秒）</a:t>
-            </a:r>
-          </a:p>
-          <a:p>
-            <a:r>
-              <a:t>廊下や壁面、図書コーナーも学びの場です。発展課題や伝統工芸のコーナーが整備され、子供は「どこで、何を使って学ぶか」を選んでいます。〔クリック〕</a:t>
+              <a:t>（15秒）</a:t>
+            </a:r>
+          </a:p>
+          <a:p>
+            <a:r>
+              <a:t>廊下や壁面も学びの場です。子供は「どこで、何を使って学ぶか」を選んでいます。〔クリック〕</a:t>
             </a:r>
           </a:p>
         </p:txBody>
@@ -2459,6 +2474,11 @@
         <p:txBody>
           <a:bodyPr/>
           <a:lstStyle/>
+          <a:p>
+            <a:r>
+              <a:t>《非表示》スライドショーでは表示しない（配布資料用）。時間に余裕があるときの予備原稿：</a:t>
+            </a:r>
+          </a:p>
           <a:p>
             <a:r>
               <a:t>（30秒）</a:t>
@@ -6499,7 +6519,7 @@
                   <a:srgbClr val="FFFFFF"/>
                 </a:solidFill>
               </a:rPr>
-              <a:t>話</a:t>
+              <a:t>手</a:t>
             </a:r>
           </a:p>
         </p:txBody>
@@ -6533,7 +6553,7 @@
                   <a:srgbClr val="FFFFFF"/>
                 </a:solidFill>
               </a:rPr>
-              <a:t>隣の人と相談（30秒）</a:t>
+              <a:t>挙手で答えよう</a:t>
             </a:r>
           </a:p>
           <a:p>
@@ -6544,7 +6564,7 @@
                   <a:srgbClr val="D3E3D9"/>
                 </a:solidFill>
               </a:rPr>
-              <a:t>選んだ理由も話してみてください</a:t>
+              <a:t>理由も考えながら選んでください</a:t>
             </a:r>
           </a:p>
         </p:txBody>
@@ -7548,7 +7568,7 @@
 </file>
 
 <file path=ppt/slides/slide14.xml><?xml version="1.0" encoding="utf-8"?>
-<p:sld xmlns:a="http://schemas.openxmlformats.org/drawingml/2006/main" xmlns:r="http://schemas.openxmlformats.org/officeDocument/2006/relationships" xmlns:p="http://schemas.openxmlformats.org/presentationml/2006/main">
+<p:sld xmlns:a="http://schemas.openxmlformats.org/drawingml/2006/main" xmlns:r="http://schemas.openxmlformats.org/officeDocument/2006/relationships" xmlns:p="http://schemas.openxmlformats.org/presentationml/2006/main" show="0">
   <p:cSld name="Slide 7">
     <p:spTree>
       <p:nvGrpSpPr>
@@ -10074,7 +10094,7 @@
 </file>
 
 <file path=ppt/slides/slide17.xml><?xml version="1.0" encoding="utf-8"?>
-<p:sld xmlns:a="http://schemas.openxmlformats.org/drawingml/2006/main" xmlns:r="http://schemas.openxmlformats.org/officeDocument/2006/relationships" xmlns:p="http://schemas.openxmlformats.org/presentationml/2006/main">
+<p:sld xmlns:a="http://schemas.openxmlformats.org/drawingml/2006/main" xmlns:r="http://schemas.openxmlformats.org/officeDocument/2006/relationships" xmlns:p="http://schemas.openxmlformats.org/presentationml/2006/main" show="0">
   <p:cSld name="Slide 11">
     <p:spTree>
       <p:nvGrpSpPr>
@@ -11977,7 +11997,7 @@
 </file>
 
 <file path=ppt/slides/slide19.xml><?xml version="1.0" encoding="utf-8"?>
-<p:sld xmlns:a="http://schemas.openxmlformats.org/drawingml/2006/main" xmlns:p="http://schemas.openxmlformats.org/presentationml/2006/main" xmlns:r="http://schemas.openxmlformats.org/officeDocument/2006/relationships">
+<p:sld xmlns:a="http://schemas.openxmlformats.org/drawingml/2006/main" xmlns:p="http://schemas.openxmlformats.org/presentationml/2006/main" xmlns:r="http://schemas.openxmlformats.org/officeDocument/2006/relationships" show="0">
   <p:cSld>
     <p:spTree>
       <p:nvGrpSpPr>
@@ -14921,7 +14941,7 @@
 </file>
 
 <file path=ppt/slides/slide22.xml><?xml version="1.0" encoding="utf-8"?>
-<p:sld xmlns:a="http://schemas.openxmlformats.org/drawingml/2006/main" xmlns:r="http://schemas.openxmlformats.org/officeDocument/2006/relationships" xmlns:p="http://schemas.openxmlformats.org/presentationml/2006/main">
+<p:sld xmlns:a="http://schemas.openxmlformats.org/drawingml/2006/main" xmlns:r="http://schemas.openxmlformats.org/officeDocument/2006/relationships" xmlns:p="http://schemas.openxmlformats.org/presentationml/2006/main" show="0">
   <p:cSld name="Slide 14">
     <p:spTree>
       <p:nvGrpSpPr>

--- a/天童中部小学校視察/081019_天童中部小学校_指導主事研修スライド_クイズ版.pptx
+++ b/天童中部小学校視察/081019_天童中部小学校_指導主事研修スライド_クイズ版.pptx
@@ -354,7 +354,7 @@
           </a:p>
           <a:p>
             <a:r>
-              <a:t>指導課の紺多です。10月14日に参加した、山形県天童市立天童中部小学校の教育研究発表会について報告します。同校の実践と次期学習指導要領の方向性を、重ねてお伝えします。〔クリック〕</a:t>
+              <a:t>指導課の紺多です。10月14日に参加した、山形県天童市立天童中部小学校の教育研究発表会について報告します。同校の実践から、子供の学びを中心に据える授業の見方を考え、次期学習指導要領の方向性を共有します。〔クリック〕</a:t>
             </a:r>
           </a:p>
         </p:txBody>
@@ -1371,6 +1371,11 @@
           <a:lstStyle/>
           <a:p>
             <a:r>
+              <a:t>《非表示》スライドショーでは表示しない（配布資料用）。時間に余裕があるときの予備原稿：</a:t>
+            </a:r>
+          </a:p>
+          <a:p>
+            <a:r>
               <a:t>（20秒）</a:t>
             </a:r>
           </a:p>
@@ -1455,7 +1460,7 @@
           </a:p>
           <a:p>
             <a:r>
-              <a:t>今の問いかけは、校内研修でも使えるアイスブレイクの型です。見せる、選ぶ、語る、知る、問い返す。写真を替えれば、どの研修でも使えます。〔クリック〕</a:t>
+              <a:t>今の問いかけは、校内研修でも使えるアイスブレイクの型です。見せる、選ぶ、語る、知る、問い返す。写真を替えれば、どの研修でも使えます。このあともクイズで考えていただきます。〔クリック〕</a:t>
             </a:r>
           </a:p>
         </p:txBody>
@@ -22153,7 +22158,7 @@
 </file>
 
 <file path=ppt/slides/slide4.xml><?xml version="1.0" encoding="utf-8"?>
-<p:sld xmlns:a="http://schemas.openxmlformats.org/drawingml/2006/main" xmlns:r="http://schemas.openxmlformats.org/officeDocument/2006/relationships" xmlns:p="http://schemas.openxmlformats.org/presentationml/2006/main">
+<p:sld xmlns:a="http://schemas.openxmlformats.org/drawingml/2006/main" xmlns:r="http://schemas.openxmlformats.org/officeDocument/2006/relationships" xmlns:p="http://schemas.openxmlformats.org/presentationml/2006/main" show="0">
   <p:cSld name="Slide 2">
     <p:spTree>
       <p:nvGrpSpPr>

--- a/天童中部小学校視察/081019_天童中部小学校_指導主事研修スライド_クイズ版.pptx
+++ b/天童中部小学校視察/081019_天童中部小学校_指導主事研修スライド_クイズ版.pptx
@@ -354,7 +354,7 @@
           </a:p>
           <a:p>
             <a:r>
-              <a:t>指導課の紺多です。10月14日に参加した、山形県天童市立天童中部小学校の教育研究発表会について報告します。同校の実践から、子供の学びを中心に据える授業の見方を考え、次期学習指導要領の方向性を共有します。〔クリック〕</a:t>
+              <a:t>指導課の紺多です。10月14日に参加した、山形県天童市立天童中部小学校の教育研究発表会について報告します。同校の実践と次期学習指導要領の方向性を、重ねてお伝えします。〔クリック〕</a:t>
             </a:r>
           </a:p>
         </p:txBody>
@@ -1371,17 +1371,12 @@
           <a:lstStyle/>
           <a:p>
             <a:r>
-              <a:t>《非表示》スライドショーでは表示しない（配布資料用）。時間に余裕があるときの予備原稿：</a:t>
-            </a:r>
-          </a:p>
-          <a:p>
-            <a:r>
-              <a:t>（20秒）</a:t>
-            </a:r>
-          </a:p>
-          <a:p>
-            <a:r>
-              <a:t>ねらいは、子供の学びを中心に据える授業の見方を考え、次期学習指導要領の方向性を共有することです。講義20分の中でクイズを3問出します。最後の5分で質疑応答です。〔クリック〕</a:t>
+              <a:t>（15秒）</a:t>
+            </a:r>
+          </a:p>
+          <a:p>
+            <a:r>
+              <a:t>本日のねらいです。天童中部小学校の取組から、子供の学びを中心に据える授業の見方を考え、次期学習指導要領の方向性を共有します。〔クリック〕</a:t>
             </a:r>
           </a:p>
         </p:txBody>
@@ -22158,7 +22153,7 @@
 </file>
 
 <file path=ppt/slides/slide4.xml><?xml version="1.0" encoding="utf-8"?>
-<p:sld xmlns:a="http://schemas.openxmlformats.org/drawingml/2006/main" xmlns:r="http://schemas.openxmlformats.org/officeDocument/2006/relationships" xmlns:p="http://schemas.openxmlformats.org/presentationml/2006/main" show="0">
+<p:sld xmlns:a="http://schemas.openxmlformats.org/drawingml/2006/main" xmlns:r="http://schemas.openxmlformats.org/officeDocument/2006/relationships" xmlns:p="http://schemas.openxmlformats.org/presentationml/2006/main">
   <p:cSld name="Slide 2">
     <p:spTree>
       <p:nvGrpSpPr>
@@ -22240,7 +22235,7 @@
           <a:lstStyle/>
           <a:p>
             <a:r>
-              <a:t>本日のねらいと流れ</a:t>
+              <a:t>本日のねらい</a:t>
             </a:r>
           </a:p>
         </p:txBody>
@@ -22299,7 +22294,7 @@
         <p:spPr>
           <a:xfrm>
             <a:off x="548640" y="1508760"/>
-            <a:ext cx="11094415" cy="1051560"/>
+            <a:ext cx="11094415" cy="4480560"/>
           </a:xfrm>
           <a:prstGeom prst="roundRect">
             <a:avLst>
@@ -22344,8 +22339,8 @@
         </p:nvSpPr>
         <p:spPr>
           <a:xfrm>
-            <a:off x="868680" y="1508760"/>
-            <a:ext cx="10454335" cy="1051560"/>
+            <a:off x="1280160" y="1508760"/>
+            <a:ext cx="9631375" cy="4480560"/>
           </a:xfrm>
           <a:prstGeom prst="rect">
             <a:avLst/>
@@ -22358,756 +22353,63 @@
           </a:bodyPr>
           <a:lstStyle/>
           <a:p>
-            <a:pPr algn="l"/>
-            <a:r>
-              <a:rPr sz="1700" b="1">
+            <a:pPr algn="l">
+              <a:spcAft>
+                <a:spcPts val="1400"/>
+              </a:spcAft>
+            </a:pPr>
+            <a:r>
+              <a:rPr sz="2000" b="1">
                 <a:solidFill>
                   <a:srgbClr val="D9702C"/>
                 </a:solidFill>
               </a:rPr>
-              <a:t>ねらい　</a:t>
-            </a:r>
-            <a:r>
-              <a:rPr sz="1700" b="0">
+              <a:t>ねらい</a:t>
+            </a:r>
+          </a:p>
+          <a:p>
+            <a:pPr algn="l">
+              <a:spcAft>
+                <a:spcPts val="800"/>
+              </a:spcAft>
+            </a:pPr>
+            <a:r>
+              <a:rPr sz="3000" b="1">
                 <a:solidFill>
                   <a:srgbClr val="FFFFFF"/>
                 </a:solidFill>
               </a:rPr>
-              <a:t>天童中部小学校の取組から、子供の学びを中心に据える授業の見方を考え、次期学習指導要領の方向性を指導主事間で共有する。</a:t>
-            </a:r>
-          </a:p>
-        </p:txBody>
-      </p:sp>
-      <p:sp>
-        <p:nvSpPr>
-          <p:cNvPr id="28" name="TextBox 27"/>
-          <p:cNvSpPr txBox="1"/>
-          <p:nvPr/>
-        </p:nvSpPr>
-        <p:spPr>
-          <a:xfrm>
-            <a:off x="548640" y="2834640"/>
-            <a:ext cx="8875532" cy="411480"/>
-          </a:xfrm>
-          <a:prstGeom prst="rect">
-            <a:avLst/>
-          </a:prstGeom>
-          <a:noFill/>
-        </p:spPr>
-        <p:txBody>
-          <a:bodyPr wrap="square" lIns="0" rIns="0" tIns="0" bIns="0" anchor="ctr">
-            <a:spAutoFit/>
-          </a:bodyPr>
-          <a:lstStyle/>
-          <a:p>
-            <a:pPr algn="ctr"/>
-            <a:r>
-              <a:rPr sz="1600" b="1">
-                <a:solidFill>
-                  <a:srgbClr val="1F5A47"/>
-                </a:solidFill>
-              </a:rPr>
-              <a:t>講義　20分（クイズで指導主事同士が話し合う）</a:t>
-            </a:r>
-          </a:p>
-        </p:txBody>
-      </p:sp>
-      <p:sp>
-        <p:nvSpPr>
-          <p:cNvPr id="29" name="TextBox 28"/>
-          <p:cNvSpPr txBox="1"/>
-          <p:nvPr/>
-        </p:nvSpPr>
-        <p:spPr>
-          <a:xfrm>
-            <a:off x="9424172" y="2834640"/>
-            <a:ext cx="2218883" cy="411480"/>
-          </a:xfrm>
-          <a:prstGeom prst="rect">
-            <a:avLst/>
-          </a:prstGeom>
-          <a:noFill/>
-        </p:spPr>
-        <p:txBody>
-          <a:bodyPr wrap="square" lIns="0" rIns="0" tIns="0" bIns="0" anchor="ctr">
-            <a:spAutoFit/>
-          </a:bodyPr>
-          <a:lstStyle/>
-          <a:p>
-            <a:pPr algn="ctr"/>
-            <a:r>
-              <a:rPr sz="1600" b="1">
-                <a:solidFill>
-                  <a:srgbClr val="D9702C"/>
-                </a:solidFill>
-              </a:rPr>
-              <a:t>質疑　5分</a:t>
-            </a:r>
-          </a:p>
-        </p:txBody>
-      </p:sp>
-      <p:sp>
-        <p:nvSpPr>
-          <p:cNvPr id="30" name="Rectangle 29"/>
-          <p:cNvSpPr/>
-          <p:nvPr/>
-        </p:nvSpPr>
-        <p:spPr>
-          <a:xfrm>
-            <a:off x="548640" y="3611880"/>
-            <a:ext cx="1276465" cy="1188720"/>
-          </a:xfrm>
-          <a:prstGeom prst="rect">
-            <a:avLst/>
-          </a:prstGeom>
-          <a:solidFill>
-            <a:srgbClr val="7FAF8E"/>
-          </a:solidFill>
-          <a:ln>
-            <a:noFill/>
-          </a:ln>
-          <a:effectLst/>
-        </p:spPr>
-        <p:style>
-          <a:lnRef idx="1">
-            <a:schemeClr val="accent1"/>
-          </a:lnRef>
-          <a:fillRef idx="3">
-            <a:schemeClr val="accent1"/>
-          </a:fillRef>
-          <a:effectRef idx="2">
-            <a:schemeClr val="accent1"/>
-          </a:effectRef>
-          <a:fontRef idx="minor">
-            <a:schemeClr val="lt1"/>
-          </a:fontRef>
-        </p:style>
-        <p:txBody>
-          <a:bodyPr rtlCol="0" anchor="ctr"/>
-          <a:lstStyle/>
-          <a:p>
-            <a:pPr algn="ctr"/>
-          </a:p>
-        </p:txBody>
-      </p:sp>
-      <p:sp>
-        <p:nvSpPr>
-          <p:cNvPr id="31" name="TextBox 30"/>
-          <p:cNvSpPr txBox="1"/>
-          <p:nvPr/>
-        </p:nvSpPr>
-        <p:spPr>
-          <a:xfrm>
-            <a:off x="658368" y="3611880"/>
-            <a:ext cx="1057009" cy="1188720"/>
-          </a:xfrm>
-          <a:prstGeom prst="rect">
-            <a:avLst/>
-          </a:prstGeom>
-          <a:noFill/>
-        </p:spPr>
-        <p:txBody>
-          <a:bodyPr wrap="square" lIns="0" rIns="0" tIns="0" bIns="0" anchor="ctr">
-            <a:spAutoFit/>
-          </a:bodyPr>
-          <a:lstStyle/>
-          <a:p>
-            <a:pPr algn="l"/>
-            <a:r>
-              <a:rPr sz="1400" b="1">
-                <a:solidFill>
-                  <a:srgbClr val="1F5A47"/>
-                </a:solidFill>
-              </a:rPr>
-              <a:t>導入</a:t>
-            </a:r>
-          </a:p>
-          <a:p>
-            <a:pPr algn="l"/>
-            <a:r>
-              <a:rPr sz="1300" b="0">
-                <a:solidFill>
-                  <a:srgbClr val="1F5A47"/>
-                </a:solidFill>
-              </a:rPr>
-              <a:t>3分</a:t>
-            </a:r>
-          </a:p>
-          <a:p>
-            <a:pPr algn="l"/>
-            <a:r>
-              <a:rPr sz="1200" b="1">
-                <a:solidFill>
-                  <a:srgbClr val="1F5A47"/>
-                </a:solidFill>
-              </a:rPr>
-              <a:t>問い・手本</a:t>
-            </a:r>
-          </a:p>
-        </p:txBody>
-      </p:sp>
-      <p:sp>
-        <p:nvSpPr>
-          <p:cNvPr id="32" name="Rectangle 31"/>
-          <p:cNvSpPr/>
-          <p:nvPr/>
-        </p:nvSpPr>
-        <p:spPr>
-          <a:xfrm>
-            <a:off x="1879969" y="3611880"/>
-            <a:ext cx="3051572" cy="1188720"/>
-          </a:xfrm>
-          <a:prstGeom prst="rect">
-            <a:avLst/>
-          </a:prstGeom>
-          <a:solidFill>
-            <a:srgbClr val="1F5A47"/>
-          </a:solidFill>
-          <a:ln>
-            <a:noFill/>
-          </a:ln>
-          <a:effectLst/>
-        </p:spPr>
-        <p:style>
-          <a:lnRef idx="1">
-            <a:schemeClr val="accent1"/>
-          </a:lnRef>
-          <a:fillRef idx="3">
-            <a:schemeClr val="accent1"/>
-          </a:fillRef>
-          <a:effectRef idx="2">
-            <a:schemeClr val="accent1"/>
-          </a:effectRef>
-          <a:fontRef idx="minor">
-            <a:schemeClr val="lt1"/>
-          </a:fontRef>
-        </p:style>
-        <p:txBody>
-          <a:bodyPr rtlCol="0" anchor="ctr"/>
-          <a:lstStyle/>
-          <a:p>
-            <a:pPr algn="ctr"/>
-          </a:p>
-        </p:txBody>
-      </p:sp>
-      <p:sp>
-        <p:nvSpPr>
-          <p:cNvPr id="33" name="TextBox 32"/>
-          <p:cNvSpPr txBox="1"/>
-          <p:nvPr/>
-        </p:nvSpPr>
-        <p:spPr>
-          <a:xfrm>
-            <a:off x="1989697" y="3611880"/>
-            <a:ext cx="2832116" cy="1188720"/>
-          </a:xfrm>
-          <a:prstGeom prst="rect">
-            <a:avLst/>
-          </a:prstGeom>
-          <a:noFill/>
-        </p:spPr>
-        <p:txBody>
-          <a:bodyPr wrap="square" lIns="0" rIns="0" tIns="0" bIns="0" anchor="ctr">
-            <a:spAutoFit/>
-          </a:bodyPr>
-          <a:lstStyle/>
-          <a:p>
-            <a:pPr algn="l"/>
-            <a:r>
-              <a:rPr sz="1600" b="1">
+              <a:t>天童中部小学校の取組から、</a:t>
+            </a:r>
+          </a:p>
+          <a:p>
+            <a:pPr algn="l">
+              <a:spcAft>
+                <a:spcPts val="800"/>
+              </a:spcAft>
+            </a:pPr>
+            <a:r>
+              <a:rPr sz="3000" b="1">
+                <a:solidFill>
+                  <a:srgbClr val="FBEADB"/>
+                </a:solidFill>
+              </a:rPr>
+              <a:t>子供の学びを中心に据える授業の見方を考え、</a:t>
+            </a:r>
+          </a:p>
+          <a:p>
+            <a:pPr algn="l">
+              <a:spcAft>
+                <a:spcPts val="800"/>
+              </a:spcAft>
+            </a:pPr>
+            <a:r>
+              <a:rPr sz="3000" b="1">
                 <a:solidFill>
                   <a:srgbClr val="FFFFFF"/>
                 </a:solidFill>
               </a:rPr>
-              <a:t>1　天童中部小の取組</a:t>
-            </a:r>
-          </a:p>
-          <a:p>
-            <a:pPr algn="l"/>
-            <a:r>
-              <a:rPr sz="1300" b="0">
-                <a:solidFill>
-                  <a:srgbClr val="FFFFFF"/>
-                </a:solidFill>
-              </a:rPr>
-              <a:t>7分</a:t>
-            </a:r>
-          </a:p>
-          <a:p>
-            <a:pPr algn="l"/>
-            <a:r>
-              <a:rPr sz="1200" b="1">
-                <a:solidFill>
-                  <a:srgbClr val="FBEADB"/>
-                </a:solidFill>
-              </a:rPr>
-              <a:t>QUIZ 1・2</a:t>
-            </a:r>
-          </a:p>
-        </p:txBody>
-      </p:sp>
-      <p:sp>
-        <p:nvSpPr>
-          <p:cNvPr id="34" name="Rectangle 33"/>
-          <p:cNvSpPr/>
-          <p:nvPr/>
-        </p:nvSpPr>
-        <p:spPr>
-          <a:xfrm>
-            <a:off x="4986406" y="3611880"/>
-            <a:ext cx="832689" cy="1188720"/>
-          </a:xfrm>
-          <a:prstGeom prst="rect">
-            <a:avLst/>
-          </a:prstGeom>
-          <a:solidFill>
-            <a:srgbClr val="7FAF8E"/>
-          </a:solidFill>
-          <a:ln>
-            <a:noFill/>
-          </a:ln>
-          <a:effectLst/>
-        </p:spPr>
-        <p:style>
-          <a:lnRef idx="1">
-            <a:schemeClr val="accent1"/>
-          </a:lnRef>
-          <a:fillRef idx="3">
-            <a:schemeClr val="accent1"/>
-          </a:fillRef>
-          <a:effectRef idx="2">
-            <a:schemeClr val="accent1"/>
-          </a:effectRef>
-          <a:fontRef idx="minor">
-            <a:schemeClr val="lt1"/>
-          </a:fontRef>
-        </p:style>
-        <p:txBody>
-          <a:bodyPr rtlCol="0" anchor="ctr"/>
-          <a:lstStyle/>
-          <a:p>
-            <a:pPr algn="ctr"/>
-          </a:p>
-        </p:txBody>
-      </p:sp>
-      <p:sp>
-        <p:nvSpPr>
-          <p:cNvPr id="35" name="TextBox 34"/>
-          <p:cNvSpPr txBox="1"/>
-          <p:nvPr/>
-        </p:nvSpPr>
-        <p:spPr>
-          <a:xfrm>
-            <a:off x="5096134" y="3611880"/>
-            <a:ext cx="613233" cy="1188720"/>
-          </a:xfrm>
-          <a:prstGeom prst="rect">
-            <a:avLst/>
-          </a:prstGeom>
-          <a:noFill/>
-        </p:spPr>
-        <p:txBody>
-          <a:bodyPr wrap="square" lIns="0" rIns="0" tIns="0" bIns="0" anchor="ctr">
-            <a:spAutoFit/>
-          </a:bodyPr>
-          <a:lstStyle/>
-          <a:p>
-            <a:pPr algn="l"/>
-            <a:r>
-              <a:rPr sz="1400" b="1">
-                <a:solidFill>
-                  <a:srgbClr val="1F5A47"/>
-                </a:solidFill>
-              </a:rPr>
-              <a:t>2</a:t>
-            </a:r>
-          </a:p>
-          <a:p>
-            <a:pPr algn="l"/>
-            <a:r>
-              <a:rPr sz="1300" b="0">
-                <a:solidFill>
-                  <a:srgbClr val="1F5A47"/>
-                </a:solidFill>
-              </a:rPr>
-              <a:t>2分</a:t>
-            </a:r>
-          </a:p>
-          <a:p>
-            <a:pPr algn="l"/>
-            <a:r>
-              <a:rPr sz="1200" b="1">
-                <a:solidFill>
-                  <a:srgbClr val="1F5A47"/>
-                </a:solidFill>
-              </a:rPr>
-              <a:t>講演</a:t>
-            </a:r>
-          </a:p>
-        </p:txBody>
-      </p:sp>
-      <p:sp>
-        <p:nvSpPr>
-          <p:cNvPr id="36" name="Rectangle 35"/>
-          <p:cNvSpPr/>
-          <p:nvPr/>
-        </p:nvSpPr>
-        <p:spPr>
-          <a:xfrm>
-            <a:off x="5873959" y="3611880"/>
-            <a:ext cx="1720242" cy="1188720"/>
-          </a:xfrm>
-          <a:prstGeom prst="rect">
-            <a:avLst/>
-          </a:prstGeom>
-          <a:solidFill>
-            <a:srgbClr val="1F5A47"/>
-          </a:solidFill>
-          <a:ln>
-            <a:noFill/>
-          </a:ln>
-          <a:effectLst/>
-        </p:spPr>
-        <p:style>
-          <a:lnRef idx="1">
-            <a:schemeClr val="accent1"/>
-          </a:lnRef>
-          <a:fillRef idx="3">
-            <a:schemeClr val="accent1"/>
-          </a:fillRef>
-          <a:effectRef idx="2">
-            <a:schemeClr val="accent1"/>
-          </a:effectRef>
-          <a:fontRef idx="minor">
-            <a:schemeClr val="lt1"/>
-          </a:fontRef>
-        </p:style>
-        <p:txBody>
-          <a:bodyPr rtlCol="0" anchor="ctr"/>
-          <a:lstStyle/>
-          <a:p>
-            <a:pPr algn="ctr"/>
-          </a:p>
-        </p:txBody>
-      </p:sp>
-      <p:sp>
-        <p:nvSpPr>
-          <p:cNvPr id="37" name="TextBox 36"/>
-          <p:cNvSpPr txBox="1"/>
-          <p:nvPr/>
-        </p:nvSpPr>
-        <p:spPr>
-          <a:xfrm>
-            <a:off x="5983687" y="3611880"/>
-            <a:ext cx="1500786" cy="1188720"/>
-          </a:xfrm>
-          <a:prstGeom prst="rect">
-            <a:avLst/>
-          </a:prstGeom>
-          <a:noFill/>
-        </p:spPr>
-        <p:txBody>
-          <a:bodyPr wrap="square" lIns="0" rIns="0" tIns="0" bIns="0" anchor="ctr">
-            <a:spAutoFit/>
-          </a:bodyPr>
-          <a:lstStyle/>
-          <a:p>
-            <a:pPr algn="l"/>
-            <a:r>
-              <a:rPr sz="1400" b="1">
-                <a:solidFill>
-                  <a:srgbClr val="FFFFFF"/>
-                </a:solidFill>
-              </a:rPr>
-              <a:t>3　次期の方向性</a:t>
-            </a:r>
-          </a:p>
-          <a:p>
-            <a:pPr algn="l"/>
-            <a:r>
-              <a:rPr sz="1300" b="0">
-                <a:solidFill>
-                  <a:srgbClr val="FFFFFF"/>
-                </a:solidFill>
-              </a:rPr>
-              <a:t>4分</a:t>
-            </a:r>
-          </a:p>
-          <a:p>
-            <a:pPr algn="l"/>
-            <a:r>
-              <a:rPr sz="1200" b="1">
-                <a:solidFill>
-                  <a:srgbClr val="FBEADB"/>
-                </a:solidFill>
-              </a:rPr>
-              <a:t>QUIZ 3</a:t>
-            </a:r>
-          </a:p>
-        </p:txBody>
-      </p:sp>
-      <p:sp>
-        <p:nvSpPr>
-          <p:cNvPr id="38" name="Rectangle 37"/>
-          <p:cNvSpPr/>
-          <p:nvPr/>
-        </p:nvSpPr>
-        <p:spPr>
-          <a:xfrm>
-            <a:off x="7649065" y="3611880"/>
-            <a:ext cx="1720242" cy="1188720"/>
-          </a:xfrm>
-          <a:prstGeom prst="rect">
-            <a:avLst/>
-          </a:prstGeom>
-          <a:solidFill>
-            <a:srgbClr val="7FAF8E"/>
-          </a:solidFill>
-          <a:ln>
-            <a:noFill/>
-          </a:ln>
-          <a:effectLst/>
-        </p:spPr>
-        <p:style>
-          <a:lnRef idx="1">
-            <a:schemeClr val="accent1"/>
-          </a:lnRef>
-          <a:fillRef idx="3">
-            <a:schemeClr val="accent1"/>
-          </a:fillRef>
-          <a:effectRef idx="2">
-            <a:schemeClr val="accent1"/>
-          </a:effectRef>
-          <a:fontRef idx="minor">
-            <a:schemeClr val="lt1"/>
-          </a:fontRef>
-        </p:style>
-        <p:txBody>
-          <a:bodyPr rtlCol="0" anchor="ctr"/>
-          <a:lstStyle/>
-          <a:p>
-            <a:pPr algn="ctr"/>
-          </a:p>
-        </p:txBody>
-      </p:sp>
-      <p:sp>
-        <p:nvSpPr>
-          <p:cNvPr id="39" name="TextBox 38"/>
-          <p:cNvSpPr txBox="1"/>
-          <p:nvPr/>
-        </p:nvSpPr>
-        <p:spPr>
-          <a:xfrm>
-            <a:off x="7758793" y="3611880"/>
-            <a:ext cx="1500786" cy="1188720"/>
-          </a:xfrm>
-          <a:prstGeom prst="rect">
-            <a:avLst/>
-          </a:prstGeom>
-          <a:noFill/>
-        </p:spPr>
-        <p:txBody>
-          <a:bodyPr wrap="square" lIns="0" rIns="0" tIns="0" bIns="0" anchor="ctr">
-            <a:spAutoFit/>
-          </a:bodyPr>
-          <a:lstStyle/>
-          <a:p>
-            <a:pPr algn="l"/>
-            <a:r>
-              <a:rPr sz="1400" b="1">
-                <a:solidFill>
-                  <a:srgbClr val="1F5A47"/>
-                </a:solidFill>
-              </a:rPr>
-              <a:t>4　視点</a:t>
-            </a:r>
-          </a:p>
-          <a:p>
-            <a:pPr algn="l"/>
-            <a:r>
-              <a:rPr sz="1300" b="0">
-                <a:solidFill>
-                  <a:srgbClr val="1F5A47"/>
-                </a:solidFill>
-              </a:rPr>
-              <a:t>4分</a:t>
-            </a:r>
-          </a:p>
-        </p:txBody>
-      </p:sp>
-      <p:sp>
-        <p:nvSpPr>
-          <p:cNvPr id="40" name="Rectangle 39"/>
-          <p:cNvSpPr/>
-          <p:nvPr/>
-        </p:nvSpPr>
-        <p:spPr>
-          <a:xfrm>
-            <a:off x="9424172" y="3611880"/>
-            <a:ext cx="2164019" cy="1188720"/>
-          </a:xfrm>
-          <a:prstGeom prst="rect">
-            <a:avLst/>
-          </a:prstGeom>
-          <a:solidFill>
-            <a:srgbClr val="D9702C"/>
-          </a:solidFill>
-          <a:ln>
-            <a:noFill/>
-          </a:ln>
-          <a:effectLst/>
-        </p:spPr>
-        <p:style>
-          <a:lnRef idx="1">
-            <a:schemeClr val="accent1"/>
-          </a:lnRef>
-          <a:fillRef idx="3">
-            <a:schemeClr val="accent1"/>
-          </a:fillRef>
-          <a:effectRef idx="2">
-            <a:schemeClr val="accent1"/>
-          </a:effectRef>
-          <a:fontRef idx="minor">
-            <a:schemeClr val="lt1"/>
-          </a:fontRef>
-        </p:style>
-        <p:txBody>
-          <a:bodyPr rtlCol="0" anchor="ctr"/>
-          <a:lstStyle/>
-          <a:p>
-            <a:pPr algn="ctr"/>
-          </a:p>
-        </p:txBody>
-      </p:sp>
-      <p:sp>
-        <p:nvSpPr>
-          <p:cNvPr id="41" name="TextBox 40"/>
-          <p:cNvSpPr txBox="1"/>
-          <p:nvPr/>
-        </p:nvSpPr>
-        <p:spPr>
-          <a:xfrm>
-            <a:off x="9533900" y="3611880"/>
-            <a:ext cx="1944563" cy="1188720"/>
-          </a:xfrm>
-          <a:prstGeom prst="rect">
-            <a:avLst/>
-          </a:prstGeom>
-          <a:noFill/>
-        </p:spPr>
-        <p:txBody>
-          <a:bodyPr wrap="square" lIns="0" rIns="0" tIns="0" bIns="0" anchor="ctr">
-            <a:spAutoFit/>
-          </a:bodyPr>
-          <a:lstStyle/>
-          <a:p>
-            <a:pPr algn="l"/>
-            <a:r>
-              <a:rPr sz="1400" b="1">
-                <a:solidFill>
-                  <a:srgbClr val="FFFFFF"/>
-                </a:solidFill>
-              </a:rPr>
-              <a:t>質疑応答</a:t>
-            </a:r>
-          </a:p>
-          <a:p>
-            <a:pPr algn="l"/>
-            <a:r>
-              <a:rPr sz="1300" b="0">
-                <a:solidFill>
-                  <a:srgbClr val="FFFFFF"/>
-                </a:solidFill>
-              </a:rPr>
-              <a:t>5分</a:t>
-            </a:r>
-          </a:p>
-        </p:txBody>
-      </p:sp>
-      <p:sp>
-        <p:nvSpPr>
-          <p:cNvPr id="42" name="Rounded Rectangle 41"/>
-          <p:cNvSpPr/>
-          <p:nvPr/>
-        </p:nvSpPr>
-        <p:spPr>
-          <a:xfrm>
-            <a:off x="548640" y="5120640"/>
-            <a:ext cx="11094415" cy="822960"/>
-          </a:xfrm>
-          <a:prstGeom prst="roundRect">
-            <a:avLst>
-              <a:gd name="adj" fmla="val 8000"/>
-            </a:avLst>
-          </a:prstGeom>
-          <a:solidFill>
-            <a:srgbClr val="EEF4F0"/>
-          </a:solidFill>
-          <a:ln>
-            <a:noFill/>
-          </a:ln>
-          <a:effectLst/>
-        </p:spPr>
-        <p:style>
-          <a:lnRef idx="1">
-            <a:schemeClr val="accent1"/>
-          </a:lnRef>
-          <a:fillRef idx="3">
-            <a:schemeClr val="accent1"/>
-          </a:fillRef>
-          <a:effectRef idx="2">
-            <a:schemeClr val="accent1"/>
-          </a:effectRef>
-          <a:fontRef idx="minor">
-            <a:schemeClr val="lt1"/>
-          </a:fontRef>
-        </p:style>
-        <p:txBody>
-          <a:bodyPr rtlCol="0" anchor="ctr"/>
-          <a:lstStyle/>
-          <a:p>
-            <a:pPr algn="ctr"/>
-          </a:p>
-        </p:txBody>
-      </p:sp>
-      <p:sp>
-        <p:nvSpPr>
-          <p:cNvPr id="43" name="TextBox 42"/>
-          <p:cNvSpPr txBox="1"/>
-          <p:nvPr/>
-        </p:nvSpPr>
-        <p:spPr>
-          <a:xfrm>
-            <a:off x="822959" y="5120640"/>
-            <a:ext cx="10545775" cy="822960"/>
-          </a:xfrm>
-          <a:prstGeom prst="rect">
-            <a:avLst/>
-          </a:prstGeom>
-          <a:noFill/>
-        </p:spPr>
-        <p:txBody>
-          <a:bodyPr wrap="square" lIns="0" rIns="0" tIns="0" bIns="0" anchor="ctr">
-            <a:spAutoFit/>
-          </a:bodyPr>
-          <a:lstStyle/>
-          <a:p>
-            <a:pPr algn="l"/>
-            <a:r>
-              <a:rPr sz="1500" b="1">
-                <a:solidFill>
-                  <a:srgbClr val="D9702C"/>
-                </a:solidFill>
-              </a:rPr>
-              <a:t>講義の中で　</a:t>
-            </a:r>
-            <a:r>
-              <a:rPr sz="1500" b="0">
-                <a:solidFill>
-                  <a:srgbClr val="1E2B27"/>
-                </a:solidFill>
-              </a:rPr>
-              <a:t>冒頭の問いとクイズ３問で、指導主事同士が話し合いながら進めます</a:t>
+              <a:t>次期学習指導要領の方向性を指導主事間で共有する。</a:t>
             </a:r>
           </a:p>
         </p:txBody>
